--- a/lessons/pandas/presentation.pptx
+++ b/lessons/pandas/presentation.pptx
@@ -23,6 +23,20 @@
     <p:sldId id="271" r:id="rId23"/>
     <p:sldId id="272" r:id="rId24"/>
     <p:sldId id="273" r:id="rId25"/>
+    <p:sldId id="274" r:id="rId26"/>
+    <p:sldId id="275" r:id="rId27"/>
+    <p:sldId id="276" r:id="rId28"/>
+    <p:sldId id="277" r:id="rId29"/>
+    <p:sldId id="278" r:id="rId30"/>
+    <p:sldId id="279" r:id="rId31"/>
+    <p:sldId id="280" r:id="rId32"/>
+    <p:sldId id="281" r:id="rId33"/>
+    <p:sldId id="282" r:id="rId34"/>
+    <p:sldId id="283" r:id="rId35"/>
+    <p:sldId id="284" r:id="rId36"/>
+    <p:sldId id="285" r:id="rId37"/>
+    <p:sldId id="286" r:id="rId38"/>
+    <p:sldId id="287" r:id="rId39"/>
   </p:sldIdLst>
   <p:sldSz cx="12191695" cy="6858000" type="screen4x3"/>
   <p:notesSz cx="6858000" cy="9144000"/>
@@ -519,567 +533,7 @@
           <a:lstStyle/>
           <a:p>
             <a:r>
-              <a:t>Мотивация: без Pandas сложно работать с реальными наборами.</a:t>
-            </a:r>
-          </a:p>
-        </p:txBody>
-      </p:sp>
-      <p:sp>
-        <p:nvSpPr>
-          <p:cNvPr id="4" name="Slide Number Placeholder 3"/>
-          <p:cNvSpPr>
-            <a:spLocks noGrp="1"/>
-          </p:cNvSpPr>
-          <p:nvPr>
-            <p:ph type="sldNum" idx="5" sz="quarter"/>
-          </p:nvPr>
-        </p:nvSpPr>
-        <p:spPr/>
-      </p:sp>
-    </p:spTree>
-  </p:cSld>
-  <p:clrMapOvr>
-    <a:masterClrMapping/>
-  </p:clrMapOvr>
-</p:notes>
-</file>
-
-<file path=ppt/notesSlides/notesSlide10.xml><?xml version="1.0" encoding="utf-8"?>
-<p:notes xmlns:a="http://schemas.openxmlformats.org/drawingml/2006/main" xmlns:p="http://schemas.openxmlformats.org/presentationml/2006/main" xmlns:r="http://schemas.openxmlformats.org/officeDocument/2006/relationships">
-  <p:cSld>
-    <p:spTree>
-      <p:nvGrpSpPr>
-        <p:cNvPr id="1" name=""/>
-        <p:cNvGrpSpPr/>
-        <p:nvPr/>
-      </p:nvGrpSpPr>
-      <p:grpSpPr>
-        <a:xfrm>
-          <a:off x="0" y="0"/>
-          <a:ext cx="0" cy="0"/>
-          <a:chOff x="0" y="0"/>
-          <a:chExt cx="0" cy="0"/>
-        </a:xfrm>
-      </p:grpSpPr>
-      <p:sp>
-        <p:nvSpPr>
-          <p:cNvPr id="2" name="Slide Image Placeholder 1"/>
-          <p:cNvSpPr>
-            <a:spLocks noGrp="1"/>
-          </p:cNvSpPr>
-          <p:nvPr>
-            <p:ph type="sldImg" idx="2"/>
-          </p:nvPr>
-        </p:nvSpPr>
-        <p:spPr/>
-      </p:sp>
-      <p:sp>
-        <p:nvSpPr>
-          <p:cNvPr id="3" name="Notes Placeholder 2"/>
-          <p:cNvSpPr>
-            <a:spLocks noGrp="1"/>
-          </p:cNvSpPr>
-          <p:nvPr>
-            <p:ph type="body" idx="3" sz="quarter"/>
-          </p:nvPr>
-        </p:nvSpPr>
-        <p:spPr/>
-        <p:txBody>
-          <a:bodyPr/>
-          <a:lstStyle/>
-          <a:p>
-            <a:r>
-              <a:t>Age в Titanic — классический пример.</a:t>
-            </a:r>
-          </a:p>
-        </p:txBody>
-      </p:sp>
-      <p:sp>
-        <p:nvSpPr>
-          <p:cNvPr id="4" name="Slide Number Placeholder 3"/>
-          <p:cNvSpPr>
-            <a:spLocks noGrp="1"/>
-          </p:cNvSpPr>
-          <p:nvPr>
-            <p:ph type="sldNum" idx="5" sz="quarter"/>
-          </p:nvPr>
-        </p:nvSpPr>
-        <p:spPr/>
-      </p:sp>
-    </p:spTree>
-  </p:cSld>
-  <p:clrMapOvr>
-    <a:masterClrMapping/>
-  </p:clrMapOvr>
-</p:notes>
-</file>
-
-<file path=ppt/notesSlides/notesSlide11.xml><?xml version="1.0" encoding="utf-8"?>
-<p:notes xmlns:a="http://schemas.openxmlformats.org/drawingml/2006/main" xmlns:p="http://schemas.openxmlformats.org/presentationml/2006/main" xmlns:r="http://schemas.openxmlformats.org/officeDocument/2006/relationships">
-  <p:cSld>
-    <p:spTree>
-      <p:nvGrpSpPr>
-        <p:cNvPr id="1" name=""/>
-        <p:cNvGrpSpPr/>
-        <p:nvPr/>
-      </p:nvGrpSpPr>
-      <p:grpSpPr>
-        <a:xfrm>
-          <a:off x="0" y="0"/>
-          <a:ext cx="0" cy="0"/>
-          <a:chOff x="0" y="0"/>
-          <a:chExt cx="0" cy="0"/>
-        </a:xfrm>
-      </p:grpSpPr>
-      <p:sp>
-        <p:nvSpPr>
-          <p:cNvPr id="2" name="Slide Image Placeholder 1"/>
-          <p:cNvSpPr>
-            <a:spLocks noGrp="1"/>
-          </p:cNvSpPr>
-          <p:nvPr>
-            <p:ph type="sldImg" idx="2"/>
-          </p:nvPr>
-        </p:nvSpPr>
-        <p:spPr/>
-      </p:sp>
-      <p:sp>
-        <p:nvSpPr>
-          <p:cNvPr id="3" name="Notes Placeholder 2"/>
-          <p:cNvSpPr>
-            <a:spLocks noGrp="1"/>
-          </p:cNvSpPr>
-          <p:nvPr>
-            <p:ph type="body" idx="3" sz="quarter"/>
-          </p:nvPr>
-        </p:nvSpPr>
-        <p:spPr/>
-        <p:txBody>
-          <a:bodyPr/>
-          <a:lstStyle/>
-          <a:p>
-            <a:r>
-              <a:t>Sex → category на Titanic.</a:t>
-            </a:r>
-          </a:p>
-        </p:txBody>
-      </p:sp>
-      <p:sp>
-        <p:nvSpPr>
-          <p:cNvPr id="4" name="Slide Number Placeholder 3"/>
-          <p:cNvSpPr>
-            <a:spLocks noGrp="1"/>
-          </p:cNvSpPr>
-          <p:nvPr>
-            <p:ph type="sldNum" idx="5" sz="quarter"/>
-          </p:nvPr>
-        </p:nvSpPr>
-        <p:spPr/>
-      </p:sp>
-    </p:spTree>
-  </p:cSld>
-  <p:clrMapOvr>
-    <a:masterClrMapping/>
-  </p:clrMapOvr>
-</p:notes>
-</file>
-
-<file path=ppt/notesSlides/notesSlide12.xml><?xml version="1.0" encoding="utf-8"?>
-<p:notes xmlns:a="http://schemas.openxmlformats.org/drawingml/2006/main" xmlns:p="http://schemas.openxmlformats.org/presentationml/2006/main" xmlns:r="http://schemas.openxmlformats.org/officeDocument/2006/relationships">
-  <p:cSld>
-    <p:spTree>
-      <p:nvGrpSpPr>
-        <p:cNvPr id="1" name=""/>
-        <p:cNvGrpSpPr/>
-        <p:nvPr/>
-      </p:nvGrpSpPr>
-      <p:grpSpPr>
-        <a:xfrm>
-          <a:off x="0" y="0"/>
-          <a:ext cx="0" cy="0"/>
-          <a:chOff x="0" y="0"/>
-          <a:chExt cx="0" cy="0"/>
-        </a:xfrm>
-      </p:grpSpPr>
-      <p:sp>
-        <p:nvSpPr>
-          <p:cNvPr id="2" name="Slide Image Placeholder 1"/>
-          <p:cNvSpPr>
-            <a:spLocks noGrp="1"/>
-          </p:cNvSpPr>
-          <p:nvPr>
-            <p:ph type="sldImg" idx="2"/>
-          </p:nvPr>
-        </p:nvSpPr>
-        <p:spPr/>
-      </p:sp>
-      <p:sp>
-        <p:nvSpPr>
-          <p:cNvPr id="3" name="Notes Placeholder 2"/>
-          <p:cNvSpPr>
-            <a:spLocks noGrp="1"/>
-          </p:cNvSpPr>
-          <p:nvPr>
-            <p:ph type="body" idx="3" sz="quarter"/>
-          </p:nvPr>
-        </p:nvSpPr>
-        <p:spPr/>
-        <p:txBody>
-          <a:bodyPr/>
-          <a:lstStyle/>
-          <a:p>
-            <a:r>
-              <a:t>map для Embarked кодов.</a:t>
-            </a:r>
-          </a:p>
-        </p:txBody>
-      </p:sp>
-      <p:sp>
-        <p:nvSpPr>
-          <p:cNvPr id="4" name="Slide Number Placeholder 3"/>
-          <p:cNvSpPr>
-            <a:spLocks noGrp="1"/>
-          </p:cNvSpPr>
-          <p:nvPr>
-            <p:ph type="sldNum" idx="5" sz="quarter"/>
-          </p:nvPr>
-        </p:nvSpPr>
-        <p:spPr/>
-      </p:sp>
-    </p:spTree>
-  </p:cSld>
-  <p:clrMapOvr>
-    <a:masterClrMapping/>
-  </p:clrMapOvr>
-</p:notes>
-</file>
-
-<file path=ppt/notesSlides/notesSlide13.xml><?xml version="1.0" encoding="utf-8"?>
-<p:notes xmlns:a="http://schemas.openxmlformats.org/drawingml/2006/main" xmlns:p="http://schemas.openxmlformats.org/presentationml/2006/main" xmlns:r="http://schemas.openxmlformats.org/officeDocument/2006/relationships">
-  <p:cSld>
-    <p:spTree>
-      <p:nvGrpSpPr>
-        <p:cNvPr id="1" name=""/>
-        <p:cNvGrpSpPr/>
-        <p:nvPr/>
-      </p:nvGrpSpPr>
-      <p:grpSpPr>
-        <a:xfrm>
-          <a:off x="0" y="0"/>
-          <a:ext cx="0" cy="0"/>
-          <a:chOff x="0" y="0"/>
-          <a:chExt cx="0" cy="0"/>
-        </a:xfrm>
-      </p:grpSpPr>
-      <p:sp>
-        <p:nvSpPr>
-          <p:cNvPr id="2" name="Slide Image Placeholder 1"/>
-          <p:cNvSpPr>
-            <a:spLocks noGrp="1"/>
-          </p:cNvSpPr>
-          <p:nvPr>
-            <p:ph type="sldImg" idx="2"/>
-          </p:nvPr>
-        </p:nvSpPr>
-        <p:spPr/>
-      </p:sp>
-      <p:sp>
-        <p:nvSpPr>
-          <p:cNvPr id="3" name="Notes Placeholder 2"/>
-          <p:cNvSpPr>
-            <a:spLocks noGrp="1"/>
-          </p:cNvSpPr>
-          <p:nvPr>
-            <p:ph type="body" idx="3" sz="quarter"/>
-          </p:nvPr>
-        </p:nvSpPr>
-        <p:spPr/>
-        <p:txBody>
-          <a:bodyPr/>
-          <a:lstStyle/>
-          <a:p>
-            <a:r>
-              <a:t>Survived rate по Pclass и Sex.</a:t>
-            </a:r>
-          </a:p>
-        </p:txBody>
-      </p:sp>
-      <p:sp>
-        <p:nvSpPr>
-          <p:cNvPr id="4" name="Slide Number Placeholder 3"/>
-          <p:cNvSpPr>
-            <a:spLocks noGrp="1"/>
-          </p:cNvSpPr>
-          <p:nvPr>
-            <p:ph type="sldNum" idx="5" sz="quarter"/>
-          </p:nvPr>
-        </p:nvSpPr>
-        <p:spPr/>
-      </p:sp>
-    </p:spTree>
-  </p:cSld>
-  <p:clrMapOvr>
-    <a:masterClrMapping/>
-  </p:clrMapOvr>
-</p:notes>
-</file>
-
-<file path=ppt/notesSlides/notesSlide14.xml><?xml version="1.0" encoding="utf-8"?>
-<p:notes xmlns:a="http://schemas.openxmlformats.org/drawingml/2006/main" xmlns:p="http://schemas.openxmlformats.org/presentationml/2006/main" xmlns:r="http://schemas.openxmlformats.org/officeDocument/2006/relationships">
-  <p:cSld>
-    <p:spTree>
-      <p:nvGrpSpPr>
-        <p:cNvPr id="1" name=""/>
-        <p:cNvGrpSpPr/>
-        <p:nvPr/>
-      </p:nvGrpSpPr>
-      <p:grpSpPr>
-        <a:xfrm>
-          <a:off x="0" y="0"/>
-          <a:ext cx="0" cy="0"/>
-          <a:chOff x="0" y="0"/>
-          <a:chExt cx="0" cy="0"/>
-        </a:xfrm>
-      </p:grpSpPr>
-      <p:sp>
-        <p:nvSpPr>
-          <p:cNvPr id="2" name="Slide Image Placeholder 1"/>
-          <p:cNvSpPr>
-            <a:spLocks noGrp="1"/>
-          </p:cNvSpPr>
-          <p:nvPr>
-            <p:ph type="sldImg" idx="2"/>
-          </p:nvPr>
-        </p:nvSpPr>
-        <p:spPr/>
-      </p:sp>
-      <p:sp>
-        <p:nvSpPr>
-          <p:cNvPr id="3" name="Notes Placeholder 2"/>
-          <p:cNvSpPr>
-            <a:spLocks noGrp="1"/>
-          </p:cNvSpPr>
-          <p:nvPr>
-            <p:ph type="body" idx="3" sz="quarter"/>
-          </p:nvPr>
-        </p:nvSpPr>
-        <p:spPr/>
-        <p:txBody>
-          <a:bodyPr/>
-          <a:lstStyle/>
-          <a:p>
-            <a:r>
-              <a:t>Микро-бенчмарк apply vs vectorized — опционально в ноутбуке.</a:t>
-            </a:r>
-          </a:p>
-        </p:txBody>
-      </p:sp>
-      <p:sp>
-        <p:nvSpPr>
-          <p:cNvPr id="4" name="Slide Number Placeholder 3"/>
-          <p:cNvSpPr>
-            <a:spLocks noGrp="1"/>
-          </p:cNvSpPr>
-          <p:nvPr>
-            <p:ph type="sldNum" idx="5" sz="quarter"/>
-          </p:nvPr>
-        </p:nvSpPr>
-        <p:spPr/>
-      </p:sp>
-    </p:spTree>
-  </p:cSld>
-  <p:clrMapOvr>
-    <a:masterClrMapping/>
-  </p:clrMapOvr>
-</p:notes>
-</file>
-
-<file path=ppt/notesSlides/notesSlide15.xml><?xml version="1.0" encoding="utf-8"?>
-<p:notes xmlns:a="http://schemas.openxmlformats.org/drawingml/2006/main" xmlns:p="http://schemas.openxmlformats.org/presentationml/2006/main" xmlns:r="http://schemas.openxmlformats.org/officeDocument/2006/relationships">
-  <p:cSld>
-    <p:spTree>
-      <p:nvGrpSpPr>
-        <p:cNvPr id="1" name=""/>
-        <p:cNvGrpSpPr/>
-        <p:nvPr/>
-      </p:nvGrpSpPr>
-      <p:grpSpPr>
-        <a:xfrm>
-          <a:off x="0" y="0"/>
-          <a:ext cx="0" cy="0"/>
-          <a:chOff x="0" y="0"/>
-          <a:chExt cx="0" cy="0"/>
-        </a:xfrm>
-      </p:grpSpPr>
-      <p:sp>
-        <p:nvSpPr>
-          <p:cNvPr id="2" name="Slide Image Placeholder 1"/>
-          <p:cNvSpPr>
-            <a:spLocks noGrp="1"/>
-          </p:cNvSpPr>
-          <p:nvPr>
-            <p:ph type="sldImg" idx="2"/>
-          </p:nvPr>
-        </p:nvSpPr>
-        <p:spPr/>
-      </p:sp>
-      <p:sp>
-        <p:nvSpPr>
-          <p:cNvPr id="3" name="Notes Placeholder 2"/>
-          <p:cNvSpPr>
-            <a:spLocks noGrp="1"/>
-          </p:cNvSpPr>
-          <p:nvPr>
-            <p:ph type="body" idx="3" sz="quarter"/>
-          </p:nvPr>
-        </p:nvSpPr>
-        <p:spPr/>
-        <p:txBody>
-          <a:bodyPr/>
-          <a:lstStyle/>
-          <a:p>
-            <a:r>
-              <a:t>Связь с data leakage из урока линейной регрессии.</a:t>
-            </a:r>
-          </a:p>
-        </p:txBody>
-      </p:sp>
-      <p:sp>
-        <p:nvSpPr>
-          <p:cNvPr id="4" name="Slide Number Placeholder 3"/>
-          <p:cNvSpPr>
-            <a:spLocks noGrp="1"/>
-          </p:cNvSpPr>
-          <p:nvPr>
-            <p:ph type="sldNum" idx="5" sz="quarter"/>
-          </p:nvPr>
-        </p:nvSpPr>
-        <p:spPr/>
-      </p:sp>
-    </p:spTree>
-  </p:cSld>
-  <p:clrMapOvr>
-    <a:masterClrMapping/>
-  </p:clrMapOvr>
-</p:notes>
-</file>
-
-<file path=ppt/notesSlides/notesSlide16.xml><?xml version="1.0" encoding="utf-8"?>
-<p:notes xmlns:a="http://schemas.openxmlformats.org/drawingml/2006/main" xmlns:p="http://schemas.openxmlformats.org/presentationml/2006/main" xmlns:r="http://schemas.openxmlformats.org/officeDocument/2006/relationships">
-  <p:cSld>
-    <p:spTree>
-      <p:nvGrpSpPr>
-        <p:cNvPr id="1" name=""/>
-        <p:cNvGrpSpPr/>
-        <p:nvPr/>
-      </p:nvGrpSpPr>
-      <p:grpSpPr>
-        <a:xfrm>
-          <a:off x="0" y="0"/>
-          <a:ext cx="0" cy="0"/>
-          <a:chOff x="0" y="0"/>
-          <a:chExt cx="0" cy="0"/>
-        </a:xfrm>
-      </p:grpSpPr>
-      <p:sp>
-        <p:nvSpPr>
-          <p:cNvPr id="2" name="Slide Image Placeholder 1"/>
-          <p:cNvSpPr>
-            <a:spLocks noGrp="1"/>
-          </p:cNvSpPr>
-          <p:nvPr>
-            <p:ph type="sldImg" idx="2"/>
-          </p:nvPr>
-        </p:nvSpPr>
-        <p:spPr/>
-      </p:sp>
-      <p:sp>
-        <p:nvSpPr>
-          <p:cNvPr id="3" name="Notes Placeholder 2"/>
-          <p:cNvSpPr>
-            <a:spLocks noGrp="1"/>
-          </p:cNvSpPr>
-          <p:nvPr>
-            <p:ph type="body" idx="3" sz="quarter"/>
-          </p:nvPr>
-        </p:nvSpPr>
-        <p:spPr/>
-        <p:txBody>
-          <a:bodyPr/>
-          <a:lstStyle/>
-          <a:p>
-            <a:r>
-              <a:t>Показать SimpleImputer в Pipeline после split.</a:t>
-            </a:r>
-          </a:p>
-        </p:txBody>
-      </p:sp>
-      <p:sp>
-        <p:nvSpPr>
-          <p:cNvPr id="4" name="Slide Number Placeholder 3"/>
-          <p:cNvSpPr>
-            <a:spLocks noGrp="1"/>
-          </p:cNvSpPr>
-          <p:nvPr>
-            <p:ph type="sldNum" idx="5" sz="quarter"/>
-          </p:nvPr>
-        </p:nvSpPr>
-        <p:spPr/>
-      </p:sp>
-    </p:spTree>
-  </p:cSld>
-  <p:clrMapOvr>
-    <a:masterClrMapping/>
-  </p:clrMapOvr>
-</p:notes>
-</file>
-
-<file path=ppt/notesSlides/notesSlide17.xml><?xml version="1.0" encoding="utf-8"?>
-<p:notes xmlns:a="http://schemas.openxmlformats.org/drawingml/2006/main" xmlns:p="http://schemas.openxmlformats.org/presentationml/2006/main" xmlns:r="http://schemas.openxmlformats.org/officeDocument/2006/relationships">
-  <p:cSld>
-    <p:spTree>
-      <p:nvGrpSpPr>
-        <p:cNvPr id="1" name=""/>
-        <p:cNvGrpSpPr/>
-        <p:nvPr/>
-      </p:nvGrpSpPr>
-      <p:grpSpPr>
-        <a:xfrm>
-          <a:off x="0" y="0"/>
-          <a:ext cx="0" cy="0"/>
-          <a:chOff x="0" y="0"/>
-          <a:chExt cx="0" cy="0"/>
-        </a:xfrm>
-      </p:grpSpPr>
-      <p:sp>
-        <p:nvSpPr>
-          <p:cNvPr id="2" name="Slide Image Placeholder 1"/>
-          <p:cNvSpPr>
-            <a:spLocks noGrp="1"/>
-          </p:cNvSpPr>
-          <p:nvPr>
-            <p:ph type="sldImg" idx="2"/>
-          </p:nvPr>
-        </p:nvSpPr>
-        <p:spPr/>
-      </p:sp>
-      <p:sp>
-        <p:nvSpPr>
-          <p:cNvPr id="3" name="Notes Placeholder 2"/>
-          <p:cNvSpPr>
-            <a:spLocks noGrp="1"/>
-          </p:cNvSpPr>
-          <p:nvPr>
-            <p:ph type="body" idx="3" sz="quarter"/>
-          </p:nvPr>
-        </p:nvSpPr>
-        <p:spPr/>
-        <p:txBody>
-          <a:bodyPr/>
-          <a:lstStyle/>
-          <a:p>
-            <a:r>
-              <a:t>Резюме перед project.ipynb.</a:t>
+              <a:t>Показать dtypes и .values/.to_numpy() на примере.</a:t>
             </a:r>
           </a:p>
         </p:txBody>
@@ -1149,7 +603,7 @@
           <a:lstStyle/>
           <a:p>
             <a:r>
-              <a:t>Показать в ноутбуке создание из dict.</a:t>
+              <a:t>Демо: filter → ragged index → reset_index.</a:t>
             </a:r>
           </a:p>
         </p:txBody>
@@ -1219,7 +673,7 @@
           <a:lstStyle/>
           <a:p>
             <a:r>
-              <a:t>OpenML Titanic как пример в project.ipynb.</a:t>
+              <a:t>Показать mask.sum() и ошибку без скобок.</a:t>
             </a:r>
           </a:p>
         </p:txBody>
@@ -1289,357 +743,7 @@
           <a:lstStyle/>
           <a:p>
             <a:r>
-              <a:t>Связать describe с EDA перед моделью.</a:t>
-            </a:r>
-          </a:p>
-        </p:txBody>
-      </p:sp>
-      <p:sp>
-        <p:nvSpPr>
-          <p:cNvPr id="4" name="Slide Number Placeholder 3"/>
-          <p:cNvSpPr>
-            <a:spLocks noGrp="1"/>
-          </p:cNvSpPr>
-          <p:nvPr>
-            <p:ph type="sldNum" idx="5" sz="quarter"/>
-          </p:nvPr>
-        </p:nvSpPr>
-        <p:spPr/>
-      </p:sp>
-    </p:spTree>
-  </p:cSld>
-  <p:clrMapOvr>
-    <a:masterClrMapping/>
-  </p:clrMapOvr>
-</p:notes>
-</file>
-
-<file path=ppt/notesSlides/notesSlide5.xml><?xml version="1.0" encoding="utf-8"?>
-<p:notes xmlns:a="http://schemas.openxmlformats.org/drawingml/2006/main" xmlns:p="http://schemas.openxmlformats.org/presentationml/2006/main" xmlns:r="http://schemas.openxmlformats.org/officeDocument/2006/relationships">
-  <p:cSld>
-    <p:spTree>
-      <p:nvGrpSpPr>
-        <p:cNvPr id="1" name=""/>
-        <p:cNvGrpSpPr/>
-        <p:nvPr/>
-      </p:nvGrpSpPr>
-      <p:grpSpPr>
-        <a:xfrm>
-          <a:off x="0" y="0"/>
-          <a:ext cx="0" cy="0"/>
-          <a:chOff x="0" y="0"/>
-          <a:chExt cx="0" cy="0"/>
-        </a:xfrm>
-      </p:grpSpPr>
-      <p:sp>
-        <p:nvSpPr>
-          <p:cNvPr id="2" name="Slide Image Placeholder 1"/>
-          <p:cNvSpPr>
-            <a:spLocks noGrp="1"/>
-          </p:cNvSpPr>
-          <p:nvPr>
-            <p:ph type="sldImg" idx="2"/>
-          </p:nvPr>
-        </p:nvSpPr>
-        <p:spPr/>
-      </p:sp>
-      <p:sp>
-        <p:nvSpPr>
-          <p:cNvPr id="3" name="Notes Placeholder 2"/>
-          <p:cNvSpPr>
-            <a:spLocks noGrp="1"/>
-          </p:cNvSpPr>
-          <p:nvPr>
-            <p:ph type="body" idx="3" sz="quarter"/>
-          </p:nvPr>
-        </p:nvSpPr>
-        <p:spPr/>
-        <p:txBody>
-          <a:bodyPr/>
-          <a:lstStyle/>
-          <a:p>
-            <a:r>
-              <a:t>Пример: PassengerId как индекс Titanic.</a:t>
-            </a:r>
-          </a:p>
-        </p:txBody>
-      </p:sp>
-      <p:sp>
-        <p:nvSpPr>
-          <p:cNvPr id="4" name="Slide Number Placeholder 3"/>
-          <p:cNvSpPr>
-            <a:spLocks noGrp="1"/>
-          </p:cNvSpPr>
-          <p:nvPr>
-            <p:ph type="sldNum" idx="5" sz="quarter"/>
-          </p:nvPr>
-        </p:nvSpPr>
-        <p:spPr/>
-      </p:sp>
-    </p:spTree>
-  </p:cSld>
-  <p:clrMapOvr>
-    <a:masterClrMapping/>
-  </p:clrMapOvr>
-</p:notes>
-</file>
-
-<file path=ppt/notesSlides/notesSlide6.xml><?xml version="1.0" encoding="utf-8"?>
-<p:notes xmlns:a="http://schemas.openxmlformats.org/drawingml/2006/main" xmlns:p="http://schemas.openxmlformats.org/presentationml/2006/main" xmlns:r="http://schemas.openxmlformats.org/officeDocument/2006/relationships">
-  <p:cSld>
-    <p:spTree>
-      <p:nvGrpSpPr>
-        <p:cNvPr id="1" name=""/>
-        <p:cNvGrpSpPr/>
-        <p:nvPr/>
-      </p:nvGrpSpPr>
-      <p:grpSpPr>
-        <a:xfrm>
-          <a:off x="0" y="0"/>
-          <a:ext cx="0" cy="0"/>
-          <a:chOff x="0" y="0"/>
-          <a:chExt cx="0" cy="0"/>
-        </a:xfrm>
-      </p:grpSpPr>
-      <p:sp>
-        <p:nvSpPr>
-          <p:cNvPr id="2" name="Slide Image Placeholder 1"/>
-          <p:cNvSpPr>
-            <a:spLocks noGrp="1"/>
-          </p:cNvSpPr>
-          <p:nvPr>
-            <p:ph type="sldImg" idx="2"/>
-          </p:nvPr>
-        </p:nvSpPr>
-        <p:spPr/>
-      </p:sp>
-      <p:sp>
-        <p:nvSpPr>
-          <p:cNvPr id="3" name="Notes Placeholder 2"/>
-          <p:cNvSpPr>
-            <a:spLocks noGrp="1"/>
-          </p:cNvSpPr>
-          <p:nvPr>
-            <p:ph type="body" idx="3" sz="quarter"/>
-          </p:nvPr>
-        </p:nvSpPr>
-        <p:spPr/>
-        <p:txBody>
-          <a:bodyPr/>
-          <a:lstStyle/>
-          <a:p>
-            <a:r>
-              <a:t>Классическая ловушка — путать loc и iloc.</a:t>
-            </a:r>
-          </a:p>
-        </p:txBody>
-      </p:sp>
-      <p:sp>
-        <p:nvSpPr>
-          <p:cNvPr id="4" name="Slide Number Placeholder 3"/>
-          <p:cNvSpPr>
-            <a:spLocks noGrp="1"/>
-          </p:cNvSpPr>
-          <p:nvPr>
-            <p:ph type="sldNum" idx="5" sz="quarter"/>
-          </p:nvPr>
-        </p:nvSpPr>
-        <p:spPr/>
-      </p:sp>
-    </p:spTree>
-  </p:cSld>
-  <p:clrMapOvr>
-    <a:masterClrMapping/>
-  </p:clrMapOvr>
-</p:notes>
-</file>
-
-<file path=ppt/notesSlides/notesSlide7.xml><?xml version="1.0" encoding="utf-8"?>
-<p:notes xmlns:a="http://schemas.openxmlformats.org/drawingml/2006/main" xmlns:p="http://schemas.openxmlformats.org/presentationml/2006/main" xmlns:r="http://schemas.openxmlformats.org/officeDocument/2006/relationships">
-  <p:cSld>
-    <p:spTree>
-      <p:nvGrpSpPr>
-        <p:cNvPr id="1" name=""/>
-        <p:cNvGrpSpPr/>
-        <p:nvPr/>
-      </p:nvGrpSpPr>
-      <p:grpSpPr>
-        <a:xfrm>
-          <a:off x="0" y="0"/>
-          <a:ext cx="0" cy="0"/>
-          <a:chOff x="0" y="0"/>
-          <a:chExt cx="0" cy="0"/>
-        </a:xfrm>
-      </p:grpSpPr>
-      <p:sp>
-        <p:nvSpPr>
-          <p:cNvPr id="2" name="Slide Image Placeholder 1"/>
-          <p:cNvSpPr>
-            <a:spLocks noGrp="1"/>
-          </p:cNvSpPr>
-          <p:nvPr>
-            <p:ph type="sldImg" idx="2"/>
-          </p:nvPr>
-        </p:nvSpPr>
-        <p:spPr/>
-      </p:sp>
-      <p:sp>
-        <p:nvSpPr>
-          <p:cNvPr id="3" name="Notes Placeholder 2"/>
-          <p:cNvSpPr>
-            <a:spLocks noGrp="1"/>
-          </p:cNvSpPr>
-          <p:nvPr>
-            <p:ph type="body" idx="3" sz="quarter"/>
-          </p:nvPr>
-        </p:nvSpPr>
-        <p:spPr/>
-        <p:txBody>
-          <a:bodyPr/>
-          <a:lstStyle/>
-          <a:p>
-            <a:r>
-              <a:t>Показать фильтр выживших женщин 1 класса.</a:t>
-            </a:r>
-          </a:p>
-        </p:txBody>
-      </p:sp>
-      <p:sp>
-        <p:nvSpPr>
-          <p:cNvPr id="4" name="Slide Number Placeholder 3"/>
-          <p:cNvSpPr>
-            <a:spLocks noGrp="1"/>
-          </p:cNvSpPr>
-          <p:nvPr>
-            <p:ph type="sldNum" idx="5" sz="quarter"/>
-          </p:nvPr>
-        </p:nvSpPr>
-        <p:spPr/>
-      </p:sp>
-    </p:spTree>
-  </p:cSld>
-  <p:clrMapOvr>
-    <a:masterClrMapping/>
-  </p:clrMapOvr>
-</p:notes>
-</file>
-
-<file path=ppt/notesSlides/notesSlide8.xml><?xml version="1.0" encoding="utf-8"?>
-<p:notes xmlns:a="http://schemas.openxmlformats.org/drawingml/2006/main" xmlns:p="http://schemas.openxmlformats.org/presentationml/2006/main" xmlns:r="http://schemas.openxmlformats.org/officeDocument/2006/relationships">
-  <p:cSld>
-    <p:spTree>
-      <p:nvGrpSpPr>
-        <p:cNvPr id="1" name=""/>
-        <p:cNvGrpSpPr/>
-        <p:nvPr/>
-      </p:nvGrpSpPr>
-      <p:grpSpPr>
-        <a:xfrm>
-          <a:off x="0" y="0"/>
-          <a:ext cx="0" cy="0"/>
-          <a:chOff x="0" y="0"/>
-          <a:chExt cx="0" cy="0"/>
-        </a:xfrm>
-      </p:grpSpPr>
-      <p:sp>
-        <p:nvSpPr>
-          <p:cNvPr id="2" name="Slide Image Placeholder 1"/>
-          <p:cNvSpPr>
-            <a:spLocks noGrp="1"/>
-          </p:cNvSpPr>
-          <p:nvPr>
-            <p:ph type="sldImg" idx="2"/>
-          </p:nvPr>
-        </p:nvSpPr>
-        <p:spPr/>
-      </p:sp>
-      <p:sp>
-        <p:nvSpPr>
-          <p:cNvPr id="3" name="Notes Placeholder 2"/>
-          <p:cNvSpPr>
-            <a:spLocks noGrp="1"/>
-          </p:cNvSpPr>
-          <p:nvPr>
-            <p:ph type="body" idx="3" sz="quarter"/>
-          </p:nvPr>
-        </p:nvSpPr>
-        <p:spPr/>
-        <p:txBody>
-          <a:bodyPr/>
-          <a:lstStyle/>
-          <a:p>
-            <a:r>
-              <a:t>Средний Fare по классу — наглядный пример.</a:t>
-            </a:r>
-          </a:p>
-        </p:txBody>
-      </p:sp>
-      <p:sp>
-        <p:nvSpPr>
-          <p:cNvPr id="4" name="Slide Number Placeholder 3"/>
-          <p:cNvSpPr>
-            <a:spLocks noGrp="1"/>
-          </p:cNvSpPr>
-          <p:nvPr>
-            <p:ph type="sldNum" idx="5" sz="quarter"/>
-          </p:nvPr>
-        </p:nvSpPr>
-        <p:spPr/>
-      </p:sp>
-    </p:spTree>
-  </p:cSld>
-  <p:clrMapOvr>
-    <a:masterClrMapping/>
-  </p:clrMapOvr>
-</p:notes>
-</file>
-
-<file path=ppt/notesSlides/notesSlide9.xml><?xml version="1.0" encoding="utf-8"?>
-<p:notes xmlns:a="http://schemas.openxmlformats.org/drawingml/2006/main" xmlns:p="http://schemas.openxmlformats.org/presentationml/2006/main" xmlns:r="http://schemas.openxmlformats.org/officeDocument/2006/relationships">
-  <p:cSld>
-    <p:spTree>
-      <p:nvGrpSpPr>
-        <p:cNvPr id="1" name=""/>
-        <p:cNvGrpSpPr/>
-        <p:nvPr/>
-      </p:nvGrpSpPr>
-      <p:grpSpPr>
-        <a:xfrm>
-          <a:off x="0" y="0"/>
-          <a:ext cx="0" cy="0"/>
-          <a:chOff x="0" y="0"/>
-          <a:chExt cx="0" cy="0"/>
-        </a:xfrm>
-      </p:grpSpPr>
-      <p:sp>
-        <p:nvSpPr>
-          <p:cNvPr id="2" name="Slide Image Placeholder 1"/>
-          <p:cNvSpPr>
-            <a:spLocks noGrp="1"/>
-          </p:cNvSpPr>
-          <p:nvPr>
-            <p:ph type="sldImg" idx="2"/>
-          </p:nvPr>
-        </p:nvSpPr>
-        <p:spPr/>
-      </p:sp>
-      <p:sp>
-        <p:nvSpPr>
-          <p:cNvPr id="3" name="Notes Placeholder 2"/>
-          <p:cNvSpPr>
-            <a:spLocks noGrp="1"/>
-          </p:cNvSpPr>
-          <p:nvPr>
-            <p:ph type="body" idx="3" sz="quarter"/>
-          </p:nvPr>
-        </p:nvSpPr>
-        <p:spPr/>
-        <p:txBody>
-          <a:bodyPr/>
-          <a:lstStyle/>
-          <a:p>
-            <a:r>
-              <a:t>Пример: таблица пассажиров + справочник портов.</a:t>
+              <a:t>Пройти пункты вслух на реальном датасете.</a:t>
             </a:r>
           </a:p>
         </p:txBody>
@@ -4831,7 +3935,7 @@
                   <a:srgbClr val="1A1A2E"/>
                 </a:solidFill>
               </a:rPr>
-              <a:t>merge и join</a:t>
+              <a:t>GroupBy: две операции, которые должен знать ML-инженер</a:t>
             </a:r>
           </a:p>
         </p:txBody>
@@ -4869,59 +3973,75 @@
                   <a:srgbClr val="000000"/>
                 </a:solidFill>
               </a:rPr>
-              <a:t>`pd.merge(left, right, on='key', how='inner|left|right|outer')` — SQL-подобное соединение</a:t>
-            </a:r>
-          </a:p>
-          <a:p>
-            <a:pPr>
-              <a:spcAft>
-                <a:spcPts val="800"/>
-              </a:spcAft>
-            </a:pPr>
-            <a:r>
-              <a:rPr lang="ru-RU" dirty="0" sz="2000">
-                <a:solidFill>
-                  <a:srgbClr val="000000"/>
-                </a:solidFill>
-              </a:rPr>
-              <a:t>how='left' — все строки левой таблицы; пропуски где нет совпадения</a:t>
-            </a:r>
-          </a:p>
-          <a:p>
-            <a:pPr>
-              <a:spcAft>
-                <a:spcPts val="800"/>
-              </a:spcAft>
-            </a:pPr>
-            <a:r>
-              <a:rPr lang="ru-RU" dirty="0" sz="2000">
-                <a:solidFill>
-                  <a:srgbClr val="000000"/>
-                </a:solidFill>
-              </a:rPr>
-              <a:t>`.join()` — по индексу; для merge ключи часто приводят к одному типу</a:t>
-            </a:r>
-          </a:p>
-          <a:p>
-            <a:pPr>
-              <a:spcAft>
-                <a:spcPts val="800"/>
-              </a:spcAft>
-            </a:pPr>
-            <a:r>
-              <a:rPr lang="ru-RU" dirty="0" sz="2000">
-                <a:solidFill>
-                  <a:srgbClr val="000000"/>
-                </a:solidFill>
-              </a:rPr>
-              <a:t>Дубликаты ключей → декартово умножение строк — проверяй `len` до и после</a:t>
+              <a:t>`agg()` — схлопывает группы в одну строку (среднее по группе)</a:t>
+            </a:r>
+          </a:p>
+          <a:p>
+            <a:pPr>
+              <a:spcAft>
+                <a:spcPts val="800"/>
+              </a:spcAft>
+            </a:pPr>
+            <a:r>
+              <a:rPr lang="ru-RU" dirty="0" sz="2000">
+                <a:solidFill>
+                  <a:srgbClr val="000000"/>
+                </a:solidFill>
+              </a:rPr>
+              <a:t xml:space="preserve">`transform()` — результат </a:t>
+            </a:r>
+            <a:r>
+              <a:rPr lang="ru-RU" dirty="0" sz="2000" b="1">
+                <a:solidFill>
+                  <a:srgbClr val="000000"/>
+                </a:solidFill>
+              </a:rPr>
+              <a:t>того же размера</a:t>
+            </a:r>
+            <a:r>
+              <a:rPr lang="ru-RU" dirty="0" sz="2000">
+                <a:solidFill>
+                  <a:srgbClr val="000000"/>
+                </a:solidFill>
+              </a:rPr>
+              <a:t>, что вход</a:t>
+            </a:r>
+          </a:p>
+          <a:p>
+            <a:pPr>
+              <a:spcAft>
+                <a:spcPts val="800"/>
+              </a:spcAft>
+            </a:pPr>
+            <a:r>
+              <a:rPr lang="ru-RU" dirty="0" sz="2000">
+                <a:solidFill>
+                  <a:srgbClr val="000000"/>
+                </a:solidFill>
+              </a:rPr>
+              <a:t>Пример: `df['dev'] = df['income'] - df.groupby('city')['income'].transform('mean')`</a:t>
+            </a:r>
+          </a:p>
+          <a:p>
+            <a:pPr>
+              <a:spcAft>
+                <a:spcPts val="800"/>
+              </a:spcAft>
+            </a:pPr>
+            <a:r>
+              <a:rPr lang="ru-RU" dirty="0" sz="2000">
+                <a:solidFill>
+                  <a:srgbClr val="000000"/>
+                </a:solidFill>
+              </a:rPr>
+              <a:t>Без `transform` нельзя создать контекстный признак без потери гранулярности</a:t>
             </a:r>
           </a:p>
         </p:txBody>
       </p:sp>
       <p:pic>
         <p:nvPicPr>
-          <p:cNvPr id="4" name="Picture 3" descr="merge_diagram.png"/>
+          <p:cNvPr id="4" name="Picture 3" descr="agg_vs_transform.png"/>
           <p:cNvPicPr>
             <a:picLocks noChangeAspect="1"/>
           </p:cNvPicPr>
@@ -4935,8 +4055,8 @@
         </p:blipFill>
         <p:spPr>
           <a:xfrm>
-            <a:off x="7635240" y="2842755"/>
-            <a:ext cx="4343400" cy="1446810"/>
+            <a:off x="7635240" y="2808590"/>
+            <a:ext cx="4343400" cy="1515140"/>
           </a:xfrm>
           <a:prstGeom prst="rect">
             <a:avLst/>
@@ -4989,7 +4109,7 @@
                   <a:srgbClr val="1A1A2E"/>
                 </a:solidFill>
               </a:rPr>
-              <a:t>Пропуски: isna, fillna, dropna</a:t>
+              <a:t>MultiIndex: иерархические индексы после groupby</a:t>
             </a:r>
           </a:p>
         </p:txBody>
@@ -5027,52 +4147,7 @@
                   <a:srgbClr val="000000"/>
                 </a:solidFill>
               </a:rPr>
-              <a:t>`isna()` / `notna()` — маска пропусков; `df.isna().sum()` — счёт по столбцам</a:t>
-            </a:r>
-          </a:p>
-          <a:p>
-            <a:pPr>
-              <a:spcAft>
-                <a:spcPts val="800"/>
-              </a:spcAft>
-            </a:pPr>
-            <a:r>
-              <a:rPr lang="ru-RU" dirty="0" sz="2000">
-                <a:solidFill>
-                  <a:srgbClr val="000000"/>
-                </a:solidFill>
-              </a:rPr>
-              <a:t>`fillna(value)` или `fillna(df['col'].median())` — заполнение</a:t>
-            </a:r>
-          </a:p>
-          <a:p>
-            <a:pPr>
-              <a:spcAft>
-                <a:spcPts val="800"/>
-              </a:spcAft>
-            </a:pPr>
-            <a:r>
-              <a:rPr lang="ru-RU" dirty="0" sz="2000">
-                <a:solidFill>
-                  <a:srgbClr val="000000"/>
-                </a:solidFill>
-              </a:rPr>
-              <a:t>`dropna(subset=['Age'])` — удалить строки с пропуском в Age</a:t>
-            </a:r>
-          </a:p>
-          <a:p>
-            <a:pPr>
-              <a:spcAft>
-                <a:spcPts val="800"/>
-              </a:spcAft>
-            </a:pPr>
-            <a:r>
-              <a:rPr lang="ru-RU" dirty="0" sz="2000">
-                <a:solidFill>
-                  <a:srgbClr val="000000"/>
-                </a:solidFill>
-              </a:rPr>
-              <a:t xml:space="preserve">Стратегия зависит от задачи: удалить vs impute; для ML — только на </a:t>
+              <a:t xml:space="preserve">`groupby(['city','cat']).agg(['mean','std'])` → </a:t>
             </a:r>
             <a:r>
               <a:rPr lang="ru-RU" dirty="0" sz="2000" b="1">
@@ -5080,14 +4155,75 @@
                   <a:srgbClr val="000000"/>
                 </a:solidFill>
               </a:rPr>
-              <a:t>train</a:t>
+              <a:t>двухуровневый</a:t>
+            </a:r>
+            <a:r>
+              <a:rPr lang="ru-RU" dirty="0" sz="2000">
+                <a:solidFill>
+                  <a:srgbClr val="000000"/>
+                </a:solidFill>
+              </a:rPr>
+              <a:t xml:space="preserve"> индекс строк и столбцов</a:t>
+            </a:r>
+          </a:p>
+          <a:p>
+            <a:pPr>
+              <a:spcAft>
+                <a:spcPts val="800"/>
+              </a:spcAft>
+            </a:pPr>
+            <a:r>
+              <a:rPr lang="ru-RU" dirty="0" sz="2000">
+                <a:solidFill>
+                  <a:srgbClr val="000000"/>
+                </a:solidFill>
+              </a:rPr>
+              <a:t>Частая боль: как обратиться к ячейке, как склеить с исходной таблицей</a:t>
+            </a:r>
+          </a:p>
+          <a:p>
+            <a:pPr>
+              <a:spcAft>
+                <a:spcPts val="800"/>
+              </a:spcAft>
+            </a:pPr>
+            <a:r>
+              <a:rPr lang="ru-RU" dirty="0" sz="2000">
+                <a:solidFill>
+                  <a:srgbClr val="000000"/>
+                </a:solidFill>
+              </a:rPr>
+              <a:t>`reset_index()` или `as_index=False` в `groupby()`</a:t>
+            </a:r>
+          </a:p>
+          <a:p>
+            <a:pPr>
+              <a:spcAft>
+                <a:spcPts val="800"/>
+              </a:spcAft>
+            </a:pPr>
+            <a:r>
+              <a:rPr lang="ru-RU" dirty="0" sz="2000">
+                <a:solidFill>
+                  <a:srgbClr val="000000"/>
+                </a:solidFill>
+              </a:rPr>
+              <a:t xml:space="preserve">Перед моделью или merge — </a:t>
+            </a:r>
+            <a:r>
+              <a:rPr lang="ru-RU" dirty="0" sz="2000" b="1">
+                <a:solidFill>
+                  <a:srgbClr val="000000"/>
+                </a:solidFill>
+              </a:rPr>
+              <a:t>сбросить MultiIndex</a:t>
             </a:r>
           </a:p>
         </p:txBody>
       </p:sp>
       <p:pic>
         <p:nvPicPr>
-          <p:cNvPr id="4" name="Picture 3" descr="missing_counts.png"/>
+          <p:cNvPr id="4" name="Picture 3" descr="multiindex_reset.png"/>
           <p:cNvPicPr>
             <a:picLocks noChangeAspect="1"/>
           </p:cNvPicPr>
@@ -5101,8 +4237,8 @@
         </p:blipFill>
         <p:spPr>
           <a:xfrm>
-            <a:off x="7635240" y="2075955"/>
-            <a:ext cx="4343400" cy="2980408"/>
+            <a:off x="7635240" y="2941473"/>
+            <a:ext cx="4343400" cy="1249372"/>
           </a:xfrm>
           <a:prstGeom prst="rect">
             <a:avLst/>
@@ -5155,7 +4291,7 @@
                   <a:srgbClr val="1A1A2E"/>
                 </a:solidFill>
               </a:rPr>
-              <a:t>Типы данных</a:t>
+              <a:t>Категории: типы кодирования и когда что применять</a:t>
             </a:r>
           </a:p>
         </p:txBody>
@@ -5188,64 +4324,88 @@
               </a:spcAft>
             </a:pPr>
             <a:r>
-              <a:rPr lang="ru-RU" dirty="0" sz="2000">
-                <a:solidFill>
-                  <a:srgbClr val="000000"/>
-                </a:solidFill>
-              </a:rPr>
-              <a:t>object — строки; int64/float64 — числа; category — экономия памяти для повторов</a:t>
-            </a:r>
-          </a:p>
-          <a:p>
-            <a:pPr>
-              <a:spcAft>
-                <a:spcPts val="800"/>
-              </a:spcAft>
-            </a:pPr>
-            <a:r>
-              <a:rPr lang="ru-RU" dirty="0" sz="2000">
-                <a:solidFill>
-                  <a:srgbClr val="000000"/>
-                </a:solidFill>
-              </a:rPr>
-              <a:t>`astype({'col': 'category'})` — явное приведение</a:t>
-            </a:r>
-          </a:p>
-          <a:p>
-            <a:pPr>
-              <a:spcAft>
-                <a:spcPts val="800"/>
-              </a:spcAft>
-            </a:pPr>
-            <a:r>
-              <a:rPr lang="ru-RU" dirty="0" sz="2000">
-                <a:solidFill>
-                  <a:srgbClr val="000000"/>
-                </a:solidFill>
-              </a:rPr>
-              <a:t>`pd.to_datetime(df['date'])` — даты; `.dt.year`, `.dt.month` — компоненты</a:t>
-            </a:r>
-          </a:p>
-          <a:p>
-            <a:pPr>
-              <a:spcAft>
-                <a:spcPts val="800"/>
-              </a:spcAft>
-            </a:pPr>
-            <a:r>
-              <a:rPr lang="ru-RU" dirty="0" sz="2000">
-                <a:solidFill>
-                  <a:srgbClr val="000000"/>
-                </a:solidFill>
-              </a:rPr>
-              <a:t>Неверный dtype ломает sort и merge — смотри `df.dtypes` после чтения</a:t>
+              <a:rPr lang="ru-RU" dirty="0" sz="2000" b="1">
+                <a:solidFill>
+                  <a:srgbClr val="000000"/>
+                </a:solidFill>
+              </a:rPr>
+              <a:t>Ordinal</a:t>
+            </a:r>
+            <a:r>
+              <a:rPr lang="ru-RU" dirty="0" sz="2000">
+                <a:solidFill>
+                  <a:srgbClr val="000000"/>
+                </a:solidFill>
+              </a:rPr>
+              <a:t xml:space="preserve"> — только упорядоченные (`category` + `.cat.codes`)</a:t>
+            </a:r>
+          </a:p>
+          <a:p>
+            <a:pPr>
+              <a:spcAft>
+                <a:spcPts val="800"/>
+              </a:spcAft>
+            </a:pPr>
+            <a:r>
+              <a:rPr lang="ru-RU" dirty="0" sz="2000" b="1">
+                <a:solidFill>
+                  <a:srgbClr val="000000"/>
+                </a:solidFill>
+              </a:rPr>
+              <a:t>One-Hot</a:t>
+            </a:r>
+            <a:r>
+              <a:rPr lang="ru-RU" dirty="0" sz="2000">
+                <a:solidFill>
+                  <a:srgbClr val="000000"/>
+                </a:solidFill>
+              </a:rPr>
+              <a:t xml:space="preserve"> — неупорядоченные: `pd.get_dummies(..., drop_first=True)`</a:t>
+            </a:r>
+          </a:p>
+          <a:p>
+            <a:pPr>
+              <a:spcAft>
+                <a:spcPts val="800"/>
+              </a:spcAft>
+            </a:pPr>
+            <a:r>
+              <a:rPr lang="ru-RU" dirty="0" sz="2000" b="1">
+                <a:solidFill>
+                  <a:srgbClr val="000000"/>
+                </a:solidFill>
+              </a:rPr>
+              <a:t>Target Encoding</a:t>
+            </a:r>
+            <a:r>
+              <a:rPr lang="ru-RU" dirty="0" sz="2000">
+                <a:solidFill>
+                  <a:srgbClr val="000000"/>
+                </a:solidFill>
+              </a:rPr>
+              <a:t xml:space="preserve"> — среднее таргета; только внутри sklearn `Pipeline`</a:t>
+            </a:r>
+          </a:p>
+          <a:p>
+            <a:pPr>
+              <a:spcAft>
+                <a:spcPts val="800"/>
+              </a:spcAft>
+            </a:pPr>
+            <a:r>
+              <a:rPr lang="ru-RU" dirty="0" sz="2000">
+                <a:solidFill>
+                  <a:srgbClr val="000000"/>
+                </a:solidFill>
+              </a:rPr>
+              <a:t>Числа 0,1,2 для деревьев ок, для линейных моделей — ломает геометрию</a:t>
             </a:r>
           </a:p>
         </p:txBody>
       </p:sp>
       <p:pic>
         <p:nvPicPr>
-          <p:cNvPr id="4" name="Picture 3" descr="dtype_category.png"/>
+          <p:cNvPr id="4" name="Picture 3" descr="encoding_methods.png"/>
           <p:cNvPicPr>
             <a:picLocks noChangeAspect="1"/>
           </p:cNvPicPr>
@@ -5259,8 +4419,8 @@
         </p:blipFill>
         <p:spPr>
           <a:xfrm>
-            <a:off x="7635240" y="2808590"/>
-            <a:ext cx="4343400" cy="1515140"/>
+            <a:off x="7635240" y="2909599"/>
+            <a:ext cx="4343400" cy="1313121"/>
           </a:xfrm>
           <a:prstGeom prst="rect">
             <a:avLst/>
@@ -5313,7 +4473,7 @@
                   <a:srgbClr val="1A1A2E"/>
                 </a:solidFill>
               </a:rPr>
-              <a:t>apply и transform</a:t>
+              <a:t>Быстрый Feature Engineering: условия, биннинг и отсечение</a:t>
             </a:r>
           </a:p>
         </p:txBody>
@@ -5351,59 +4511,59 @@
                   <a:srgbClr val="000000"/>
                 </a:solidFill>
               </a:rPr>
-              <a:t>`.apply(func, axis=0|1)` — функция по столбцу или строке; медленнее векторизации</a:t>
-            </a:r>
-          </a:p>
-          <a:p>
-            <a:pPr>
-              <a:spcAft>
-                <a:spcPts val="800"/>
-              </a:spcAft>
-            </a:pPr>
-            <a:r>
-              <a:rPr lang="ru-RU" dirty="0" sz="2000">
-                <a:solidFill>
-                  <a:srgbClr val="000000"/>
-                </a:solidFill>
-              </a:rPr>
-              <a:t>`.map(dict)` на Series — замена значений по словарю</a:t>
-            </a:r>
-          </a:p>
-          <a:p>
-            <a:pPr>
-              <a:spcAft>
-                <a:spcPts val="800"/>
-              </a:spcAft>
-            </a:pPr>
-            <a:r>
-              <a:rPr lang="ru-RU" dirty="0" sz="2000">
-                <a:solidFill>
-                  <a:srgbClr val="000000"/>
-                </a:solidFill>
-              </a:rPr>
-              <a:t>`.transform('mean')` после groupby — результат той же длины, что и исходник</a:t>
-            </a:r>
-          </a:p>
-          <a:p>
-            <a:pPr>
-              <a:spcAft>
-                <a:spcPts val="800"/>
-              </a:spcAft>
-            </a:pPr>
-            <a:r>
-              <a:rPr lang="ru-RU" dirty="0" sz="2000">
-                <a:solidFill>
-                  <a:srgbClr val="000000"/>
-                </a:solidFill>
-              </a:rPr>
-              <a:t>Предпочитай встроенные методы (`str`, `dt`, NumPy) — apply для сложной логики</a:t>
+              <a:t>`np.where` — векторизованные условия, в сотни раз быстрее `apply`</a:t>
+            </a:r>
+          </a:p>
+          <a:p>
+            <a:pPr>
+              <a:spcAft>
+                <a:spcPts val="800"/>
+              </a:spcAft>
+            </a:pPr>
+            <a:r>
+              <a:rPr lang="ru-RU" dirty="0" sz="2000">
+                <a:solidFill>
+                  <a:srgbClr val="000000"/>
+                </a:solidFill>
+              </a:rPr>
+              <a:t>`pd.cut` — равные интервалы; `pd.qcut` — равное число объектов в корзинах</a:t>
+            </a:r>
+          </a:p>
+          <a:p>
+            <a:pPr>
+              <a:spcAft>
+                <a:spcPts val="800"/>
+              </a:spcAft>
+            </a:pPr>
+            <a:r>
+              <a:rPr lang="ru-RU" dirty="0" sz="2000">
+                <a:solidFill>
+                  <a:srgbClr val="000000"/>
+                </a:solidFill>
+              </a:rPr>
+              <a:t>`clip` / Winsorization: `df['x'].clip(upper=quantile(0.99))` — спасает от выбросов без удаления строк</a:t>
+            </a:r>
+          </a:p>
+          <a:p>
+            <a:pPr>
+              <a:spcAft>
+                <a:spcPts val="800"/>
+              </a:spcAft>
+            </a:pPr>
+            <a:r>
+              <a:rPr lang="ru-RU" dirty="0" sz="2000">
+                <a:solidFill>
+                  <a:srgbClr val="000000"/>
+                </a:solidFill>
+              </a:rPr>
+              <a:t>Линейным моделям помогает биннинг; деревьям — проще разбиения</a:t>
             </a:r>
           </a:p>
         </p:txBody>
       </p:sp>
       <p:pic>
         <p:nvPicPr>
-          <p:cNvPr id="4" name="Picture 3" descr="apply_map_transform.png"/>
+          <p:cNvPr id="4" name="Picture 3" descr="clip_outliers.png"/>
           <p:cNvPicPr>
             <a:picLocks noChangeAspect="1"/>
           </p:cNvPicPr>
@@ -5417,8 +4577,32 @@
         </p:blipFill>
         <p:spPr>
           <a:xfrm>
-            <a:off x="7635240" y="2909599"/>
-            <a:ext cx="4343400" cy="1313121"/>
+            <a:off x="7635240" y="1670162"/>
+            <a:ext cx="4343400" cy="1515140"/>
+          </a:xfrm>
+          <a:prstGeom prst="rect">
+            <a:avLst/>
+          </a:prstGeom>
+        </p:spPr>
+      </p:pic>
+      <p:pic>
+        <p:nvPicPr>
+          <p:cNvPr id="5" name="Picture 4" descr="cut_bins.png"/>
+          <p:cNvPicPr>
+            <a:picLocks noChangeAspect="1"/>
+          </p:cNvPicPr>
+          <p:nvPr/>
+        </p:nvPicPr>
+        <p:blipFill>
+          <a:blip r:embed="rId3"/>
+          <a:stretch>
+            <a:fillRect/>
+          </a:stretch>
+        </p:blipFill>
+        <p:spPr>
+          <a:xfrm>
+            <a:off x="8203431" y="3602735"/>
+            <a:ext cx="3207016" cy="2203704"/>
           </a:xfrm>
           <a:prstGeom prst="rect">
             <a:avLst/>
@@ -5471,7 +4655,7 @@
                   <a:srgbClr val="1A1A2E"/>
                 </a:solidFill>
               </a:rPr>
-              <a:t>pivot и pivot_table</a:t>
+              <a:t>Работа с текстом: стринговый аксессор `.str`</a:t>
             </a:r>
           </a:p>
         </p:txBody>
@@ -5509,59 +4693,59 @@
                   <a:srgbClr val="000000"/>
                 </a:solidFill>
               </a:rPr>
-              <a:t>`pivot_table(values, index, columns, aggfunc='mean')` — сводная таблица</a:t>
-            </a:r>
-          </a:p>
-          <a:p>
-            <a:pPr>
-              <a:spcAft>
-                <a:spcPts val="800"/>
-              </a:spcAft>
-            </a:pPr>
-            <a:r>
-              <a:rPr lang="ru-RU" dirty="0" sz="2000">
-                <a:solidFill>
-                  <a:srgbClr val="000000"/>
-                </a:solidFill>
-              </a:rPr>
-              <a:t>Аналог Excel Pivot: строки × столбцы × агрегат</a:t>
-            </a:r>
-          </a:p>
-          <a:p>
-            <a:pPr>
-              <a:spcAft>
-                <a:spcPts val="800"/>
-              </a:spcAft>
-            </a:pPr>
-            <a:r>
-              <a:rPr lang="ru-RU" dirty="0" sz="2000">
-                <a:solidFill>
-                  <a:srgbClr val="000000"/>
-                </a:solidFill>
-              </a:rPr>
-              <a:t>`.pivot()` — без агрегации, требует уникальных пар index×columns</a:t>
-            </a:r>
-          </a:p>
-          <a:p>
-            <a:pPr>
-              <a:spcAft>
-                <a:spcPts val="800"/>
-              </a:spcAft>
-            </a:pPr>
-            <a:r>
-              <a:rPr lang="ru-RU" dirty="0" sz="2000">
-                <a:solidFill>
-                  <a:srgbClr val="000000"/>
-                </a:solidFill>
-              </a:rPr>
-              <a:t>Удобно для отчётов и быстрой проверки гипотез (выживаемость по классу и полу)</a:t>
+              <a:t>`.str` — векторизованные операции над строками (база NLP-препроцессинга)</a:t>
+            </a:r>
+          </a:p>
+          <a:p>
+            <a:pPr>
+              <a:spcAft>
+                <a:spcPts val="800"/>
+              </a:spcAft>
+            </a:pPr>
+            <a:r>
+              <a:rPr lang="ru-RU" dirty="0" sz="2000">
+                <a:solidFill>
+                  <a:srgbClr val="000000"/>
+                </a:solidFill>
+              </a:rPr>
+              <a:t>`.str.len()`, `.str.lower()`, `.str.contains()`, `.str.replace()`</a:t>
+            </a:r>
+          </a:p>
+          <a:p>
+            <a:pPr>
+              <a:spcAft>
+                <a:spcPts val="800"/>
+              </a:spcAft>
+            </a:pPr>
+            <a:r>
+              <a:rPr lang="ru-RU" dirty="0" sz="2000">
+                <a:solidFill>
+                  <a:srgbClr val="000000"/>
+                </a:solidFill>
+              </a:rPr>
+              <a:t>`.str.extract(regex)` — извлечение в DataFrame; `.str.split().str[0]`</a:t>
+            </a:r>
+          </a:p>
+          <a:p>
+            <a:pPr>
+              <a:spcAft>
+                <a:spcPts val="800"/>
+              </a:spcAft>
+            </a:pPr>
+            <a:r>
+              <a:rPr lang="ru-RU" dirty="0" sz="2000">
+                <a:solidFill>
+                  <a:srgbClr val="000000"/>
+                </a:solidFill>
+              </a:rPr>
+              <a:t>Работает с `object` и `string[pyarrow]`</a:t>
             </a:r>
           </a:p>
         </p:txBody>
       </p:sp>
       <p:pic>
         <p:nvPicPr>
-          <p:cNvPr id="4" name="Picture 3" descr="pivot_survival.png"/>
+          <p:cNvPr id="4" name="Picture 3" descr="str_extract.png"/>
           <p:cNvPicPr>
             <a:picLocks noChangeAspect="1"/>
           </p:cNvPicPr>
@@ -5575,8 +4759,8 @@
         </p:blipFill>
         <p:spPr>
           <a:xfrm>
-            <a:off x="7635240" y="2307648"/>
-            <a:ext cx="4343400" cy="2517023"/>
+            <a:off x="7635240" y="2076907"/>
+            <a:ext cx="4343400" cy="2978505"/>
           </a:xfrm>
           <a:prstGeom prst="rect">
             <a:avLst/>
@@ -5629,7 +4813,7 @@
                   <a:srgbClr val="1A1A2E"/>
                 </a:solidFill>
               </a:rPr>
-              <a:t>Базовая производительность</a:t>
+              <a:t>Время как признак: аксессор `.dt`</a:t>
             </a:r>
           </a:p>
         </p:txBody>
@@ -5667,7 +4851,7 @@
                   <a:srgbClr val="000000"/>
                 </a:solidFill>
               </a:rPr>
-              <a:t xml:space="preserve">Векторизация NumPy/Pandas </a:t>
+              <a:t xml:space="preserve">Модель не понимает timestamp — нужны </a:t>
             </a:r>
             <a:r>
               <a:rPr lang="ru-RU" dirty="0" sz="2000" b="1">
@@ -5675,67 +4859,103 @@
                   <a:srgbClr val="000000"/>
                 </a:solidFill>
               </a:rPr>
-              <a:t>быстрее</a:t>
-            </a:r>
-            <a:r>
-              <a:rPr lang="ru-RU" dirty="0" sz="2000">
-                <a:solidFill>
-                  <a:srgbClr val="000000"/>
-                </a:solidFill>
-              </a:rPr>
-              <a:t xml:space="preserve"> цикла Python и построчного apply</a:t>
-            </a:r>
-          </a:p>
-          <a:p>
-            <a:pPr>
-              <a:spcAft>
-                <a:spcPts val="800"/>
-              </a:spcAft>
-            </a:pPr>
-            <a:r>
-              <a:rPr lang="ru-RU" dirty="0" sz="2000">
-                <a:solidFill>
-                  <a:srgbClr val="000000"/>
-                </a:solidFill>
-              </a:rPr>
-              <a:t>`.values` / `.to_numpy()` — массив для sklearn без копий где возможно</a:t>
-            </a:r>
-          </a:p>
-          <a:p>
-            <a:pPr>
-              <a:spcAft>
-                <a:spcPts val="800"/>
-              </a:spcAft>
-            </a:pPr>
-            <a:r>
-              <a:rPr lang="ru-RU" dirty="0" sz="2000">
-                <a:solidFill>
-                  <a:srgbClr val="000000"/>
-                </a:solidFill>
-              </a:rPr>
-              <a:t>category и правильные dtypes уменьшают память на больших таблицах</a:t>
-            </a:r>
-          </a:p>
-          <a:p>
-            <a:pPr>
-              <a:spcAft>
-                <a:spcPts val="800"/>
-              </a:spcAft>
-            </a:pPr>
-            <a:r>
-              <a:rPr lang="ru-RU" dirty="0" sz="2000">
-                <a:solidFill>
-                  <a:srgbClr val="000000"/>
-                </a:solidFill>
-              </a:rPr>
-              <a:t>Чтение: `usecols`, `dtype`, `chunksize` — для файлов на миллионы строк</a:t>
+              <a:t>смысловые</a:t>
+            </a:r>
+            <a:r>
+              <a:rPr lang="ru-RU" dirty="0" sz="2000">
+                <a:solidFill>
+                  <a:srgbClr val="000000"/>
+                </a:solidFill>
+              </a:rPr>
+              <a:t xml:space="preserve"> признаки</a:t>
+            </a:r>
+          </a:p>
+          <a:p>
+            <a:pPr>
+              <a:spcAft>
+                <a:spcPts val="800"/>
+              </a:spcAft>
+            </a:pPr>
+            <a:r>
+              <a:rPr lang="ru-RU" dirty="0" sz="2000">
+                <a:solidFill>
+                  <a:srgbClr val="000000"/>
+                </a:solidFill>
+              </a:rPr>
+              <a:t>`.dt.dayofweek`, `.dt.hour`, `.dt.is_month_end` — события и циклы</a:t>
+            </a:r>
+          </a:p>
+          <a:p>
+            <a:pPr>
+              <a:spcAft>
+                <a:spcPts val="800"/>
+              </a:spcAft>
+            </a:pPr>
+            <a:r>
+              <a:rPr lang="ru-RU" dirty="0" sz="2000">
+                <a:solidFill>
+                  <a:srgbClr val="000000"/>
+                </a:solidFill>
+              </a:rPr>
+              <a:t xml:space="preserve">Час и месяц кодируют через </a:t>
+            </a:r>
+            <ns0:m xmlns:ns0="http://schemas.microsoft.com/office/drawing/2010/main">
+              <m:oMath xmlns:m="http://schemas.openxmlformats.org/officeDocument/2006/math">
+                <m:r>
+                  <m:rPr>
+                    <m:sty m:val="p"/>
+                  </m:rPr>
+                  <m:t>sin</m:t>
+                </m:r>
+              </m:oMath>
+            </ns0:m>
+            <a:r>
+              <a:rPr lang="ru-RU" dirty="0" sz="2000">
+                <a:solidFill>
+                  <a:srgbClr val="000000"/>
+                </a:solidFill>
+              </a:rPr>
+              <a:t xml:space="preserve">, </a:t>
+            </a:r>
+            <ns0:m xmlns:ns0="http://schemas.microsoft.com/office/drawing/2010/main">
+              <m:oMath xmlns:m="http://schemas.openxmlformats.org/officeDocument/2006/math">
+                <m:r>
+                  <m:rPr>
+                    <m:sty m:val="p"/>
+                  </m:rPr>
+                  <m:t>cos</m:t>
+                </m:r>
+              </m:oMath>
+            </ns0:m>
+            <a:r>
+              <a:rPr lang="ru-RU" dirty="0" sz="2000">
+                <a:solidFill>
+                  <a:srgbClr val="000000"/>
+                </a:solidFill>
+              </a:rPr>
+              <a:t xml:space="preserve"> для цикличности (23:00 близко к 00:00)</a:t>
+            </a:r>
+          </a:p>
+          <a:p>
+            <a:pPr>
+              <a:spcAft>
+                <a:spcPts val="800"/>
+              </a:spcAft>
+            </a:pPr>
+            <a:r>
+              <a:rPr lang="ru-RU" dirty="0" sz="2000">
+                <a:solidFill>
+                  <a:srgbClr val="000000"/>
+                </a:solidFill>
+              </a:rPr>
+              <a:t>Всегда приводите к `datetime64` перед `.dt`</a:t>
             </a:r>
           </a:p>
         </p:txBody>
       </p:sp>
       <p:pic>
         <p:nvPicPr>
-          <p:cNvPr id="4" name="Picture 3" descr="perf_vectorized.png"/>
+          <p:cNvPr id="4" name="Picture 3" descr="dt_cyclic_hour.png"/>
           <p:cNvPicPr>
             <a:picLocks noChangeAspect="1"/>
           </p:cNvPicPr>
@@ -5749,8 +4969,8 @@
         </p:blipFill>
         <p:spPr>
           <a:xfrm>
-            <a:off x="7635240" y="2073874"/>
-            <a:ext cx="4343400" cy="2984571"/>
+            <a:off x="7635240" y="2075955"/>
+            <a:ext cx="4343400" cy="2980408"/>
           </a:xfrm>
           <a:prstGeom prst="rect">
             <a:avLst/>
@@ -5803,7 +5023,7 @@
                   <a:srgbClr val="1A1A2E"/>
                 </a:solidFill>
               </a:rPr>
-              <a:t>Типичные ошибки в Pandas</a:t>
+              <a:t>pandas &lt;-&gt; numpy: мост между экосистемами</a:t>
             </a:r>
           </a:p>
         </p:txBody>
@@ -5836,88 +5056,64 @@
               </a:spcAft>
             </a:pPr>
             <a:r>
-              <a:rPr lang="ru-RU" dirty="0" sz="2000" b="1">
-                <a:solidFill>
-                  <a:srgbClr val="000000"/>
-                </a:solidFill>
-              </a:rPr>
-              <a:t>SettingWithCopyWarning</a:t>
-            </a:r>
-            <a:r>
-              <a:rPr lang="ru-RU" dirty="0" sz="2000">
-                <a:solidFill>
-                  <a:srgbClr val="000000"/>
-                </a:solidFill>
-              </a:rPr>
-              <a:t xml:space="preserve"> — цепочка срезов; используй `.loc` или `.copy()`</a:t>
-            </a:r>
-          </a:p>
-          <a:p>
-            <a:pPr>
-              <a:spcAft>
-                <a:spcPts val="800"/>
-              </a:spcAft>
-            </a:pPr>
-            <a:r>
-              <a:rPr lang="ru-RU" dirty="0" sz="2000">
-                <a:solidFill>
-                  <a:srgbClr val="000000"/>
-                </a:solidFill>
-              </a:rPr>
-              <a:t>Изменение среза не меняет исходник — нужен явный assign или loc</a:t>
-            </a:r>
-          </a:p>
-          <a:p>
-            <a:pPr>
-              <a:spcAft>
-                <a:spcPts val="800"/>
-              </a:spcAft>
-            </a:pPr>
-            <a:r>
-              <a:rPr lang="ru-RU" dirty="0" sz="2000">
-                <a:solidFill>
-                  <a:srgbClr val="000000"/>
-                </a:solidFill>
-              </a:rPr>
-              <a:t>merge без проверки дубликатов ключей → раздувание строк</a:t>
-            </a:r>
-          </a:p>
-          <a:p>
-            <a:pPr>
-              <a:spcAft>
-                <a:spcPts val="800"/>
-              </a:spcAft>
-            </a:pPr>
-            <a:r>
-              <a:rPr lang="ru-RU" dirty="0" sz="2000">
-                <a:solidFill>
-                  <a:srgbClr val="000000"/>
-                </a:solidFill>
-              </a:rPr>
-              <a:t xml:space="preserve">fillna/dropna </a:t>
-            </a:r>
-            <a:r>
-              <a:rPr lang="ru-RU" dirty="0" sz="2000" b="1">
-                <a:solidFill>
-                  <a:srgbClr val="000000"/>
-                </a:solidFill>
-              </a:rPr>
-              <a:t>до</a:t>
-            </a:r>
-            <a:r>
-              <a:rPr lang="ru-RU" dirty="0" sz="2000">
-                <a:solidFill>
-                  <a:srgbClr val="000000"/>
-                </a:solidFill>
-              </a:rPr>
-              <a:t xml:space="preserve"> train_test_split — утечка информации из test</a:t>
+              <a:rPr lang="ru-RU" dirty="0" sz="2000">
+                <a:solidFill>
+                  <a:srgbClr val="000000"/>
+                </a:solidFill>
+              </a:rPr>
+              <a:t>`df.to_numpy()` — современный способ в numpy</a:t>
+            </a:r>
+          </a:p>
+          <a:p>
+            <a:pPr>
+              <a:spcAft>
+                <a:spcPts val="800"/>
+              </a:spcAft>
+            </a:pPr>
+            <a:r>
+              <a:rPr lang="ru-RU" dirty="0" sz="2000">
+                <a:solidFill>
+                  <a:srgbClr val="000000"/>
+                </a:solidFill>
+              </a:rPr>
+              <a:t>`df.select_dtypes(include=np.number).to_numpy()` — только числа для модели</a:t>
+            </a:r>
+          </a:p>
+          <a:p>
+            <a:pPr>
+              <a:spcAft>
+                <a:spcPts val="800"/>
+              </a:spcAft>
+            </a:pPr>
+            <a:r>
+              <a:rPr lang="ru-RU" dirty="0" sz="2000">
+                <a:solidFill>
+                  <a:srgbClr val="000000"/>
+                </a:solidFill>
+              </a:rPr>
+              <a:t>`pd.DataFrame(arr, columns=[...])` — из numpy в pandas</a:t>
+            </a:r>
+          </a:p>
+          <a:p>
+            <a:pPr>
+              <a:spcAft>
+                <a:spcPts val="800"/>
+              </a:spcAft>
+            </a:pPr>
+            <a:r>
+              <a:rPr lang="ru-RU" dirty="0" sz="2000">
+                <a:solidFill>
+                  <a:srgbClr val="000000"/>
+                </a:solidFill>
+              </a:rPr>
+              <a:t>Строки в DataFrame → `.to_numpy()` даст `object`, модель сломается</a:t>
             </a:r>
           </a:p>
         </p:txBody>
       </p:sp>
       <p:pic>
         <p:nvPicPr>
-          <p:cNvPr id="4" name="Picture 3" descr="pandas_leakage.png"/>
+          <p:cNvPr id="4" name="Picture 3" descr="to_numpy_bridge.png"/>
           <p:cNvPicPr>
             <a:picLocks noChangeAspect="1"/>
           </p:cNvPicPr>
@@ -5931,8 +5127,8 @@
         </p:blipFill>
         <p:spPr>
           <a:xfrm>
-            <a:off x="7635240" y="2210364"/>
-            <a:ext cx="4343400" cy="2711592"/>
+            <a:off x="7635240" y="2945922"/>
+            <a:ext cx="4343400" cy="1240475"/>
           </a:xfrm>
           <a:prstGeom prst="rect">
             <a:avLst/>
@@ -5985,7 +5181,7 @@
                   <a:srgbClr val="1A1A2E"/>
                 </a:solidFill>
               </a:rPr>
-              <a:t>Pandas и sklearn Pipeline</a:t>
+              <a:t>Опасности склейки таблиц: merge и concat</a:t>
             </a:r>
           </a:p>
         </p:txBody>
@@ -6018,64 +5214,88 @@
               </a:spcAft>
             </a:pPr>
             <a:r>
-              <a:rPr lang="ru-RU" dirty="0" sz="2000">
-                <a:solidFill>
-                  <a:srgbClr val="000000"/>
-                </a:solidFill>
-              </a:rPr>
-              <a:t>Pandas — EDA и подготовка; sklearn — `fit`/`predict` на NumPy</a:t>
-            </a:r>
-          </a:p>
-          <a:p>
-            <a:pPr>
-              <a:spcAft>
-                <a:spcPts val="800"/>
-              </a:spcAft>
-            </a:pPr>
-            <a:r>
-              <a:rPr lang="ru-RU" dirty="0" sz="2000">
-                <a:solidFill>
-                  <a:srgbClr val="000000"/>
-                </a:solidFill>
-              </a:rPr>
-              <a:t>`ColumnTransformer` + `Pipeline`: imputer/scaler/encoder внутри пайплайна</a:t>
-            </a:r>
-          </a:p>
-          <a:p>
-            <a:pPr>
-              <a:spcAft>
-                <a:spcPts val="800"/>
-              </a:spcAft>
-            </a:pPr>
-            <a:r>
-              <a:rPr lang="ru-RU" dirty="0" sz="2000">
-                <a:solidFill>
-                  <a:srgbClr val="000000"/>
-                </a:solidFill>
-              </a:rPr>
-              <a:t>`df[feature_cols].to_numpy()` или `Pipeline` с `FunctionTransformer`</a:t>
-            </a:r>
-          </a:p>
-          <a:p>
-            <a:pPr>
-              <a:spcAft>
-                <a:spcPts val="800"/>
-              </a:spcAft>
-            </a:pPr>
-            <a:r>
-              <a:rPr lang="ru-RU" dirty="0" sz="2000">
-                <a:solidFill>
-                  <a:srgbClr val="000000"/>
-                </a:solidFill>
-              </a:rPr>
-              <a:t>Сохраняй согласованность имён столбцов между train и test</a:t>
+              <a:rPr lang="ru-RU" dirty="0" sz="2000" b="1">
+                <a:solidFill>
+                  <a:srgbClr val="000000"/>
+                </a:solidFill>
+              </a:rPr>
+              <a:t>Cartesian product</a:t>
+            </a:r>
+            <a:r>
+              <a:rPr lang="ru-RU" dirty="0" sz="2000">
+                <a:solidFill>
+                  <a:srgbClr val="000000"/>
+                </a:solidFill>
+              </a:rPr>
+              <a:t xml:space="preserve"> в merge: неуникальный ключ в B размножает строки A</a:t>
+            </a:r>
+          </a:p>
+          <a:p>
+            <a:pPr>
+              <a:spcAft>
+                <a:spcPts val="800"/>
+              </a:spcAft>
+            </a:pPr>
+            <a:r>
+              <a:rPr lang="ru-RU" dirty="0" sz="2000">
+                <a:solidFill>
+                  <a:srgbClr val="000000"/>
+                </a:solidFill>
+              </a:rPr>
+              <a:t>Всегда проверяйте уникальность ключей перед join</a:t>
+            </a:r>
+          </a:p>
+          <a:p>
+            <a:pPr>
+              <a:spcAft>
+                <a:spcPts val="800"/>
+              </a:spcAft>
+            </a:pPr>
+            <a:r>
+              <a:rPr lang="ru-RU" dirty="0" sz="2000">
+                <a:solidFill>
+                  <a:srgbClr val="000000"/>
+                </a:solidFill>
+              </a:rPr>
+              <a:t xml:space="preserve">`pd.concat([df1, df2], axis=1)` склеивает </a:t>
+            </a:r>
+            <a:r>
+              <a:rPr lang="ru-RU" dirty="0" sz="2000" b="1">
+                <a:solidFill>
+                  <a:srgbClr val="000000"/>
+                </a:solidFill>
+              </a:rPr>
+              <a:t>по индексу</a:t>
+            </a:r>
+            <a:r>
+              <a:rPr lang="ru-RU" dirty="0" sz="2000">
+                <a:solidFill>
+                  <a:srgbClr val="000000"/>
+                </a:solidFill>
+              </a:rPr>
+              <a:t>, не по порядку</a:t>
+            </a:r>
+          </a:p>
+          <a:p>
+            <a:pPr>
+              <a:spcAft>
+                <a:spcPts val="800"/>
+              </a:spcAft>
+            </a:pPr>
+            <a:r>
+              <a:rPr lang="ru-RU" dirty="0" sz="2000">
+                <a:solidFill>
+                  <a:srgbClr val="000000"/>
+                </a:solidFill>
+              </a:rPr>
+              <a:t>После `train_test_split` — `reset_index(drop=True)` перед concat по столбцам</a:t>
             </a:r>
           </a:p>
         </p:txBody>
       </p:sp>
       <p:pic>
         <p:nvPicPr>
-          <p:cNvPr id="4" name="Picture 3" descr="pandas_sklearn_pipeline.png"/>
+          <p:cNvPr id="4" name="Picture 3" descr="merge_cartesian.png"/>
           <p:cNvPicPr>
             <a:picLocks noChangeAspect="1"/>
           </p:cNvPicPr>
@@ -6089,8 +5309,32 @@
         </p:blipFill>
         <p:spPr>
           <a:xfrm>
-            <a:off x="7635240" y="2297301"/>
-            <a:ext cx="4343400" cy="2537717"/>
+            <a:off x="8200166" y="1325880"/>
+            <a:ext cx="3213547" cy="2203703"/>
+          </a:xfrm>
+          <a:prstGeom prst="rect">
+            <a:avLst/>
+          </a:prstGeom>
+        </p:spPr>
+      </p:pic>
+      <p:pic>
+        <p:nvPicPr>
+          <p:cNvPr id="5" name="Picture 4" descr="concat_index_trap.png"/>
+          <p:cNvPicPr>
+            <a:picLocks noChangeAspect="1"/>
+          </p:cNvPicPr>
+          <p:nvPr/>
+        </p:nvPicPr>
+        <p:blipFill>
+          <a:blip r:embed="rId3"/>
+          <a:stretch>
+            <a:fillRect/>
+          </a:stretch>
+        </p:blipFill>
+        <p:spPr>
+          <a:xfrm>
+            <a:off x="7635240" y="3772654"/>
+            <a:ext cx="4343400" cy="1863867"/>
           </a:xfrm>
           <a:prstGeom prst="rect">
             <a:avLst/>
@@ -6143,7 +5387,7 @@
                   <a:srgbClr val="1A1A2E"/>
                 </a:solidFill>
               </a:rPr>
-              <a:t>Итоги и чек-лист</a:t>
+              <a:t>merge_asof: асинхронный join для временных рядов</a:t>
             </a:r>
           </a:p>
         </p:txBody>
@@ -6157,7 +5401,7 @@
         <p:spPr>
           <a:xfrm>
             <a:off x="640080" y="1371600"/>
-            <a:ext cx="11247120" cy="5029200"/>
+            <a:ext cx="6858000" cy="5029200"/>
           </a:xfrm>
           <a:prstGeom prst="rect">
             <a:avLst/>
@@ -6181,22 +5425,22 @@
                   <a:srgbClr val="000000"/>
                 </a:solidFill>
               </a:rPr>
-              <a:t>1. `read_*` → `head/info/describe` перед любыми выводами</a:t>
-            </a:r>
-          </a:p>
-          <a:p>
-            <a:pPr>
-              <a:spcAft>
-                <a:spcPts val="800"/>
-              </a:spcAft>
-            </a:pPr>
-            <a:r>
-              <a:rPr lang="ru-RU" dirty="0" sz="2000">
-                <a:solidFill>
-                  <a:srgbClr val="000000"/>
-                </a:solidFill>
-              </a:rPr>
-              <a:t xml:space="preserve">2. Выборка: </a:t>
+              <a:t>Классический `merge` требует точного совпадения времени</a:t>
+            </a:r>
+          </a:p>
+          <a:p>
+            <a:pPr>
+              <a:spcAft>
+                <a:spcPts val="800"/>
+              </a:spcAft>
+            </a:pPr>
+            <a:r>
+              <a:rPr lang="ru-RU" dirty="0" sz="2000">
+                <a:solidFill>
+                  <a:srgbClr val="000000"/>
+                </a:solidFill>
+              </a:rPr>
+              <a:t xml:space="preserve">`pd.merge_asof()` — join по </a:t>
             </a:r>
             <a:r>
               <a:rPr lang="ru-RU" dirty="0" sz="2000" b="1">
@@ -6204,80 +5448,231 @@
                   <a:srgbClr val="000000"/>
                 </a:solidFill>
               </a:rPr>
-              <a:t>loc</a:t>
-            </a:r>
-            <a:r>
-              <a:rPr lang="ru-RU" dirty="0" sz="2000">
-                <a:solidFill>
-                  <a:srgbClr val="000000"/>
-                </a:solidFill>
-              </a:rPr>
-              <a:t xml:space="preserve"> по меткам, </a:t>
-            </a:r>
-            <a:r>
-              <a:rPr lang="ru-RU" dirty="0" sz="2000" b="1">
-                <a:solidFill>
-                  <a:srgbClr val="000000"/>
-                </a:solidFill>
-              </a:rPr>
-              <a:t>iloc</a:t>
-            </a:r>
-            <a:r>
-              <a:rPr lang="ru-RU" dirty="0" sz="2000">
-                <a:solidFill>
-                  <a:srgbClr val="000000"/>
-                </a:solidFill>
-              </a:rPr>
-              <a:t xml:space="preserve"> по позициям; маски через loc</a:t>
-            </a:r>
-          </a:p>
-          <a:p>
-            <a:pPr>
-              <a:spcAft>
-                <a:spcPts val="800"/>
-              </a:spcAft>
-            </a:pPr>
-            <a:r>
-              <a:rPr lang="ru-RU" dirty="0" sz="2000">
-                <a:solidFill>
-                  <a:srgbClr val="000000"/>
-                </a:solidFill>
-              </a:rPr>
-              <a:t>3. groupby/merge/pivot — три кита аналитики таблиц</a:t>
-            </a:r>
-          </a:p>
-          <a:p>
-            <a:pPr>
-              <a:spcAft>
-                <a:spcPts val="800"/>
-              </a:spcAft>
-            </a:pPr>
-            <a:r>
-              <a:rPr lang="ru-RU" dirty="0" sz="2000">
-                <a:solidFill>
-                  <a:srgbClr val="000000"/>
-                </a:solidFill>
-              </a:rPr>
-              <a:t>4. Пропуски и dtypes — до модели; трансформации — в Pipeline после split</a:t>
-            </a:r>
-          </a:p>
-          <a:p>
-            <a:pPr>
-              <a:spcAft>
-                <a:spcPts val="800"/>
-              </a:spcAft>
-            </a:pPr>
-            <a:r>
-              <a:rPr lang="ru-RU" dirty="0" sz="2000">
-                <a:solidFill>
-                  <a:srgbClr val="000000"/>
-                </a:solidFill>
-              </a:rPr>
-              <a:t>5. Векторизация вместо apply в горячих местах</a:t>
-            </a:r>
-          </a:p>
-        </p:txBody>
-      </p:sp>
+              <a:t>ближайшему</a:t>
+            </a:r>
+            <a:r>
+              <a:rPr lang="ru-RU" dirty="0" sz="2000">
+                <a:solidFill>
+                  <a:srgbClr val="000000"/>
+                </a:solidFill>
+              </a:rPr>
+              <a:t xml:space="preserve"> времени</a:t>
+            </a:r>
+          </a:p>
+          <a:p>
+            <a:pPr>
+              <a:spcAft>
+                <a:spcPts val="800"/>
+              </a:spcAft>
+            </a:pPr>
+            <a:r>
+              <a:rPr lang="ru-RU" dirty="0" sz="2000">
+                <a:solidFill>
+                  <a:srgbClr val="000000"/>
+                </a:solidFill>
+              </a:rPr>
+              <a:t>Пример: транзакции + курс валют `direction='backward'`</a:t>
+            </a:r>
+          </a:p>
+          <a:p>
+            <a:pPr>
+              <a:spcAft>
+                <a:spcPts val="800"/>
+              </a:spcAft>
+            </a:pPr>
+            <a:r>
+              <a:rPr lang="ru-RU" dirty="0" sz="2000">
+                <a:solidFill>
+                  <a:srgbClr val="000000"/>
+                </a:solidFill>
+              </a:rPr>
+              <a:t>Нужен для признаков «курс/погода на момент события»</a:t>
+            </a:r>
+          </a:p>
+        </p:txBody>
+      </p:sp>
+      <p:pic>
+        <p:nvPicPr>
+          <p:cNvPr id="4" name="Picture 3" descr="merge_asof_timeline.png"/>
+          <p:cNvPicPr>
+            <a:picLocks noChangeAspect="1"/>
+          </p:cNvPicPr>
+          <p:nvPr/>
+        </p:nvPicPr>
+        <p:blipFill>
+          <a:blip r:embed="rId2"/>
+          <a:stretch>
+            <a:fillRect/>
+          </a:stretch>
+        </p:blipFill>
+        <p:spPr>
+          <a:xfrm>
+            <a:off x="7635240" y="2185699"/>
+            <a:ext cx="4343400" cy="2760921"/>
+          </a:xfrm>
+          <a:prstGeom prst="rect">
+            <a:avLst/>
+          </a:prstGeom>
+        </p:spPr>
+      </p:pic>
+    </p:spTree>
+  </p:cSld>
+  <p:clrMapOvr>
+    <a:masterClrMapping/>
+  </p:clrMapOvr>
+</p:sld>
+</file>
+
+<file path=ppt/slides/slide19.xml><?xml version="1.0" encoding="utf-8"?>
+<p:sld xmlns:a="http://schemas.openxmlformats.org/drawingml/2006/main" xmlns:p="http://schemas.openxmlformats.org/presentationml/2006/main" xmlns:r="http://schemas.openxmlformats.org/officeDocument/2006/relationships">
+  <p:cSld>
+    <p:spTree>
+      <p:nvGrpSpPr>
+        <p:cNvPr id="1" name=""/>
+        <p:cNvGrpSpPr/>
+        <p:nvPr/>
+      </p:nvGrpSpPr>
+      <p:grpSpPr/>
+      <p:sp>
+        <p:nvSpPr>
+          <p:cNvPr id="2" name="TextBox 1"/>
+          <p:cNvSpPr txBox="1"/>
+          <p:nvPr/>
+        </p:nvSpPr>
+        <p:spPr>
+          <a:xfrm>
+            <a:off x="457200" y="274320"/>
+            <a:ext cx="11247120" cy="914400"/>
+          </a:xfrm>
+          <a:prstGeom prst="rect">
+            <a:avLst/>
+          </a:prstGeom>
+          <a:noFill/>
+        </p:spPr>
+        <p:txBody>
+          <a:bodyPr wrap="square">
+            <a:spAutoFit/>
+          </a:bodyPr>
+          <a:lstStyle/>
+          <a:p>
+            <a:r>
+              <a:rPr lang="ru-RU" dirty="0" sz="3200" b="1">
+                <a:solidFill>
+                  <a:srgbClr val="1A1A2E"/>
+                </a:solidFill>
+              </a:rPr>
+              <a:t>pandas &lt;-&gt; sklearn: где возникают проблемы</a:t>
+            </a:r>
+          </a:p>
+        </p:txBody>
+      </p:sp>
+      <p:sp>
+        <p:nvSpPr>
+          <p:cNvPr id="3" name="TextBox 2"/>
+          <p:cNvSpPr txBox="1"/>
+          <p:nvPr/>
+        </p:nvSpPr>
+        <p:spPr>
+          <a:xfrm>
+            <a:off x="640080" y="1371600"/>
+            <a:ext cx="6858000" cy="5029200"/>
+          </a:xfrm>
+          <a:prstGeom prst="rect">
+            <a:avLst/>
+          </a:prstGeom>
+          <a:noFill/>
+        </p:spPr>
+        <p:txBody>
+          <a:bodyPr wrap="square">
+            <a:spAutoFit/>
+          </a:bodyPr>
+          <a:lstStyle/>
+          <a:p>
+            <a:pPr>
+              <a:spcAft>
+                <a:spcPts val="800"/>
+              </a:spcAft>
+            </a:pPr>
+            <a:r>
+              <a:rPr lang="ru-RU" dirty="0" sz="2000">
+                <a:solidFill>
+                  <a:srgbClr val="000000"/>
+                </a:solidFill>
+              </a:rPr>
+              <a:t>sklearn игнорирует имена столбцов и индексы — только позиции</a:t>
+            </a:r>
+          </a:p>
+          <a:p>
+            <a:pPr>
+              <a:spcAft>
+                <a:spcPts val="800"/>
+              </a:spcAft>
+            </a:pPr>
+            <a:r>
+              <a:rPr lang="ru-RU" dirty="0" sz="2000">
+                <a:solidFill>
+                  <a:srgbClr val="000000"/>
+                </a:solidFill>
+              </a:rPr>
+              <a:t>Разные категории Train/Test → разное число OHE-столбцов → `handle_unknown='ignore'` в Pipeline</a:t>
+            </a:r>
+          </a:p>
+          <a:p>
+            <a:pPr>
+              <a:spcAft>
+                <a:spcPts val="800"/>
+              </a:spcAft>
+            </a:pPr>
+            <a:r>
+              <a:rPr lang="ru-RU" dirty="0" sz="2000">
+                <a:solidFill>
+                  <a:srgbClr val="000000"/>
+                </a:solidFill>
+              </a:rPr>
+              <a:t>Старые индексы после split → NaN при склейке → `reset_index(drop=True)`</a:t>
+            </a:r>
+          </a:p>
+          <a:p>
+            <a:pPr>
+              <a:spcAft>
+                <a:spcPts val="800"/>
+              </a:spcAft>
+            </a:pPr>
+            <a:r>
+              <a:rPr lang="ru-RU" dirty="0" sz="2000">
+                <a:solidFill>
+                  <a:srgbClr val="000000"/>
+                </a:solidFill>
+              </a:rPr>
+              <a:t>Все fit-зависимые шаги — внутри Pipeline</a:t>
+            </a:r>
+          </a:p>
+        </p:txBody>
+      </p:sp>
+      <p:pic>
+        <p:nvPicPr>
+          <p:cNvPr id="4" name="Picture 3" descr="pandas_sklearn_pipeline.png"/>
+          <p:cNvPicPr>
+            <a:picLocks noChangeAspect="1"/>
+          </p:cNvPicPr>
+          <p:nvPr/>
+        </p:nvPicPr>
+        <p:blipFill>
+          <a:blip r:embed="rId2"/>
+          <a:stretch>
+            <a:fillRect/>
+          </a:stretch>
+        </p:blipFill>
+        <p:spPr>
+          <a:xfrm>
+            <a:off x="7635240" y="2338916"/>
+            <a:ext cx="4343400" cy="2454488"/>
+          </a:xfrm>
+          <a:prstGeom prst="rect">
+            <a:avLst/>
+          </a:prstGeom>
+        </p:spPr>
+      </p:pic>
     </p:spTree>
   </p:cSld>
   <p:clrMapOvr>
@@ -6324,7 +5719,7 @@
                   <a:srgbClr val="1A1A2E"/>
                 </a:solidFill>
               </a:rPr>
-              <a:t>Табличные данные в машинном обучении</a:t>
+              <a:t>Философия pandas: это не Excel, а numpy с индексами</a:t>
             </a:r>
           </a:p>
         </p:txBody>
@@ -6362,7 +5757,7 @@
                   <a:srgbClr val="000000"/>
                 </a:solidFill>
               </a:rPr>
-              <a:t xml:space="preserve">Большинство задач ML начинается с </a:t>
+              <a:t xml:space="preserve">pandas — </a:t>
             </a:r>
             <a:r>
               <a:rPr lang="ru-RU" dirty="0" sz="2000" b="1">
@@ -6370,67 +5765,83 @@
                   <a:srgbClr val="000000"/>
                 </a:solidFill>
               </a:rPr>
-              <a:t>таблицы</a:t>
-            </a:r>
-            <a:r>
-              <a:rPr lang="ru-RU" dirty="0" sz="2000">
-                <a:solidFill>
-                  <a:srgbClr val="000000"/>
-                </a:solidFill>
-              </a:rPr>
-              <a:t>: строки — объекты, столбцы — признаки</a:t>
-            </a:r>
-          </a:p>
-          <a:p>
-            <a:pPr>
-              <a:spcAft>
-                <a:spcPts val="800"/>
-              </a:spcAft>
-            </a:pPr>
-            <a:r>
-              <a:rPr lang="ru-RU" dirty="0" sz="2000">
-                <a:solidFill>
-                  <a:srgbClr val="000000"/>
-                </a:solidFill>
-              </a:rPr>
-              <a:t>Excel/CSV → очистка → анализ → модель: Pandas — стандартный инструмент на этом пути</a:t>
-            </a:r>
-          </a:p>
-          <a:p>
-            <a:pPr>
-              <a:spcAft>
-                <a:spcPts val="800"/>
-              </a:spcAft>
-            </a:pPr>
-            <a:r>
-              <a:rPr lang="ru-RU" dirty="0" sz="2000">
-                <a:solidFill>
-                  <a:srgbClr val="000000"/>
-                </a:solidFill>
-              </a:rPr>
-              <a:t>Альтернатива «голому» NumPy: именованные столбцы, индексы, группировки, join</a:t>
-            </a:r>
-          </a:p>
-          <a:p>
-            <a:pPr>
-              <a:spcAft>
-                <a:spcPts val="800"/>
-              </a:spcAft>
-            </a:pPr>
-            <a:r>
-              <a:rPr lang="ru-RU" dirty="0" sz="2000">
-                <a:solidFill>
-                  <a:srgbClr val="000000"/>
-                </a:solidFill>
-              </a:rPr>
-              <a:t>В sklearn данные часто передают как `X` (массив) и `y` (Series), но EDA делают в Pandas</a:t>
+              <a:t>удобная надстройка над numpy</a:t>
+            </a:r>
+            <a:r>
+              <a:rPr lang="ru-RU" dirty="0" sz="2000">
+                <a:solidFill>
+                  <a:srgbClr val="000000"/>
+                </a:solidFill>
+              </a:rPr>
+              <a:t>, а не самостоятельная сущность</a:t>
+            </a:r>
+          </a:p>
+          <a:p>
+            <a:pPr>
+              <a:spcAft>
+                <a:spcPts val="800"/>
+              </a:spcAft>
+            </a:pPr>
+            <a:r>
+              <a:rPr lang="ru-RU" dirty="0" sz="2000">
+                <a:solidFill>
+                  <a:srgbClr val="000000"/>
+                </a:solidFill>
+              </a:rPr>
+              <a:t>Числовой столбец внутри — непрерывный numpy-массив (быстро и эффективно)</a:t>
+            </a:r>
+          </a:p>
+          <a:p>
+            <a:pPr>
+              <a:spcAft>
+                <a:spcPts val="800"/>
+              </a:spcAft>
+            </a:pPr>
+            <a:r>
+              <a:rPr lang="ru-RU" dirty="0" sz="2000">
+                <a:solidFill>
+                  <a:srgbClr val="000000"/>
+                </a:solidFill>
+              </a:rPr>
+              <a:t>Столбец `object` — указатели на Python-объекты (медленно); современный стандарт — `string[pyarrow]`</a:t>
+            </a:r>
+          </a:p>
+          <a:p>
+            <a:pPr>
+              <a:spcAft>
+                <a:spcPts val="800"/>
+              </a:spcAft>
+            </a:pPr>
+            <a:r>
+              <a:rPr lang="ru-RU" dirty="0" sz="2000">
+                <a:solidFill>
+                  <a:srgbClr val="000000"/>
+                </a:solidFill>
+              </a:rPr>
+              <a:t xml:space="preserve">Главное отличие от numpy — </a:t>
+            </a:r>
+            <a:r>
+              <a:rPr lang="ru-RU" dirty="0" sz="2000" b="1">
+                <a:solidFill>
+                  <a:srgbClr val="000000"/>
+                </a:solidFill>
+              </a:rPr>
+              <a:t>индексы (метки строк)</a:t>
+            </a:r>
+            <a:r>
+              <a:rPr lang="ru-RU" dirty="0" sz="2000">
+                <a:solidFill>
+                  <a:srgbClr val="000000"/>
+                </a:solidFill>
+              </a:rPr>
+              <a:t>: словарь, а не матрица</a:t>
             </a:r>
           </a:p>
         </p:txBody>
       </p:sp>
       <p:pic>
         <p:nvPicPr>
-          <p:cNvPr id="4" name="Picture 3" descr="pandas_ml_pipeline.png"/>
+          <p:cNvPr id="4" name="Picture 3" descr="pandas_numpy_schema.png"/>
           <p:cNvPicPr>
             <a:picLocks noChangeAspect="1"/>
           </p:cNvPicPr>
@@ -6444,8 +5855,1749 @@
         </p:blipFill>
         <p:spPr>
           <a:xfrm>
-            <a:off x="7635240" y="2193104"/>
-            <a:ext cx="4343400" cy="2746110"/>
+            <a:off x="7635240" y="2103809"/>
+            <a:ext cx="4343400" cy="2924702"/>
+          </a:xfrm>
+          <a:prstGeom prst="rect">
+            <a:avLst/>
+          </a:prstGeom>
+        </p:spPr>
+      </p:pic>
+    </p:spTree>
+  </p:cSld>
+  <p:clrMapOvr>
+    <a:masterClrMapping/>
+  </p:clrMapOvr>
+</p:sld>
+</file>
+
+<file path=ppt/slides/slide20.xml><?xml version="1.0" encoding="utf-8"?>
+<p:sld xmlns:a="http://schemas.openxmlformats.org/drawingml/2006/main" xmlns:p="http://schemas.openxmlformats.org/presentationml/2006/main" xmlns:r="http://schemas.openxmlformats.org/officeDocument/2006/relationships">
+  <p:cSld>
+    <p:spTree>
+      <p:nvGrpSpPr>
+        <p:cNvPr id="1" name=""/>
+        <p:cNvGrpSpPr/>
+        <p:nvPr/>
+      </p:nvGrpSpPr>
+      <p:grpSpPr/>
+      <p:sp>
+        <p:nvSpPr>
+          <p:cNvPr id="2" name="TextBox 1"/>
+          <p:cNvSpPr txBox="1"/>
+          <p:nvPr/>
+        </p:nvSpPr>
+        <p:spPr>
+          <a:xfrm>
+            <a:off x="457200" y="274320"/>
+            <a:ext cx="11247120" cy="914400"/>
+          </a:xfrm>
+          <a:prstGeom prst="rect">
+            <a:avLst/>
+          </a:prstGeom>
+          <a:noFill/>
+        </p:spPr>
+        <p:txBody>
+          <a:bodyPr wrap="square">
+            <a:spAutoFit/>
+          </a:bodyPr>
+          <a:lstStyle/>
+          <a:p>
+            <a:r>
+              <a:rPr lang="ru-RU" dirty="0" sz="3200" b="1">
+                <a:solidFill>
+                  <a:srgbClr val="1A1A2E"/>
+                </a:solidFill>
+              </a:rPr>
+              <a:t>pandas &lt;-&gt; PyTorch: создание Dataset</a:t>
+            </a:r>
+          </a:p>
+        </p:txBody>
+      </p:sp>
+      <p:sp>
+        <p:nvSpPr>
+          <p:cNvPr id="3" name="TextBox 2"/>
+          <p:cNvSpPr txBox="1"/>
+          <p:nvPr/>
+        </p:nvSpPr>
+        <p:spPr>
+          <a:xfrm>
+            <a:off x="640080" y="1371600"/>
+            <a:ext cx="6858000" cy="5029200"/>
+          </a:xfrm>
+          <a:prstGeom prst="rect">
+            <a:avLst/>
+          </a:prstGeom>
+          <a:noFill/>
+        </p:spPr>
+        <p:txBody>
+          <a:bodyPr wrap="square">
+            <a:spAutoFit/>
+          </a:bodyPr>
+          <a:lstStyle/>
+          <a:p>
+            <a:pPr>
+              <a:spcAft>
+                <a:spcPts val="800"/>
+              </a:spcAft>
+            </a:pPr>
+            <a:r>
+              <a:rPr lang="ru-RU" dirty="0" sz="2000">
+                <a:solidFill>
+                  <a:srgbClr val="000000"/>
+                </a:solidFill>
+              </a:rPr>
+              <a:t>Путь: pandas → numpy → `torch.from_numpy()` → `TensorDataset`</a:t>
+            </a:r>
+          </a:p>
+          <a:p>
+            <a:pPr>
+              <a:spcAft>
+                <a:spcPts val="800"/>
+              </a:spcAft>
+            </a:pPr>
+            <a:r>
+              <a:rPr lang="ru-RU" dirty="0" sz="2000">
+                <a:solidFill>
+                  <a:srgbClr val="000000"/>
+                </a:solidFill>
+              </a:rPr>
+              <a:t xml:space="preserve">`torch.from_numpy(X)` </a:t>
+            </a:r>
+            <a:r>
+              <a:rPr lang="ru-RU" dirty="0" sz="2000" b="1">
+                <a:solidFill>
+                  <a:srgbClr val="000000"/>
+                </a:solidFill>
+              </a:rPr>
+              <a:t>разделяет память</a:t>
+            </a:r>
+            <a:r>
+              <a:rPr lang="ru-RU" dirty="0" sz="2000">
+                <a:solidFill>
+                  <a:srgbClr val="000000"/>
+                </a:solidFill>
+              </a:rPr>
+              <a:t xml:space="preserve"> с numpy — изменение X меняет тензор</a:t>
+            </a:r>
+          </a:p>
+          <a:p>
+            <a:pPr>
+              <a:spcAft>
+                <a:spcPts val="800"/>
+              </a:spcAft>
+            </a:pPr>
+            <a:r>
+              <a:rPr lang="ru-RU" dirty="0" sz="2000">
+                <a:solidFill>
+                  <a:srgbClr val="000000"/>
+                </a:solidFill>
+              </a:rPr>
+              <a:t>Независимость: `torch.tensor(X)` или `.copy()` перед конвертацией</a:t>
+            </a:r>
+          </a:p>
+          <a:p>
+            <a:pPr>
+              <a:spcAft>
+                <a:spcPts val="800"/>
+              </a:spcAft>
+            </a:pPr>
+            <a:r>
+              <a:rPr lang="ru-RU" dirty="0" sz="2000">
+                <a:solidFill>
+                  <a:srgbClr val="000000"/>
+                </a:solidFill>
+              </a:rPr>
+              <a:t>Явно задавайте `dtype` — `object`/`int64` для float-тензоров не подходят</a:t>
+            </a:r>
+          </a:p>
+        </p:txBody>
+      </p:sp>
+      <p:pic>
+        <p:nvPicPr>
+          <p:cNvPr id="4" name="Picture 3" descr="pandas_pytorch_bridge.png"/>
+          <p:cNvPicPr>
+            <a:picLocks noChangeAspect="1"/>
+          </p:cNvPicPr>
+          <p:nvPr/>
+        </p:nvPicPr>
+        <p:blipFill>
+          <a:blip r:embed="rId2"/>
+          <a:stretch>
+            <a:fillRect/>
+          </a:stretch>
+        </p:blipFill>
+        <p:spPr>
+          <a:xfrm>
+            <a:off x="7635240" y="2893637"/>
+            <a:ext cx="4343400" cy="1345045"/>
+          </a:xfrm>
+          <a:prstGeom prst="rect">
+            <a:avLst/>
+          </a:prstGeom>
+        </p:spPr>
+      </p:pic>
+    </p:spTree>
+  </p:cSld>
+  <p:clrMapOvr>
+    <a:masterClrMapping/>
+  </p:clrMapOvr>
+</p:sld>
+</file>
+
+<file path=ppt/slides/slide21.xml><?xml version="1.0" encoding="utf-8"?>
+<p:sld xmlns:a="http://schemas.openxmlformats.org/drawingml/2006/main" xmlns:p="http://schemas.openxmlformats.org/presentationml/2006/main" xmlns:r="http://schemas.openxmlformats.org/officeDocument/2006/relationships">
+  <p:cSld>
+    <p:spTree>
+      <p:nvGrpSpPr>
+        <p:cNvPr id="1" name=""/>
+        <p:cNvGrpSpPr/>
+        <p:nvPr/>
+      </p:nvGrpSpPr>
+      <p:grpSpPr/>
+      <p:sp>
+        <p:nvSpPr>
+          <p:cNvPr id="2" name="TextBox 1"/>
+          <p:cNvSpPr txBox="1"/>
+          <p:nvPr/>
+        </p:nvSpPr>
+        <p:spPr>
+          <a:xfrm>
+            <a:off x="457200" y="274320"/>
+            <a:ext cx="11247120" cy="914400"/>
+          </a:xfrm>
+          <a:prstGeom prst="rect">
+            <a:avLst/>
+          </a:prstGeom>
+          <a:noFill/>
+        </p:spPr>
+        <p:txBody>
+          <a:bodyPr wrap="square">
+            <a:spAutoFit/>
+          </a:bodyPr>
+          <a:lstStyle/>
+          <a:p>
+            <a:r>
+              <a:rPr lang="ru-RU" dirty="0" sz="3200" b="1">
+                <a:solidFill>
+                  <a:srgbClr val="1A1A2E"/>
+                </a:solidFill>
+              </a:rPr>
+              <a:t>Data Leakage: где прячется в pandas</a:t>
+            </a:r>
+          </a:p>
+        </p:txBody>
+      </p:sp>
+      <p:sp>
+        <p:nvSpPr>
+          <p:cNvPr id="3" name="TextBox 2"/>
+          <p:cNvSpPr txBox="1"/>
+          <p:nvPr/>
+        </p:nvSpPr>
+        <p:spPr>
+          <a:xfrm>
+            <a:off x="640080" y="1371600"/>
+            <a:ext cx="6858000" cy="5029200"/>
+          </a:xfrm>
+          <a:prstGeom prst="rect">
+            <a:avLst/>
+          </a:prstGeom>
+          <a:noFill/>
+        </p:spPr>
+        <p:txBody>
+          <a:bodyPr wrap="square">
+            <a:spAutoFit/>
+          </a:bodyPr>
+          <a:lstStyle/>
+          <a:p>
+            <a:pPr>
+              <a:spcAft>
+                <a:spcPts val="800"/>
+              </a:spcAft>
+            </a:pPr>
+            <a:r>
+              <a:rPr lang="ru-RU" dirty="0" sz="2000">
+                <a:solidFill>
+                  <a:srgbClr val="000000"/>
+                </a:solidFill>
+              </a:rPr>
+              <a:t xml:space="preserve">Импутация `fillna(mean())` </a:t>
+            </a:r>
+            <a:r>
+              <a:rPr lang="ru-RU" dirty="0" sz="2000" b="1">
+                <a:solidFill>
+                  <a:srgbClr val="000000"/>
+                </a:solidFill>
+              </a:rPr>
+              <a:t>до</a:t>
+            </a:r>
+            <a:r>
+              <a:rPr lang="ru-RU" dirty="0" sz="2000">
+                <a:solidFill>
+                  <a:srgbClr val="000000"/>
+                </a:solidFill>
+              </a:rPr>
+              <a:t xml:space="preserve"> split — классическая утечка</a:t>
+            </a:r>
+          </a:p>
+          <a:p>
+            <a:pPr>
+              <a:spcAft>
+                <a:spcPts val="800"/>
+              </a:spcAft>
+            </a:pPr>
+            <a:r>
+              <a:rPr lang="ru-RU" dirty="0" sz="2000">
+                <a:solidFill>
+                  <a:srgbClr val="000000"/>
+                </a:solidFill>
+              </a:rPr>
+              <a:t>Target Encoding вне Pipeline — утечка таргета</a:t>
+            </a:r>
+          </a:p>
+          <a:p>
+            <a:pPr>
+              <a:spcAft>
+                <a:spcPts val="800"/>
+              </a:spcAft>
+            </a:pPr>
+            <a:r>
+              <a:rPr lang="ru-RU" dirty="0" sz="2000">
+                <a:solidFill>
+                  <a:srgbClr val="000000"/>
+                </a:solidFill>
+              </a:rPr>
+              <a:t>Индекс как сигнал (`timestamp`, `user_id`) если забыли `reset_index()`</a:t>
+            </a:r>
+          </a:p>
+          <a:p>
+            <a:pPr>
+              <a:spcAft>
+                <a:spcPts val="800"/>
+              </a:spcAft>
+            </a:pPr>
+            <a:r>
+              <a:rPr lang="ru-RU" dirty="0" sz="2000">
+                <a:solidFill>
+                  <a:srgbClr val="000000"/>
+                </a:solidFill>
+              </a:rPr>
+              <a:t>Случайный join по старым индексам после split</a:t>
+            </a:r>
+          </a:p>
+          <a:p>
+            <a:pPr>
+              <a:spcAft>
+                <a:spcPts val="800"/>
+              </a:spcAft>
+            </a:pPr>
+            <a:r>
+              <a:rPr lang="ru-RU" dirty="0" sz="2000">
+                <a:solidFill>
+                  <a:srgbClr val="000000"/>
+                </a:solidFill>
+              </a:rPr>
+              <a:t>Решение: fit-зависимые шаги в `sklearn.Pipeline`; pandas — загрузка и EDA</a:t>
+            </a:r>
+          </a:p>
+        </p:txBody>
+      </p:sp>
+      <p:pic>
+        <p:nvPicPr>
+          <p:cNvPr id="4" name="Picture 3" descr="pandas_leakage.png"/>
+          <p:cNvPicPr>
+            <a:picLocks noChangeAspect="1"/>
+          </p:cNvPicPr>
+          <p:nvPr/>
+        </p:nvPicPr>
+        <p:blipFill>
+          <a:blip r:embed="rId2"/>
+          <a:stretch>
+            <a:fillRect/>
+          </a:stretch>
+        </p:blipFill>
+        <p:spPr>
+          <a:xfrm>
+            <a:off x="7635240" y="2909599"/>
+            <a:ext cx="4343400" cy="1313121"/>
+          </a:xfrm>
+          <a:prstGeom prst="rect">
+            <a:avLst/>
+          </a:prstGeom>
+        </p:spPr>
+      </p:pic>
+    </p:spTree>
+  </p:cSld>
+  <p:clrMapOvr>
+    <a:masterClrMapping/>
+  </p:clrMapOvr>
+</p:sld>
+</file>
+
+<file path=ppt/slides/slide22.xml><?xml version="1.0" encoding="utf-8"?>
+<p:sld xmlns:a="http://schemas.openxmlformats.org/drawingml/2006/main" xmlns:p="http://schemas.openxmlformats.org/presentationml/2006/main" xmlns:r="http://schemas.openxmlformats.org/officeDocument/2006/relationships">
+  <p:cSld>
+    <p:spTree>
+      <p:nvGrpSpPr>
+        <p:cNvPr id="1" name=""/>
+        <p:cNvGrpSpPr/>
+        <p:nvPr/>
+      </p:nvGrpSpPr>
+      <p:grpSpPr/>
+      <p:sp>
+        <p:nvSpPr>
+          <p:cNvPr id="2" name="TextBox 1"/>
+          <p:cNvSpPr txBox="1"/>
+          <p:nvPr/>
+        </p:nvSpPr>
+        <p:spPr>
+          <a:xfrm>
+            <a:off x="457200" y="274320"/>
+            <a:ext cx="11247120" cy="914400"/>
+          </a:xfrm>
+          <a:prstGeom prst="rect">
+            <a:avLst/>
+          </a:prstGeom>
+          <a:noFill/>
+        </p:spPr>
+        <p:txBody>
+          <a:bodyPr wrap="square">
+            <a:spAutoFit/>
+          </a:bodyPr>
+          <a:lstStyle/>
+          <a:p>
+            <a:r>
+              <a:rPr lang="ru-RU" dirty="0" sz="3200" b="1">
+                <a:solidFill>
+                  <a:srgbClr val="1A1A2E"/>
+                </a:solidFill>
+              </a:rPr>
+              <a:t>Итеративная обработка: когда файл не влезает в RAM</a:t>
+            </a:r>
+          </a:p>
+        </p:txBody>
+      </p:sp>
+      <p:sp>
+        <p:nvSpPr>
+          <p:cNvPr id="3" name="TextBox 2"/>
+          <p:cNvSpPr txBox="1"/>
+          <p:nvPr/>
+        </p:nvSpPr>
+        <p:spPr>
+          <a:xfrm>
+            <a:off x="640080" y="1371600"/>
+            <a:ext cx="6858000" cy="5029200"/>
+          </a:xfrm>
+          <a:prstGeom prst="rect">
+            <a:avLst/>
+          </a:prstGeom>
+          <a:noFill/>
+        </p:spPr>
+        <p:txBody>
+          <a:bodyPr wrap="square">
+            <a:spAutoFit/>
+          </a:bodyPr>
+          <a:lstStyle/>
+          <a:p>
+            <a:pPr>
+              <a:spcAft>
+                <a:spcPts val="800"/>
+              </a:spcAft>
+            </a:pPr>
+            <a:r>
+              <a:rPr lang="ru-RU" dirty="0" sz="2000">
+                <a:solidFill>
+                  <a:srgbClr val="000000"/>
+                </a:solidFill>
+              </a:rPr>
+              <a:t>50 ГБ CSV при 16 ГБ RAM — `read_csv()` упадёт с OOM</a:t>
+            </a:r>
+          </a:p>
+          <a:p>
+            <a:pPr>
+              <a:spcAft>
+                <a:spcPts val="800"/>
+              </a:spcAft>
+            </a:pPr>
+            <a:r>
+              <a:rPr lang="ru-RU" dirty="0" sz="2000">
+                <a:solidFill>
+                  <a:srgbClr val="000000"/>
+                </a:solidFill>
+              </a:rPr>
+              <a:t>`chunksize` в `read_csv()` — итератор порций</a:t>
+            </a:r>
+          </a:p>
+          <a:p>
+            <a:pPr>
+              <a:spcAft>
+                <a:spcPts val="800"/>
+              </a:spcAft>
+            </a:pPr>
+            <a:r>
+              <a:rPr lang="ru-RU" dirty="0" sz="2000">
+                <a:solidFill>
+                  <a:srgbClr val="000000"/>
+                </a:solidFill>
+              </a:rPr>
+              <a:t>Обрабатывайте chunk, накапливайте статистики</a:t>
+            </a:r>
+          </a:p>
+          <a:p>
+            <a:pPr>
+              <a:spcAft>
+                <a:spcPts val="800"/>
+              </a:spcAft>
+            </a:pPr>
+            <a:r>
+              <a:rPr lang="ru-RU" dirty="0" sz="2000">
+                <a:solidFill>
+                  <a:srgbClr val="000000"/>
+                </a:solidFill>
+              </a:rPr>
+              <a:t>Альтернатива: Parquet + фильтрация через `pyarrow`</a:t>
+            </a:r>
+          </a:p>
+        </p:txBody>
+      </p:sp>
+      <p:pic>
+        <p:nvPicPr>
+          <p:cNvPr id="4" name="Picture 3" descr="read_csv_chunks.png"/>
+          <p:cNvPicPr>
+            <a:picLocks noChangeAspect="1"/>
+          </p:cNvPicPr>
+          <p:nvPr/>
+        </p:nvPicPr>
+        <p:blipFill>
+          <a:blip r:embed="rId2"/>
+          <a:stretch>
+            <a:fillRect/>
+          </a:stretch>
+        </p:blipFill>
+        <p:spPr>
+          <a:xfrm>
+            <a:off x="7635240" y="2338916"/>
+            <a:ext cx="4343400" cy="2454488"/>
+          </a:xfrm>
+          <a:prstGeom prst="rect">
+            <a:avLst/>
+          </a:prstGeom>
+        </p:spPr>
+      </p:pic>
+    </p:spTree>
+  </p:cSld>
+  <p:clrMapOvr>
+    <a:masterClrMapping/>
+  </p:clrMapOvr>
+</p:sld>
+</file>
+
+<file path=ppt/slides/slide23.xml><?xml version="1.0" encoding="utf-8"?>
+<p:sld xmlns:a="http://schemas.openxmlformats.org/drawingml/2006/main" xmlns:p="http://schemas.openxmlformats.org/presentationml/2006/main" xmlns:r="http://schemas.openxmlformats.org/officeDocument/2006/relationships">
+  <p:cSld>
+    <p:spTree>
+      <p:nvGrpSpPr>
+        <p:cNvPr id="1" name=""/>
+        <p:cNvGrpSpPr/>
+        <p:nvPr/>
+      </p:nvGrpSpPr>
+      <p:grpSpPr/>
+      <p:sp>
+        <p:nvSpPr>
+          <p:cNvPr id="2" name="TextBox 1"/>
+          <p:cNvSpPr txBox="1"/>
+          <p:nvPr/>
+        </p:nvSpPr>
+        <p:spPr>
+          <a:xfrm>
+            <a:off x="457200" y="274320"/>
+            <a:ext cx="11247120" cy="914400"/>
+          </a:xfrm>
+          <a:prstGeom prst="rect">
+            <a:avLst/>
+          </a:prstGeom>
+          <a:noFill/>
+        </p:spPr>
+        <p:txBody>
+          <a:bodyPr wrap="square">
+            <a:spAutoFit/>
+          </a:bodyPr>
+          <a:lstStyle/>
+          <a:p>
+            <a:r>
+              <a:rPr lang="ru-RU" dirty="0" sz="3200" b="1">
+                <a:solidFill>
+                  <a:srgbClr val="1A1A2E"/>
+                </a:solidFill>
+              </a:rPr>
+              <a:t>Профилирование данных: автоматический EDA</a:t>
+            </a:r>
+          </a:p>
+        </p:txBody>
+      </p:sp>
+      <p:sp>
+        <p:nvSpPr>
+          <p:cNvPr id="3" name="TextBox 2"/>
+          <p:cNvSpPr txBox="1"/>
+          <p:nvPr/>
+        </p:nvSpPr>
+        <p:spPr>
+          <a:xfrm>
+            <a:off x="640080" y="1371600"/>
+            <a:ext cx="6858000" cy="5029200"/>
+          </a:xfrm>
+          <a:prstGeom prst="rect">
+            <a:avLst/>
+          </a:prstGeom>
+          <a:noFill/>
+        </p:spPr>
+        <p:txBody>
+          <a:bodyPr wrap="square">
+            <a:spAutoFit/>
+          </a:bodyPr>
+          <a:lstStyle/>
+          <a:p>
+            <a:pPr>
+              <a:spcAft>
+                <a:spcPts val="800"/>
+              </a:spcAft>
+            </a:pPr>
+            <a:r>
+              <a:rPr lang="ru-RU" dirty="0" sz="2000">
+                <a:solidFill>
+                  <a:srgbClr val="000000"/>
+                </a:solidFill>
+              </a:rPr>
+              <a:t>Ручной EDA (`info`, `describe`, `value_counts`) — часы на новом датасете</a:t>
+            </a:r>
+          </a:p>
+          <a:p>
+            <a:pPr>
+              <a:spcAft>
+                <a:spcPts val="800"/>
+              </a:spcAft>
+            </a:pPr>
+            <a:r>
+              <a:rPr lang="ru-RU" dirty="0" sz="2000">
+                <a:solidFill>
+                  <a:srgbClr val="000000"/>
+                </a:solidFill>
+              </a:rPr>
+              <a:t>`ydata-profiling` (бывш. `pandas-profiling`) — HTML-отчёт одной командой</a:t>
+            </a:r>
+          </a:p>
+          <a:p>
+            <a:pPr>
+              <a:spcAft>
+                <a:spcPts val="800"/>
+              </a:spcAft>
+            </a:pPr>
+            <a:r>
+              <a:rPr lang="ru-RU" dirty="0" sz="2000">
+                <a:solidFill>
+                  <a:srgbClr val="000000"/>
+                </a:solidFill>
+              </a:rPr>
+              <a:t>Отчёт: распределения, корреляции, пропуски, дубликаты, предупреждения</a:t>
+            </a:r>
+          </a:p>
+          <a:p>
+            <a:pPr>
+              <a:spcAft>
+                <a:spcPts val="800"/>
+              </a:spcAft>
+            </a:pPr>
+            <a:r>
+              <a:rPr lang="ru-RU" dirty="0" sz="2000">
+                <a:solidFill>
+                  <a:srgbClr val="000000"/>
+                </a:solidFill>
+              </a:rPr>
+              <a:t>Стандарт индустрии для быстрого знакомства с данными</a:t>
+            </a:r>
+          </a:p>
+        </p:txBody>
+      </p:sp>
+      <p:pic>
+        <p:nvPicPr>
+          <p:cNvPr id="4" name="Picture 3" descr="profiling_report_mock.png"/>
+          <p:cNvPicPr>
+            <a:picLocks noChangeAspect="1"/>
+          </p:cNvPicPr>
+          <p:nvPr/>
+        </p:nvPicPr>
+        <p:blipFill>
+          <a:blip r:embed="rId2"/>
+          <a:stretch>
+            <a:fillRect/>
+          </a:stretch>
+        </p:blipFill>
+        <p:spPr>
+          <a:xfrm>
+            <a:off x="7635240" y="1774507"/>
+            <a:ext cx="4343400" cy="3583305"/>
+          </a:xfrm>
+          <a:prstGeom prst="rect">
+            <a:avLst/>
+          </a:prstGeom>
+        </p:spPr>
+      </p:pic>
+      <p:sp>
+        <p:nvSpPr>
+          <p:cNvPr id="5" name="TextBox 4"/>
+          <p:cNvSpPr txBox="1"/>
+          <p:nvPr/>
+        </p:nvSpPr>
+        <p:spPr>
+          <a:xfrm>
+            <a:off x="640080" y="5943600"/>
+            <a:ext cx="5486400" cy="457200"/>
+          </a:xfrm>
+          <a:prstGeom prst="rect">
+            <a:avLst/>
+          </a:prstGeom>
+          <a:noFill/>
+        </p:spPr>
+        <p:txBody>
+          <a:bodyPr wrap="square">
+            <a:spAutoFit/>
+          </a:bodyPr>
+          <a:lstStyle/>
+          <a:p>
+            <a:r>
+              <a:rPr lang="ru-RU" dirty="0" sz="1400">
+                <a:solidFill>
+                  <a:srgbClr val="3366CC"/>
+                </a:solidFill>
+              </a:rPr>
+              <a:t xml:space="preserve">Документация ydata-profiling: </a:t>
+            </a:r>
+            <a:r>
+              <a:rPr sz="1400">
+                <a:solidFill>
+                  <a:srgbClr val="3366CC"/>
+                </a:solidFill>
+                <a:hlinkClick r:id="rId3"/>
+              </a:rPr>
+              <a:t>https://docs.profiling.ydata.ai/</a:t>
+            </a:r>
+          </a:p>
+        </p:txBody>
+      </p:sp>
+      <p:pic>
+        <p:nvPicPr>
+          <p:cNvPr id="6" name="Picture 5" descr="_qr_temp.png"/>
+          <p:cNvPicPr>
+            <a:picLocks noChangeAspect="1"/>
+          </p:cNvPicPr>
+          <p:nvPr/>
+        </p:nvPicPr>
+        <p:blipFill>
+          <a:blip r:embed="rId4"/>
+          <a:stretch>
+            <a:fillRect/>
+          </a:stretch>
+        </p:blipFill>
+        <p:spPr>
+          <a:xfrm>
+            <a:off x="10515600" y="4114800"/>
+            <a:ext cx="1371600" cy="1371600"/>
+          </a:xfrm>
+          <a:prstGeom prst="rect">
+            <a:avLst/>
+          </a:prstGeom>
+        </p:spPr>
+      </p:pic>
+    </p:spTree>
+  </p:cSld>
+  <p:clrMapOvr>
+    <a:masterClrMapping/>
+  </p:clrMapOvr>
+</p:sld>
+</file>
+
+<file path=ppt/slides/slide24.xml><?xml version="1.0" encoding="utf-8"?>
+<p:sld xmlns:a="http://schemas.openxmlformats.org/drawingml/2006/main" xmlns:p="http://schemas.openxmlformats.org/presentationml/2006/main" xmlns:r="http://schemas.openxmlformats.org/officeDocument/2006/relationships">
+  <p:cSld>
+    <p:spTree>
+      <p:nvGrpSpPr>
+        <p:cNvPr id="1" name=""/>
+        <p:cNvGrpSpPr/>
+        <p:nvPr/>
+      </p:nvGrpSpPr>
+      <p:grpSpPr/>
+      <p:sp>
+        <p:nvSpPr>
+          <p:cNvPr id="2" name="TextBox 1"/>
+          <p:cNvSpPr txBox="1"/>
+          <p:nvPr/>
+        </p:nvSpPr>
+        <p:spPr>
+          <a:xfrm>
+            <a:off x="457200" y="274320"/>
+            <a:ext cx="11247120" cy="914400"/>
+          </a:xfrm>
+          <a:prstGeom prst="rect">
+            <a:avLst/>
+          </a:prstGeom>
+          <a:noFill/>
+        </p:spPr>
+        <p:txBody>
+          <a:bodyPr wrap="square">
+            <a:spAutoFit/>
+          </a:bodyPr>
+          <a:lstStyle/>
+          <a:p>
+            <a:r>
+              <a:rPr lang="ru-RU" dirty="0" sz="3200" b="1">
+                <a:solidFill>
+                  <a:srgbClr val="1A1A2E"/>
+                </a:solidFill>
+              </a:rPr>
+              <a:t>Производительность: когда pandas «не тянет»</a:t>
+            </a:r>
+          </a:p>
+        </p:txBody>
+      </p:sp>
+      <p:sp>
+        <p:nvSpPr>
+          <p:cNvPr id="3" name="TextBox 2"/>
+          <p:cNvSpPr txBox="1"/>
+          <p:nvPr/>
+        </p:nvSpPr>
+        <p:spPr>
+          <a:xfrm>
+            <a:off x="640080" y="1371600"/>
+            <a:ext cx="6858000" cy="5029200"/>
+          </a:xfrm>
+          <a:prstGeom prst="rect">
+            <a:avLst/>
+          </a:prstGeom>
+          <a:noFill/>
+        </p:spPr>
+        <p:txBody>
+          <a:bodyPr wrap="square">
+            <a:spAutoFit/>
+          </a:bodyPr>
+          <a:lstStyle/>
+          <a:p>
+            <a:pPr>
+              <a:spcAft>
+                <a:spcPts val="800"/>
+              </a:spcAft>
+            </a:pPr>
+            <a:r>
+              <a:rPr lang="ru-RU" dirty="0" sz="2000">
+                <a:solidFill>
+                  <a:srgbClr val="000000"/>
+                </a:solidFill>
+              </a:rPr>
+              <a:t>pandas однопоточный — не для огромных данных</a:t>
+            </a:r>
+          </a:p>
+          <a:p>
+            <a:pPr>
+              <a:spcAft>
+                <a:spcPts val="800"/>
+              </a:spcAft>
+            </a:pPr>
+            <a:r>
+              <a:rPr lang="ru-RU" dirty="0" sz="2000">
+                <a:solidFill>
+                  <a:srgbClr val="000000"/>
+                </a:solidFill>
+              </a:rPr>
+              <a:t>`iterrows` / `itertuples` — заменять векторизацией</a:t>
+            </a:r>
+          </a:p>
+          <a:p>
+            <a:pPr>
+              <a:spcAft>
+                <a:spcPts val="800"/>
+              </a:spcAft>
+            </a:pPr>
+            <a:r>
+              <a:rPr lang="ru-RU" dirty="0" sz="2000">
+                <a:solidFill>
+                  <a:srgbClr val="000000"/>
+                </a:solidFill>
+              </a:rPr>
+              <a:t>`apply` с Python-функцией — ~100× медленнее векторизации</a:t>
+            </a:r>
+          </a:p>
+          <a:p>
+            <a:pPr>
+              <a:spcAft>
+                <a:spcPts val="800"/>
+              </a:spcAft>
+            </a:pPr>
+            <a:r>
+              <a:rPr lang="ru-RU" dirty="0" sz="2000">
+                <a:solidFill>
+                  <a:srgbClr val="000000"/>
+                </a:solidFill>
+              </a:rPr>
+              <a:t>Первая линия: `.str`, numpy, `np.where` вместо `apply`</a:t>
+            </a:r>
+          </a:p>
+        </p:txBody>
+      </p:sp>
+      <p:pic>
+        <p:nvPicPr>
+          <p:cNvPr id="4" name="Picture 3" descr="perf_vectorized.png"/>
+          <p:cNvPicPr>
+            <a:picLocks noChangeAspect="1"/>
+          </p:cNvPicPr>
+          <p:nvPr/>
+        </p:nvPicPr>
+        <p:blipFill>
+          <a:blip r:embed="rId2"/>
+          <a:stretch>
+            <a:fillRect/>
+          </a:stretch>
+        </p:blipFill>
+        <p:spPr>
+          <a:xfrm>
+            <a:off x="7635240" y="2073874"/>
+            <a:ext cx="4343400" cy="2984571"/>
+          </a:xfrm>
+          <a:prstGeom prst="rect">
+            <a:avLst/>
+          </a:prstGeom>
+        </p:spPr>
+      </p:pic>
+    </p:spTree>
+  </p:cSld>
+  <p:clrMapOvr>
+    <a:masterClrMapping/>
+  </p:clrMapOvr>
+</p:sld>
+</file>
+
+<file path=ppt/slides/slide25.xml><?xml version="1.0" encoding="utf-8"?>
+<p:sld xmlns:a="http://schemas.openxmlformats.org/drawingml/2006/main" xmlns:p="http://schemas.openxmlformats.org/presentationml/2006/main" xmlns:r="http://schemas.openxmlformats.org/officeDocument/2006/relationships">
+  <p:cSld>
+    <p:spTree>
+      <p:nvGrpSpPr>
+        <p:cNvPr id="1" name=""/>
+        <p:cNvGrpSpPr/>
+        <p:nvPr/>
+      </p:nvGrpSpPr>
+      <p:grpSpPr/>
+      <p:sp>
+        <p:nvSpPr>
+          <p:cNvPr id="2" name="TextBox 1"/>
+          <p:cNvSpPr txBox="1"/>
+          <p:nvPr/>
+        </p:nvSpPr>
+        <p:spPr>
+          <a:xfrm>
+            <a:off x="457200" y="274320"/>
+            <a:ext cx="11247120" cy="914400"/>
+          </a:xfrm>
+          <a:prstGeom prst="rect">
+            <a:avLst/>
+          </a:prstGeom>
+          <a:noFill/>
+        </p:spPr>
+        <p:txBody>
+          <a:bodyPr wrap="square">
+            <a:spAutoFit/>
+          </a:bodyPr>
+          <a:lstStyle/>
+          <a:p>
+            <a:r>
+              <a:rPr lang="ru-RU" dirty="0" sz="3200" b="1">
+                <a:solidFill>
+                  <a:srgbClr val="1A1A2E"/>
+                </a:solidFill>
+              </a:rPr>
+              <a:t>Оптимизация памяти: downcasting типов</a:t>
+            </a:r>
+          </a:p>
+        </p:txBody>
+      </p:sp>
+      <p:sp>
+        <p:nvSpPr>
+          <p:cNvPr id="3" name="TextBox 2"/>
+          <p:cNvSpPr txBox="1"/>
+          <p:nvPr/>
+        </p:nvSpPr>
+        <p:spPr>
+          <a:xfrm>
+            <a:off x="640080" y="1371600"/>
+            <a:ext cx="6858000" cy="5029200"/>
+          </a:xfrm>
+          <a:prstGeom prst="rect">
+            <a:avLst/>
+          </a:prstGeom>
+          <a:noFill/>
+        </p:spPr>
+        <p:txBody>
+          <a:bodyPr wrap="square">
+            <a:spAutoFit/>
+          </a:bodyPr>
+          <a:lstStyle/>
+          <a:p>
+            <a:pPr>
+              <a:spcAft>
+                <a:spcPts val="800"/>
+              </a:spcAft>
+            </a:pPr>
+            <a:r>
+              <a:rPr lang="ru-RU" dirty="0" sz="2000">
+                <a:solidFill>
+                  <a:srgbClr val="000000"/>
+                </a:solidFill>
+              </a:rPr>
+              <a:t>По умолчанию `float64`, `int64` — расточительно для ML</a:t>
+            </a:r>
+          </a:p>
+          <a:p>
+            <a:pPr>
+              <a:spcAft>
+                <a:spcPts val="800"/>
+              </a:spcAft>
+            </a:pPr>
+            <a:r>
+              <a:rPr lang="ru-RU" dirty="0" sz="2000">
+                <a:solidFill>
+                  <a:srgbClr val="000000"/>
+                </a:solidFill>
+              </a:rPr>
+              <a:t>`astype('category')` для строк — экономия в 10–100×</a:t>
+            </a:r>
+          </a:p>
+          <a:p>
+            <a:pPr>
+              <a:spcAft>
+                <a:spcPts val="800"/>
+              </a:spcAft>
+            </a:pPr>
+            <a:r>
+              <a:rPr lang="ru-RU" dirty="0" sz="2000">
+                <a:solidFill>
+                  <a:srgbClr val="000000"/>
+                </a:solidFill>
+              </a:rPr>
+              <a:t>`float32` вместо `float64` — обычно достаточно</a:t>
+            </a:r>
+          </a:p>
+          <a:p>
+            <a:pPr>
+              <a:spcAft>
+                <a:spcPts val="800"/>
+              </a:spcAft>
+            </a:pPr>
+            <a:r>
+              <a:rPr lang="ru-RU" dirty="0" sz="2000">
+                <a:solidFill>
+                  <a:srgbClr val="000000"/>
+                </a:solidFill>
+              </a:rPr>
+              <a:t>`pd.to_numeric(..., downcast='integer')` — автоматический downcast</a:t>
+            </a:r>
+          </a:p>
+        </p:txBody>
+      </p:sp>
+      <p:pic>
+        <p:nvPicPr>
+          <p:cNvPr id="4" name="Picture 3" descr="dtype_memory.png"/>
+          <p:cNvPicPr>
+            <a:picLocks noChangeAspect="1"/>
+          </p:cNvPicPr>
+          <p:nvPr/>
+        </p:nvPicPr>
+        <p:blipFill>
+          <a:blip r:embed="rId2"/>
+          <a:stretch>
+            <a:fillRect/>
+          </a:stretch>
+        </p:blipFill>
+        <p:spPr>
+          <a:xfrm>
+            <a:off x="7635240" y="2073874"/>
+            <a:ext cx="4343400" cy="2984571"/>
+          </a:xfrm>
+          <a:prstGeom prst="rect">
+            <a:avLst/>
+          </a:prstGeom>
+        </p:spPr>
+      </p:pic>
+    </p:spTree>
+  </p:cSld>
+  <p:clrMapOvr>
+    <a:masterClrMapping/>
+  </p:clrMapOvr>
+</p:sld>
+</file>
+
+<file path=ppt/slides/slide26.xml><?xml version="1.0" encoding="utf-8"?>
+<p:sld xmlns:a="http://schemas.openxmlformats.org/drawingml/2006/main" xmlns:p="http://schemas.openxmlformats.org/presentationml/2006/main" xmlns:r="http://schemas.openxmlformats.org/officeDocument/2006/relationships">
+  <p:cSld>
+    <p:spTree>
+      <p:nvGrpSpPr>
+        <p:cNvPr id="1" name=""/>
+        <p:cNvGrpSpPr/>
+        <p:nvPr/>
+      </p:nvGrpSpPr>
+      <p:grpSpPr/>
+      <p:sp>
+        <p:nvSpPr>
+          <p:cNvPr id="2" name="TextBox 1"/>
+          <p:cNvSpPr txBox="1"/>
+          <p:nvPr/>
+        </p:nvSpPr>
+        <p:spPr>
+          <a:xfrm>
+            <a:off x="457200" y="274320"/>
+            <a:ext cx="11247120" cy="914400"/>
+          </a:xfrm>
+          <a:prstGeom prst="rect">
+            <a:avLst/>
+          </a:prstGeom>
+          <a:noFill/>
+        </p:spPr>
+        <p:txBody>
+          <a:bodyPr wrap="square">
+            <a:spAutoFit/>
+          </a:bodyPr>
+          <a:lstStyle/>
+          <a:p>
+            <a:r>
+              <a:rPr lang="ru-RU" dirty="0" sz="3200" b="1">
+                <a:solidFill>
+                  <a:srgbClr val="1A1A2E"/>
+                </a:solidFill>
+              </a:rPr>
+              <a:t>Форматы хранения: Смерть CSV и восстание Parquet</a:t>
+            </a:r>
+          </a:p>
+        </p:txBody>
+      </p:sp>
+      <p:sp>
+        <p:nvSpPr>
+          <p:cNvPr id="3" name="TextBox 2"/>
+          <p:cNvSpPr txBox="1"/>
+          <p:nvPr/>
+        </p:nvSpPr>
+        <p:spPr>
+          <a:xfrm>
+            <a:off x="640080" y="1371600"/>
+            <a:ext cx="6858000" cy="5029200"/>
+          </a:xfrm>
+          <a:prstGeom prst="rect">
+            <a:avLst/>
+          </a:prstGeom>
+          <a:noFill/>
+        </p:spPr>
+        <p:txBody>
+          <a:bodyPr wrap="square">
+            <a:spAutoFit/>
+          </a:bodyPr>
+          <a:lstStyle/>
+          <a:p>
+            <a:pPr>
+              <a:spcAft>
+                <a:spcPts val="800"/>
+              </a:spcAft>
+            </a:pPr>
+            <a:r>
+              <a:rPr lang="ru-RU" dirty="0" sz="2000">
+                <a:solidFill>
+                  <a:srgbClr val="000000"/>
+                </a:solidFill>
+              </a:rPr>
+              <a:t>CSV не сохраняет типы: ID `007`→`7`, даты→строки, категории→object</a:t>
+            </a:r>
+          </a:p>
+          <a:p>
+            <a:pPr>
+              <a:spcAft>
+                <a:spcPts val="800"/>
+              </a:spcAft>
+            </a:pPr>
+            <a:r>
+              <a:rPr lang="ru-RU" dirty="0" sz="2000">
+                <a:solidFill>
+                  <a:srgbClr val="000000"/>
+                </a:solidFill>
+              </a:rPr>
+              <a:t>CSV медленен на больших датасетах</a:t>
+            </a:r>
+          </a:p>
+          <a:p>
+            <a:pPr>
+              <a:spcAft>
+                <a:spcPts val="800"/>
+              </a:spcAft>
+            </a:pPr>
+            <a:r>
+              <a:rPr lang="ru-RU" dirty="0" sz="2000" b="1">
+                <a:solidFill>
+                  <a:srgbClr val="000000"/>
+                </a:solidFill>
+              </a:rPr>
+              <a:t>Parquet</a:t>
+            </a:r>
+            <a:r>
+              <a:rPr lang="ru-RU" dirty="0" sz="2000">
+                <a:solidFill>
+                  <a:srgbClr val="000000"/>
+                </a:solidFill>
+              </a:rPr>
+              <a:t xml:space="preserve"> — колоночный формат, типы pandas, сжатие 5–10×</a:t>
+            </a:r>
+          </a:p>
+          <a:p>
+            <a:pPr>
+              <a:spcAft>
+                <a:spcPts val="800"/>
+              </a:spcAft>
+            </a:pPr>
+            <a:r>
+              <a:rPr lang="ru-RU" dirty="0" sz="2000">
+                <a:solidFill>
+                  <a:srgbClr val="000000"/>
+                </a:solidFill>
+              </a:rPr>
+              <a:t>CSV — отчёт бизнесу; внутри ML-пайплайна — `.to_parquet()`</a:t>
+            </a:r>
+          </a:p>
+        </p:txBody>
+      </p:sp>
+      <p:pic>
+        <p:nvPicPr>
+          <p:cNvPr id="4" name="Picture 3" descr="csv_vs_parquet.png"/>
+          <p:cNvPicPr>
+            <a:picLocks noChangeAspect="1"/>
+          </p:cNvPicPr>
+          <p:nvPr/>
+        </p:nvPicPr>
+        <p:blipFill>
+          <a:blip r:embed="rId2"/>
+          <a:stretch>
+            <a:fillRect/>
+          </a:stretch>
+        </p:blipFill>
+        <p:spPr>
+          <a:xfrm>
+            <a:off x="7635240" y="2808590"/>
+            <a:ext cx="4343400" cy="1515140"/>
+          </a:xfrm>
+          <a:prstGeom prst="rect">
+            <a:avLst/>
+          </a:prstGeom>
+        </p:spPr>
+      </p:pic>
+    </p:spTree>
+  </p:cSld>
+  <p:clrMapOvr>
+    <a:masterClrMapping/>
+  </p:clrMapOvr>
+</p:sld>
+</file>
+
+<file path=ppt/slides/slide27.xml><?xml version="1.0" encoding="utf-8"?>
+<p:sld xmlns:a="http://schemas.openxmlformats.org/drawingml/2006/main" xmlns:p="http://schemas.openxmlformats.org/presentationml/2006/main" xmlns:r="http://schemas.openxmlformats.org/officeDocument/2006/relationships">
+  <p:cSld>
+    <p:spTree>
+      <p:nvGrpSpPr>
+        <p:cNvPr id="1" name=""/>
+        <p:cNvGrpSpPr/>
+        <p:nvPr/>
+      </p:nvGrpSpPr>
+      <p:grpSpPr/>
+      <p:sp>
+        <p:nvSpPr>
+          <p:cNvPr id="2" name="TextBox 1"/>
+          <p:cNvSpPr txBox="1"/>
+          <p:nvPr/>
+        </p:nvSpPr>
+        <p:spPr>
+          <a:xfrm>
+            <a:off x="457200" y="274320"/>
+            <a:ext cx="11247120" cy="914400"/>
+          </a:xfrm>
+          <a:prstGeom prst="rect">
+            <a:avLst/>
+          </a:prstGeom>
+          <a:noFill/>
+        </p:spPr>
+        <p:txBody>
+          <a:bodyPr wrap="square">
+            <a:spAutoFit/>
+          </a:bodyPr>
+          <a:lstStyle/>
+          <a:p>
+            <a:r>
+              <a:rPr lang="ru-RU" dirty="0" sz="3200" b="1">
+                <a:solidFill>
+                  <a:srgbClr val="1A1A2E"/>
+                </a:solidFill>
+              </a:rPr>
+              <a:t>Экспорт в продакшен: SQL и другие форматы</a:t>
+            </a:r>
+          </a:p>
+        </p:txBody>
+      </p:sp>
+      <p:sp>
+        <p:nvSpPr>
+          <p:cNvPr id="3" name="TextBox 2"/>
+          <p:cNvSpPr txBox="1"/>
+          <p:nvPr/>
+        </p:nvSpPr>
+        <p:spPr>
+          <a:xfrm>
+            <a:off x="640080" y="1371600"/>
+            <a:ext cx="6858000" cy="5029200"/>
+          </a:xfrm>
+          <a:prstGeom prst="rect">
+            <a:avLst/>
+          </a:prstGeom>
+          <a:noFill/>
+        </p:spPr>
+        <p:txBody>
+          <a:bodyPr wrap="square">
+            <a:spAutoFit/>
+          </a:bodyPr>
+          <a:lstStyle/>
+          <a:p>
+            <a:pPr>
+              <a:spcAft>
+                <a:spcPts val="800"/>
+              </a:spcAft>
+            </a:pPr>
+            <a:r>
+              <a:rPr lang="ru-RU" dirty="0" sz="2000">
+                <a:solidFill>
+                  <a:srgbClr val="000000"/>
+                </a:solidFill>
+              </a:rPr>
+              <a:t>`to_sql(..., index=False)` — интеграция с БД через SQLAlchemy</a:t>
+            </a:r>
+          </a:p>
+          <a:p>
+            <a:pPr>
+              <a:spcAft>
+                <a:spcPts val="800"/>
+              </a:spcAft>
+            </a:pPr>
+            <a:r>
+              <a:rPr lang="ru-RU" dirty="0" sz="2000">
+                <a:solidFill>
+                  <a:srgbClr val="000000"/>
+                </a:solidFill>
+              </a:rPr>
+              <a:t>`to_json()` — REST API и веб</a:t>
+            </a:r>
+          </a:p>
+          <a:p>
+            <a:pPr>
+              <a:spcAft>
+                <a:spcPts val="800"/>
+              </a:spcAft>
+            </a:pPr>
+            <a:r>
+              <a:rPr lang="ru-RU" dirty="0" sz="2000">
+                <a:solidFill>
+                  <a:srgbClr val="000000"/>
+                </a:solidFill>
+              </a:rPr>
+              <a:t>`to_feather()` — быстрый бинарный промежуточный формат</a:t>
+            </a:r>
+          </a:p>
+          <a:p>
+            <a:pPr>
+              <a:spcAft>
+                <a:spcPts val="800"/>
+              </a:spcAft>
+            </a:pPr>
+            <a:r>
+              <a:rPr lang="ru-RU" dirty="0" sz="2000">
+                <a:solidFill>
+                  <a:srgbClr val="000000"/>
+                </a:solidFill>
+              </a:rPr>
+              <a:t>Всегда `index=False` при экспорте — иначе лишний столбец</a:t>
+            </a:r>
+          </a:p>
+        </p:txBody>
+      </p:sp>
+      <p:pic>
+        <p:nvPicPr>
+          <p:cNvPr id="4" name="Picture 3" descr="export_formats.png"/>
+          <p:cNvPicPr>
+            <a:picLocks noChangeAspect="1"/>
+          </p:cNvPicPr>
+          <p:nvPr/>
+        </p:nvPicPr>
+        <p:blipFill>
+          <a:blip r:embed="rId2"/>
+          <a:stretch>
+            <a:fillRect/>
+          </a:stretch>
+        </p:blipFill>
+        <p:spPr>
+          <a:xfrm>
+            <a:off x="7635240" y="2076907"/>
+            <a:ext cx="4343400" cy="2978505"/>
+          </a:xfrm>
+          <a:prstGeom prst="rect">
+            <a:avLst/>
+          </a:prstGeom>
+        </p:spPr>
+      </p:pic>
+    </p:spTree>
+  </p:cSld>
+  <p:clrMapOvr>
+    <a:masterClrMapping/>
+  </p:clrMapOvr>
+</p:sld>
+</file>
+
+<file path=ppt/slides/slide28.xml><?xml version="1.0" encoding="utf-8"?>
+<p:sld xmlns:a="http://schemas.openxmlformats.org/drawingml/2006/main" xmlns:p="http://schemas.openxmlformats.org/presentationml/2006/main" xmlns:r="http://schemas.openxmlformats.org/officeDocument/2006/relationships">
+  <p:cSld>
+    <p:spTree>
+      <p:nvGrpSpPr>
+        <p:cNvPr id="1" name=""/>
+        <p:cNvGrpSpPr/>
+        <p:nvPr/>
+      </p:nvGrpSpPr>
+      <p:grpSpPr/>
+      <p:sp>
+        <p:nvSpPr>
+          <p:cNvPr id="2" name="TextBox 1"/>
+          <p:cNvSpPr txBox="1"/>
+          <p:nvPr/>
+        </p:nvSpPr>
+        <p:spPr>
+          <a:xfrm>
+            <a:off x="457200" y="274320"/>
+            <a:ext cx="11247120" cy="914400"/>
+          </a:xfrm>
+          <a:prstGeom prst="rect">
+            <a:avLst/>
+          </a:prstGeom>
+          <a:noFill/>
+        </p:spPr>
+        <p:txBody>
+          <a:bodyPr wrap="square">
+            <a:spAutoFit/>
+          </a:bodyPr>
+          <a:lstStyle/>
+          <a:p>
+            <a:r>
+              <a:rPr lang="ru-RU" dirty="0" sz="3200" b="1">
+                <a:solidFill>
+                  <a:srgbClr val="1A1A2E"/>
+                </a:solidFill>
+              </a:rPr>
+              <a:t>Альтернативы: что использовать, когда pandas не справляется</a:t>
+            </a:r>
+          </a:p>
+        </p:txBody>
+      </p:sp>
+      <p:sp>
+        <p:nvSpPr>
+          <p:cNvPr id="3" name="TextBox 2"/>
+          <p:cNvSpPr txBox="1"/>
+          <p:nvPr/>
+        </p:nvSpPr>
+        <p:spPr>
+          <a:xfrm>
+            <a:off x="640080" y="1371600"/>
+            <a:ext cx="6858000" cy="5029200"/>
+          </a:xfrm>
+          <a:prstGeom prst="rect">
+            <a:avLst/>
+          </a:prstGeom>
+          <a:noFill/>
+        </p:spPr>
+        <p:txBody>
+          <a:bodyPr wrap="square">
+            <a:spAutoFit/>
+          </a:bodyPr>
+          <a:lstStyle/>
+          <a:p>
+            <a:pPr>
+              <a:spcAft>
+                <a:spcPts val="800"/>
+              </a:spcAft>
+            </a:pPr>
+            <a:r>
+              <a:rPr lang="ru-RU" dirty="0" sz="2000" b="1">
+                <a:solidFill>
+                  <a:srgbClr val="000000"/>
+                </a:solidFill>
+              </a:rPr>
+              <a:t>Polars</a:t>
+            </a:r>
+            <a:r>
+              <a:rPr lang="ru-RU" dirty="0" sz="2000">
+                <a:solidFill>
+                  <a:srgbClr val="000000"/>
+                </a:solidFill>
+              </a:rPr>
+              <a:t xml:space="preserve"> (Rust) — ленивые вычисления, 10–100× быстрее</a:t>
+            </a:r>
+          </a:p>
+          <a:p>
+            <a:pPr>
+              <a:spcAft>
+                <a:spcPts val="800"/>
+              </a:spcAft>
+            </a:pPr>
+            <a:r>
+              <a:rPr lang="ru-RU" dirty="0" sz="2000" b="1">
+                <a:solidFill>
+                  <a:srgbClr val="000000"/>
+                </a:solidFill>
+              </a:rPr>
+              <a:t>Dask</a:t>
+            </a:r>
+            <a:r>
+              <a:rPr lang="ru-RU" dirty="0" sz="2000">
+                <a:solidFill>
+                  <a:srgbClr val="000000"/>
+                </a:solidFill>
+              </a:rPr>
+              <a:t xml:space="preserve"> — распределённый pandas, данные &gt; RAM</a:t>
+            </a:r>
+          </a:p>
+          <a:p>
+            <a:pPr>
+              <a:spcAft>
+                <a:spcPts val="800"/>
+              </a:spcAft>
+            </a:pPr>
+            <a:r>
+              <a:rPr lang="ru-RU" dirty="0" sz="2000" b="1">
+                <a:solidFill>
+                  <a:srgbClr val="000000"/>
+                </a:solidFill>
+              </a:rPr>
+              <a:t>DuckDB</a:t>
+            </a:r>
+            <a:r>
+              <a:rPr lang="ru-RU" dirty="0" sz="2000">
+                <a:solidFill>
+                  <a:srgbClr val="000000"/>
+                </a:solidFill>
+              </a:rPr>
+              <a:t xml:space="preserve"> — SQL-аналитика поверх файлов</a:t>
+            </a:r>
+          </a:p>
+          <a:p>
+            <a:pPr>
+              <a:spcAft>
+                <a:spcPts val="800"/>
+              </a:spcAft>
+            </a:pPr>
+            <a:r>
+              <a:rPr lang="ru-RU" dirty="0" sz="2000">
+                <a:solidFill>
+                  <a:srgbClr val="000000"/>
+                </a:solidFill>
+              </a:rPr>
+              <a:t>pandas — EDA и &lt; 1–2 ГБ; продакшен чаще Polars/DuckDB</a:t>
+            </a:r>
+          </a:p>
+        </p:txBody>
+      </p:sp>
+      <p:pic>
+        <p:nvPicPr>
+          <p:cNvPr id="4" name="Picture 3" descr="alternatives_compare.png"/>
+          <p:cNvPicPr>
+            <a:picLocks noChangeAspect="1"/>
+          </p:cNvPicPr>
+          <p:nvPr/>
+        </p:nvPicPr>
+        <p:blipFill>
+          <a:blip r:embed="rId2"/>
+          <a:stretch>
+            <a:fillRect/>
+          </a:stretch>
+        </p:blipFill>
+        <p:spPr>
+          <a:xfrm>
+            <a:off x="7635240" y="2069694"/>
+            <a:ext cx="4343400" cy="2992931"/>
+          </a:xfrm>
+          <a:prstGeom prst="rect">
+            <a:avLst/>
+          </a:prstGeom>
+        </p:spPr>
+      </p:pic>
+    </p:spTree>
+  </p:cSld>
+  <p:clrMapOvr>
+    <a:masterClrMapping/>
+  </p:clrMapOvr>
+</p:sld>
+</file>
+
+<file path=ppt/slides/slide29.xml><?xml version="1.0" encoding="utf-8"?>
+<p:sld xmlns:a="http://schemas.openxmlformats.org/drawingml/2006/main" xmlns:p="http://schemas.openxmlformats.org/presentationml/2006/main" xmlns:r="http://schemas.openxmlformats.org/officeDocument/2006/relationships">
+  <p:cSld>
+    <p:spTree>
+      <p:nvGrpSpPr>
+        <p:cNvPr id="1" name=""/>
+        <p:cNvGrpSpPr/>
+        <p:nvPr/>
+      </p:nvGrpSpPr>
+      <p:grpSpPr/>
+      <p:sp>
+        <p:nvSpPr>
+          <p:cNvPr id="2" name="TextBox 1"/>
+          <p:cNvSpPr txBox="1"/>
+          <p:nvPr/>
+        </p:nvSpPr>
+        <p:spPr>
+          <a:xfrm>
+            <a:off x="457200" y="274320"/>
+            <a:ext cx="11247120" cy="914400"/>
+          </a:xfrm>
+          <a:prstGeom prst="rect">
+            <a:avLst/>
+          </a:prstGeom>
+          <a:noFill/>
+        </p:spPr>
+        <p:txBody>
+          <a:bodyPr wrap="square">
+            <a:spAutoFit/>
+          </a:bodyPr>
+          <a:lstStyle/>
+          <a:p>
+            <a:r>
+              <a:rPr lang="ru-RU" dirty="0" sz="3200" b="1">
+                <a:solidFill>
+                  <a:srgbClr val="1A1A2E"/>
+                </a:solidFill>
+              </a:rPr>
+              <a:t>Pandas и GPU: разрушение мифов и экосистема RAPIDS</a:t>
+            </a:r>
+          </a:p>
+        </p:txBody>
+      </p:sp>
+      <p:sp>
+        <p:nvSpPr>
+          <p:cNvPr id="3" name="TextBox 2"/>
+          <p:cNvSpPr txBox="1"/>
+          <p:nvPr/>
+        </p:nvSpPr>
+        <p:spPr>
+          <a:xfrm>
+            <a:off x="640080" y="1371600"/>
+            <a:ext cx="6858000" cy="5029200"/>
+          </a:xfrm>
+          <a:prstGeom prst="rect">
+            <a:avLst/>
+          </a:prstGeom>
+          <a:noFill/>
+        </p:spPr>
+        <p:txBody>
+          <a:bodyPr wrap="square">
+            <a:spAutoFit/>
+          </a:bodyPr>
+          <a:lstStyle/>
+          <a:p>
+            <a:pPr>
+              <a:spcAft>
+                <a:spcPts val="800"/>
+              </a:spcAft>
+            </a:pPr>
+            <a:r>
+              <a:rPr lang="ru-RU" dirty="0" sz="2000">
+                <a:solidFill>
+                  <a:srgbClr val="000000"/>
+                </a:solidFill>
+              </a:rPr>
+              <a:t xml:space="preserve">Миф: «pandas на GPU из коробки» — </a:t>
+            </a:r>
+            <a:r>
+              <a:rPr lang="ru-RU" dirty="0" sz="2000" b="1">
+                <a:solidFill>
+                  <a:srgbClr val="000000"/>
+                </a:solidFill>
+              </a:rPr>
+              <a:t>нативный pandas только CPU</a:t>
+            </a:r>
+          </a:p>
+          <a:p>
+            <a:pPr>
+              <a:spcAft>
+                <a:spcPts val="800"/>
+              </a:spcAft>
+            </a:pPr>
+            <a:r>
+              <a:rPr lang="ru-RU" dirty="0" sz="2000" b="1">
+                <a:solidFill>
+                  <a:srgbClr val="000000"/>
+                </a:solidFill>
+              </a:rPr>
+              <a:t>cuDF</a:t>
+            </a:r>
+            <a:r>
+              <a:rPr lang="ru-RU" dirty="0" sz="2000">
+                <a:solidFill>
+                  <a:srgbClr val="000000"/>
+                </a:solidFill>
+              </a:rPr>
+              <a:t xml:space="preserve"> (NVIDIA RAPIDS) — API как pandas, вычисления на GPU</a:t>
+            </a:r>
+          </a:p>
+          <a:p>
+            <a:pPr>
+              <a:spcAft>
+                <a:spcPts val="800"/>
+              </a:spcAft>
+            </a:pPr>
+            <a:r>
+              <a:rPr lang="ru-RU" dirty="0" sz="2000">
+                <a:solidFill>
+                  <a:srgbClr val="000000"/>
+                </a:solidFill>
+              </a:rPr>
+              <a:t>`cudf.pandas` — перехват вызовов GPU/CPU автоматически</a:t>
+            </a:r>
+          </a:p>
+          <a:p>
+            <a:pPr>
+              <a:spcAft>
+                <a:spcPts val="800"/>
+              </a:spcAft>
+            </a:pPr>
+            <a:r>
+              <a:rPr lang="ru-RU" dirty="0" sz="2000">
+                <a:solidFill>
+                  <a:srgbClr val="000000"/>
+                </a:solidFill>
+              </a:rPr>
+              <a:t>В VRAM данные передаёт PyTorch (`tensor.to('cuda')`), не pandas</a:t>
+            </a:r>
+          </a:p>
+        </p:txBody>
+      </p:sp>
+      <p:pic>
+        <p:nvPicPr>
+          <p:cNvPr id="4" name="Picture 3" descr="rapids_gpu_flow.png"/>
+          <p:cNvPicPr>
+            <a:picLocks noChangeAspect="1"/>
+          </p:cNvPicPr>
+          <p:nvPr/>
+        </p:nvPicPr>
+        <p:blipFill>
+          <a:blip r:embed="rId2"/>
+          <a:stretch>
+            <a:fillRect/>
+          </a:stretch>
+        </p:blipFill>
+        <p:spPr>
+          <a:xfrm>
+            <a:off x="7635240" y="2218113"/>
+            <a:ext cx="4343400" cy="2696093"/>
           </a:xfrm>
           <a:prstGeom prst="rect">
             <a:avLst/>
@@ -6498,7 +7650,7 @@
                   <a:srgbClr val="1A1A2E"/>
                 </a:solidFill>
               </a:rPr>
-              <a:t>Series и DataFrame</a:t>
+              <a:t>Индекс — это не «номер строки», а ключ</a:t>
             </a:r>
           </a:p>
         </p:txBody>
@@ -6531,80 +7683,95 @@
               </a:spcAft>
             </a:pPr>
             <a:r>
+              <a:rPr lang="ru-RU" dirty="0" sz="2000">
+                <a:solidFill>
+                  <a:srgbClr val="000000"/>
+                </a:solidFill>
+              </a:rPr>
+              <a:t>Позиция (</a:t>
+            </a:r>
+            <ns0:m xmlns:ns0="http://schemas.microsoft.com/office/drawing/2010/main">
+              <m:oMath xmlns:m="http://schemas.openxmlformats.org/officeDocument/2006/math">
+                <m:r>
+                  <m:t>0,1,2…</m:t>
+                </m:r>
+              </m:oMath>
+            </ns0:m>
+            <a:r>
+              <a:rPr lang="ru-RU" dirty="0" sz="2000">
+                <a:solidFill>
+                  <a:srgbClr val="000000"/>
+                </a:solidFill>
+              </a:rPr>
+              <a:t xml:space="preserve">) и </a:t>
+            </a:r>
+            <a:r>
               <a:rPr lang="ru-RU" dirty="0" sz="2000" b="1">
                 <a:solidFill>
                   <a:srgbClr val="000000"/>
                 </a:solidFill>
               </a:rPr>
-              <a:t>Series</a:t>
-            </a:r>
-            <a:r>
-              <a:rPr lang="ru-RU" dirty="0" sz="2000">
-                <a:solidFill>
-                  <a:srgbClr val="000000"/>
-                </a:solidFill>
-              </a:rPr>
-              <a:t xml:space="preserve"> — одномерный массив с индексом: `s['a']`, `s.iloc[0]`</a:t>
-            </a:r>
-          </a:p>
-          <a:p>
-            <a:pPr>
-              <a:spcAft>
-                <a:spcPts val="800"/>
-              </a:spcAft>
-            </a:pPr>
-            <a:r>
-              <a:rPr lang="ru-RU" dirty="0" sz="2000" b="1">
-                <a:solidFill>
-                  <a:srgbClr val="000000"/>
-                </a:solidFill>
-              </a:rPr>
-              <a:t>DataFrame</a:t>
-            </a:r>
-            <a:r>
-              <a:rPr lang="ru-RU" dirty="0" sz="2000">
-                <a:solidFill>
-                  <a:srgbClr val="000000"/>
-                </a:solidFill>
-              </a:rPr>
-              <a:t xml:space="preserve"> — таблица: столбцы — Series с общим индексом строк</a:t>
-            </a:r>
-          </a:p>
-          <a:p>
-            <a:pPr>
-              <a:spcAft>
-                <a:spcPts val="800"/>
-              </a:spcAft>
-            </a:pPr>
-            <a:r>
-              <a:rPr lang="ru-RU" dirty="0" sz="2000">
-                <a:solidFill>
-                  <a:srgbClr val="000000"/>
-                </a:solidFill>
-              </a:rPr>
-              <a:t>Создание: `pd.DataFrame({'col': [...]})`, из dict/list, из NumPy</a:t>
-            </a:r>
-          </a:p>
-          <a:p>
-            <a:pPr>
-              <a:spcAft>
-                <a:spcPts val="800"/>
-              </a:spcAft>
-            </a:pPr>
-            <a:r>
-              <a:rPr lang="ru-RU" dirty="0" sz="2000">
-                <a:solidFill>
-                  <a:srgbClr val="000000"/>
-                </a:solidFill>
-              </a:rPr>
-              <a:t>`.shape`, `.columns`, `.dtypes` — первые вопросы к любой таблице</a:t>
+              <a:t>метка индекса</a:t>
+            </a:r>
+            <a:r>
+              <a:rPr lang="ru-RU" dirty="0" sz="2000">
+                <a:solidFill>
+                  <a:srgbClr val="000000"/>
+                </a:solidFill>
+              </a:rPr>
+              <a:t xml:space="preserve"> — разные вещи</a:t>
+            </a:r>
+          </a:p>
+          <a:p>
+            <a:pPr>
+              <a:spcAft>
+                <a:spcPts val="800"/>
+              </a:spcAft>
+            </a:pPr>
+            <a:r>
+              <a:rPr lang="ru-RU" dirty="0" sz="2000">
+                <a:solidFill>
+                  <a:srgbClr val="000000"/>
+                </a:solidFill>
+              </a:rPr>
+              <a:t>После фильтрации, merge или сортировки индексы становятся «рваными»</a:t>
+            </a:r>
+          </a:p>
+          <a:p>
+            <a:pPr>
+              <a:spcAft>
+                <a:spcPts val="800"/>
+              </a:spcAft>
+            </a:pPr>
+            <a:r>
+              <a:rPr lang="ru-RU" dirty="0" sz="2000">
+                <a:solidFill>
+                  <a:srgbClr val="000000"/>
+                </a:solidFill>
+              </a:rPr>
+              <a:t>`reset_index(drop=True)` — базовая операция после трансформации</a:t>
+            </a:r>
+          </a:p>
+          <a:p>
+            <a:pPr>
+              <a:spcAft>
+                <a:spcPts val="800"/>
+              </a:spcAft>
+            </a:pPr>
+            <a:r>
+              <a:rPr lang="ru-RU" dirty="0" sz="2000">
+                <a:solidFill>
+                  <a:srgbClr val="000000"/>
+                </a:solidFill>
+              </a:rPr>
+              <a:t>sklearn игнорирует индексы, но при склейке в pandas несовпадение даст неожиданные NaN</a:t>
             </a:r>
           </a:p>
         </p:txBody>
       </p:sp>
       <p:pic>
         <p:nvPicPr>
-          <p:cNvPr id="4" name="Picture 3" descr="series_dataframe_schema.png"/>
+          <p:cNvPr id="4" name="Picture 3" descr="index_ragged_reset.png"/>
           <p:cNvPicPr>
             <a:picLocks noChangeAspect="1"/>
           </p:cNvPicPr>
@@ -6618,14 +7785,502 @@
         </p:blipFill>
         <p:spPr>
           <a:xfrm>
-            <a:off x="7635240" y="2842755"/>
-            <a:ext cx="4343400" cy="1446810"/>
+            <a:off x="7635240" y="2873949"/>
+            <a:ext cx="4343400" cy="1384422"/>
           </a:xfrm>
           <a:prstGeom prst="rect">
             <a:avLst/>
           </a:prstGeom>
         </p:spPr>
       </p:pic>
+    </p:spTree>
+  </p:cSld>
+  <p:clrMapOvr>
+    <a:masterClrMapping/>
+  </p:clrMapOvr>
+</p:sld>
+</file>
+
+<file path=ppt/slides/slide30.xml><?xml version="1.0" encoding="utf-8"?>
+<p:sld xmlns:a="http://schemas.openxmlformats.org/drawingml/2006/main" xmlns:p="http://schemas.openxmlformats.org/presentationml/2006/main" xmlns:r="http://schemas.openxmlformats.org/officeDocument/2006/relationships">
+  <p:cSld>
+    <p:spTree>
+      <p:nvGrpSpPr>
+        <p:cNvPr id="1" name=""/>
+        <p:cNvGrpSpPr/>
+        <p:nvPr/>
+      </p:nvGrpSpPr>
+      <p:grpSpPr/>
+      <p:sp>
+        <p:nvSpPr>
+          <p:cNvPr id="2" name="TextBox 1"/>
+          <p:cNvSpPr txBox="1"/>
+          <p:nvPr/>
+        </p:nvSpPr>
+        <p:spPr>
+          <a:xfrm>
+            <a:off x="457200" y="274320"/>
+            <a:ext cx="11247120" cy="914400"/>
+          </a:xfrm>
+          <a:prstGeom prst="rect">
+            <a:avLst/>
+          </a:prstGeom>
+          <a:noFill/>
+        </p:spPr>
+        <p:txBody>
+          <a:bodyPr wrap="square">
+            <a:spAutoFit/>
+          </a:bodyPr>
+          <a:lstStyle/>
+          <a:p>
+            <a:r>
+              <a:rPr lang="ru-RU" dirty="0" sz="3200" b="1">
+                <a:solidFill>
+                  <a:srgbClr val="1A1A2E"/>
+                </a:solidFill>
+              </a:rPr>
+              <a:t>Гигиена памяти в Jupyter: борьба с OOM</a:t>
+            </a:r>
+          </a:p>
+        </p:txBody>
+      </p:sp>
+      <p:sp>
+        <p:nvSpPr>
+          <p:cNvPr id="3" name="TextBox 2"/>
+          <p:cNvSpPr txBox="1"/>
+          <p:nvPr/>
+        </p:nvSpPr>
+        <p:spPr>
+          <a:xfrm>
+            <a:off x="640080" y="1371600"/>
+            <a:ext cx="6858000" cy="5029200"/>
+          </a:xfrm>
+          <a:prstGeom prst="rect">
+            <a:avLst/>
+          </a:prstGeom>
+          <a:noFill/>
+        </p:spPr>
+        <p:txBody>
+          <a:bodyPr wrap="square">
+            <a:spAutoFit/>
+          </a:bodyPr>
+          <a:lstStyle/>
+          <a:p>
+            <a:pPr>
+              <a:spcAft>
+                <a:spcPts val="800"/>
+              </a:spcAft>
+            </a:pPr>
+            <a:r>
+              <a:rPr lang="ru-RU" dirty="0" sz="2000">
+                <a:solidFill>
+                  <a:srgbClr val="000000"/>
+                </a:solidFill>
+              </a:rPr>
+              <a:t>Jupyter хранит ссылки на старые датафреймы (`_`, история выводов)</a:t>
+            </a:r>
+          </a:p>
+          <a:p>
+            <a:pPr>
+              <a:spcAft>
+                <a:spcPts val="800"/>
+              </a:spcAft>
+            </a:pPr>
+            <a:r>
+              <a:rPr lang="ru-RU" dirty="0" sz="2000">
+                <a:solidFill>
+                  <a:srgbClr val="000000"/>
+                </a:solidFill>
+              </a:rPr>
+              <a:t>Переопределение `df1` не освобождает память сразу</a:t>
+            </a:r>
+          </a:p>
+          <a:p>
+            <a:pPr>
+              <a:spcAft>
+                <a:spcPts val="800"/>
+              </a:spcAft>
+            </a:pPr>
+            <a:r>
+              <a:rPr lang="ru-RU" dirty="0" sz="2000">
+                <a:solidFill>
+                  <a:srgbClr val="000000"/>
+                </a:solidFill>
+              </a:rPr>
+              <a:t>`del df_old` + `gc.collect()` перед тяжёлой моделью</a:t>
+            </a:r>
+          </a:p>
+          <a:p>
+            <a:pPr>
+              <a:spcAft>
+                <a:spcPts val="800"/>
+              </a:spcAft>
+            </a:pPr>
+            <a:r>
+              <a:rPr lang="ru-RU" dirty="0" sz="2000">
+                <a:solidFill>
+                  <a:srgbClr val="000000"/>
+                </a:solidFill>
+              </a:rPr>
+              <a:t>Явное управление памятью — навык для больших ноутбуков</a:t>
+            </a:r>
+          </a:p>
+        </p:txBody>
+      </p:sp>
+      <p:pic>
+        <p:nvPicPr>
+          <p:cNvPr id="4" name="Picture 3" descr="jupyter_memory.png"/>
+          <p:cNvPicPr>
+            <a:picLocks noChangeAspect="1"/>
+          </p:cNvPicPr>
+          <p:nvPr/>
+        </p:nvPicPr>
+        <p:blipFill>
+          <a:blip r:embed="rId2"/>
+          <a:stretch>
+            <a:fillRect/>
+          </a:stretch>
+        </p:blipFill>
+        <p:spPr>
+          <a:xfrm>
+            <a:off x="7635240" y="2904435"/>
+            <a:ext cx="4343400" cy="1323449"/>
+          </a:xfrm>
+          <a:prstGeom prst="rect">
+            <a:avLst/>
+          </a:prstGeom>
+        </p:spPr>
+      </p:pic>
+    </p:spTree>
+  </p:cSld>
+  <p:clrMapOvr>
+    <a:masterClrMapping/>
+  </p:clrMapOvr>
+</p:sld>
+</file>
+
+<file path=ppt/slides/slide31.xml><?xml version="1.0" encoding="utf-8"?>
+<p:sld xmlns:a="http://schemas.openxmlformats.org/drawingml/2006/main" xmlns:p="http://schemas.openxmlformats.org/presentationml/2006/main" xmlns:r="http://schemas.openxmlformats.org/officeDocument/2006/relationships">
+  <p:cSld>
+    <p:spTree>
+      <p:nvGrpSpPr>
+        <p:cNvPr id="1" name=""/>
+        <p:cNvGrpSpPr/>
+        <p:nvPr/>
+      </p:nvGrpSpPr>
+      <p:grpSpPr/>
+      <p:sp>
+        <p:nvSpPr>
+          <p:cNvPr id="2" name="TextBox 1"/>
+          <p:cNvSpPr txBox="1"/>
+          <p:nvPr/>
+        </p:nvSpPr>
+        <p:spPr>
+          <a:xfrm>
+            <a:off x="457200" y="274320"/>
+            <a:ext cx="11247120" cy="914400"/>
+          </a:xfrm>
+          <a:prstGeom prst="rect">
+            <a:avLst/>
+          </a:prstGeom>
+          <a:noFill/>
+        </p:spPr>
+        <p:txBody>
+          <a:bodyPr wrap="square">
+            <a:spAutoFit/>
+          </a:bodyPr>
+          <a:lstStyle/>
+          <a:p>
+            <a:r>
+              <a:rPr lang="ru-RU" dirty="0" sz="3200" b="1">
+                <a:solidFill>
+                  <a:srgbClr val="1A1A2E"/>
+                </a:solidFill>
+              </a:rPr>
+              <a:t>Итоговая ментальная модель pandas для ML-инженера</a:t>
+            </a:r>
+          </a:p>
+        </p:txBody>
+      </p:sp>
+      <p:sp>
+        <p:nvSpPr>
+          <p:cNvPr id="3" name="TextBox 2"/>
+          <p:cNvSpPr txBox="1"/>
+          <p:nvPr/>
+        </p:nvSpPr>
+        <p:spPr>
+          <a:xfrm>
+            <a:off x="640080" y="1371600"/>
+            <a:ext cx="6858000" cy="5029200"/>
+          </a:xfrm>
+          <a:prstGeom prst="rect">
+            <a:avLst/>
+          </a:prstGeom>
+          <a:noFill/>
+        </p:spPr>
+        <p:txBody>
+          <a:bodyPr wrap="square">
+            <a:spAutoFit/>
+          </a:bodyPr>
+          <a:lstStyle/>
+          <a:p>
+            <a:pPr>
+              <a:spcAft>
+                <a:spcPts val="800"/>
+              </a:spcAft>
+            </a:pPr>
+            <a:r>
+              <a:rPr lang="ru-RU" dirty="0" sz="2000">
+                <a:solidFill>
+                  <a:srgbClr val="000000"/>
+                </a:solidFill>
+              </a:rPr>
+              <a:t>pandas = EDA и первичная очистка, не тяжёлые продакшен-трансформации</a:t>
+            </a:r>
+          </a:p>
+          <a:p>
+            <a:pPr>
+              <a:spcAft>
+                <a:spcPts val="800"/>
+              </a:spcAft>
+            </a:pPr>
+            <a:r>
+              <a:rPr lang="ru-RU" dirty="0" sz="2000">
+                <a:solidFill>
+                  <a:srgbClr val="000000"/>
+                </a:solidFill>
+              </a:rPr>
+              <a:t>Индекс — ключ; помните при join/merge/concat</a:t>
+            </a:r>
+          </a:p>
+          <a:p>
+            <a:pPr>
+              <a:spcAft>
+                <a:spcPts val="800"/>
+              </a:spcAft>
+            </a:pPr>
+            <a:r>
+              <a:rPr lang="ru-RU" dirty="0" sz="2000">
+                <a:solidFill>
+                  <a:srgbClr val="000000"/>
+                </a:solidFill>
+              </a:rPr>
+              <a:t>`.copy()` / `.loc`; векторизация &gt; apply &gt; iterrows</a:t>
+            </a:r>
+          </a:p>
+          <a:p>
+            <a:pPr>
+              <a:spcAft>
+                <a:spcPts val="800"/>
+              </a:spcAft>
+            </a:pPr>
+            <a:r>
+              <a:rPr lang="ru-RU" dirty="0" sz="2000">
+                <a:solidFill>
+                  <a:srgbClr val="000000"/>
+                </a:solidFill>
+              </a:rPr>
+              <a:t>Fit-зависимое — в Pipeline; перед моделью — `.to_numpy()` + `reset_index()`</a:t>
+            </a:r>
+          </a:p>
+          <a:p>
+            <a:pPr>
+              <a:spcAft>
+                <a:spcPts val="800"/>
+              </a:spcAft>
+            </a:pPr>
+            <a:r>
+              <a:rPr lang="ru-RU" dirty="0" sz="2000">
+                <a:solidFill>
+                  <a:srgbClr val="000000"/>
+                </a:solidFill>
+              </a:rPr>
+              <a:t>Промежуточные данные — Parquet; GPU — cuDF/PyTorch, не pandas</a:t>
+            </a:r>
+          </a:p>
+        </p:txBody>
+      </p:sp>
+      <p:pic>
+        <p:nvPicPr>
+          <p:cNvPr id="4" name="Picture 3" descr="pandas_ml_pipeline.png"/>
+          <p:cNvPicPr>
+            <a:picLocks noChangeAspect="1"/>
+          </p:cNvPicPr>
+          <p:nvPr/>
+        </p:nvPicPr>
+        <p:blipFill>
+          <a:blip r:embed="rId2"/>
+          <a:stretch>
+            <a:fillRect/>
+          </a:stretch>
+        </p:blipFill>
+        <p:spPr>
+          <a:xfrm>
+            <a:off x="7635240" y="2329535"/>
+            <a:ext cx="4343400" cy="2473248"/>
+          </a:xfrm>
+          <a:prstGeom prst="rect">
+            <a:avLst/>
+          </a:prstGeom>
+        </p:spPr>
+      </p:pic>
+    </p:spTree>
+  </p:cSld>
+  <p:clrMapOvr>
+    <a:masterClrMapping/>
+  </p:clrMapOvr>
+</p:sld>
+</file>
+
+<file path=ppt/slides/slide32.xml><?xml version="1.0" encoding="utf-8"?>
+<p:sld xmlns:a="http://schemas.openxmlformats.org/drawingml/2006/main" xmlns:p="http://schemas.openxmlformats.org/presentationml/2006/main" xmlns:r="http://schemas.openxmlformats.org/officeDocument/2006/relationships">
+  <p:cSld>
+    <p:spTree>
+      <p:nvGrpSpPr>
+        <p:cNvPr id="1" name=""/>
+        <p:cNvGrpSpPr/>
+        <p:nvPr/>
+      </p:nvGrpSpPr>
+      <p:grpSpPr/>
+      <p:sp>
+        <p:nvSpPr>
+          <p:cNvPr id="2" name="TextBox 1"/>
+          <p:cNvSpPr txBox="1"/>
+          <p:nvPr/>
+        </p:nvSpPr>
+        <p:spPr>
+          <a:xfrm>
+            <a:off x="457200" y="274320"/>
+            <a:ext cx="11247120" cy="914400"/>
+          </a:xfrm>
+          <a:prstGeom prst="rect">
+            <a:avLst/>
+          </a:prstGeom>
+          <a:noFill/>
+        </p:spPr>
+        <p:txBody>
+          <a:bodyPr wrap="square">
+            <a:spAutoFit/>
+          </a:bodyPr>
+          <a:lstStyle/>
+          <a:p>
+            <a:r>
+              <a:rPr lang="ru-RU" dirty="0" sz="3200" b="1">
+                <a:solidFill>
+                  <a:srgbClr val="1A1A2E"/>
+                </a:solidFill>
+              </a:rPr>
+              <a:t>Чек-лист перед обучением модели</a:t>
+            </a:r>
+          </a:p>
+        </p:txBody>
+      </p:sp>
+      <p:sp>
+        <p:nvSpPr>
+          <p:cNvPr id="3" name="TextBox 2"/>
+          <p:cNvSpPr txBox="1"/>
+          <p:nvPr/>
+        </p:nvSpPr>
+        <p:spPr>
+          <a:xfrm>
+            <a:off x="640080" y="1371600"/>
+            <a:ext cx="11247120" cy="5029200"/>
+          </a:xfrm>
+          <a:prstGeom prst="rect">
+            <a:avLst/>
+          </a:prstGeom>
+          <a:noFill/>
+        </p:spPr>
+        <p:txBody>
+          <a:bodyPr wrap="square">
+            <a:spAutoFit/>
+          </a:bodyPr>
+          <a:lstStyle/>
+          <a:p>
+            <a:pPr>
+              <a:spcAft>
+                <a:spcPts val="800"/>
+              </a:spcAft>
+            </a:pPr>
+            <a:r>
+              <a:rPr lang="ru-RU" dirty="0" sz="2000">
+                <a:solidFill>
+                  <a:srgbClr val="000000"/>
+                </a:solidFill>
+              </a:rPr>
+              <a:t>`df.info()` — типы и пропуски; `describe()` — аномалии</a:t>
+            </a:r>
+          </a:p>
+          <a:p>
+            <a:pPr>
+              <a:spcAft>
+                <a:spcPts val="800"/>
+              </a:spcAft>
+            </a:pPr>
+            <a:r>
+              <a:rPr lang="ru-RU" dirty="0" sz="2000">
+                <a:solidFill>
+                  <a:srgbClr val="000000"/>
+                </a:solidFill>
+              </a:rPr>
+              <a:t>`value_counts()` / `corr()` — кардинальность и мультиколлинеарность</a:t>
+            </a:r>
+          </a:p>
+          <a:p>
+            <a:pPr>
+              <a:spcAft>
+                <a:spcPts val="800"/>
+              </a:spcAft>
+            </a:pPr>
+            <a:r>
+              <a:rPr lang="ru-RU" dirty="0" sz="2000">
+                <a:solidFill>
+                  <a:srgbClr val="000000"/>
+                </a:solidFill>
+              </a:rPr>
+              <a:t xml:space="preserve">`drop_duplicates`; кодирование категорий; импутация </a:t>
+            </a:r>
+            <a:r>
+              <a:rPr lang="ru-RU" dirty="0" sz="2000" b="1">
+                <a:solidFill>
+                  <a:srgbClr val="000000"/>
+                </a:solidFill>
+              </a:rPr>
+              <a:t>не по всему датасету</a:t>
+            </a:r>
+          </a:p>
+          <a:p>
+            <a:pPr>
+              <a:spcAft>
+                <a:spcPts val="800"/>
+              </a:spcAft>
+            </a:pPr>
+            <a:r>
+              <a:rPr lang="ru-RU" dirty="0" sz="2000">
+                <a:solidFill>
+                  <a:srgbClr val="000000"/>
+                </a:solidFill>
+              </a:rPr>
+              <a:t>`train_test_split` до глобальных трансформаций; X,y → numpy с правильным dtype</a:t>
+            </a:r>
+          </a:p>
+          <a:p>
+            <a:pPr>
+              <a:spcAft>
+                <a:spcPts val="800"/>
+              </a:spcAft>
+            </a:pPr>
+            <a:r>
+              <a:rPr lang="ru-RU" dirty="0" sz="2000">
+                <a:solidFill>
+                  <a:srgbClr val="000000"/>
+                </a:solidFill>
+              </a:rPr>
+              <a:t>Проверка NaN/inf; Pipeline; `del` + `gc.collect()`</a:t>
+            </a:r>
+          </a:p>
+        </p:txBody>
+      </p:sp>
     </p:spTree>
   </p:cSld>
   <p:clrMapOvr>
@@ -6672,7 +8327,7 @@
                   <a:srgbClr val="1A1A2E"/>
                 </a:solidFill>
               </a:rPr>
-              <a:t>Чтение данных</a:t>
+              <a:t>Булева индексация — магия numpy внутри pandas</a:t>
             </a:r>
           </a:p>
         </p:txBody>
@@ -6710,59 +8365,67 @@
                   <a:srgbClr val="000000"/>
                 </a:solidFill>
               </a:rPr>
-              <a:t>`pd.read_csv(path)` — основной формат; параметры `sep`, `encoding`, `parse_dates`</a:t>
-            </a:r>
-          </a:p>
-          <a:p>
-            <a:pPr>
-              <a:spcAft>
-                <a:spcPts val="800"/>
-              </a:spcAft>
-            </a:pPr>
-            <a:r>
-              <a:rPr lang="ru-RU" dirty="0" sz="2000">
-                <a:solidFill>
-                  <a:srgbClr val="000000"/>
-                </a:solidFill>
-              </a:rPr>
-              <a:t>`pd.read_excel` — листы через `sheet_name`; для OpenML — `fetch_openml(..., as_frame=True)`</a:t>
-            </a:r>
-          </a:p>
-          <a:p>
-            <a:pPr>
-              <a:spcAft>
-                <a:spcPts val="800"/>
-              </a:spcAft>
-            </a:pPr>
-            <a:r>
-              <a:rPr lang="ru-RU" dirty="0" sz="2000">
-                <a:solidFill>
-                  <a:srgbClr val="000000"/>
-                </a:solidFill>
-              </a:rPr>
-              <a:t>После чтения: `df.head()`, `df.info()`, `df.describe()` — быстрый осмотр</a:t>
-            </a:r>
-          </a:p>
-          <a:p>
-            <a:pPr>
-              <a:spcAft>
-                <a:spcPts val="800"/>
-              </a:spcAft>
-            </a:pPr>
-            <a:r>
-              <a:rPr lang="ru-RU" dirty="0" sz="2000">
-                <a:solidFill>
-                  <a:srgbClr val="000000"/>
-                </a:solidFill>
-              </a:rPr>
-              <a:t>Сохранение: `df.to_csv(..., index=False)` — индекс в файл обычно не пишем</a:t>
+              <a:t>`df[df['age'] &gt; 30]` — маска numpy внутри pandas</a:t>
+            </a:r>
+          </a:p>
+          <a:p>
+            <a:pPr>
+              <a:spcAft>
+                <a:spcPts val="800"/>
+              </a:spcAft>
+            </a:pPr>
+            <a:r>
+              <a:rPr lang="ru-RU" dirty="0" sz="2000">
+                <a:solidFill>
+                  <a:srgbClr val="000000"/>
+                </a:solidFill>
+              </a:rPr>
+              <a:t>Шаг 1: `df['age'] &gt; 30` → булев массив `[True, False, True, \ldots]`</a:t>
+            </a:r>
+          </a:p>
+          <a:p>
+            <a:pPr>
+              <a:spcAft>
+                <a:spcPts val="800"/>
+              </a:spcAft>
+            </a:pPr>
+            <a:r>
+              <a:rPr lang="ru-RU" dirty="0" sz="2000">
+                <a:solidFill>
+                  <a:srgbClr val="000000"/>
+                </a:solidFill>
+              </a:rPr>
+              <a:t>Шаг 2: `df[mask]` возвращает строки, где `True` — прямое наследие numpy</a:t>
+            </a:r>
+          </a:p>
+          <a:p>
+            <a:pPr>
+              <a:spcAft>
+                <a:spcPts val="800"/>
+              </a:spcAft>
+            </a:pPr>
+            <a:r>
+              <a:rPr lang="ru-RU" dirty="0" sz="2000">
+                <a:solidFill>
+                  <a:srgbClr val="000000"/>
+                </a:solidFill>
+              </a:rPr>
+              <a:t xml:space="preserve">Составные условия: `&amp;`, `|`, `~` (не `and`/`or`); </a:t>
+            </a:r>
+            <a:r>
+              <a:rPr lang="ru-RU" dirty="0" sz="2000" b="1">
+                <a:solidFill>
+                  <a:srgbClr val="000000"/>
+                </a:solidFill>
+              </a:rPr>
+              <a:t>каждое условие в скобках</a:t>
             </a:r>
           </a:p>
         </p:txBody>
       </p:sp>
       <p:pic>
         <p:nvPicPr>
-          <p:cNvPr id="4" name="Picture 3" descr="read_csv_flow.png"/>
+          <p:cNvPr id="4" name="Picture 3" descr="boolean_mask_flow.png"/>
           <p:cNvPicPr>
             <a:picLocks noChangeAspect="1"/>
           </p:cNvPicPr>
@@ -6776,8 +8439,8 @@
         </p:blipFill>
         <p:spPr>
           <a:xfrm>
-            <a:off x="7635240" y="2076907"/>
-            <a:ext cx="4343400" cy="2978505"/>
+            <a:off x="7635240" y="2917026"/>
+            <a:ext cx="4343400" cy="1298267"/>
           </a:xfrm>
           <a:prstGeom prst="rect">
             <a:avLst/>
@@ -6830,7 +8493,7 @@
                   <a:srgbClr val="1A1A2E"/>
                 </a:solidFill>
               </a:rPr>
-              <a:t>Первичный осмотр таблицы</a:t>
+              <a:t>Три способа обратиться к данным: `[]`, `.loc`, `.iloc`</a:t>
             </a:r>
           </a:p>
         </p:txBody>
@@ -6868,59 +8531,91 @@
                   <a:srgbClr val="000000"/>
                 </a:solidFill>
               </a:rPr>
-              <a:t>`head(n)` / `tail(n)` — первые и последние строки</a:t>
-            </a:r>
-          </a:p>
-          <a:p>
-            <a:pPr>
-              <a:spcAft>
-                <a:spcPts val="800"/>
-              </a:spcAft>
-            </a:pPr>
-            <a:r>
-              <a:rPr lang="ru-RU" dirty="0" sz="2000">
-                <a:solidFill>
-                  <a:srgbClr val="000000"/>
-                </a:solidFill>
-              </a:rPr>
-              <a:t>`info()` — типы, пропуски, память; `describe()` — статистики числовых столбцов</a:t>
-            </a:r>
-          </a:p>
-          <a:p>
-            <a:pPr>
-              <a:spcAft>
-                <a:spcPts val="800"/>
-              </a:spcAft>
-            </a:pPr>
-            <a:r>
-              <a:rPr lang="ru-RU" dirty="0" sz="2000">
-                <a:solidFill>
-                  <a:srgbClr val="000000"/>
-                </a:solidFill>
-              </a:rPr>
-              <a:t>`value_counts()` для категорий — баланс классов, частые значения</a:t>
-            </a:r>
-          </a:p>
-          <a:p>
-            <a:pPr>
-              <a:spcAft>
-                <a:spcPts val="800"/>
-              </a:spcAft>
-            </a:pPr>
-            <a:r>
-              <a:rPr lang="ru-RU" dirty="0" sz="2000">
-                <a:solidFill>
-                  <a:srgbClr val="000000"/>
-                </a:solidFill>
-              </a:rPr>
-              <a:t>`.sample(n, random_state=42)` — случайная подвыборка для ручной проверки</a:t>
+              <a:t>`df['col']` — столбец по имени</a:t>
+            </a:r>
+          </a:p>
+          <a:p>
+            <a:pPr>
+              <a:spcAft>
+                <a:spcPts val="800"/>
+              </a:spcAft>
+            </a:pPr>
+            <a:r>
+              <a:rPr lang="ru-RU" dirty="0" sz="2000">
+                <a:solidFill>
+                  <a:srgbClr val="000000"/>
+                </a:solidFill>
+              </a:rPr>
+              <a:t xml:space="preserve">`.iloc[i, j]` — доступ </a:t>
+            </a:r>
+            <a:r>
+              <a:rPr lang="ru-RU" dirty="0" sz="2000" b="1">
+                <a:solidFill>
+                  <a:srgbClr val="000000"/>
+                </a:solidFill>
+              </a:rPr>
+              <a:t>по позиции</a:t>
+            </a:r>
+            <a:r>
+              <a:rPr lang="ru-RU" dirty="0" sz="2000">
+                <a:solidFill>
+                  <a:srgbClr val="000000"/>
+                </a:solidFill>
+              </a:rPr>
+              <a:t xml:space="preserve"> (как numpy); индексы игнорируются</a:t>
+            </a:r>
+          </a:p>
+          <a:p>
+            <a:pPr>
+              <a:spcAft>
+                <a:spcPts val="800"/>
+              </a:spcAft>
+            </a:pPr>
+            <a:r>
+              <a:rPr lang="ru-RU" dirty="0" sz="2000">
+                <a:solidFill>
+                  <a:srgbClr val="000000"/>
+                </a:solidFill>
+              </a:rPr>
+              <a:t xml:space="preserve">`.loc[label, col]` — доступ </a:t>
+            </a:r>
+            <a:r>
+              <a:rPr lang="ru-RU" dirty="0" sz="2000" b="1">
+                <a:solidFill>
+                  <a:srgbClr val="000000"/>
+                </a:solidFill>
+              </a:rPr>
+              <a:t>по метке</a:t>
+            </a:r>
+            <a:r>
+              <a:rPr lang="ru-RU" dirty="0" sz="2000">
+                <a:solidFill>
+                  <a:srgbClr val="000000"/>
+                </a:solidFill>
+              </a:rPr>
+              <a:t xml:space="preserve"> индекса</a:t>
+            </a:r>
+          </a:p>
+          <a:p>
+            <a:pPr>
+              <a:spcAft>
+                <a:spcPts val="800"/>
+              </a:spcAft>
+            </a:pPr>
+            <a:r>
+              <a:rPr lang="ru-RU" dirty="0" sz="2000">
+                <a:solidFill>
+                  <a:srgbClr val="000000"/>
+                </a:solidFill>
+              </a:rPr>
+              <a:t>Присваивание — через `.loc`; перед sklearn удобнее `.iloc` (позиционная индексация)</a:t>
             </a:r>
           </a:p>
         </p:txBody>
       </p:sp>
       <p:pic>
         <p:nvPicPr>
-          <p:cNvPr id="4" name="Picture 3" descr="describe_snapshot.png"/>
+          <p:cNvPr id="4" name="Picture 3" descr="loc_vs_iloc.png"/>
           <p:cNvPicPr>
             <a:picLocks noChangeAspect="1"/>
           </p:cNvPicPr>
@@ -6934,8 +8629,8 @@
         </p:blipFill>
         <p:spPr>
           <a:xfrm>
-            <a:off x="7635240" y="2232712"/>
-            <a:ext cx="4343400" cy="2666895"/>
+            <a:off x="7635240" y="2055813"/>
+            <a:ext cx="4343400" cy="3020693"/>
           </a:xfrm>
           <a:prstGeom prst="rect">
             <a:avLst/>
@@ -6988,7 +8683,7 @@
                   <a:srgbClr val="1A1A2E"/>
                 </a:solidFill>
               </a:rPr>
-              <a:t>Индексы строк и столбцов</a:t>
+              <a:t>Самая большая боль: SettingWithCopyWarning</a:t>
             </a:r>
           </a:p>
         </p:txBody>
@@ -7026,59 +8721,67 @@
                   <a:srgbClr val="000000"/>
                 </a:solidFill>
               </a:rPr>
-              <a:t>Индекс — «метки» строк; по умолчанию 0…n−1, но может быть id, дата, код</a:t>
-            </a:r>
-          </a:p>
-          <a:p>
-            <a:pPr>
-              <a:spcAft>
-                <a:spcPts val="800"/>
-              </a:spcAft>
-            </a:pPr>
-            <a:r>
-              <a:rPr lang="ru-RU" dirty="0" sz="2000">
-                <a:solidFill>
-                  <a:srgbClr val="000000"/>
-                </a:solidFill>
-              </a:rPr>
-              <a:t>`set_index('col')` — сделать столбец индексом; `reset_index()` — вернуть в столбец</a:t>
-            </a:r>
-          </a:p>
-          <a:p>
-            <a:pPr>
-              <a:spcAft>
-                <a:spcPts val="800"/>
-              </a:spcAft>
-            </a:pPr>
-            <a:r>
-              <a:rPr lang="ru-RU" dirty="0" sz="2000">
-                <a:solidFill>
-                  <a:srgbClr val="000000"/>
-                </a:solidFill>
-              </a:rPr>
-              <a:t>`df.loc[label]` — по метке; `df['col']` — столбец (Series)</a:t>
-            </a:r>
-          </a:p>
-          <a:p>
-            <a:pPr>
-              <a:spcAft>
-                <a:spcPts val="800"/>
-              </a:spcAft>
-            </a:pPr>
-            <a:r>
-              <a:rPr lang="ru-RU" dirty="0" sz="2000">
-                <a:solidFill>
-                  <a:srgbClr val="000000"/>
-                </a:solidFill>
-              </a:rPr>
-              <a:t>Дубликаты индекса допустимы, но усложняют выборку — лучше уникальный ключ</a:t>
+              <a:t>pandas не всегда понимает: вы меняете оригинал или копию</a:t>
+            </a:r>
+          </a:p>
+          <a:p>
+            <a:pPr>
+              <a:spcAft>
+                <a:spcPts val="800"/>
+              </a:spcAft>
+            </a:pPr>
+            <a:r>
+              <a:rPr lang="ru-RU" dirty="0" sz="2000">
+                <a:solidFill>
+                  <a:srgbClr val="000000"/>
+                </a:solidFill>
+              </a:rPr>
+              <a:t xml:space="preserve">`subset = df[df['age'] &gt; 30]; subset['new_col'] = 1` — </a:t>
+            </a:r>
+            <a:r>
+              <a:rPr lang="ru-RU" dirty="0" sz="2000" b="1">
+                <a:solidFill>
+                  <a:srgbClr val="000000"/>
+                </a:solidFill>
+              </a:rPr>
+              <a:t>Warning</a:t>
+            </a:r>
+          </a:p>
+          <a:p>
+            <a:pPr>
+              <a:spcAft>
+                <a:spcPts val="800"/>
+              </a:spcAft>
+            </a:pPr>
+            <a:r>
+              <a:rPr lang="ru-RU" dirty="0" sz="2000">
+                <a:solidFill>
+                  <a:srgbClr val="000000"/>
+                </a:solidFill>
+              </a:rPr>
+              <a:t>Изменения могут не попасть в `df` или перезаписать данные случайно</a:t>
+            </a:r>
+          </a:p>
+          <a:p>
+            <a:pPr>
+              <a:spcAft>
+                <a:spcPts val="800"/>
+              </a:spcAft>
+            </a:pPr>
+            <a:r>
+              <a:rPr lang="ru-RU" dirty="0" sz="2000">
+                <a:solidFill>
+                  <a:srgbClr val="000000"/>
+                </a:solidFill>
+              </a:rPr>
+              <a:t>Решение: `.copy()` или `df.loc[mask, 'col'] = value`</a:t>
             </a:r>
           </a:p>
         </p:txBody>
       </p:sp>
       <p:pic>
         <p:nvPicPr>
-          <p:cNvPr id="4" name="Picture 3" descr="index_set_reset.png"/>
+          <p:cNvPr id="4" name="Picture 3" descr="setting_with_copy.png"/>
           <p:cNvPicPr>
             <a:picLocks noChangeAspect="1"/>
           </p:cNvPicPr>
@@ -7092,8 +8795,8 @@
         </p:blipFill>
         <p:spPr>
           <a:xfrm>
-            <a:off x="7635240" y="2909599"/>
-            <a:ext cx="4343400" cy="1313121"/>
+            <a:off x="7635240" y="2076907"/>
+            <a:ext cx="4343400" cy="2978505"/>
           </a:xfrm>
           <a:prstGeom prst="rect">
             <a:avLst/>
@@ -7146,7 +8849,7 @@
                   <a:srgbClr val="1A1A2E"/>
                 </a:solidFill>
               </a:rPr>
-              <a:t>loc и iloc: две системы адресации</a:t>
+              <a:t>View vs Copy: архитектурная проблема pandas</a:t>
             </a:r>
           </a:p>
         </p:txBody>
@@ -7184,91 +8887,91 @@
                   <a:srgbClr val="000000"/>
                 </a:solidFill>
               </a:rPr>
-              <a:t>loc</a:t>
-            </a:r>
-            <a:r>
-              <a:rPr lang="ru-RU" dirty="0" sz="2000">
-                <a:solidFill>
-                  <a:srgbClr val="000000"/>
-                </a:solidFill>
-              </a:rPr>
-              <a:t xml:space="preserve"> — по меткам (label-based): `df.loc[3, 'Age']`, срезы включают конец</a:t>
-            </a:r>
-          </a:p>
-          <a:p>
-            <a:pPr>
-              <a:spcAft>
-                <a:spcPts val="800"/>
-              </a:spcAft>
-            </a:pPr>
+              <a:t>View</a:t>
+            </a:r>
+            <a:r>
+              <a:rPr lang="ru-RU" dirty="0" sz="2000">
+                <a:solidFill>
+                  <a:srgbClr val="000000"/>
+                </a:solidFill>
+              </a:rPr>
+              <a:t xml:space="preserve"> — разделяет память с оригиналом; </a:t>
+            </a:r>
             <a:r>
               <a:rPr lang="ru-RU" dirty="0" sz="2000" b="1">
                 <a:solidFill>
                   <a:srgbClr val="000000"/>
                 </a:solidFill>
               </a:rPr>
-              <a:t>iloc</a:t>
-            </a:r>
-            <a:r>
-              <a:rPr lang="ru-RU" dirty="0" sz="2000">
-                <a:solidFill>
-                  <a:srgbClr val="000000"/>
-                </a:solidFill>
-              </a:rPr>
-              <a:t xml:space="preserve"> — по позициям (integer): `df.iloc[0:5, 1:3]`, как NumPy</a:t>
-            </a:r>
-          </a:p>
-          <a:p>
-            <a:pPr>
-              <a:spcAft>
-                <a:spcPts val="800"/>
-              </a:spcAft>
-            </a:pPr>
-            <a:r>
-              <a:rPr lang="ru-RU" dirty="0" sz="2000">
-                <a:solidFill>
-                  <a:srgbClr val="000000"/>
-                </a:solidFill>
-              </a:rPr>
-              <a:t>Срезы: `loc['a':'c']` включает 'c'; `iloc[0:3]` — не включает 3</a:t>
-            </a:r>
-          </a:p>
-          <a:p>
-            <a:pPr>
-              <a:spcAft>
-                <a:spcPts val="800"/>
-              </a:spcAft>
-            </a:pPr>
-            <a:r>
-              <a:rPr lang="ru-RU" dirty="0" sz="2000">
-                <a:solidFill>
-                  <a:srgbClr val="000000"/>
-                </a:solidFill>
-              </a:rPr>
-              <a:t xml:space="preserve">Булевы маски работают с </a:t>
-            </a:r>
+              <a:t>Copy</a:t>
+            </a:r>
+            <a:r>
+              <a:rPr lang="ru-RU" dirty="0" sz="2000">
+                <a:solidFill>
+                  <a:srgbClr val="000000"/>
+                </a:solidFill>
+              </a:rPr>
+              <a:t xml:space="preserve"> — независимые данные</a:t>
+            </a:r>
+          </a:p>
+          <a:p>
+            <a:pPr>
+              <a:spcAft>
+                <a:spcPts val="800"/>
+              </a:spcAft>
+            </a:pPr>
+            <a:r>
+              <a:rPr lang="ru-RU" dirty="0" sz="2000">
+                <a:solidFill>
+                  <a:srgbClr val="000000"/>
+                </a:solidFill>
+              </a:rPr>
+              <a:t>Исторически pandas решает «по ситуации» → неопределённость</a:t>
+            </a:r>
+          </a:p>
+          <a:p>
+            <a:pPr>
+              <a:spcAft>
+                <a:spcPts val="800"/>
+              </a:spcAft>
+            </a:pPr>
             <a:r>
               <a:rPr lang="ru-RU" dirty="0" sz="2000" b="1">
                 <a:solidFill>
                   <a:srgbClr val="000000"/>
                 </a:solidFill>
               </a:rPr>
-              <a:t>loc</a:t>
-            </a:r>
-            <a:r>
-              <a:rPr lang="ru-RU" dirty="0" sz="2000">
-                <a:solidFill>
-                  <a:srgbClr val="000000"/>
-                </a:solidFill>
-              </a:rPr>
-              <a:t>: `df.loc[df['Age'] &gt; 30, ['Name','Age']]`</a:t>
+              <a:t>Copy-on-Write</a:t>
+            </a:r>
+            <a:r>
+              <a:rPr lang="ru-RU" dirty="0" sz="2000">
+                <a:solidFill>
+                  <a:srgbClr val="000000"/>
+                </a:solidFill>
+              </a:rPr>
+              <a:t xml:space="preserve"> (pandas 2.0+): `pd.options.mode.copy_on_write = True`</a:t>
+            </a:r>
+          </a:p>
+          <a:p>
+            <a:pPr>
+              <a:spcAft>
+                <a:spcPts val="800"/>
+              </a:spcAft>
+            </a:pPr>
+            <a:r>
+              <a:rPr lang="ru-RU" dirty="0" sz="2000">
+                <a:solidFill>
+                  <a:srgbClr val="000000"/>
+                </a:solidFill>
+              </a:rPr>
+              <a:t>Для ML: `.copy()` при создании новых признаков, если не уверены</a:t>
             </a:r>
           </a:p>
         </p:txBody>
       </p:sp>
       <p:pic>
         <p:nvPicPr>
-          <p:cNvPr id="4" name="Picture 3" descr="loc_vs_iloc.png"/>
+          <p:cNvPr id="4" name="Picture 3" descr="view_vs_copy.png"/>
           <p:cNvPicPr>
             <a:picLocks noChangeAspect="1"/>
           </p:cNvPicPr>
@@ -7282,8 +8985,8 @@
         </p:blipFill>
         <p:spPr>
           <a:xfrm>
-            <a:off x="7635240" y="2775910"/>
-            <a:ext cx="4343400" cy="1580498"/>
+            <a:off x="7635240" y="2873949"/>
+            <a:ext cx="4343400" cy="1384422"/>
           </a:xfrm>
           <a:prstGeom prst="rect">
             <a:avLst/>
@@ -7336,7 +9039,7 @@
                   <a:srgbClr val="1A1A2E"/>
                 </a:solidFill>
               </a:rPr>
-              <a:t>Фильтрация и булевы маски</a:t>
+              <a:t>Пропуски: NaN, None, NaT и эволюция типов</a:t>
             </a:r>
           </a:p>
         </p:txBody>
@@ -7374,59 +9077,91 @@
                   <a:srgbClr val="000000"/>
                 </a:solidFill>
               </a:rPr>
-              <a:t>Условие даёт Series bool: `df['Age'] &gt; 18`</a:t>
-            </a:r>
-          </a:p>
-          <a:p>
-            <a:pPr>
-              <a:spcAft>
-                <a:spcPts val="800"/>
-              </a:spcAft>
-            </a:pPr>
-            <a:r>
-              <a:rPr lang="ru-RU" dirty="0" sz="2000">
-                <a:solidFill>
-                  <a:srgbClr val="000000"/>
-                </a:solidFill>
-              </a:rPr>
-              <a:t>Несколько условий: `&amp;` (и), `|` (или); каждое в скобках: `(A) &amp; (B)`</a:t>
-            </a:r>
-          </a:p>
-          <a:p>
-            <a:pPr>
-              <a:spcAft>
-                <a:spcPts val="800"/>
-              </a:spcAft>
-            </a:pPr>
-            <a:r>
-              <a:rPr lang="ru-RU" dirty="0" sz="2000">
-                <a:solidFill>
-                  <a:srgbClr val="000000"/>
-                </a:solidFill>
-              </a:rPr>
-              <a:t>`.isin([...])`, `.between(a, b)`, `.str.contains(...)` для строк</a:t>
-            </a:r>
-          </a:p>
-          <a:p>
-            <a:pPr>
-              <a:spcAft>
-                <a:spcPts val="800"/>
-              </a:spcAft>
-            </a:pPr>
-            <a:r>
-              <a:rPr lang="ru-RU" dirty="0" sz="2000">
-                <a:solidFill>
-                  <a:srgbClr val="000000"/>
-                </a:solidFill>
-              </a:rPr>
-              <a:t>`.query('Age &gt; 18 and Pclass == 1')` — альтернативный синтаксис</a:t>
+              <a:t>Разные «пустые»: `np.nan` (числа), `None` (object), `pd.NaT` (время)</a:t>
+            </a:r>
+          </a:p>
+          <a:p>
+            <a:pPr>
+              <a:spcAft>
+                <a:spcPts val="800"/>
+              </a:spcAft>
+            </a:pPr>
+            <a:r>
+              <a:rPr lang="ru-RU" dirty="0" sz="2000">
+                <a:solidFill>
+                  <a:srgbClr val="000000"/>
+                </a:solidFill>
+              </a:rPr>
+              <a:t>`df.isnull().sum()` — первый шаг диагностики</a:t>
+            </a:r>
+          </a:p>
+          <a:p>
+            <a:pPr>
+              <a:spcAft>
+                <a:spcPts val="800"/>
+              </a:spcAft>
+            </a:pPr>
+            <a:r>
+              <a:rPr lang="ru-RU" dirty="0" sz="2000">
+                <a:solidFill>
+                  <a:srgbClr val="000000"/>
+                </a:solidFill>
+              </a:rPr>
+              <a:t xml:space="preserve">Раньше пропуск в `int64` → весь столбец во `float64`; сейчас </a:t>
+            </a:r>
+            <a:r>
+              <a:rPr lang="ru-RU" dirty="0" sz="2000" b="1">
+                <a:solidFill>
+                  <a:srgbClr val="000000"/>
+                </a:solidFill>
+              </a:rPr>
+              <a:t>Nullable</a:t>
+            </a:r>
+            <a:r>
+              <a:rPr lang="ru-RU" dirty="0" sz="2000">
+                <a:solidFill>
+                  <a:srgbClr val="000000"/>
+                </a:solidFill>
+              </a:rPr>
+              <a:t xml:space="preserve"> (`Int64`, `boolean`, `pd.NA`)</a:t>
+            </a:r>
+          </a:p>
+          <a:p>
+            <a:pPr>
+              <a:spcAft>
+                <a:spcPts val="800"/>
+              </a:spcAft>
+            </a:pPr>
+            <a:r>
+              <a:rPr lang="ru-RU" dirty="0" sz="2000">
+                <a:solidFill>
+                  <a:srgbClr val="000000"/>
+                </a:solidFill>
+              </a:rPr>
+              <a:t xml:space="preserve">В ML: импутация только по </a:t>
+            </a:r>
+            <a:r>
+              <a:rPr lang="ru-RU" dirty="0" sz="2000" b="1">
+                <a:solidFill>
+                  <a:srgbClr val="000000"/>
+                </a:solidFill>
+              </a:rPr>
+              <a:t>Train</a:t>
+            </a:r>
+            <a:r>
+              <a:rPr lang="ru-RU" dirty="0" sz="2000">
+                <a:solidFill>
+                  <a:srgbClr val="000000"/>
+                </a:solidFill>
+              </a:rPr>
+              <a:t>, иначе утечка</a:t>
             </a:r>
           </a:p>
         </p:txBody>
       </p:sp>
       <p:pic>
         <p:nvPicPr>
-          <p:cNvPr id="4" name="Picture 3" descr="boolean_filter.png"/>
+          <p:cNvPr id="4" name="Picture 3" descr="missing_counts.png"/>
           <p:cNvPicPr>
             <a:picLocks noChangeAspect="1"/>
           </p:cNvPicPr>
@@ -7440,8 +9175,32 @@
         </p:blipFill>
         <p:spPr>
           <a:xfrm>
-            <a:off x="7635240" y="1940418"/>
-            <a:ext cx="4343400" cy="3251484"/>
+            <a:off x="8203431" y="1325880"/>
+            <a:ext cx="3207016" cy="2203704"/>
+          </a:xfrm>
+          <a:prstGeom prst="rect">
+            <a:avLst/>
+          </a:prstGeom>
+        </p:spPr>
+      </p:pic>
+      <p:pic>
+        <p:nvPicPr>
+          <p:cNvPr id="5" name="Picture 4" descr="nullable_int_types.png"/>
+          <p:cNvPicPr>
+            <a:picLocks noChangeAspect="1"/>
+          </p:cNvPicPr>
+          <p:nvPr/>
+        </p:nvPicPr>
+        <p:blipFill>
+          <a:blip r:embed="rId3"/>
+          <a:stretch>
+            <a:fillRect/>
+          </a:stretch>
+        </p:blipFill>
+        <p:spPr>
+          <a:xfrm>
+            <a:off x="7635240" y="3795127"/>
+            <a:ext cx="4343400" cy="1818920"/>
           </a:xfrm>
           <a:prstGeom prst="rect">
             <a:avLst/>
@@ -7494,7 +9253,7 @@
                   <a:srgbClr val="1A1A2E"/>
                 </a:solidFill>
               </a:rPr>
-              <a:t>groupby и агрегации</a:t>
+              <a:t>Базовая аналитика: `value_counts()`, `nunique()`, `corr()`</a:t>
             </a:r>
           </a:p>
         </p:txBody>
@@ -7532,59 +9291,74 @@
                   <a:srgbClr val="000000"/>
                 </a:solidFill>
               </a:rPr>
-              <a:t>«Разбить по ключу → применить функцию → собрать» — `df.groupby('Pclass')`</a:t>
-            </a:r>
-          </a:p>
-          <a:p>
-            <a:pPr>
-              <a:spcAft>
-                <a:spcPts val="800"/>
-              </a:spcAft>
-            </a:pPr>
-            <a:r>
-              <a:rPr lang="ru-RU" dirty="0" sz="2000">
-                <a:solidFill>
-                  <a:srgbClr val="000000"/>
-                </a:solidFill>
-              </a:rPr>
-              <a:t>`.agg({'Age':'mean', 'Fare':'sum'})` — разные функции по столбцам</a:t>
-            </a:r>
-          </a:p>
-          <a:p>
-            <a:pPr>
-              <a:spcAft>
-                <a:spcPts val="800"/>
-              </a:spcAft>
-            </a:pPr>
-            <a:r>
-              <a:rPr lang="ru-RU" dirty="0" sz="2000">
-                <a:solidFill>
-                  <a:srgbClr val="000000"/>
-                </a:solidFill>
-              </a:rPr>
-              <a:t>`.mean()`, `.size()`, `.count()` — частые сокращения</a:t>
-            </a:r>
-          </a:p>
-          <a:p>
-            <a:pPr>
-              <a:spcAft>
-                <a:spcPts val="800"/>
-              </a:spcAft>
-            </a:pPr>
-            <a:r>
-              <a:rPr lang="ru-RU" dirty="0" sz="2000">
-                <a:solidFill>
-                  <a:srgbClr val="000000"/>
-                </a:solidFill>
-              </a:rPr>
-              <a:t>Несколько ключей: `groupby(['Pclass','Sex'])` — вложенные группы</a:t>
+              <a:t>`value_counts()` — частоты категорий, дисбаланс классов, мусорные категории</a:t>
+            </a:r>
+          </a:p>
+          <a:p>
+            <a:pPr>
+              <a:spcAft>
+                <a:spcPts val="800"/>
+              </a:spcAft>
+            </a:pPr>
+            <a:r>
+              <a:rPr lang="ru-RU" dirty="0" sz="2000">
+                <a:solidFill>
+                  <a:srgbClr val="000000"/>
+                </a:solidFill>
+              </a:rPr>
+              <a:t>`nunique()` — кардинальность: 100k уникальных из 100k строк → признак-ID, удалить</a:t>
+            </a:r>
+          </a:p>
+          <a:p>
+            <a:pPr>
+              <a:spcAft>
+                <a:spcPts val="800"/>
+              </a:spcAft>
+            </a:pPr>
+            <a:r>
+              <a:rPr lang="ru-RU" dirty="0" sz="2000">
+                <a:solidFill>
+                  <a:srgbClr val="000000"/>
+                </a:solidFill>
+              </a:rPr>
+              <a:t xml:space="preserve">`corr()` — мультиколлинеарность (корреляция </a:t>
+            </a:r>
+            <ns0:m xmlns:ns0="http://schemas.microsoft.com/office/drawing/2010/main">
+              <m:oMath xmlns:m="http://schemas.openxmlformats.org/officeDocument/2006/math">
+                <m:r>
+                  <m:t>&gt;0.9</m:t>
+                </m:r>
+              </m:oMath>
+            </ns0:m>
+            <a:r>
+              <a:rPr lang="ru-RU" dirty="0" sz="2000">
+                <a:solidFill>
+                  <a:srgbClr val="000000"/>
+                </a:solidFill>
+              </a:rPr>
+              <a:t>) перед линейными моделями</a:t>
+            </a:r>
+          </a:p>
+          <a:p>
+            <a:pPr>
+              <a:spcAft>
+                <a:spcPts val="800"/>
+              </a:spcAft>
+            </a:pPr>
+            <a:r>
+              <a:rPr lang="ru-RU" dirty="0" sz="2000">
+                <a:solidFill>
+                  <a:srgbClr val="000000"/>
+                </a:solidFill>
+              </a:rPr>
+              <a:t>`describe(include='all')` — числа и категории в одном отчёте</a:t>
             </a:r>
           </a:p>
         </p:txBody>
       </p:sp>
       <p:pic>
         <p:nvPicPr>
-          <p:cNvPr id="4" name="Picture 3" descr="groupby_fare_pclass.png"/>
+          <p:cNvPr id="4" name="Picture 3" descr="corr_heatmap.png"/>
           <p:cNvPicPr>
             <a:picLocks noChangeAspect="1"/>
           </p:cNvPicPr>
@@ -7598,8 +9372,32 @@
         </p:blipFill>
         <p:spPr>
           <a:xfrm>
-            <a:off x="7635240" y="2112450"/>
-            <a:ext cx="4343400" cy="2907419"/>
+            <a:off x="8528247" y="1325880"/>
+            <a:ext cx="2557384" cy="2203703"/>
+          </a:xfrm>
+          <a:prstGeom prst="rect">
+            <a:avLst/>
+          </a:prstGeom>
+        </p:spPr>
+      </p:pic>
+      <p:pic>
+        <p:nvPicPr>
+          <p:cNvPr id="5" name="Picture 4" descr="value_counts_bar.png"/>
+          <p:cNvPicPr>
+            <a:picLocks noChangeAspect="1"/>
+          </p:cNvPicPr>
+          <p:nvPr/>
+        </p:nvPicPr>
+        <p:blipFill>
+          <a:blip r:embed="rId3"/>
+          <a:stretch>
+            <a:fillRect/>
+          </a:stretch>
+        </p:blipFill>
+        <p:spPr>
+          <a:xfrm>
+            <a:off x="8203431" y="3602735"/>
+            <a:ext cx="3207016" cy="2203704"/>
           </a:xfrm>
           <a:prstGeom prst="rect">
             <a:avLst/>

--- a/lessons/pandas/presentation.pptx
+++ b/lessons/pandas/presentation.pptx
@@ -37,6 +37,7 @@
     <p:sldId id="285" r:id="rId37"/>
     <p:sldId id="286" r:id="rId38"/>
     <p:sldId id="287" r:id="rId39"/>
+    <p:sldId id="288" r:id="rId40"/>
   </p:sldIdLst>
   <p:sldSz cx="12191695" cy="6858000" type="screen4x3"/>
   <p:notesSz cx="6858000" cy="9144000"/>
@@ -744,6 +745,76 @@
           <a:p>
             <a:r>
               <a:t>Пройти пункты вслух на реальном датасете.</a:t>
+            </a:r>
+          </a:p>
+        </p:txBody>
+      </p:sp>
+      <p:sp>
+        <p:nvSpPr>
+          <p:cNvPr id="4" name="Slide Number Placeholder 3"/>
+          <p:cNvSpPr>
+            <a:spLocks noGrp="1"/>
+          </p:cNvSpPr>
+          <p:nvPr>
+            <p:ph type="sldNum" idx="5" sz="quarter"/>
+          </p:nvPr>
+        </p:nvSpPr>
+        <p:spPr/>
+      </p:sp>
+    </p:spTree>
+  </p:cSld>
+  <p:clrMapOvr>
+    <a:masterClrMapping/>
+  </p:clrMapOvr>
+</p:notes>
+</file>
+
+<file path=ppt/notesSlides/notesSlide5.xml><?xml version="1.0" encoding="utf-8"?>
+<p:notes xmlns:a="http://schemas.openxmlformats.org/drawingml/2006/main" xmlns:p="http://schemas.openxmlformats.org/presentationml/2006/main" xmlns:r="http://schemas.openxmlformats.org/officeDocument/2006/relationships">
+  <p:cSld>
+    <p:spTree>
+      <p:nvGrpSpPr>
+        <p:cNvPr id="1" name=""/>
+        <p:cNvGrpSpPr/>
+        <p:nvPr/>
+      </p:nvGrpSpPr>
+      <p:grpSpPr>
+        <a:xfrm>
+          <a:off x="0" y="0"/>
+          <a:ext cx="0" cy="0"/>
+          <a:chOff x="0" y="0"/>
+          <a:chExt cx="0" cy="0"/>
+        </a:xfrm>
+      </p:grpSpPr>
+      <p:sp>
+        <p:nvSpPr>
+          <p:cNvPr id="2" name="Slide Image Placeholder 1"/>
+          <p:cNvSpPr>
+            <a:spLocks noGrp="1"/>
+          </p:cNvSpPr>
+          <p:nvPr>
+            <p:ph type="sldImg" idx="2"/>
+          </p:nvPr>
+        </p:nvSpPr>
+        <p:spPr/>
+      </p:sp>
+      <p:sp>
+        <p:nvSpPr>
+          <p:cNvPr id="3" name="Notes Placeholder 2"/>
+          <p:cNvSpPr>
+            <a:spLocks noGrp="1"/>
+          </p:cNvSpPr>
+          <p:nvPr>
+            <p:ph type="body" idx="3" sz="quarter"/>
+          </p:nvPr>
+        </p:nvSpPr>
+        <p:spPr/>
+        <p:txBody>
+          <a:bodyPr/>
+          <a:lstStyle/>
+          <a:p>
+            <a:r>
+              <a:t>Colab-ссылки обновляются агентом при --apply.</a:t>
             </a:r>
           </a:p>
         </p:txBody>
@@ -8277,6 +8348,470 @@
                 </a:solidFill>
               </a:rPr>
               <a:t>Проверка NaN/inf; Pipeline; `del` + `gc.collect()`</a:t>
+            </a:r>
+          </a:p>
+        </p:txBody>
+      </p:sp>
+    </p:spTree>
+  </p:cSld>
+  <p:clrMapOvr>
+    <a:masterClrMapping/>
+  </p:clrMapOvr>
+</p:sld>
+</file>
+
+<file path=ppt/slides/slide33.xml><?xml version="1.0" encoding="utf-8"?>
+<p:sld xmlns:a="http://schemas.openxmlformats.org/drawingml/2006/main" xmlns:p="http://schemas.openxmlformats.org/presentationml/2006/main" xmlns:r="http://schemas.openxmlformats.org/officeDocument/2006/relationships">
+  <p:cSld>
+    <p:spTree>
+      <p:nvGrpSpPr>
+        <p:cNvPr id="1" name=""/>
+        <p:cNvGrpSpPr/>
+        <p:nvPr/>
+      </p:nvGrpSpPr>
+      <p:grpSpPr/>
+      <p:sp>
+        <p:nvSpPr>
+          <p:cNvPr id="2" name="TextBox 1"/>
+          <p:cNvSpPr txBox="1"/>
+          <p:nvPr/>
+        </p:nvSpPr>
+        <p:spPr>
+          <a:xfrm>
+            <a:off x="457200" y="274320"/>
+            <a:ext cx="11247120" cy="914400"/>
+          </a:xfrm>
+          <a:prstGeom prst="rect">
+            <a:avLst/>
+          </a:prstGeom>
+          <a:noFill/>
+        </p:spPr>
+        <p:txBody>
+          <a:bodyPr wrap="square">
+            <a:spAutoFit/>
+          </a:bodyPr>
+          <a:lstStyle/>
+          <a:p>
+            <a:r>
+              <a:rPr lang="ru-RU" dirty="0" sz="3200" b="1">
+                <a:solidFill>
+                  <a:srgbClr val="1A1A2E"/>
+                </a:solidFill>
+              </a:rPr>
+              <a:t>Источники и практика</a:t>
+            </a:r>
+          </a:p>
+        </p:txBody>
+      </p:sp>
+      <p:sp>
+        <p:nvSpPr>
+          <p:cNvPr id="3" name="TextBox 2"/>
+          <p:cNvSpPr txBox="1"/>
+          <p:nvPr/>
+        </p:nvSpPr>
+        <p:spPr>
+          <a:xfrm>
+            <a:off x="640080" y="1325880"/>
+            <a:ext cx="6583680" cy="320040"/>
+          </a:xfrm>
+          <a:prstGeom prst="rect">
+            <a:avLst/>
+          </a:prstGeom>
+          <a:noFill/>
+        </p:spPr>
+        <p:txBody>
+          <a:bodyPr wrap="none">
+            <a:spAutoFit/>
+          </a:bodyPr>
+          <a:lstStyle/>
+          <a:p>
+            <a:pPr>
+              <a:defRPr sz="1800" b="1">
+                <a:solidFill>
+                  <a:srgbClr val="000000"/>
+                </a:solidFill>
+              </a:defRPr>
+            </a:pPr>
+            <a:r>
+              <a:t>Литература</a:t>
+            </a:r>
+          </a:p>
+        </p:txBody>
+      </p:sp>
+      <p:sp>
+        <p:nvSpPr>
+          <p:cNvPr id="4" name="TextBox 3"/>
+          <p:cNvSpPr txBox="1"/>
+          <p:nvPr/>
+        </p:nvSpPr>
+        <p:spPr>
+          <a:xfrm>
+            <a:off x="640080" y="1673352"/>
+            <a:ext cx="6583680" cy="566928"/>
+          </a:xfrm>
+          <a:prstGeom prst="rect">
+            <a:avLst/>
+          </a:prstGeom>
+          <a:noFill/>
+        </p:spPr>
+        <p:txBody>
+          <a:bodyPr wrap="square">
+            <a:spAutoFit/>
+          </a:bodyPr>
+          <a:lstStyle/>
+          <a:p>
+            <a:pPr>
+              <a:spcAft>
+                <a:spcPts val="400"/>
+              </a:spcAft>
+            </a:pPr>
+            <a:r>
+              <a:rPr lang="ru-RU" dirty="0" sz="1600">
+                <a:solidFill>
+                  <a:srgbClr val="000000"/>
+                </a:solidFill>
+              </a:rPr>
+              <a:t xml:space="preserve">• </a:t>
+            </a:r>
+            <a:r>
+              <a:rPr sz="1600">
+                <a:solidFill>
+                  <a:srgbClr val="3366CC"/>
+                </a:solidFill>
+                <a:hlinkClick r:id="rId2"/>
+              </a:rPr>
+              <a:t>McKinney W. (2010). Data Structures for Statistical Computing in Python</a:t>
+            </a:r>
+          </a:p>
+        </p:txBody>
+      </p:sp>
+      <p:sp>
+        <p:nvSpPr>
+          <p:cNvPr id="5" name="TextBox 4"/>
+          <p:cNvSpPr txBox="1"/>
+          <p:nvPr/>
+        </p:nvSpPr>
+        <p:spPr>
+          <a:xfrm>
+            <a:off x="640080" y="2240280"/>
+            <a:ext cx="6583680" cy="566928"/>
+          </a:xfrm>
+          <a:prstGeom prst="rect">
+            <a:avLst/>
+          </a:prstGeom>
+          <a:noFill/>
+        </p:spPr>
+        <p:txBody>
+          <a:bodyPr wrap="square">
+            <a:spAutoFit/>
+          </a:bodyPr>
+          <a:lstStyle/>
+          <a:p>
+            <a:pPr>
+              <a:spcAft>
+                <a:spcPts val="400"/>
+              </a:spcAft>
+            </a:pPr>
+            <a:r>
+              <a:rPr lang="ru-RU" dirty="0" sz="1600">
+                <a:solidFill>
+                  <a:srgbClr val="000000"/>
+                </a:solidFill>
+              </a:rPr>
+              <a:t xml:space="preserve">• </a:t>
+            </a:r>
+            <a:r>
+              <a:rPr sz="1600">
+                <a:solidFill>
+                  <a:srgbClr val="3366CC"/>
+                </a:solidFill>
+                <a:hlinkClick r:id="rId3"/>
+              </a:rPr>
+              <a:t>Wickham H. (2014). Tidy Data</a:t>
+            </a:r>
+          </a:p>
+        </p:txBody>
+      </p:sp>
+      <p:sp>
+        <p:nvSpPr>
+          <p:cNvPr id="6" name="TextBox 5"/>
+          <p:cNvSpPr txBox="1"/>
+          <p:nvPr/>
+        </p:nvSpPr>
+        <p:spPr>
+          <a:xfrm>
+            <a:off x="640080" y="2807208"/>
+            <a:ext cx="6583680" cy="566928"/>
+          </a:xfrm>
+          <a:prstGeom prst="rect">
+            <a:avLst/>
+          </a:prstGeom>
+          <a:noFill/>
+        </p:spPr>
+        <p:txBody>
+          <a:bodyPr wrap="square">
+            <a:spAutoFit/>
+          </a:bodyPr>
+          <a:lstStyle/>
+          <a:p>
+            <a:pPr>
+              <a:spcAft>
+                <a:spcPts val="400"/>
+              </a:spcAft>
+            </a:pPr>
+            <a:r>
+              <a:rPr lang="ru-RU" dirty="0" sz="1600">
+                <a:solidFill>
+                  <a:srgbClr val="000000"/>
+                </a:solidFill>
+              </a:rPr>
+              <a:t xml:space="preserve">• </a:t>
+            </a:r>
+            <a:r>
+              <a:rPr sz="1600">
+                <a:solidFill>
+                  <a:srgbClr val="3366CC"/>
+                </a:solidFill>
+                <a:hlinkClick r:id="rId4"/>
+              </a:rPr>
+              <a:t>Reback J., McKinney W., et al. (2020). pandas: powerful Python data analysis toolkit</a:t>
+            </a:r>
+          </a:p>
+        </p:txBody>
+      </p:sp>
+      <p:sp>
+        <p:nvSpPr>
+          <p:cNvPr id="7" name="TextBox 6"/>
+          <p:cNvSpPr txBox="1"/>
+          <p:nvPr/>
+        </p:nvSpPr>
+        <p:spPr>
+          <a:xfrm>
+            <a:off x="640080" y="3374136"/>
+            <a:ext cx="6583680" cy="320040"/>
+          </a:xfrm>
+          <a:prstGeom prst="rect">
+            <a:avLst/>
+          </a:prstGeom>
+          <a:noFill/>
+        </p:spPr>
+        <p:txBody>
+          <a:bodyPr wrap="none">
+            <a:spAutoFit/>
+          </a:bodyPr>
+          <a:lstStyle/>
+          <a:p>
+            <a:pPr>
+              <a:defRPr sz="1800" b="1">
+                <a:solidFill>
+                  <a:srgbClr val="000000"/>
+                </a:solidFill>
+              </a:defRPr>
+            </a:pPr>
+            <a:r>
+              <a:t>Практика в Colab</a:t>
+            </a:r>
+          </a:p>
+        </p:txBody>
+      </p:sp>
+      <p:sp>
+        <p:nvSpPr>
+          <p:cNvPr id="8" name="TextBox 7"/>
+          <p:cNvSpPr txBox="1"/>
+          <p:nvPr/>
+        </p:nvSpPr>
+        <p:spPr>
+          <a:xfrm>
+            <a:off x="640080" y="3721608"/>
+            <a:ext cx="6583680" cy="457200"/>
+          </a:xfrm>
+          <a:prstGeom prst="rect">
+            <a:avLst/>
+          </a:prstGeom>
+          <a:noFill/>
+        </p:spPr>
+        <p:txBody>
+          <a:bodyPr wrap="square">
+            <a:spAutoFit/>
+          </a:bodyPr>
+          <a:lstStyle/>
+          <a:p>
+            <a:r>
+              <a:rPr lang="ru-RU" dirty="0" sz="1500">
+                <a:solidFill>
+                  <a:srgbClr val="000000"/>
+                </a:solidFill>
+              </a:rPr>
+              <a:t xml:space="preserve">• Примеры по слайдам: </a:t>
+            </a:r>
+            <a:r>
+              <a:rPr sz="1400">
+                <a:solidFill>
+                  <a:srgbClr val="3366CC"/>
+                </a:solidFill>
+                <a:hlinkClick r:id="rId5"/>
+              </a:rPr>
+              <a:t>https://colab.research.google.com/github/gurovic/ml-lessons/blob/feature/references-and-slide-code/lessons/pandas/code.ipynb</a:t>
+            </a:r>
+          </a:p>
+        </p:txBody>
+      </p:sp>
+      <p:sp>
+        <p:nvSpPr>
+          <p:cNvPr id="9" name="TextBox 8"/>
+          <p:cNvSpPr txBox="1"/>
+          <p:nvPr/>
+        </p:nvSpPr>
+        <p:spPr>
+          <a:xfrm>
+            <a:off x="640080" y="4178808"/>
+            <a:ext cx="6583680" cy="457200"/>
+          </a:xfrm>
+          <a:prstGeom prst="rect">
+            <a:avLst/>
+          </a:prstGeom>
+          <a:noFill/>
+        </p:spPr>
+        <p:txBody>
+          <a:bodyPr wrap="square">
+            <a:spAutoFit/>
+          </a:bodyPr>
+          <a:lstStyle/>
+          <a:p>
+            <a:r>
+              <a:rPr lang="ru-RU" dirty="0" sz="1500">
+                <a:solidFill>
+                  <a:srgbClr val="000000"/>
+                </a:solidFill>
+              </a:rPr>
+              <a:t xml:space="preserve">• Мини-проект: </a:t>
+            </a:r>
+            <a:r>
+              <a:rPr sz="1400">
+                <a:solidFill>
+                  <a:srgbClr val="3366CC"/>
+                </a:solidFill>
+                <a:hlinkClick r:id="rId6"/>
+              </a:rPr>
+              <a:t>https://colab.research.google.com/github/gurovic/ml-lessons/blob/feature/references-and-slide-code/lessons/pandas/project.ipynb</a:t>
+            </a:r>
+          </a:p>
+        </p:txBody>
+      </p:sp>
+      <p:pic>
+        <p:nvPicPr>
+          <p:cNvPr id="10" name="Picture 9" descr="_qr_ref_32_0.png"/>
+          <p:cNvPicPr>
+            <a:picLocks noChangeAspect="1"/>
+          </p:cNvPicPr>
+          <p:nvPr/>
+        </p:nvPicPr>
+        <p:blipFill>
+          <a:blip r:embed="rId7"/>
+          <a:stretch>
+            <a:fillRect/>
+          </a:stretch>
+        </p:blipFill>
+        <p:spPr>
+          <a:xfrm>
+            <a:off x="8229600" y="1463040"/>
+            <a:ext cx="1051560" cy="1051560"/>
+          </a:xfrm>
+          <a:prstGeom prst="rect">
+            <a:avLst/>
+          </a:prstGeom>
+        </p:spPr>
+      </p:pic>
+      <p:sp>
+        <p:nvSpPr>
+          <p:cNvPr id="11" name="TextBox 10"/>
+          <p:cNvSpPr txBox="1"/>
+          <p:nvPr/>
+        </p:nvSpPr>
+        <p:spPr>
+          <a:xfrm>
+            <a:off x="8138160" y="2532888"/>
+            <a:ext cx="1417319" cy="274320"/>
+          </a:xfrm>
+          <a:prstGeom prst="rect">
+            <a:avLst/>
+          </a:prstGeom>
+          <a:noFill/>
+        </p:spPr>
+        <p:txBody>
+          <a:bodyPr wrap="none">
+            <a:spAutoFit/>
+          </a:bodyPr>
+          <a:lstStyle/>
+          <a:p>
+            <a:pPr algn="ctr">
+              <a:defRPr sz="1000">
+                <a:solidFill>
+                  <a:srgbClr val="555555"/>
+                </a:solidFill>
+              </a:defRPr>
+            </a:pPr>
+            <a:r>
+              <a:t>Примеры по слайдам</a:t>
+            </a:r>
+          </a:p>
+        </p:txBody>
+      </p:sp>
+      <p:pic>
+        <p:nvPicPr>
+          <p:cNvPr id="12" name="Picture 11" descr="_qr_ref_32_1.png"/>
+          <p:cNvPicPr>
+            <a:picLocks noChangeAspect="1"/>
+          </p:cNvPicPr>
+          <p:nvPr/>
+        </p:nvPicPr>
+        <p:blipFill>
+          <a:blip r:embed="rId8"/>
+          <a:stretch>
+            <a:fillRect/>
+          </a:stretch>
+        </p:blipFill>
+        <p:spPr>
+          <a:xfrm>
+            <a:off x="8229600" y="3063240"/>
+            <a:ext cx="1051560" cy="1051560"/>
+          </a:xfrm>
+          <a:prstGeom prst="rect">
+            <a:avLst/>
+          </a:prstGeom>
+        </p:spPr>
+      </p:pic>
+      <p:sp>
+        <p:nvSpPr>
+          <p:cNvPr id="13" name="TextBox 12"/>
+          <p:cNvSpPr txBox="1"/>
+          <p:nvPr/>
+        </p:nvSpPr>
+        <p:spPr>
+          <a:xfrm>
+            <a:off x="8138160" y="4133087"/>
+            <a:ext cx="1417319" cy="274320"/>
+          </a:xfrm>
+          <a:prstGeom prst="rect">
+            <a:avLst/>
+          </a:prstGeom>
+          <a:noFill/>
+        </p:spPr>
+        <p:txBody>
+          <a:bodyPr wrap="none">
+            <a:spAutoFit/>
+          </a:bodyPr>
+          <a:lstStyle/>
+          <a:p>
+            <a:pPr algn="ctr">
+              <a:defRPr sz="1000">
+                <a:solidFill>
+                  <a:srgbClr val="555555"/>
+                </a:solidFill>
+              </a:defRPr>
+            </a:pPr>
+            <a:r>
+              <a:t>Мини-проект</a:t>
             </a:r>
           </a:p>
         </p:txBody>

--- a/lessons/pandas/presentation.pptx
+++ b/lessons/pandas/presentation.pptx
@@ -4020,7 +4020,7 @@
         <p:spPr>
           <a:xfrm>
             <a:off x="640080" y="1371600"/>
-            <a:ext cx="6858000" cy="5029200"/>
+            <a:ext cx="6858000" cy="1810512"/>
           </a:xfrm>
           <a:prstGeom prst="rect">
             <a:avLst/>
@@ -4110,9 +4110,144 @@
           </a:p>
         </p:txBody>
       </p:sp>
+      <p:sp>
+        <p:nvSpPr>
+          <p:cNvPr id="4" name="Rectangle 3"/>
+          <p:cNvSpPr/>
+          <p:nvPr/>
+        </p:nvSpPr>
+        <p:spPr>
+          <a:xfrm>
+            <a:off x="640080" y="3291840"/>
+            <a:ext cx="6766560" cy="457200"/>
+          </a:xfrm>
+          <a:prstGeom prst="rect">
+            <a:avLst/>
+          </a:prstGeom>
+          <a:solidFill>
+            <a:srgbClr val="F5F5F5"/>
+          </a:solidFill>
+          <a:ln>
+            <a:solidFill>
+              <a:srgbClr val="DDDDDD"/>
+            </a:solidFill>
+          </a:ln>
+        </p:spPr>
+        <p:style>
+          <a:lnRef idx="1">
+            <a:schemeClr val="accent1"/>
+          </a:lnRef>
+          <a:fillRef idx="3">
+            <a:schemeClr val="accent1"/>
+          </a:fillRef>
+          <a:effectRef idx="2">
+            <a:schemeClr val="accent1"/>
+          </a:effectRef>
+          <a:fontRef idx="minor">
+            <a:schemeClr val="lt1"/>
+          </a:fontRef>
+        </p:style>
+        <p:txBody>
+          <a:bodyPr rtlCol="0" anchor="ctr"/>
+          <a:lstStyle/>
+          <a:p>
+            <a:pPr algn="ctr"/>
+          </a:p>
+        </p:txBody>
+      </p:sp>
+      <p:sp>
+        <p:nvSpPr>
+          <p:cNvPr id="5" name="TextBox 4"/>
+          <p:cNvSpPr txBox="1"/>
+          <p:nvPr/>
+        </p:nvSpPr>
+        <p:spPr>
+          <a:xfrm>
+            <a:off x="713231" y="3328416"/>
+            <a:ext cx="6620256" cy="384048"/>
+          </a:xfrm>
+          <a:prstGeom prst="rect">
+            <a:avLst/>
+          </a:prstGeom>
+          <a:noFill/>
+        </p:spPr>
+        <p:txBody>
+          <a:bodyPr wrap="square">
+            <a:noAutofit/>
+          </a:bodyPr>
+          <a:lstStyle/>
+          <a:p>
+            <a:pPr>
+              <a:spcAft>
+                <a:spcPts val="0"/>
+              </a:spcAft>
+              <a:defRPr sz="1100">
+                <a:solidFill>
+                  <a:srgbClr val="000000"/>
+                </a:solidFill>
+                <a:latin typeface="Consolas"/>
+              </a:defRPr>
+            </a:pPr>
+            <a:r>
+              <a:t>df.groupby('city')['sales'].agg(['mean', 'count'])</a:t>
+            </a:r>
+          </a:p>
+          <a:p>
+            <a:pPr>
+              <a:spcAft>
+                <a:spcPts val="0"/>
+              </a:spcAft>
+              <a:defRPr sz="1100">
+                <a:solidFill>
+                  <a:srgbClr val="000000"/>
+                </a:solidFill>
+                <a:latin typeface="Consolas"/>
+              </a:defRPr>
+            </a:pPr>
+            <a:r>
+              <a:t>df.groupby('date')['amount'].sum().reset_index()</a:t>
+            </a:r>
+          </a:p>
+        </p:txBody>
+      </p:sp>
+      <p:sp>
+        <p:nvSpPr>
+          <p:cNvPr id="6" name="TextBox 5"/>
+          <p:cNvSpPr txBox="1"/>
+          <p:nvPr/>
+        </p:nvSpPr>
+        <p:spPr>
+          <a:xfrm>
+            <a:off x="640080" y="3803904"/>
+            <a:ext cx="6766560" cy="201168"/>
+          </a:xfrm>
+          <a:prstGeom prst="rect">
+            <a:avLst/>
+          </a:prstGeom>
+          <a:noFill/>
+        </p:spPr>
+        <p:txBody>
+          <a:bodyPr wrap="none">
+            <a:spAutoFit/>
+          </a:bodyPr>
+          <a:lstStyle/>
+          <a:p>
+            <a:pPr algn="l">
+              <a:defRPr sz="1000" i="1">
+                <a:solidFill>
+                  <a:srgbClr val="555555"/>
+                </a:solidFill>
+              </a:defRPr>
+            </a:pPr>
+            <a:r>
+              <a:t>groupby + agg</a:t>
+            </a:r>
+          </a:p>
+        </p:txBody>
+      </p:sp>
       <p:pic>
         <p:nvPicPr>
-          <p:cNvPr id="4" name="Picture 3" descr="agg_vs_transform.png"/>
+          <p:cNvPr id="7" name="Picture 6" descr="agg_vs_transform.png"/>
           <p:cNvPicPr>
             <a:picLocks noChangeAspect="1"/>
           </p:cNvPicPr>
@@ -4194,7 +4329,7 @@
         <p:spPr>
           <a:xfrm>
             <a:off x="640080" y="1371600"/>
-            <a:ext cx="6858000" cy="5029200"/>
+            <a:ext cx="6858000" cy="1810512"/>
           </a:xfrm>
           <a:prstGeom prst="rect">
             <a:avLst/>
@@ -4292,9 +4427,160 @@
           </a:p>
         </p:txBody>
       </p:sp>
+      <p:sp>
+        <p:nvSpPr>
+          <p:cNvPr id="4" name="Rectangle 3"/>
+          <p:cNvSpPr/>
+          <p:nvPr/>
+        </p:nvSpPr>
+        <p:spPr>
+          <a:xfrm>
+            <a:off x="640080" y="3291840"/>
+            <a:ext cx="6766560" cy="630936"/>
+          </a:xfrm>
+          <a:prstGeom prst="rect">
+            <a:avLst/>
+          </a:prstGeom>
+          <a:solidFill>
+            <a:srgbClr val="F5F5F5"/>
+          </a:solidFill>
+          <a:ln>
+            <a:solidFill>
+              <a:srgbClr val="DDDDDD"/>
+            </a:solidFill>
+          </a:ln>
+        </p:spPr>
+        <p:style>
+          <a:lnRef idx="1">
+            <a:schemeClr val="accent1"/>
+          </a:lnRef>
+          <a:fillRef idx="3">
+            <a:schemeClr val="accent1"/>
+          </a:fillRef>
+          <a:effectRef idx="2">
+            <a:schemeClr val="accent1"/>
+          </a:effectRef>
+          <a:fontRef idx="minor">
+            <a:schemeClr val="lt1"/>
+          </a:fontRef>
+        </p:style>
+        <p:txBody>
+          <a:bodyPr rtlCol="0" anchor="ctr"/>
+          <a:lstStyle/>
+          <a:p>
+            <a:pPr algn="ctr"/>
+          </a:p>
+        </p:txBody>
+      </p:sp>
+      <p:sp>
+        <p:nvSpPr>
+          <p:cNvPr id="5" name="TextBox 4"/>
+          <p:cNvSpPr txBox="1"/>
+          <p:nvPr/>
+        </p:nvSpPr>
+        <p:spPr>
+          <a:xfrm>
+            <a:off x="713231" y="3328416"/>
+            <a:ext cx="6620256" cy="557784"/>
+          </a:xfrm>
+          <a:prstGeom prst="rect">
+            <a:avLst/>
+          </a:prstGeom>
+          <a:noFill/>
+        </p:spPr>
+        <p:txBody>
+          <a:bodyPr wrap="square">
+            <a:noAutofit/>
+          </a:bodyPr>
+          <a:lstStyle/>
+          <a:p>
+            <a:pPr>
+              <a:spcAft>
+                <a:spcPts val="0"/>
+              </a:spcAft>
+              <a:defRPr sz="1100">
+                <a:solidFill>
+                  <a:srgbClr val="000000"/>
+                </a:solidFill>
+                <a:latin typeface="Consolas"/>
+              </a:defRPr>
+            </a:pPr>
+            <a:r>
+              <a:t>g = df.groupby(['city', 'year'])['sales'].mean()</a:t>
+            </a:r>
+          </a:p>
+          <a:p>
+            <a:pPr>
+              <a:spcAft>
+                <a:spcPts val="0"/>
+              </a:spcAft>
+              <a:defRPr sz="1100">
+                <a:solidFill>
+                  <a:srgbClr val="000000"/>
+                </a:solidFill>
+                <a:latin typeface="Consolas"/>
+              </a:defRPr>
+            </a:pPr>
+            <a:r>
+              <a:t>g.loc['MSK']          # срез по первому уровню</a:t>
+            </a:r>
+          </a:p>
+          <a:p>
+            <a:pPr>
+              <a:spcAft>
+                <a:spcPts val="0"/>
+              </a:spcAft>
+              <a:defRPr sz="1100">
+                <a:solidFill>
+                  <a:srgbClr val="000000"/>
+                </a:solidFill>
+                <a:latin typeface="Consolas"/>
+              </a:defRPr>
+            </a:pPr>
+            <a:r>
+              <a:t>g.reset_index()       # обратно в таблицу</a:t>
+            </a:r>
+          </a:p>
+        </p:txBody>
+      </p:sp>
+      <p:sp>
+        <p:nvSpPr>
+          <p:cNvPr id="6" name="TextBox 5"/>
+          <p:cNvSpPr txBox="1"/>
+          <p:nvPr/>
+        </p:nvSpPr>
+        <p:spPr>
+          <a:xfrm>
+            <a:off x="640080" y="3977639"/>
+            <a:ext cx="6766560" cy="201168"/>
+          </a:xfrm>
+          <a:prstGeom prst="rect">
+            <a:avLst/>
+          </a:prstGeom>
+          <a:noFill/>
+        </p:spPr>
+        <p:txBody>
+          <a:bodyPr wrap="none">
+            <a:spAutoFit/>
+          </a:bodyPr>
+          <a:lstStyle/>
+          <a:p>
+            <a:pPr algn="l">
+              <a:defRPr sz="1000" i="1">
+                <a:solidFill>
+                  <a:srgbClr val="555555"/>
+                </a:solidFill>
+              </a:defRPr>
+            </a:pPr>
+            <a:r>
+              <a:t>MultiIndex после groupby</a:t>
+            </a:r>
+          </a:p>
+        </p:txBody>
+      </p:sp>
       <p:pic>
         <p:nvPicPr>
-          <p:cNvPr id="4" name="Picture 3" descr="multiindex_reset.png"/>
+          <p:cNvPr id="7" name="Picture 6" descr="multiindex_reset.png"/>
           <p:cNvPicPr>
             <a:picLocks noChangeAspect="1"/>
           </p:cNvPicPr>
@@ -4376,7 +4662,7 @@
         <p:spPr>
           <a:xfrm>
             <a:off x="640080" y="1371600"/>
-            <a:ext cx="6858000" cy="5029200"/>
+            <a:ext cx="6858000" cy="1810512"/>
           </a:xfrm>
           <a:prstGeom prst="rect">
             <a:avLst/>
@@ -4474,9 +4760,160 @@
           </a:p>
         </p:txBody>
       </p:sp>
+      <p:sp>
+        <p:nvSpPr>
+          <p:cNvPr id="4" name="Rectangle 3"/>
+          <p:cNvSpPr/>
+          <p:nvPr/>
+        </p:nvSpPr>
+        <p:spPr>
+          <a:xfrm>
+            <a:off x="640080" y="3291840"/>
+            <a:ext cx="6766560" cy="630936"/>
+          </a:xfrm>
+          <a:prstGeom prst="rect">
+            <a:avLst/>
+          </a:prstGeom>
+          <a:solidFill>
+            <a:srgbClr val="F5F5F5"/>
+          </a:solidFill>
+          <a:ln>
+            <a:solidFill>
+              <a:srgbClr val="DDDDDD"/>
+            </a:solidFill>
+          </a:ln>
+        </p:spPr>
+        <p:style>
+          <a:lnRef idx="1">
+            <a:schemeClr val="accent1"/>
+          </a:lnRef>
+          <a:fillRef idx="3">
+            <a:schemeClr val="accent1"/>
+          </a:fillRef>
+          <a:effectRef idx="2">
+            <a:schemeClr val="accent1"/>
+          </a:effectRef>
+          <a:fontRef idx="minor">
+            <a:schemeClr val="lt1"/>
+          </a:fontRef>
+        </p:style>
+        <p:txBody>
+          <a:bodyPr rtlCol="0" anchor="ctr"/>
+          <a:lstStyle/>
+          <a:p>
+            <a:pPr algn="ctr"/>
+          </a:p>
+        </p:txBody>
+      </p:sp>
+      <p:sp>
+        <p:nvSpPr>
+          <p:cNvPr id="5" name="TextBox 4"/>
+          <p:cNvSpPr txBox="1"/>
+          <p:nvPr/>
+        </p:nvSpPr>
+        <p:spPr>
+          <a:xfrm>
+            <a:off x="713231" y="3328416"/>
+            <a:ext cx="6620256" cy="557784"/>
+          </a:xfrm>
+          <a:prstGeom prst="rect">
+            <a:avLst/>
+          </a:prstGeom>
+          <a:noFill/>
+        </p:spPr>
+        <p:txBody>
+          <a:bodyPr wrap="square">
+            <a:noAutofit/>
+          </a:bodyPr>
+          <a:lstStyle/>
+          <a:p>
+            <a:pPr>
+              <a:spcAft>
+                <a:spcPts val="0"/>
+              </a:spcAft>
+              <a:defRPr sz="1100">
+                <a:solidFill>
+                  <a:srgbClr val="000000"/>
+                </a:solidFill>
+                <a:latin typeface="Consolas"/>
+              </a:defRPr>
+            </a:pPr>
+            <a:r>
+              <a:t>df['color'] = df['color'].astype('category')</a:t>
+            </a:r>
+          </a:p>
+          <a:p>
+            <a:pPr>
+              <a:spcAft>
+                <a:spcPts val="0"/>
+              </a:spcAft>
+              <a:defRPr sz="1100">
+                <a:solidFill>
+                  <a:srgbClr val="000000"/>
+                </a:solidFill>
+                <a:latin typeface="Consolas"/>
+              </a:defRPr>
+            </a:pPr>
+            <a:r>
+              <a:t>df['color'].cat.codes   # целые коды</a:t>
+            </a:r>
+          </a:p>
+          <a:p>
+            <a:pPr>
+              <a:spcAft>
+                <a:spcPts val="0"/>
+              </a:spcAft>
+              <a:defRPr sz="1100">
+                <a:solidFill>
+                  <a:srgbClr val="000000"/>
+                </a:solidFill>
+                <a:latin typeface="Consolas"/>
+              </a:defRPr>
+            </a:pPr>
+            <a:r>
+              <a:t>pd.get_dummies(df, columns=['color'])</a:t>
+            </a:r>
+          </a:p>
+        </p:txBody>
+      </p:sp>
+      <p:sp>
+        <p:nvSpPr>
+          <p:cNvPr id="6" name="TextBox 5"/>
+          <p:cNvSpPr txBox="1"/>
+          <p:nvPr/>
+        </p:nvSpPr>
+        <p:spPr>
+          <a:xfrm>
+            <a:off x="640080" y="3977639"/>
+            <a:ext cx="6766560" cy="201168"/>
+          </a:xfrm>
+          <a:prstGeom prst="rect">
+            <a:avLst/>
+          </a:prstGeom>
+          <a:noFill/>
+        </p:spPr>
+        <p:txBody>
+          <a:bodyPr wrap="none">
+            <a:spAutoFit/>
+          </a:bodyPr>
+          <a:lstStyle/>
+          <a:p>
+            <a:pPr algn="l">
+              <a:defRPr sz="1000" i="1">
+                <a:solidFill>
+                  <a:srgbClr val="555555"/>
+                </a:solidFill>
+              </a:defRPr>
+            </a:pPr>
+            <a:r>
+              <a:t>category и get_dummies</a:t>
+            </a:r>
+          </a:p>
+        </p:txBody>
+      </p:sp>
       <p:pic>
         <p:nvPicPr>
-          <p:cNvPr id="4" name="Picture 3" descr="encoding_methods.png"/>
+          <p:cNvPr id="7" name="Picture 6" descr="encoding_methods.png"/>
           <p:cNvPicPr>
             <a:picLocks noChangeAspect="1"/>
           </p:cNvPicPr>
@@ -4558,7 +4995,7 @@
         <p:spPr>
           <a:xfrm>
             <a:off x="640080" y="1371600"/>
-            <a:ext cx="6858000" cy="5029200"/>
+            <a:ext cx="6858000" cy="1810512"/>
           </a:xfrm>
           <a:prstGeom prst="rect">
             <a:avLst/>
@@ -4632,9 +5069,160 @@
           </a:p>
         </p:txBody>
       </p:sp>
+      <p:sp>
+        <p:nvSpPr>
+          <p:cNvPr id="4" name="Rectangle 3"/>
+          <p:cNvSpPr/>
+          <p:nvPr/>
+        </p:nvSpPr>
+        <p:spPr>
+          <a:xfrm>
+            <a:off x="640080" y="3291840"/>
+            <a:ext cx="6766560" cy="630936"/>
+          </a:xfrm>
+          <a:prstGeom prst="rect">
+            <a:avLst/>
+          </a:prstGeom>
+          <a:solidFill>
+            <a:srgbClr val="F5F5F5"/>
+          </a:solidFill>
+          <a:ln>
+            <a:solidFill>
+              <a:srgbClr val="DDDDDD"/>
+            </a:solidFill>
+          </a:ln>
+        </p:spPr>
+        <p:style>
+          <a:lnRef idx="1">
+            <a:schemeClr val="accent1"/>
+          </a:lnRef>
+          <a:fillRef idx="3">
+            <a:schemeClr val="accent1"/>
+          </a:fillRef>
+          <a:effectRef idx="2">
+            <a:schemeClr val="accent1"/>
+          </a:effectRef>
+          <a:fontRef idx="minor">
+            <a:schemeClr val="lt1"/>
+          </a:fontRef>
+        </p:style>
+        <p:txBody>
+          <a:bodyPr rtlCol="0" anchor="ctr"/>
+          <a:lstStyle/>
+          <a:p>
+            <a:pPr algn="ctr"/>
+          </a:p>
+        </p:txBody>
+      </p:sp>
+      <p:sp>
+        <p:nvSpPr>
+          <p:cNvPr id="5" name="TextBox 4"/>
+          <p:cNvSpPr txBox="1"/>
+          <p:nvPr/>
+        </p:nvSpPr>
+        <p:spPr>
+          <a:xfrm>
+            <a:off x="713231" y="3328416"/>
+            <a:ext cx="6620256" cy="557784"/>
+          </a:xfrm>
+          <a:prstGeom prst="rect">
+            <a:avLst/>
+          </a:prstGeom>
+          <a:noFill/>
+        </p:spPr>
+        <p:txBody>
+          <a:bodyPr wrap="square">
+            <a:noAutofit/>
+          </a:bodyPr>
+          <a:lstStyle/>
+          <a:p>
+            <a:pPr>
+              <a:spcAft>
+                <a:spcPts val="0"/>
+              </a:spcAft>
+              <a:defRPr sz="1100">
+                <a:solidFill>
+                  <a:srgbClr val="000000"/>
+                </a:solidFill>
+                <a:latin typeface="Consolas"/>
+              </a:defRPr>
+            </a:pPr>
+            <a:r>
+              <a:t>df['bucket'] = pd.cut(df['age'], bins=[0, 18, 65, 100])</a:t>
+            </a:r>
+          </a:p>
+          <a:p>
+            <a:pPr>
+              <a:spcAft>
+                <a:spcPts val="0"/>
+              </a:spcAft>
+              <a:defRPr sz="1100">
+                <a:solidFill>
+                  <a:srgbClr val="000000"/>
+                </a:solidFill>
+                <a:latin typeface="Consolas"/>
+              </a:defRPr>
+            </a:pPr>
+            <a:r>
+              <a:t>df['flag'] = (df['score'] &gt; 0.5).astype(int)</a:t>
+            </a:r>
+          </a:p>
+          <a:p>
+            <a:pPr>
+              <a:spcAft>
+                <a:spcPts val="0"/>
+              </a:spcAft>
+              <a:defRPr sz="1100">
+                <a:solidFill>
+                  <a:srgbClr val="000000"/>
+                </a:solidFill>
+                <a:latin typeface="Consolas"/>
+              </a:defRPr>
+            </a:pPr>
+            <a:r>
+              <a:t>df = df[df['amount'] &gt; 0]</a:t>
+            </a:r>
+          </a:p>
+        </p:txBody>
+      </p:sp>
+      <p:sp>
+        <p:nvSpPr>
+          <p:cNvPr id="6" name="TextBox 5"/>
+          <p:cNvSpPr txBox="1"/>
+          <p:nvPr/>
+        </p:nvSpPr>
+        <p:spPr>
+          <a:xfrm>
+            <a:off x="640080" y="3977639"/>
+            <a:ext cx="6766560" cy="201168"/>
+          </a:xfrm>
+          <a:prstGeom prst="rect">
+            <a:avLst/>
+          </a:prstGeom>
+          <a:noFill/>
+        </p:spPr>
+        <p:txBody>
+          <a:bodyPr wrap="none">
+            <a:spAutoFit/>
+          </a:bodyPr>
+          <a:lstStyle/>
+          <a:p>
+            <a:pPr algn="l">
+              <a:defRPr sz="1000" i="1">
+                <a:solidFill>
+                  <a:srgbClr val="555555"/>
+                </a:solidFill>
+              </a:defRPr>
+            </a:pPr>
+            <a:r>
+              <a:t>cut и условия</a:t>
+            </a:r>
+          </a:p>
+        </p:txBody>
+      </p:sp>
       <p:pic>
         <p:nvPicPr>
-          <p:cNvPr id="4" name="Picture 3" descr="clip_outliers.png"/>
+          <p:cNvPr id="7" name="Picture 6" descr="clip_outliers.png"/>
           <p:cNvPicPr>
             <a:picLocks noChangeAspect="1"/>
           </p:cNvPicPr>
@@ -4658,7 +5246,7 @@
       </p:pic>
       <p:pic>
         <p:nvPicPr>
-          <p:cNvPr id="5" name="Picture 4" descr="cut_bins.png"/>
+          <p:cNvPr id="8" name="Picture 7" descr="cut_bins.png"/>
           <p:cNvPicPr>
             <a:picLocks noChangeAspect="1"/>
           </p:cNvPicPr>
@@ -4740,7 +5328,7 @@
         <p:spPr>
           <a:xfrm>
             <a:off x="640080" y="1371600"/>
-            <a:ext cx="6858000" cy="5029200"/>
+            <a:ext cx="6858000" cy="1810512"/>
           </a:xfrm>
           <a:prstGeom prst="rect">
             <a:avLst/>
@@ -4814,9 +5402,160 @@
           </a:p>
         </p:txBody>
       </p:sp>
+      <p:sp>
+        <p:nvSpPr>
+          <p:cNvPr id="4" name="Rectangle 3"/>
+          <p:cNvSpPr/>
+          <p:nvPr/>
+        </p:nvSpPr>
+        <p:spPr>
+          <a:xfrm>
+            <a:off x="640080" y="3291840"/>
+            <a:ext cx="6766560" cy="630936"/>
+          </a:xfrm>
+          <a:prstGeom prst="rect">
+            <a:avLst/>
+          </a:prstGeom>
+          <a:solidFill>
+            <a:srgbClr val="F5F5F5"/>
+          </a:solidFill>
+          <a:ln>
+            <a:solidFill>
+              <a:srgbClr val="DDDDDD"/>
+            </a:solidFill>
+          </a:ln>
+        </p:spPr>
+        <p:style>
+          <a:lnRef idx="1">
+            <a:schemeClr val="accent1"/>
+          </a:lnRef>
+          <a:fillRef idx="3">
+            <a:schemeClr val="accent1"/>
+          </a:fillRef>
+          <a:effectRef idx="2">
+            <a:schemeClr val="accent1"/>
+          </a:effectRef>
+          <a:fontRef idx="minor">
+            <a:schemeClr val="lt1"/>
+          </a:fontRef>
+        </p:style>
+        <p:txBody>
+          <a:bodyPr rtlCol="0" anchor="ctr"/>
+          <a:lstStyle/>
+          <a:p>
+            <a:pPr algn="ctr"/>
+          </a:p>
+        </p:txBody>
+      </p:sp>
+      <p:sp>
+        <p:nvSpPr>
+          <p:cNvPr id="5" name="TextBox 4"/>
+          <p:cNvSpPr txBox="1"/>
+          <p:nvPr/>
+        </p:nvSpPr>
+        <p:spPr>
+          <a:xfrm>
+            <a:off x="713231" y="3328416"/>
+            <a:ext cx="6620256" cy="557784"/>
+          </a:xfrm>
+          <a:prstGeom prst="rect">
+            <a:avLst/>
+          </a:prstGeom>
+          <a:noFill/>
+        </p:spPr>
+        <p:txBody>
+          <a:bodyPr wrap="square">
+            <a:noAutofit/>
+          </a:bodyPr>
+          <a:lstStyle/>
+          <a:p>
+            <a:pPr>
+              <a:spcAft>
+                <a:spcPts val="0"/>
+              </a:spcAft>
+              <a:defRPr sz="1100">
+                <a:solidFill>
+                  <a:srgbClr val="000000"/>
+                </a:solidFill>
+                <a:latin typeface="Consolas"/>
+              </a:defRPr>
+            </a:pPr>
+            <a:r>
+              <a:t>df['email'].str.lower()</a:t>
+            </a:r>
+          </a:p>
+          <a:p>
+            <a:pPr>
+              <a:spcAft>
+                <a:spcPts val="0"/>
+              </a:spcAft>
+              <a:defRPr sz="1100">
+                <a:solidFill>
+                  <a:srgbClr val="000000"/>
+                </a:solidFill>
+                <a:latin typeface="Consolas"/>
+              </a:defRPr>
+            </a:pPr>
+            <a:r>
+              <a:t>df['name'].str.contains('ivan', case=False)</a:t>
+            </a:r>
+          </a:p>
+          <a:p>
+            <a:pPr>
+              <a:spcAft>
+                <a:spcPts val="0"/>
+              </a:spcAft>
+              <a:defRPr sz="1100">
+                <a:solidFill>
+                  <a:srgbClr val="000000"/>
+                </a:solidFill>
+                <a:latin typeface="Consolas"/>
+              </a:defRPr>
+            </a:pPr>
+            <a:r>
+              <a:t>df['phone'].str.replace('-', '', regex=False)</a:t>
+            </a:r>
+          </a:p>
+        </p:txBody>
+      </p:sp>
+      <p:sp>
+        <p:nvSpPr>
+          <p:cNvPr id="6" name="TextBox 5"/>
+          <p:cNvSpPr txBox="1"/>
+          <p:nvPr/>
+        </p:nvSpPr>
+        <p:spPr>
+          <a:xfrm>
+            <a:off x="640080" y="3977639"/>
+            <a:ext cx="6766560" cy="201168"/>
+          </a:xfrm>
+          <a:prstGeom prst="rect">
+            <a:avLst/>
+          </a:prstGeom>
+          <a:noFill/>
+        </p:spPr>
+        <p:txBody>
+          <a:bodyPr wrap="none">
+            <a:spAutoFit/>
+          </a:bodyPr>
+          <a:lstStyle/>
+          <a:p>
+            <a:pPr algn="l">
+              <a:defRPr sz="1000" i="1">
+                <a:solidFill>
+                  <a:srgbClr val="555555"/>
+                </a:solidFill>
+              </a:defRPr>
+            </a:pPr>
+            <a:r>
+              <a:t>Аксессор .str</a:t>
+            </a:r>
+          </a:p>
+        </p:txBody>
+      </p:sp>
       <p:pic>
         <p:nvPicPr>
-          <p:cNvPr id="4" name="Picture 3" descr="str_extract.png"/>
+          <p:cNvPr id="7" name="Picture 6" descr="str_extract.png"/>
           <p:cNvPicPr>
             <a:picLocks noChangeAspect="1"/>
           </p:cNvPicPr>
@@ -4898,7 +5637,7 @@
         <p:spPr>
           <a:xfrm>
             <a:off x="640080" y="1371600"/>
-            <a:ext cx="6858000" cy="5029200"/>
+            <a:ext cx="6858000" cy="1810512"/>
           </a:xfrm>
           <a:prstGeom prst="rect">
             <a:avLst/>
@@ -5024,9 +5763,160 @@
           </a:p>
         </p:txBody>
       </p:sp>
+      <p:sp>
+        <p:nvSpPr>
+          <p:cNvPr id="4" name="Rectangle 3"/>
+          <p:cNvSpPr/>
+          <p:nvPr/>
+        </p:nvSpPr>
+        <p:spPr>
+          <a:xfrm>
+            <a:off x="640080" y="3291840"/>
+            <a:ext cx="6766560" cy="630936"/>
+          </a:xfrm>
+          <a:prstGeom prst="rect">
+            <a:avLst/>
+          </a:prstGeom>
+          <a:solidFill>
+            <a:srgbClr val="F5F5F5"/>
+          </a:solidFill>
+          <a:ln>
+            <a:solidFill>
+              <a:srgbClr val="DDDDDD"/>
+            </a:solidFill>
+          </a:ln>
+        </p:spPr>
+        <p:style>
+          <a:lnRef idx="1">
+            <a:schemeClr val="accent1"/>
+          </a:lnRef>
+          <a:fillRef idx="3">
+            <a:schemeClr val="accent1"/>
+          </a:fillRef>
+          <a:effectRef idx="2">
+            <a:schemeClr val="accent1"/>
+          </a:effectRef>
+          <a:fontRef idx="minor">
+            <a:schemeClr val="lt1"/>
+          </a:fontRef>
+        </p:style>
+        <p:txBody>
+          <a:bodyPr rtlCol="0" anchor="ctr"/>
+          <a:lstStyle/>
+          <a:p>
+            <a:pPr algn="ctr"/>
+          </a:p>
+        </p:txBody>
+      </p:sp>
+      <p:sp>
+        <p:nvSpPr>
+          <p:cNvPr id="5" name="TextBox 4"/>
+          <p:cNvSpPr txBox="1"/>
+          <p:nvPr/>
+        </p:nvSpPr>
+        <p:spPr>
+          <a:xfrm>
+            <a:off x="713231" y="3328416"/>
+            <a:ext cx="6620256" cy="557784"/>
+          </a:xfrm>
+          <a:prstGeom prst="rect">
+            <a:avLst/>
+          </a:prstGeom>
+          <a:noFill/>
+        </p:spPr>
+        <p:txBody>
+          <a:bodyPr wrap="square">
+            <a:noAutofit/>
+          </a:bodyPr>
+          <a:lstStyle/>
+          <a:p>
+            <a:pPr>
+              <a:spcAft>
+                <a:spcPts val="0"/>
+              </a:spcAft>
+              <a:defRPr sz="1100">
+                <a:solidFill>
+                  <a:srgbClr val="000000"/>
+                </a:solidFill>
+                <a:latin typeface="Consolas"/>
+              </a:defRPr>
+            </a:pPr>
+            <a:r>
+              <a:t>df['ts'] = pd.to_datetime(df['ts'])</a:t>
+            </a:r>
+          </a:p>
+          <a:p>
+            <a:pPr>
+              <a:spcAft>
+                <a:spcPts val="0"/>
+              </a:spcAft>
+              <a:defRPr sz="1100">
+                <a:solidFill>
+                  <a:srgbClr val="000000"/>
+                </a:solidFill>
+                <a:latin typeface="Consolas"/>
+              </a:defRPr>
+            </a:pPr>
+            <a:r>
+              <a:t>df['hour'] = df['ts'].dt.hour</a:t>
+            </a:r>
+          </a:p>
+          <a:p>
+            <a:pPr>
+              <a:spcAft>
+                <a:spcPts val="0"/>
+              </a:spcAft>
+              <a:defRPr sz="1100">
+                <a:solidFill>
+                  <a:srgbClr val="000000"/>
+                </a:solidFill>
+                <a:latin typeface="Consolas"/>
+              </a:defRPr>
+            </a:pPr>
+            <a:r>
+              <a:t>df['weekday'] = df['ts'].dt.dayofweek</a:t>
+            </a:r>
+          </a:p>
+        </p:txBody>
+      </p:sp>
+      <p:sp>
+        <p:nvSpPr>
+          <p:cNvPr id="6" name="TextBox 5"/>
+          <p:cNvSpPr txBox="1"/>
+          <p:nvPr/>
+        </p:nvSpPr>
+        <p:spPr>
+          <a:xfrm>
+            <a:off x="640080" y="3977639"/>
+            <a:ext cx="6766560" cy="201168"/>
+          </a:xfrm>
+          <a:prstGeom prst="rect">
+            <a:avLst/>
+          </a:prstGeom>
+          <a:noFill/>
+        </p:spPr>
+        <p:txBody>
+          <a:bodyPr wrap="none">
+            <a:spAutoFit/>
+          </a:bodyPr>
+          <a:lstStyle/>
+          <a:p>
+            <a:pPr algn="l">
+              <a:defRPr sz="1000" i="1">
+                <a:solidFill>
+                  <a:srgbClr val="555555"/>
+                </a:solidFill>
+              </a:defRPr>
+            </a:pPr>
+            <a:r>
+              <a:t>Аксессор .dt</a:t>
+            </a:r>
+          </a:p>
+        </p:txBody>
+      </p:sp>
       <p:pic>
         <p:nvPicPr>
-          <p:cNvPr id="4" name="Picture 3" descr="dt_cyclic_hour.png"/>
+          <p:cNvPr id="7" name="Picture 6" descr="dt_cyclic_hour.png"/>
           <p:cNvPicPr>
             <a:picLocks noChangeAspect="1"/>
           </p:cNvPicPr>
@@ -5108,7 +5998,7 @@
         <p:spPr>
           <a:xfrm>
             <a:off x="640080" y="1371600"/>
-            <a:ext cx="6858000" cy="5029200"/>
+            <a:ext cx="6858000" cy="1810512"/>
           </a:xfrm>
           <a:prstGeom prst="rect">
             <a:avLst/>
@@ -5182,9 +6072,160 @@
           </a:p>
         </p:txBody>
       </p:sp>
+      <p:sp>
+        <p:nvSpPr>
+          <p:cNvPr id="4" name="Rectangle 3"/>
+          <p:cNvSpPr/>
+          <p:nvPr/>
+        </p:nvSpPr>
+        <p:spPr>
+          <a:xfrm>
+            <a:off x="640080" y="3291840"/>
+            <a:ext cx="6766560" cy="630936"/>
+          </a:xfrm>
+          <a:prstGeom prst="rect">
+            <a:avLst/>
+          </a:prstGeom>
+          <a:solidFill>
+            <a:srgbClr val="F5F5F5"/>
+          </a:solidFill>
+          <a:ln>
+            <a:solidFill>
+              <a:srgbClr val="DDDDDD"/>
+            </a:solidFill>
+          </a:ln>
+        </p:spPr>
+        <p:style>
+          <a:lnRef idx="1">
+            <a:schemeClr val="accent1"/>
+          </a:lnRef>
+          <a:fillRef idx="3">
+            <a:schemeClr val="accent1"/>
+          </a:fillRef>
+          <a:effectRef idx="2">
+            <a:schemeClr val="accent1"/>
+          </a:effectRef>
+          <a:fontRef idx="minor">
+            <a:schemeClr val="lt1"/>
+          </a:fontRef>
+        </p:style>
+        <p:txBody>
+          <a:bodyPr rtlCol="0" anchor="ctr"/>
+          <a:lstStyle/>
+          <a:p>
+            <a:pPr algn="ctr"/>
+          </a:p>
+        </p:txBody>
+      </p:sp>
+      <p:sp>
+        <p:nvSpPr>
+          <p:cNvPr id="5" name="TextBox 4"/>
+          <p:cNvSpPr txBox="1"/>
+          <p:nvPr/>
+        </p:nvSpPr>
+        <p:spPr>
+          <a:xfrm>
+            <a:off x="713231" y="3328416"/>
+            <a:ext cx="6620256" cy="557784"/>
+          </a:xfrm>
+          <a:prstGeom prst="rect">
+            <a:avLst/>
+          </a:prstGeom>
+          <a:noFill/>
+        </p:spPr>
+        <p:txBody>
+          <a:bodyPr wrap="square">
+            <a:noAutofit/>
+          </a:bodyPr>
+          <a:lstStyle/>
+          <a:p>
+            <a:pPr>
+              <a:spcAft>
+                <a:spcPts val="0"/>
+              </a:spcAft>
+              <a:defRPr sz="1100">
+                <a:solidFill>
+                  <a:srgbClr val="000000"/>
+                </a:solidFill>
+                <a:latin typeface="Consolas"/>
+              </a:defRPr>
+            </a:pPr>
+            <a:r>
+              <a:t>arr = df[['x', 'y']].to_numpy()   # DataFrame → ndarray</a:t>
+            </a:r>
+          </a:p>
+          <a:p>
+            <a:pPr>
+              <a:spcAft>
+                <a:spcPts val="0"/>
+              </a:spcAft>
+              <a:defRPr sz="1100">
+                <a:solidFill>
+                  <a:srgbClr val="000000"/>
+                </a:solidFill>
+                <a:latin typeface="Consolas"/>
+              </a:defRPr>
+            </a:pPr>
+            <a:r>
+              <a:t>df2 = pd.DataFrame(arr, columns=['x', 'y'])</a:t>
+            </a:r>
+          </a:p>
+          <a:p>
+            <a:pPr>
+              <a:spcAft>
+                <a:spcPts val="0"/>
+              </a:spcAft>
+              <a:defRPr sz="1100">
+                <a:solidFill>
+                  <a:srgbClr val="000000"/>
+                </a:solidFill>
+                <a:latin typeface="Consolas"/>
+              </a:defRPr>
+            </a:pPr>
+            <a:r>
+              <a:t>df.values  # устаревший alias</a:t>
+            </a:r>
+          </a:p>
+        </p:txBody>
+      </p:sp>
+      <p:sp>
+        <p:nvSpPr>
+          <p:cNvPr id="6" name="TextBox 5"/>
+          <p:cNvSpPr txBox="1"/>
+          <p:nvPr/>
+        </p:nvSpPr>
+        <p:spPr>
+          <a:xfrm>
+            <a:off x="640080" y="3977639"/>
+            <a:ext cx="6766560" cy="201168"/>
+          </a:xfrm>
+          <a:prstGeom prst="rect">
+            <a:avLst/>
+          </a:prstGeom>
+          <a:noFill/>
+        </p:spPr>
+        <p:txBody>
+          <a:bodyPr wrap="none">
+            <a:spAutoFit/>
+          </a:bodyPr>
+          <a:lstStyle/>
+          <a:p>
+            <a:pPr algn="l">
+              <a:defRPr sz="1000" i="1">
+                <a:solidFill>
+                  <a:srgbClr val="555555"/>
+                </a:solidFill>
+              </a:defRPr>
+            </a:pPr>
+            <a:r>
+              <a:t>to_numpy()</a:t>
+            </a:r>
+          </a:p>
+        </p:txBody>
+      </p:sp>
       <p:pic>
         <p:nvPicPr>
-          <p:cNvPr id="4" name="Picture 3" descr="to_numpy_bridge.png"/>
+          <p:cNvPr id="7" name="Picture 6" descr="to_numpy_bridge.png"/>
           <p:cNvPicPr>
             <a:picLocks noChangeAspect="1"/>
           </p:cNvPicPr>
@@ -5266,7 +6307,7 @@
         <p:spPr>
           <a:xfrm>
             <a:off x="640080" y="1371600"/>
-            <a:ext cx="6858000" cy="5029200"/>
+            <a:ext cx="6858000" cy="1810512"/>
           </a:xfrm>
           <a:prstGeom prst="rect">
             <a:avLst/>
@@ -5364,9 +6405,144 @@
           </a:p>
         </p:txBody>
       </p:sp>
+      <p:sp>
+        <p:nvSpPr>
+          <p:cNvPr id="4" name="Rectangle 3"/>
+          <p:cNvSpPr/>
+          <p:nvPr/>
+        </p:nvSpPr>
+        <p:spPr>
+          <a:xfrm>
+            <a:off x="640080" y="3291840"/>
+            <a:ext cx="6766560" cy="457200"/>
+          </a:xfrm>
+          <a:prstGeom prst="rect">
+            <a:avLst/>
+          </a:prstGeom>
+          <a:solidFill>
+            <a:srgbClr val="F5F5F5"/>
+          </a:solidFill>
+          <a:ln>
+            <a:solidFill>
+              <a:srgbClr val="DDDDDD"/>
+            </a:solidFill>
+          </a:ln>
+        </p:spPr>
+        <p:style>
+          <a:lnRef idx="1">
+            <a:schemeClr val="accent1"/>
+          </a:lnRef>
+          <a:fillRef idx="3">
+            <a:schemeClr val="accent1"/>
+          </a:fillRef>
+          <a:effectRef idx="2">
+            <a:schemeClr val="accent1"/>
+          </a:effectRef>
+          <a:fontRef idx="minor">
+            <a:schemeClr val="lt1"/>
+          </a:fontRef>
+        </p:style>
+        <p:txBody>
+          <a:bodyPr rtlCol="0" anchor="ctr"/>
+          <a:lstStyle/>
+          <a:p>
+            <a:pPr algn="ctr"/>
+          </a:p>
+        </p:txBody>
+      </p:sp>
+      <p:sp>
+        <p:nvSpPr>
+          <p:cNvPr id="5" name="TextBox 4"/>
+          <p:cNvSpPr txBox="1"/>
+          <p:nvPr/>
+        </p:nvSpPr>
+        <p:spPr>
+          <a:xfrm>
+            <a:off x="713231" y="3328416"/>
+            <a:ext cx="6620256" cy="384048"/>
+          </a:xfrm>
+          <a:prstGeom prst="rect">
+            <a:avLst/>
+          </a:prstGeom>
+          <a:noFill/>
+        </p:spPr>
+        <p:txBody>
+          <a:bodyPr wrap="square">
+            <a:noAutofit/>
+          </a:bodyPr>
+          <a:lstStyle/>
+          <a:p>
+            <a:pPr>
+              <a:spcAft>
+                <a:spcPts val="0"/>
+              </a:spcAft>
+              <a:defRPr sz="1100">
+                <a:solidFill>
+                  <a:srgbClr val="000000"/>
+                </a:solidFill>
+                <a:latin typeface="Consolas"/>
+              </a:defRPr>
+            </a:pPr>
+            <a:r>
+              <a:t>out = pd.merge(users, orders, on='user_id', how='left')</a:t>
+            </a:r>
+          </a:p>
+          <a:p>
+            <a:pPr>
+              <a:spcAft>
+                <a:spcPts val="0"/>
+              </a:spcAft>
+              <a:defRPr sz="1100">
+                <a:solidFill>
+                  <a:srgbClr val="000000"/>
+                </a:solidFill>
+                <a:latin typeface="Consolas"/>
+              </a:defRPr>
+            </a:pPr>
+            <a:r>
+              <a:t>wide = pd.concat([df_a, df_b], axis=1)</a:t>
+            </a:r>
+          </a:p>
+        </p:txBody>
+      </p:sp>
+      <p:sp>
+        <p:nvSpPr>
+          <p:cNvPr id="6" name="TextBox 5"/>
+          <p:cNvSpPr txBox="1"/>
+          <p:nvPr/>
+        </p:nvSpPr>
+        <p:spPr>
+          <a:xfrm>
+            <a:off x="640080" y="3803904"/>
+            <a:ext cx="6766560" cy="201168"/>
+          </a:xfrm>
+          <a:prstGeom prst="rect">
+            <a:avLst/>
+          </a:prstGeom>
+          <a:noFill/>
+        </p:spPr>
+        <p:txBody>
+          <a:bodyPr wrap="none">
+            <a:spAutoFit/>
+          </a:bodyPr>
+          <a:lstStyle/>
+          <a:p>
+            <a:pPr algn="l">
+              <a:defRPr sz="1000" i="1">
+                <a:solidFill>
+                  <a:srgbClr val="555555"/>
+                </a:solidFill>
+              </a:defRPr>
+            </a:pPr>
+            <a:r>
+              <a:t>merge и concat</a:t>
+            </a:r>
+          </a:p>
+        </p:txBody>
+      </p:sp>
       <p:pic>
         <p:nvPicPr>
-          <p:cNvPr id="4" name="Picture 3" descr="merge_cartesian.png"/>
+          <p:cNvPr id="7" name="Picture 6" descr="merge_cartesian.png"/>
           <p:cNvPicPr>
             <a:picLocks noChangeAspect="1"/>
           </p:cNvPicPr>
@@ -5390,7 +6566,7 @@
       </p:pic>
       <p:pic>
         <p:nvPicPr>
-          <p:cNvPr id="5" name="Picture 4" descr="concat_index_trap.png"/>
+          <p:cNvPr id="8" name="Picture 7" descr="concat_index_trap.png"/>
           <p:cNvPicPr>
             <a:picLocks noChangeAspect="1"/>
           </p:cNvPicPr>
@@ -5472,7 +6648,7 @@
         <p:spPr>
           <a:xfrm>
             <a:off x="640080" y="1371600"/>
-            <a:ext cx="6858000" cy="5029200"/>
+            <a:ext cx="6858000" cy="1810512"/>
           </a:xfrm>
           <a:prstGeom prst="rect">
             <a:avLst/>
@@ -5562,9 +6738,192 @@
           </a:p>
         </p:txBody>
       </p:sp>
+      <p:sp>
+        <p:nvSpPr>
+          <p:cNvPr id="4" name="Rectangle 3"/>
+          <p:cNvSpPr/>
+          <p:nvPr/>
+        </p:nvSpPr>
+        <p:spPr>
+          <a:xfrm>
+            <a:off x="640080" y="3291840"/>
+            <a:ext cx="6766560" cy="978407"/>
+          </a:xfrm>
+          <a:prstGeom prst="rect">
+            <a:avLst/>
+          </a:prstGeom>
+          <a:solidFill>
+            <a:srgbClr val="F5F5F5"/>
+          </a:solidFill>
+          <a:ln>
+            <a:solidFill>
+              <a:srgbClr val="DDDDDD"/>
+            </a:solidFill>
+          </a:ln>
+        </p:spPr>
+        <p:style>
+          <a:lnRef idx="1">
+            <a:schemeClr val="accent1"/>
+          </a:lnRef>
+          <a:fillRef idx="3">
+            <a:schemeClr val="accent1"/>
+          </a:fillRef>
+          <a:effectRef idx="2">
+            <a:schemeClr val="accent1"/>
+          </a:effectRef>
+          <a:fontRef idx="minor">
+            <a:schemeClr val="lt1"/>
+          </a:fontRef>
+        </p:style>
+        <p:txBody>
+          <a:bodyPr rtlCol="0" anchor="ctr"/>
+          <a:lstStyle/>
+          <a:p>
+            <a:pPr algn="ctr"/>
+          </a:p>
+        </p:txBody>
+      </p:sp>
+      <p:sp>
+        <p:nvSpPr>
+          <p:cNvPr id="5" name="TextBox 4"/>
+          <p:cNvSpPr txBox="1"/>
+          <p:nvPr/>
+        </p:nvSpPr>
+        <p:spPr>
+          <a:xfrm>
+            <a:off x="713231" y="3328416"/>
+            <a:ext cx="6620256" cy="905255"/>
+          </a:xfrm>
+          <a:prstGeom prst="rect">
+            <a:avLst/>
+          </a:prstGeom>
+          <a:noFill/>
+        </p:spPr>
+        <p:txBody>
+          <a:bodyPr wrap="square">
+            <a:noAutofit/>
+          </a:bodyPr>
+          <a:lstStyle/>
+          <a:p>
+            <a:pPr>
+              <a:spcAft>
+                <a:spcPts val="0"/>
+              </a:spcAft>
+              <a:defRPr sz="1100">
+                <a:solidFill>
+                  <a:srgbClr val="000000"/>
+                </a:solidFill>
+                <a:latin typeface="Consolas"/>
+              </a:defRPr>
+            </a:pPr>
+            <a:r>
+              <a:t>pd.merge_asof(</a:t>
+            </a:r>
+          </a:p>
+          <a:p>
+            <a:pPr>
+              <a:spcAft>
+                <a:spcPts val="0"/>
+              </a:spcAft>
+              <a:defRPr sz="1100">
+                <a:solidFill>
+                  <a:srgbClr val="000000"/>
+                </a:solidFill>
+                <a:latin typeface="Consolas"/>
+              </a:defRPr>
+            </a:pPr>
+            <a:r>
+              <a:t>    quotes.sort_values('time'),</a:t>
+            </a:r>
+          </a:p>
+          <a:p>
+            <a:pPr>
+              <a:spcAft>
+                <a:spcPts val="0"/>
+              </a:spcAft>
+              <a:defRPr sz="1100">
+                <a:solidFill>
+                  <a:srgbClr val="000000"/>
+                </a:solidFill>
+                <a:latin typeface="Consolas"/>
+              </a:defRPr>
+            </a:pPr>
+            <a:r>
+              <a:t>    trades.sort_values('time'),</a:t>
+            </a:r>
+          </a:p>
+          <a:p>
+            <a:pPr>
+              <a:spcAft>
+                <a:spcPts val="0"/>
+              </a:spcAft>
+              <a:defRPr sz="1100">
+                <a:solidFill>
+                  <a:srgbClr val="000000"/>
+                </a:solidFill>
+                <a:latin typeface="Consolas"/>
+              </a:defRPr>
+            </a:pPr>
+            <a:r>
+              <a:t>    on='time', direction='backward',</a:t>
+            </a:r>
+          </a:p>
+          <a:p>
+            <a:pPr>
+              <a:spcAft>
+                <a:spcPts val="0"/>
+              </a:spcAft>
+              <a:defRPr sz="1100">
+                <a:solidFill>
+                  <a:srgbClr val="000000"/>
+                </a:solidFill>
+                <a:latin typeface="Consolas"/>
+              </a:defRPr>
+            </a:pPr>
+            <a:r>
+              <a:t>)</a:t>
+            </a:r>
+          </a:p>
+        </p:txBody>
+      </p:sp>
+      <p:sp>
+        <p:nvSpPr>
+          <p:cNvPr id="6" name="TextBox 5"/>
+          <p:cNvSpPr txBox="1"/>
+          <p:nvPr/>
+        </p:nvSpPr>
+        <p:spPr>
+          <a:xfrm>
+            <a:off x="640080" y="4325112"/>
+            <a:ext cx="6766560" cy="201168"/>
+          </a:xfrm>
+          <a:prstGeom prst="rect">
+            <a:avLst/>
+          </a:prstGeom>
+          <a:noFill/>
+        </p:spPr>
+        <p:txBody>
+          <a:bodyPr wrap="none">
+            <a:spAutoFit/>
+          </a:bodyPr>
+          <a:lstStyle/>
+          <a:p>
+            <a:pPr algn="l">
+              <a:defRPr sz="1000" i="1">
+                <a:solidFill>
+                  <a:srgbClr val="555555"/>
+                </a:solidFill>
+              </a:defRPr>
+            </a:pPr>
+            <a:r>
+              <a:t>Ближайшее прошлое событие</a:t>
+            </a:r>
+          </a:p>
+        </p:txBody>
+      </p:sp>
       <p:pic>
         <p:nvPicPr>
-          <p:cNvPr id="4" name="Picture 3" descr="merge_asof_timeline.png"/>
+          <p:cNvPr id="7" name="Picture 6" descr="merge_asof_timeline.png"/>
           <p:cNvPicPr>
             <a:picLocks noChangeAspect="1"/>
           </p:cNvPicPr>
@@ -5646,7 +7005,7 @@
         <p:spPr>
           <a:xfrm>
             <a:off x="640080" y="1371600"/>
-            <a:ext cx="6858000" cy="5029200"/>
+            <a:ext cx="6858000" cy="1810512"/>
           </a:xfrm>
           <a:prstGeom prst="rect">
             <a:avLst/>
@@ -5720,9 +7079,160 @@
           </a:p>
         </p:txBody>
       </p:sp>
+      <p:sp>
+        <p:nvSpPr>
+          <p:cNvPr id="4" name="Rectangle 3"/>
+          <p:cNvSpPr/>
+          <p:nvPr/>
+        </p:nvSpPr>
+        <p:spPr>
+          <a:xfrm>
+            <a:off x="640080" y="3291840"/>
+            <a:ext cx="6766560" cy="630936"/>
+          </a:xfrm>
+          <a:prstGeom prst="rect">
+            <a:avLst/>
+          </a:prstGeom>
+          <a:solidFill>
+            <a:srgbClr val="F5F5F5"/>
+          </a:solidFill>
+          <a:ln>
+            <a:solidFill>
+              <a:srgbClr val="DDDDDD"/>
+            </a:solidFill>
+          </a:ln>
+        </p:spPr>
+        <p:style>
+          <a:lnRef idx="1">
+            <a:schemeClr val="accent1"/>
+          </a:lnRef>
+          <a:fillRef idx="3">
+            <a:schemeClr val="accent1"/>
+          </a:fillRef>
+          <a:effectRef idx="2">
+            <a:schemeClr val="accent1"/>
+          </a:effectRef>
+          <a:fontRef idx="minor">
+            <a:schemeClr val="lt1"/>
+          </a:fontRef>
+        </p:style>
+        <p:txBody>
+          <a:bodyPr rtlCol="0" anchor="ctr"/>
+          <a:lstStyle/>
+          <a:p>
+            <a:pPr algn="ctr"/>
+          </a:p>
+        </p:txBody>
+      </p:sp>
+      <p:sp>
+        <p:nvSpPr>
+          <p:cNvPr id="5" name="TextBox 4"/>
+          <p:cNvSpPr txBox="1"/>
+          <p:nvPr/>
+        </p:nvSpPr>
+        <p:spPr>
+          <a:xfrm>
+            <a:off x="713231" y="3328416"/>
+            <a:ext cx="6620256" cy="557784"/>
+          </a:xfrm>
+          <a:prstGeom prst="rect">
+            <a:avLst/>
+          </a:prstGeom>
+          <a:noFill/>
+        </p:spPr>
+        <p:txBody>
+          <a:bodyPr wrap="square">
+            <a:noAutofit/>
+          </a:bodyPr>
+          <a:lstStyle/>
+          <a:p>
+            <a:pPr>
+              <a:spcAft>
+                <a:spcPts val="0"/>
+              </a:spcAft>
+              <a:defRPr sz="1100">
+                <a:solidFill>
+                  <a:srgbClr val="000000"/>
+                </a:solidFill>
+                <a:latin typeface="Consolas"/>
+              </a:defRPr>
+            </a:pPr>
+            <a:r>
+              <a:t>X = df.drop(columns=['target'])</a:t>
+            </a:r>
+          </a:p>
+          <a:p>
+            <a:pPr>
+              <a:spcAft>
+                <a:spcPts val="0"/>
+              </a:spcAft>
+              <a:defRPr sz="1100">
+                <a:solidFill>
+                  <a:srgbClr val="000000"/>
+                </a:solidFill>
+                <a:latin typeface="Consolas"/>
+              </a:defRPr>
+            </a:pPr>
+            <a:r>
+              <a:t>y = df['target']</a:t>
+            </a:r>
+          </a:p>
+          <a:p>
+            <a:pPr>
+              <a:spcAft>
+                <a:spcPts val="0"/>
+              </a:spcAft>
+              <a:defRPr sz="1100">
+                <a:solidFill>
+                  <a:srgbClr val="000000"/>
+                </a:solidFill>
+                <a:latin typeface="Consolas"/>
+              </a:defRPr>
+            </a:pPr>
+            <a:r>
+              <a:t>model.fit(X.select_dtypes('number'), y)</a:t>
+            </a:r>
+          </a:p>
+        </p:txBody>
+      </p:sp>
+      <p:sp>
+        <p:nvSpPr>
+          <p:cNvPr id="6" name="TextBox 5"/>
+          <p:cNvSpPr txBox="1"/>
+          <p:nvPr/>
+        </p:nvSpPr>
+        <p:spPr>
+          <a:xfrm>
+            <a:off x="640080" y="3977639"/>
+            <a:ext cx="6766560" cy="201168"/>
+          </a:xfrm>
+          <a:prstGeom prst="rect">
+            <a:avLst/>
+          </a:prstGeom>
+          <a:noFill/>
+        </p:spPr>
+        <p:txBody>
+          <a:bodyPr wrap="none">
+            <a:spAutoFit/>
+          </a:bodyPr>
+          <a:lstStyle/>
+          <a:p>
+            <a:pPr algn="l">
+              <a:defRPr sz="1000" i="1">
+                <a:solidFill>
+                  <a:srgbClr val="555555"/>
+                </a:solidFill>
+              </a:defRPr>
+            </a:pPr>
+            <a:r>
+              <a:t>Только числовые столбцы</a:t>
+            </a:r>
+          </a:p>
+        </p:txBody>
+      </p:sp>
       <p:pic>
         <p:nvPicPr>
-          <p:cNvPr id="4" name="Picture 3" descr="pandas_sklearn_pipeline.png"/>
+          <p:cNvPr id="7" name="Picture 6" descr="pandas_sklearn_pipeline.png"/>
           <p:cNvPicPr>
             <a:picLocks noChangeAspect="1"/>
           </p:cNvPicPr>
@@ -5804,7 +7314,7 @@
         <p:spPr>
           <a:xfrm>
             <a:off x="640080" y="1371600"/>
-            <a:ext cx="6858000" cy="5029200"/>
+            <a:ext cx="6858000" cy="1810512"/>
           </a:xfrm>
           <a:prstGeom prst="rect">
             <a:avLst/>
@@ -5994,7 +7504,7 @@
         <p:spPr>
           <a:xfrm>
             <a:off x="640080" y="1371600"/>
-            <a:ext cx="6858000" cy="5029200"/>
+            <a:ext cx="6858000" cy="1810512"/>
           </a:xfrm>
           <a:prstGeom prst="rect">
             <a:avLst/>
@@ -6084,9 +7594,160 @@
           </a:p>
         </p:txBody>
       </p:sp>
+      <p:sp>
+        <p:nvSpPr>
+          <p:cNvPr id="4" name="Rectangle 3"/>
+          <p:cNvSpPr/>
+          <p:nvPr/>
+        </p:nvSpPr>
+        <p:spPr>
+          <a:xfrm>
+            <a:off x="640080" y="3291840"/>
+            <a:ext cx="6766560" cy="630936"/>
+          </a:xfrm>
+          <a:prstGeom prst="rect">
+            <a:avLst/>
+          </a:prstGeom>
+          <a:solidFill>
+            <a:srgbClr val="F5F5F5"/>
+          </a:solidFill>
+          <a:ln>
+            <a:solidFill>
+              <a:srgbClr val="DDDDDD"/>
+            </a:solidFill>
+          </a:ln>
+        </p:spPr>
+        <p:style>
+          <a:lnRef idx="1">
+            <a:schemeClr val="accent1"/>
+          </a:lnRef>
+          <a:fillRef idx="3">
+            <a:schemeClr val="accent1"/>
+          </a:fillRef>
+          <a:effectRef idx="2">
+            <a:schemeClr val="accent1"/>
+          </a:effectRef>
+          <a:fontRef idx="minor">
+            <a:schemeClr val="lt1"/>
+          </a:fontRef>
+        </p:style>
+        <p:txBody>
+          <a:bodyPr rtlCol="0" anchor="ctr"/>
+          <a:lstStyle/>
+          <a:p>
+            <a:pPr algn="ctr"/>
+          </a:p>
+        </p:txBody>
+      </p:sp>
+      <p:sp>
+        <p:nvSpPr>
+          <p:cNvPr id="5" name="TextBox 4"/>
+          <p:cNvSpPr txBox="1"/>
+          <p:nvPr/>
+        </p:nvSpPr>
+        <p:spPr>
+          <a:xfrm>
+            <a:off x="713231" y="3328416"/>
+            <a:ext cx="6620256" cy="557784"/>
+          </a:xfrm>
+          <a:prstGeom prst="rect">
+            <a:avLst/>
+          </a:prstGeom>
+          <a:noFill/>
+        </p:spPr>
+        <p:txBody>
+          <a:bodyPr wrap="square">
+            <a:noAutofit/>
+          </a:bodyPr>
+          <a:lstStyle/>
+          <a:p>
+            <a:pPr>
+              <a:spcAft>
+                <a:spcPts val="0"/>
+              </a:spcAft>
+              <a:defRPr sz="1100">
+                <a:solidFill>
+                  <a:srgbClr val="000000"/>
+                </a:solidFill>
+                <a:latin typeface="Consolas"/>
+              </a:defRPr>
+            </a:pPr>
+            <a:r>
+              <a:t>import torch</a:t>
+            </a:r>
+          </a:p>
+          <a:p>
+            <a:pPr>
+              <a:spcAft>
+                <a:spcPts val="0"/>
+              </a:spcAft>
+              <a:defRPr sz="1100">
+                <a:solidFill>
+                  <a:srgbClr val="000000"/>
+                </a:solidFill>
+                <a:latin typeface="Consolas"/>
+              </a:defRPr>
+            </a:pPr>
+            <a:r>
+              <a:t>X_t = torch.tensor(df[cols].to_numpy(), dtype=torch.float32)</a:t>
+            </a:r>
+          </a:p>
+          <a:p>
+            <a:pPr>
+              <a:spcAft>
+                <a:spcPts val="0"/>
+              </a:spcAft>
+              <a:defRPr sz="1100">
+                <a:solidFill>
+                  <a:srgbClr val="000000"/>
+                </a:solidFill>
+                <a:latin typeface="Consolas"/>
+              </a:defRPr>
+            </a:pPr>
+            <a:r>
+              <a:t>y_t = torch.tensor(df['y'].to_numpy())</a:t>
+            </a:r>
+          </a:p>
+        </p:txBody>
+      </p:sp>
+      <p:sp>
+        <p:nvSpPr>
+          <p:cNvPr id="6" name="TextBox 5"/>
+          <p:cNvSpPr txBox="1"/>
+          <p:nvPr/>
+        </p:nvSpPr>
+        <p:spPr>
+          <a:xfrm>
+            <a:off x="640080" y="3977639"/>
+            <a:ext cx="6766560" cy="201168"/>
+          </a:xfrm>
+          <a:prstGeom prst="rect">
+            <a:avLst/>
+          </a:prstGeom>
+          <a:noFill/>
+        </p:spPr>
+        <p:txBody>
+          <a:bodyPr wrap="none">
+            <a:spAutoFit/>
+          </a:bodyPr>
+          <a:lstStyle/>
+          <a:p>
+            <a:pPr algn="l">
+              <a:defRPr sz="1000" i="1">
+                <a:solidFill>
+                  <a:srgbClr val="555555"/>
+                </a:solidFill>
+              </a:defRPr>
+            </a:pPr>
+            <a:r>
+              <a:t>DataFrame → tensor</a:t>
+            </a:r>
+          </a:p>
+        </p:txBody>
+      </p:sp>
       <p:pic>
         <p:nvPicPr>
-          <p:cNvPr id="4" name="Picture 3" descr="pandas_pytorch_bridge.png"/>
+          <p:cNvPr id="7" name="Picture 6" descr="pandas_pytorch_bridge.png"/>
           <p:cNvPicPr>
             <a:picLocks noChangeAspect="1"/>
           </p:cNvPicPr>
@@ -6168,7 +7829,7 @@
         <p:spPr>
           <a:xfrm>
             <a:off x="640080" y="1371600"/>
-            <a:ext cx="6858000" cy="5029200"/>
+            <a:ext cx="6858000" cy="2194560"/>
           </a:xfrm>
           <a:prstGeom prst="rect">
             <a:avLst/>
@@ -6273,9 +7934,176 @@
           </a:p>
         </p:txBody>
       </p:sp>
+      <p:sp>
+        <p:nvSpPr>
+          <p:cNvPr id="4" name="Rectangle 3"/>
+          <p:cNvSpPr/>
+          <p:nvPr/>
+        </p:nvSpPr>
+        <p:spPr>
+          <a:xfrm>
+            <a:off x="640080" y="3675887"/>
+            <a:ext cx="6766560" cy="804672"/>
+          </a:xfrm>
+          <a:prstGeom prst="rect">
+            <a:avLst/>
+          </a:prstGeom>
+          <a:solidFill>
+            <a:srgbClr val="F5F5F5"/>
+          </a:solidFill>
+          <a:ln>
+            <a:solidFill>
+              <a:srgbClr val="DDDDDD"/>
+            </a:solidFill>
+          </a:ln>
+        </p:spPr>
+        <p:style>
+          <a:lnRef idx="1">
+            <a:schemeClr val="accent1"/>
+          </a:lnRef>
+          <a:fillRef idx="3">
+            <a:schemeClr val="accent1"/>
+          </a:fillRef>
+          <a:effectRef idx="2">
+            <a:schemeClr val="accent1"/>
+          </a:effectRef>
+          <a:fontRef idx="minor">
+            <a:schemeClr val="lt1"/>
+          </a:fontRef>
+        </p:style>
+        <p:txBody>
+          <a:bodyPr rtlCol="0" anchor="ctr"/>
+          <a:lstStyle/>
+          <a:p>
+            <a:pPr algn="ctr"/>
+          </a:p>
+        </p:txBody>
+      </p:sp>
+      <p:sp>
+        <p:nvSpPr>
+          <p:cNvPr id="5" name="TextBox 4"/>
+          <p:cNvSpPr txBox="1"/>
+          <p:nvPr/>
+        </p:nvSpPr>
+        <p:spPr>
+          <a:xfrm>
+            <a:off x="713231" y="3712463"/>
+            <a:ext cx="6620256" cy="731520"/>
+          </a:xfrm>
+          <a:prstGeom prst="rect">
+            <a:avLst/>
+          </a:prstGeom>
+          <a:noFill/>
+        </p:spPr>
+        <p:txBody>
+          <a:bodyPr wrap="square">
+            <a:noAutofit/>
+          </a:bodyPr>
+          <a:lstStyle/>
+          <a:p>
+            <a:pPr>
+              <a:spcAft>
+                <a:spcPts val="0"/>
+              </a:spcAft>
+              <a:defRPr sz="1100">
+                <a:solidFill>
+                  <a:srgbClr val="000000"/>
+                </a:solidFill>
+                <a:latin typeface="Consolas"/>
+              </a:defRPr>
+            </a:pPr>
+            <a:r>
+              <a:t>from sklearn.model_selection import train_test_split</a:t>
+            </a:r>
+          </a:p>
+          <a:p>
+            <a:pPr>
+              <a:spcAft>
+                <a:spcPts val="0"/>
+              </a:spcAft>
+              <a:defRPr sz="1100">
+                <a:solidFill>
+                  <a:srgbClr val="000000"/>
+                </a:solidFill>
+                <a:latin typeface="Consolas"/>
+              </a:defRPr>
+            </a:pPr>
+            <a:r>
+              <a:t>train, test = train_test_split(df, random_state=42)</a:t>
+            </a:r>
+          </a:p>
+          <a:p>
+            <a:pPr>
+              <a:spcAft>
+                <a:spcPts val="0"/>
+              </a:spcAft>
+              <a:defRPr sz="1100">
+                <a:solidFill>
+                  <a:srgbClr val="000000"/>
+                </a:solidFill>
+                <a:latin typeface="Consolas"/>
+              </a:defRPr>
+            </a:pPr>
+            <a:r>
+              <a:t>mu = train['x'].mean()  # статистика только с train</a:t>
+            </a:r>
+          </a:p>
+          <a:p>
+            <a:pPr>
+              <a:spcAft>
+                <a:spcPts val="0"/>
+              </a:spcAft>
+              <a:defRPr sz="1100">
+                <a:solidFill>
+                  <a:srgbClr val="000000"/>
+                </a:solidFill>
+                <a:latin typeface="Consolas"/>
+              </a:defRPr>
+            </a:pPr>
+            <a:r>
+              <a:t>test['x'] = test['x'].fillna(mu)</a:t>
+            </a:r>
+          </a:p>
+        </p:txBody>
+      </p:sp>
+      <p:sp>
+        <p:nvSpPr>
+          <p:cNvPr id="6" name="TextBox 5"/>
+          <p:cNvSpPr txBox="1"/>
+          <p:nvPr/>
+        </p:nvSpPr>
+        <p:spPr>
+          <a:xfrm>
+            <a:off x="640080" y="4535423"/>
+            <a:ext cx="6766560" cy="201168"/>
+          </a:xfrm>
+          <a:prstGeom prst="rect">
+            <a:avLst/>
+          </a:prstGeom>
+          <a:noFill/>
+        </p:spPr>
+        <p:txBody>
+          <a:bodyPr wrap="none">
+            <a:spAutoFit/>
+          </a:bodyPr>
+          <a:lstStyle/>
+          <a:p>
+            <a:pPr algn="l">
+              <a:defRPr sz="1000" i="1">
+                <a:solidFill>
+                  <a:srgbClr val="555555"/>
+                </a:solidFill>
+              </a:defRPr>
+            </a:pPr>
+            <a:r>
+              <a:t>Impute после split</a:t>
+            </a:r>
+          </a:p>
+        </p:txBody>
+      </p:sp>
       <p:pic>
         <p:nvPicPr>
-          <p:cNvPr id="4" name="Picture 3" descr="pandas_leakage.png"/>
+          <p:cNvPr id="7" name="Picture 6" descr="pandas_leakage.png"/>
           <p:cNvPicPr>
             <a:picLocks noChangeAspect="1"/>
           </p:cNvPicPr>
@@ -6357,7 +8185,7 @@
         <p:spPr>
           <a:xfrm>
             <a:off x="640080" y="1371600"/>
-            <a:ext cx="6858000" cy="5029200"/>
+            <a:ext cx="6858000" cy="1810512"/>
           </a:xfrm>
           <a:prstGeom prst="rect">
             <a:avLst/>
@@ -6431,9 +8259,160 @@
           </a:p>
         </p:txBody>
       </p:sp>
+      <p:sp>
+        <p:nvSpPr>
+          <p:cNvPr id="4" name="Rectangle 3"/>
+          <p:cNvSpPr/>
+          <p:nvPr/>
+        </p:nvSpPr>
+        <p:spPr>
+          <a:xfrm>
+            <a:off x="640080" y="3291840"/>
+            <a:ext cx="6766560" cy="630936"/>
+          </a:xfrm>
+          <a:prstGeom prst="rect">
+            <a:avLst/>
+          </a:prstGeom>
+          <a:solidFill>
+            <a:srgbClr val="F5F5F5"/>
+          </a:solidFill>
+          <a:ln>
+            <a:solidFill>
+              <a:srgbClr val="DDDDDD"/>
+            </a:solidFill>
+          </a:ln>
+        </p:spPr>
+        <p:style>
+          <a:lnRef idx="1">
+            <a:schemeClr val="accent1"/>
+          </a:lnRef>
+          <a:fillRef idx="3">
+            <a:schemeClr val="accent1"/>
+          </a:fillRef>
+          <a:effectRef idx="2">
+            <a:schemeClr val="accent1"/>
+          </a:effectRef>
+          <a:fontRef idx="minor">
+            <a:schemeClr val="lt1"/>
+          </a:fontRef>
+        </p:style>
+        <p:txBody>
+          <a:bodyPr rtlCol="0" anchor="ctr"/>
+          <a:lstStyle/>
+          <a:p>
+            <a:pPr algn="ctr"/>
+          </a:p>
+        </p:txBody>
+      </p:sp>
+      <p:sp>
+        <p:nvSpPr>
+          <p:cNvPr id="5" name="TextBox 4"/>
+          <p:cNvSpPr txBox="1"/>
+          <p:nvPr/>
+        </p:nvSpPr>
+        <p:spPr>
+          <a:xfrm>
+            <a:off x="713231" y="3328416"/>
+            <a:ext cx="6620256" cy="557784"/>
+          </a:xfrm>
+          <a:prstGeom prst="rect">
+            <a:avLst/>
+          </a:prstGeom>
+          <a:noFill/>
+        </p:spPr>
+        <p:txBody>
+          <a:bodyPr wrap="square">
+            <a:noAutofit/>
+          </a:bodyPr>
+          <a:lstStyle/>
+          <a:p>
+            <a:pPr>
+              <a:spcAft>
+                <a:spcPts val="0"/>
+              </a:spcAft>
+              <a:defRPr sz="1100">
+                <a:solidFill>
+                  <a:srgbClr val="000000"/>
+                </a:solidFill>
+                <a:latin typeface="Consolas"/>
+              </a:defRPr>
+            </a:pPr>
+            <a:r>
+              <a:t>chunks = pd.read_csv('big.csv', chunksize=100_000)</a:t>
+            </a:r>
+          </a:p>
+          <a:p>
+            <a:pPr>
+              <a:spcAft>
+                <a:spcPts val="0"/>
+              </a:spcAft>
+              <a:defRPr sz="1100">
+                <a:solidFill>
+                  <a:srgbClr val="000000"/>
+                </a:solidFill>
+                <a:latin typeface="Consolas"/>
+              </a:defRPr>
+            </a:pPr>
+            <a:r>
+              <a:t>for chunk in chunks:</a:t>
+            </a:r>
+          </a:p>
+          <a:p>
+            <a:pPr>
+              <a:spcAft>
+                <a:spcPts val="0"/>
+              </a:spcAft>
+              <a:defRPr sz="1100">
+                <a:solidFill>
+                  <a:srgbClr val="000000"/>
+                </a:solidFill>
+                <a:latin typeface="Consolas"/>
+              </a:defRPr>
+            </a:pPr>
+            <a:r>
+              <a:t>    process(chunk)  # обработка по частям</a:t>
+            </a:r>
+          </a:p>
+        </p:txBody>
+      </p:sp>
+      <p:sp>
+        <p:nvSpPr>
+          <p:cNvPr id="6" name="TextBox 5"/>
+          <p:cNvSpPr txBox="1"/>
+          <p:nvPr/>
+        </p:nvSpPr>
+        <p:spPr>
+          <a:xfrm>
+            <a:off x="640080" y="3977639"/>
+            <a:ext cx="6766560" cy="201168"/>
+          </a:xfrm>
+          <a:prstGeom prst="rect">
+            <a:avLst/>
+          </a:prstGeom>
+          <a:noFill/>
+        </p:spPr>
+        <p:txBody>
+          <a:bodyPr wrap="none">
+            <a:spAutoFit/>
+          </a:bodyPr>
+          <a:lstStyle/>
+          <a:p>
+            <a:pPr algn="l">
+              <a:defRPr sz="1000" i="1">
+                <a:solidFill>
+                  <a:srgbClr val="555555"/>
+                </a:solidFill>
+              </a:defRPr>
+            </a:pPr>
+            <a:r>
+              <a:t>read_csv(chunksize=...)</a:t>
+            </a:r>
+          </a:p>
+        </p:txBody>
+      </p:sp>
       <p:pic>
         <p:nvPicPr>
-          <p:cNvPr id="4" name="Picture 3" descr="read_csv_chunks.png"/>
+          <p:cNvPr id="7" name="Picture 6" descr="read_csv_chunks.png"/>
           <p:cNvPicPr>
             <a:picLocks noChangeAspect="1"/>
           </p:cNvPicPr>
@@ -6515,7 +8494,7 @@
         <p:spPr>
           <a:xfrm>
             <a:off x="640080" y="1371600"/>
-            <a:ext cx="6858000" cy="5029200"/>
+            <a:ext cx="6858000" cy="1810512"/>
           </a:xfrm>
           <a:prstGeom prst="rect">
             <a:avLst/>
@@ -6739,7 +8718,7 @@
         <p:spPr>
           <a:xfrm>
             <a:off x="640080" y="1371600"/>
-            <a:ext cx="6858000" cy="5029200"/>
+            <a:ext cx="6858000" cy="1810512"/>
           </a:xfrm>
           <a:prstGeom prst="rect">
             <a:avLst/>
@@ -6813,9 +8792,144 @@
           </a:p>
         </p:txBody>
       </p:sp>
+      <p:sp>
+        <p:nvSpPr>
+          <p:cNvPr id="4" name="Rectangle 3"/>
+          <p:cNvSpPr/>
+          <p:nvPr/>
+        </p:nvSpPr>
+        <p:spPr>
+          <a:xfrm>
+            <a:off x="640080" y="3291840"/>
+            <a:ext cx="6766560" cy="457200"/>
+          </a:xfrm>
+          <a:prstGeom prst="rect">
+            <a:avLst/>
+          </a:prstGeom>
+          <a:solidFill>
+            <a:srgbClr val="F5F5F5"/>
+          </a:solidFill>
+          <a:ln>
+            <a:solidFill>
+              <a:srgbClr val="DDDDDD"/>
+            </a:solidFill>
+          </a:ln>
+        </p:spPr>
+        <p:style>
+          <a:lnRef idx="1">
+            <a:schemeClr val="accent1"/>
+          </a:lnRef>
+          <a:fillRef idx="3">
+            <a:schemeClr val="accent1"/>
+          </a:fillRef>
+          <a:effectRef idx="2">
+            <a:schemeClr val="accent1"/>
+          </a:effectRef>
+          <a:fontRef idx="minor">
+            <a:schemeClr val="lt1"/>
+          </a:fontRef>
+        </p:style>
+        <p:txBody>
+          <a:bodyPr rtlCol="0" anchor="ctr"/>
+          <a:lstStyle/>
+          <a:p>
+            <a:pPr algn="ctr"/>
+          </a:p>
+        </p:txBody>
+      </p:sp>
+      <p:sp>
+        <p:nvSpPr>
+          <p:cNvPr id="5" name="TextBox 4"/>
+          <p:cNvSpPr txBox="1"/>
+          <p:nvPr/>
+        </p:nvSpPr>
+        <p:spPr>
+          <a:xfrm>
+            <a:off x="713231" y="3328416"/>
+            <a:ext cx="6620256" cy="384048"/>
+          </a:xfrm>
+          <a:prstGeom prst="rect">
+            <a:avLst/>
+          </a:prstGeom>
+          <a:noFill/>
+        </p:spPr>
+        <p:txBody>
+          <a:bodyPr wrap="square">
+            <a:noAutofit/>
+          </a:bodyPr>
+          <a:lstStyle/>
+          <a:p>
+            <a:pPr>
+              <a:spcAft>
+                <a:spcPts val="0"/>
+              </a:spcAft>
+              <a:defRPr sz="1100">
+                <a:solidFill>
+                  <a:srgbClr val="000000"/>
+                </a:solidFill>
+                <a:latin typeface="Consolas"/>
+              </a:defRPr>
+            </a:pPr>
+            <a:r>
+              <a:t>df['x'] * 2              # векторизация — быстро</a:t>
+            </a:r>
+          </a:p>
+          <a:p>
+            <a:pPr>
+              <a:spcAft>
+                <a:spcPts val="0"/>
+              </a:spcAft>
+              <a:defRPr sz="1100">
+                <a:solidFill>
+                  <a:srgbClr val="000000"/>
+                </a:solidFill>
+                <a:latin typeface="Consolas"/>
+              </a:defRPr>
+            </a:pPr>
+            <a:r>
+              <a:t># for i in range(len(df)): ...  # цикл — медленно</a:t>
+            </a:r>
+          </a:p>
+        </p:txBody>
+      </p:sp>
+      <p:sp>
+        <p:nvSpPr>
+          <p:cNvPr id="6" name="TextBox 5"/>
+          <p:cNvSpPr txBox="1"/>
+          <p:nvPr/>
+        </p:nvSpPr>
+        <p:spPr>
+          <a:xfrm>
+            <a:off x="640080" y="3803904"/>
+            <a:ext cx="6766560" cy="201168"/>
+          </a:xfrm>
+          <a:prstGeom prst="rect">
+            <a:avLst/>
+          </a:prstGeom>
+          <a:noFill/>
+        </p:spPr>
+        <p:txBody>
+          <a:bodyPr wrap="none">
+            <a:spAutoFit/>
+          </a:bodyPr>
+          <a:lstStyle/>
+          <a:p>
+            <a:pPr algn="l">
+              <a:defRPr sz="1000" i="1">
+                <a:solidFill>
+                  <a:srgbClr val="555555"/>
+                </a:solidFill>
+              </a:defRPr>
+            </a:pPr>
+            <a:r>
+              <a:t>Векторизация vs цикл</a:t>
+            </a:r>
+          </a:p>
+        </p:txBody>
+      </p:sp>
       <p:pic>
         <p:nvPicPr>
-          <p:cNvPr id="4" name="Picture 3" descr="perf_vectorized.png"/>
+          <p:cNvPr id="7" name="Picture 6" descr="perf_vectorized.png"/>
           <p:cNvPicPr>
             <a:picLocks noChangeAspect="1"/>
           </p:cNvPicPr>
@@ -6897,7 +9011,7 @@
         <p:spPr>
           <a:xfrm>
             <a:off x="640080" y="1371600"/>
-            <a:ext cx="6858000" cy="5029200"/>
+            <a:ext cx="6858000" cy="1810512"/>
           </a:xfrm>
           <a:prstGeom prst="rect">
             <a:avLst/>
@@ -6971,9 +9085,144 @@
           </a:p>
         </p:txBody>
       </p:sp>
+      <p:sp>
+        <p:nvSpPr>
+          <p:cNvPr id="4" name="Rectangle 3"/>
+          <p:cNvSpPr/>
+          <p:nvPr/>
+        </p:nvSpPr>
+        <p:spPr>
+          <a:xfrm>
+            <a:off x="640080" y="3291840"/>
+            <a:ext cx="6766560" cy="457200"/>
+          </a:xfrm>
+          <a:prstGeom prst="rect">
+            <a:avLst/>
+          </a:prstGeom>
+          <a:solidFill>
+            <a:srgbClr val="F5F5F5"/>
+          </a:solidFill>
+          <a:ln>
+            <a:solidFill>
+              <a:srgbClr val="DDDDDD"/>
+            </a:solidFill>
+          </a:ln>
+        </p:spPr>
+        <p:style>
+          <a:lnRef idx="1">
+            <a:schemeClr val="accent1"/>
+          </a:lnRef>
+          <a:fillRef idx="3">
+            <a:schemeClr val="accent1"/>
+          </a:fillRef>
+          <a:effectRef idx="2">
+            <a:schemeClr val="accent1"/>
+          </a:effectRef>
+          <a:fontRef idx="minor">
+            <a:schemeClr val="lt1"/>
+          </a:fontRef>
+        </p:style>
+        <p:txBody>
+          <a:bodyPr rtlCol="0" anchor="ctr"/>
+          <a:lstStyle/>
+          <a:p>
+            <a:pPr algn="ctr"/>
+          </a:p>
+        </p:txBody>
+      </p:sp>
+      <p:sp>
+        <p:nvSpPr>
+          <p:cNvPr id="5" name="TextBox 4"/>
+          <p:cNvSpPr txBox="1"/>
+          <p:nvPr/>
+        </p:nvSpPr>
+        <p:spPr>
+          <a:xfrm>
+            <a:off x="713231" y="3328416"/>
+            <a:ext cx="6620256" cy="384048"/>
+          </a:xfrm>
+          <a:prstGeom prst="rect">
+            <a:avLst/>
+          </a:prstGeom>
+          <a:noFill/>
+        </p:spPr>
+        <p:txBody>
+          <a:bodyPr wrap="square">
+            <a:noAutofit/>
+          </a:bodyPr>
+          <a:lstStyle/>
+          <a:p>
+            <a:pPr>
+              <a:spcAft>
+                <a:spcPts val="0"/>
+              </a:spcAft>
+              <a:defRPr sz="1100">
+                <a:solidFill>
+                  <a:srgbClr val="000000"/>
+                </a:solidFill>
+                <a:latin typeface="Consolas"/>
+              </a:defRPr>
+            </a:pPr>
+            <a:r>
+              <a:t>df['small_int'] = pd.to_numeric(df['small_int'], downcast='integer')</a:t>
+            </a:r>
+          </a:p>
+          <a:p>
+            <a:pPr>
+              <a:spcAft>
+                <a:spcPts val="0"/>
+              </a:spcAft>
+              <a:defRPr sz="1100">
+                <a:solidFill>
+                  <a:srgbClr val="000000"/>
+                </a:solidFill>
+                <a:latin typeface="Consolas"/>
+              </a:defRPr>
+            </a:pPr>
+            <a:r>
+              <a:t>df['category'] = df['category'].astype('category')</a:t>
+            </a:r>
+          </a:p>
+        </p:txBody>
+      </p:sp>
+      <p:sp>
+        <p:nvSpPr>
+          <p:cNvPr id="6" name="TextBox 5"/>
+          <p:cNvSpPr txBox="1"/>
+          <p:nvPr/>
+        </p:nvSpPr>
+        <p:spPr>
+          <a:xfrm>
+            <a:off x="640080" y="3803904"/>
+            <a:ext cx="6766560" cy="201168"/>
+          </a:xfrm>
+          <a:prstGeom prst="rect">
+            <a:avLst/>
+          </a:prstGeom>
+          <a:noFill/>
+        </p:spPr>
+        <p:txBody>
+          <a:bodyPr wrap="none">
+            <a:spAutoFit/>
+          </a:bodyPr>
+          <a:lstStyle/>
+          <a:p>
+            <a:pPr algn="l">
+              <a:defRPr sz="1000" i="1">
+                <a:solidFill>
+                  <a:srgbClr val="555555"/>
+                </a:solidFill>
+              </a:defRPr>
+            </a:pPr>
+            <a:r>
+              <a:t>Меньше байт на ячейку</a:t>
+            </a:r>
+          </a:p>
+        </p:txBody>
+      </p:sp>
       <p:pic>
         <p:nvPicPr>
-          <p:cNvPr id="4" name="Picture 3" descr="dtype_memory.png"/>
+          <p:cNvPr id="7" name="Picture 6" descr="dtype_memory.png"/>
           <p:cNvPicPr>
             <a:picLocks noChangeAspect="1"/>
           </p:cNvPicPr>
@@ -7055,7 +9304,7 @@
         <p:spPr>
           <a:xfrm>
             <a:off x="640080" y="1371600"/>
-            <a:ext cx="6858000" cy="5029200"/>
+            <a:ext cx="6858000" cy="1810512"/>
           </a:xfrm>
           <a:prstGeom prst="rect">
             <a:avLst/>
@@ -7137,9 +9386,160 @@
           </a:p>
         </p:txBody>
       </p:sp>
+      <p:sp>
+        <p:nvSpPr>
+          <p:cNvPr id="4" name="Rectangle 3"/>
+          <p:cNvSpPr/>
+          <p:nvPr/>
+        </p:nvSpPr>
+        <p:spPr>
+          <a:xfrm>
+            <a:off x="640080" y="3291840"/>
+            <a:ext cx="6766560" cy="630936"/>
+          </a:xfrm>
+          <a:prstGeom prst="rect">
+            <a:avLst/>
+          </a:prstGeom>
+          <a:solidFill>
+            <a:srgbClr val="F5F5F5"/>
+          </a:solidFill>
+          <a:ln>
+            <a:solidFill>
+              <a:srgbClr val="DDDDDD"/>
+            </a:solidFill>
+          </a:ln>
+        </p:spPr>
+        <p:style>
+          <a:lnRef idx="1">
+            <a:schemeClr val="accent1"/>
+          </a:lnRef>
+          <a:fillRef idx="3">
+            <a:schemeClr val="accent1"/>
+          </a:fillRef>
+          <a:effectRef idx="2">
+            <a:schemeClr val="accent1"/>
+          </a:effectRef>
+          <a:fontRef idx="minor">
+            <a:schemeClr val="lt1"/>
+          </a:fontRef>
+        </p:style>
+        <p:txBody>
+          <a:bodyPr rtlCol="0" anchor="ctr"/>
+          <a:lstStyle/>
+          <a:p>
+            <a:pPr algn="ctr"/>
+          </a:p>
+        </p:txBody>
+      </p:sp>
+      <p:sp>
+        <p:nvSpPr>
+          <p:cNvPr id="5" name="TextBox 4"/>
+          <p:cNvSpPr txBox="1"/>
+          <p:nvPr/>
+        </p:nvSpPr>
+        <p:spPr>
+          <a:xfrm>
+            <a:off x="713231" y="3328416"/>
+            <a:ext cx="6620256" cy="557784"/>
+          </a:xfrm>
+          <a:prstGeom prst="rect">
+            <a:avLst/>
+          </a:prstGeom>
+          <a:noFill/>
+        </p:spPr>
+        <p:txBody>
+          <a:bodyPr wrap="square">
+            <a:noAutofit/>
+          </a:bodyPr>
+          <a:lstStyle/>
+          <a:p>
+            <a:pPr>
+              <a:spcAft>
+                <a:spcPts val="0"/>
+              </a:spcAft>
+              <a:defRPr sz="1100">
+                <a:solidFill>
+                  <a:srgbClr val="000000"/>
+                </a:solidFill>
+                <a:latin typeface="Consolas"/>
+              </a:defRPr>
+            </a:pPr>
+            <a:r>
+              <a:t>df.to_parquet('data.parquet', index=False)</a:t>
+            </a:r>
+          </a:p>
+          <a:p>
+            <a:pPr>
+              <a:spcAft>
+                <a:spcPts val="0"/>
+              </a:spcAft>
+              <a:defRPr sz="1100">
+                <a:solidFill>
+                  <a:srgbClr val="000000"/>
+                </a:solidFill>
+                <a:latin typeface="Consolas"/>
+              </a:defRPr>
+            </a:pPr>
+            <a:r>
+              <a:t>df = pd.read_parquet('data.parquet')</a:t>
+            </a:r>
+          </a:p>
+          <a:p>
+            <a:pPr>
+              <a:spcAft>
+                <a:spcPts val="0"/>
+              </a:spcAft>
+              <a:defRPr sz="1100">
+                <a:solidFill>
+                  <a:srgbClr val="000000"/>
+                </a:solidFill>
+                <a:latin typeface="Consolas"/>
+              </a:defRPr>
+            </a:pPr>
+            <a:r>
+              <a:t># типы и сжатие сохраняются</a:t>
+            </a:r>
+          </a:p>
+        </p:txBody>
+      </p:sp>
+      <p:sp>
+        <p:nvSpPr>
+          <p:cNvPr id="6" name="TextBox 5"/>
+          <p:cNvSpPr txBox="1"/>
+          <p:nvPr/>
+        </p:nvSpPr>
+        <p:spPr>
+          <a:xfrm>
+            <a:off x="640080" y="3977639"/>
+            <a:ext cx="6766560" cy="201168"/>
+          </a:xfrm>
+          <a:prstGeom prst="rect">
+            <a:avLst/>
+          </a:prstGeom>
+          <a:noFill/>
+        </p:spPr>
+        <p:txBody>
+          <a:bodyPr wrap="none">
+            <a:spAutoFit/>
+          </a:bodyPr>
+          <a:lstStyle/>
+          <a:p>
+            <a:pPr algn="l">
+              <a:defRPr sz="1000" i="1">
+                <a:solidFill>
+                  <a:srgbClr val="555555"/>
+                </a:solidFill>
+              </a:defRPr>
+            </a:pPr>
+            <a:r>
+              <a:t>Parquet вместо CSV</a:t>
+            </a:r>
+          </a:p>
+        </p:txBody>
+      </p:sp>
       <p:pic>
         <p:nvPicPr>
-          <p:cNvPr id="4" name="Picture 3" descr="csv_vs_parquet.png"/>
+          <p:cNvPr id="7" name="Picture 6" descr="csv_vs_parquet.png"/>
           <p:cNvPicPr>
             <a:picLocks noChangeAspect="1"/>
           </p:cNvPicPr>
@@ -7221,7 +9621,7 @@
         <p:spPr>
           <a:xfrm>
             <a:off x="640080" y="1371600"/>
-            <a:ext cx="6858000" cy="5029200"/>
+            <a:ext cx="6858000" cy="1810512"/>
           </a:xfrm>
           <a:prstGeom prst="rect">
             <a:avLst/>
@@ -7379,7 +9779,7 @@
         <p:spPr>
           <a:xfrm>
             <a:off x="640080" y="1371600"/>
-            <a:ext cx="6858000" cy="5029200"/>
+            <a:ext cx="6858000" cy="1810512"/>
           </a:xfrm>
           <a:prstGeom prst="rect">
             <a:avLst/>
@@ -7561,7 +9961,7 @@
         <p:spPr>
           <a:xfrm>
             <a:off x="640080" y="1371600"/>
-            <a:ext cx="6858000" cy="5029200"/>
+            <a:ext cx="6858000" cy="1810512"/>
           </a:xfrm>
           <a:prstGeom prst="rect">
             <a:avLst/>
@@ -7735,7 +10135,7 @@
         <p:spPr>
           <a:xfrm>
             <a:off x="640080" y="1371600"/>
-            <a:ext cx="6858000" cy="5029200"/>
+            <a:ext cx="6858000" cy="1810512"/>
           </a:xfrm>
           <a:prstGeom prst="rect">
             <a:avLst/>
@@ -7840,9 +10240,176 @@
           </a:p>
         </p:txBody>
       </p:sp>
+      <p:sp>
+        <p:nvSpPr>
+          <p:cNvPr id="4" name="Rectangle 3"/>
+          <p:cNvSpPr/>
+          <p:nvPr/>
+        </p:nvSpPr>
+        <p:spPr>
+          <a:xfrm>
+            <a:off x="640080" y="3291840"/>
+            <a:ext cx="6766560" cy="804672"/>
+          </a:xfrm>
+          <a:prstGeom prst="rect">
+            <a:avLst/>
+          </a:prstGeom>
+          <a:solidFill>
+            <a:srgbClr val="F5F5F5"/>
+          </a:solidFill>
+          <a:ln>
+            <a:solidFill>
+              <a:srgbClr val="DDDDDD"/>
+            </a:solidFill>
+          </a:ln>
+        </p:spPr>
+        <p:style>
+          <a:lnRef idx="1">
+            <a:schemeClr val="accent1"/>
+          </a:lnRef>
+          <a:fillRef idx="3">
+            <a:schemeClr val="accent1"/>
+          </a:fillRef>
+          <a:effectRef idx="2">
+            <a:schemeClr val="accent1"/>
+          </a:effectRef>
+          <a:fontRef idx="minor">
+            <a:schemeClr val="lt1"/>
+          </a:fontRef>
+        </p:style>
+        <p:txBody>
+          <a:bodyPr rtlCol="0" anchor="ctr"/>
+          <a:lstStyle/>
+          <a:p>
+            <a:pPr algn="ctr"/>
+          </a:p>
+        </p:txBody>
+      </p:sp>
+      <p:sp>
+        <p:nvSpPr>
+          <p:cNvPr id="5" name="TextBox 4"/>
+          <p:cNvSpPr txBox="1"/>
+          <p:nvPr/>
+        </p:nvSpPr>
+        <p:spPr>
+          <a:xfrm>
+            <a:off x="713231" y="3328416"/>
+            <a:ext cx="6620256" cy="731520"/>
+          </a:xfrm>
+          <a:prstGeom prst="rect">
+            <a:avLst/>
+          </a:prstGeom>
+          <a:noFill/>
+        </p:spPr>
+        <p:txBody>
+          <a:bodyPr wrap="square">
+            <a:noAutofit/>
+          </a:bodyPr>
+          <a:lstStyle/>
+          <a:p>
+            <a:pPr>
+              <a:spcAft>
+                <a:spcPts val="0"/>
+              </a:spcAft>
+              <a:defRPr sz="1100">
+                <a:solidFill>
+                  <a:srgbClr val="000000"/>
+                </a:solidFill>
+                <a:latin typeface="Consolas"/>
+              </a:defRPr>
+            </a:pPr>
+            <a:r>
+              <a:t>import pandas as pd</a:t>
+            </a:r>
+          </a:p>
+          <a:p>
+            <a:pPr>
+              <a:spcAft>
+                <a:spcPts val="0"/>
+              </a:spcAft>
+              <a:defRPr sz="1100">
+                <a:solidFill>
+                  <a:srgbClr val="000000"/>
+                </a:solidFill>
+                <a:latin typeface="Consolas"/>
+              </a:defRPr>
+            </a:pPr>
+            <a:r>
+              <a:t>df = pd.DataFrame({'a': [1, 2]}, index=['x', 'y'])</a:t>
+            </a:r>
+          </a:p>
+          <a:p>
+            <a:pPr>
+              <a:spcAft>
+                <a:spcPts val="0"/>
+              </a:spcAft>
+              <a:defRPr sz="1100">
+                <a:solidFill>
+                  <a:srgbClr val="000000"/>
+                </a:solidFill>
+                <a:latin typeface="Consolas"/>
+              </a:defRPr>
+            </a:pPr>
+            <a:r>
+              <a:t>df.loc['x']      # по метке</a:t>
+            </a:r>
+          </a:p>
+          <a:p>
+            <a:pPr>
+              <a:spcAft>
+                <a:spcPts val="0"/>
+              </a:spcAft>
+              <a:defRPr sz="1100">
+                <a:solidFill>
+                  <a:srgbClr val="000000"/>
+                </a:solidFill>
+                <a:latin typeface="Consolas"/>
+              </a:defRPr>
+            </a:pPr>
+            <a:r>
+              <a:t>df.iloc[0]       # по позиции</a:t>
+            </a:r>
+          </a:p>
+        </p:txBody>
+      </p:sp>
+      <p:sp>
+        <p:nvSpPr>
+          <p:cNvPr id="6" name="TextBox 5"/>
+          <p:cNvSpPr txBox="1"/>
+          <p:nvPr/>
+        </p:nvSpPr>
+        <p:spPr>
+          <a:xfrm>
+            <a:off x="640080" y="4151376"/>
+            <a:ext cx="6766560" cy="201168"/>
+          </a:xfrm>
+          <a:prstGeom prst="rect">
+            <a:avLst/>
+          </a:prstGeom>
+          <a:noFill/>
+        </p:spPr>
+        <p:txBody>
+          <a:bodyPr wrap="none">
+            <a:spAutoFit/>
+          </a:bodyPr>
+          <a:lstStyle/>
+          <a:p>
+            <a:pPr algn="l">
+              <a:defRPr sz="1000" i="1">
+                <a:solidFill>
+                  <a:srgbClr val="555555"/>
+                </a:solidFill>
+              </a:defRPr>
+            </a:pPr>
+            <a:r>
+              <a:t>Метка vs позиция</a:t>
+            </a:r>
+          </a:p>
+        </p:txBody>
+      </p:sp>
       <p:pic>
         <p:nvPicPr>
-          <p:cNvPr id="4" name="Picture 3" descr="index_ragged_reset.png"/>
+          <p:cNvPr id="7" name="Picture 6" descr="index_ragged_reset.png"/>
           <p:cNvPicPr>
             <a:picLocks noChangeAspect="1"/>
           </p:cNvPicPr>
@@ -7924,7 +10491,7 @@
         <p:spPr>
           <a:xfrm>
             <a:off x="640080" y="1371600"/>
-            <a:ext cx="6858000" cy="5029200"/>
+            <a:ext cx="6858000" cy="1810512"/>
           </a:xfrm>
           <a:prstGeom prst="rect">
             <a:avLst/>
@@ -7998,9 +10565,160 @@
           </a:p>
         </p:txBody>
       </p:sp>
+      <p:sp>
+        <p:nvSpPr>
+          <p:cNvPr id="4" name="Rectangle 3"/>
+          <p:cNvSpPr/>
+          <p:nvPr/>
+        </p:nvSpPr>
+        <p:spPr>
+          <a:xfrm>
+            <a:off x="640080" y="3291840"/>
+            <a:ext cx="6766560" cy="630936"/>
+          </a:xfrm>
+          <a:prstGeom prst="rect">
+            <a:avLst/>
+          </a:prstGeom>
+          <a:solidFill>
+            <a:srgbClr val="F5F5F5"/>
+          </a:solidFill>
+          <a:ln>
+            <a:solidFill>
+              <a:srgbClr val="DDDDDD"/>
+            </a:solidFill>
+          </a:ln>
+        </p:spPr>
+        <p:style>
+          <a:lnRef idx="1">
+            <a:schemeClr val="accent1"/>
+          </a:lnRef>
+          <a:fillRef idx="3">
+            <a:schemeClr val="accent1"/>
+          </a:fillRef>
+          <a:effectRef idx="2">
+            <a:schemeClr val="accent1"/>
+          </a:effectRef>
+          <a:fontRef idx="minor">
+            <a:schemeClr val="lt1"/>
+          </a:fontRef>
+        </p:style>
+        <p:txBody>
+          <a:bodyPr rtlCol="0" anchor="ctr"/>
+          <a:lstStyle/>
+          <a:p>
+            <a:pPr algn="ctr"/>
+          </a:p>
+        </p:txBody>
+      </p:sp>
+      <p:sp>
+        <p:nvSpPr>
+          <p:cNvPr id="5" name="TextBox 4"/>
+          <p:cNvSpPr txBox="1"/>
+          <p:nvPr/>
+        </p:nvSpPr>
+        <p:spPr>
+          <a:xfrm>
+            <a:off x="713231" y="3328416"/>
+            <a:ext cx="6620256" cy="557784"/>
+          </a:xfrm>
+          <a:prstGeom prst="rect">
+            <a:avLst/>
+          </a:prstGeom>
+          <a:noFill/>
+        </p:spPr>
+        <p:txBody>
+          <a:bodyPr wrap="square">
+            <a:noAutofit/>
+          </a:bodyPr>
+          <a:lstStyle/>
+          <a:p>
+            <a:pPr>
+              <a:spcAft>
+                <a:spcPts val="0"/>
+              </a:spcAft>
+              <a:defRPr sz="1100">
+                <a:solidFill>
+                  <a:srgbClr val="000000"/>
+                </a:solidFill>
+                <a:latin typeface="Consolas"/>
+              </a:defRPr>
+            </a:pPr>
+            <a:r>
+              <a:t>del big_df</a:t>
+            </a:r>
+          </a:p>
+          <a:p>
+            <a:pPr>
+              <a:spcAft>
+                <a:spcPts val="0"/>
+              </a:spcAft>
+              <a:defRPr sz="1100">
+                <a:solidFill>
+                  <a:srgbClr val="000000"/>
+                </a:solidFill>
+                <a:latin typeface="Consolas"/>
+              </a:defRPr>
+            </a:pPr>
+            <a:r>
+              <a:t>import gc; gc.collect()</a:t>
+            </a:r>
+          </a:p>
+          <a:p>
+            <a:pPr>
+              <a:spcAft>
+                <a:spcPts val="0"/>
+              </a:spcAft>
+              <a:defRPr sz="1100">
+                <a:solidFill>
+                  <a:srgbClr val="000000"/>
+                </a:solidFill>
+                <a:latin typeface="Consolas"/>
+              </a:defRPr>
+            </a:pPr>
+            <a:r>
+              <a:t>df = df[['need', 'only', 'cols']].copy()</a:t>
+            </a:r>
+          </a:p>
+        </p:txBody>
+      </p:sp>
+      <p:sp>
+        <p:nvSpPr>
+          <p:cNvPr id="6" name="TextBox 5"/>
+          <p:cNvSpPr txBox="1"/>
+          <p:nvPr/>
+        </p:nvSpPr>
+        <p:spPr>
+          <a:xfrm>
+            <a:off x="640080" y="3977639"/>
+            <a:ext cx="6766560" cy="201168"/>
+          </a:xfrm>
+          <a:prstGeom prst="rect">
+            <a:avLst/>
+          </a:prstGeom>
+          <a:noFill/>
+        </p:spPr>
+        <p:txBody>
+          <a:bodyPr wrap="none">
+            <a:spAutoFit/>
+          </a:bodyPr>
+          <a:lstStyle/>
+          <a:p>
+            <a:pPr algn="l">
+              <a:defRPr sz="1000" i="1">
+                <a:solidFill>
+                  <a:srgbClr val="555555"/>
+                </a:solidFill>
+              </a:defRPr>
+            </a:pPr>
+            <a:r>
+              <a:t>del + gc.collect()</a:t>
+            </a:r>
+          </a:p>
+        </p:txBody>
+      </p:sp>
       <p:pic>
         <p:nvPicPr>
-          <p:cNvPr id="4" name="Picture 3" descr="jupyter_memory.png"/>
+          <p:cNvPr id="7" name="Picture 6" descr="jupyter_memory.png"/>
           <p:cNvPicPr>
             <a:picLocks noChangeAspect="1"/>
           </p:cNvPicPr>
@@ -8082,7 +10800,7 @@
         <p:spPr>
           <a:xfrm>
             <a:off x="640080" y="1371600"/>
-            <a:ext cx="6858000" cy="5029200"/>
+            <a:ext cx="6858000" cy="2194560"/>
           </a:xfrm>
           <a:prstGeom prst="rect">
             <a:avLst/>
@@ -8255,7 +10973,7 @@
         <p:spPr>
           <a:xfrm>
             <a:off x="640080" y="1371600"/>
-            <a:ext cx="11247120" cy="5029200"/>
+            <a:ext cx="11247120" cy="2194560"/>
           </a:xfrm>
           <a:prstGeom prst="rect">
             <a:avLst/>
@@ -8876,7 +11594,7 @@
         <p:spPr>
           <a:xfrm>
             <a:off x="640080" y="1371600"/>
-            <a:ext cx="6858000" cy="5029200"/>
+            <a:ext cx="6858000" cy="1810512"/>
           </a:xfrm>
           <a:prstGeom prst="rect">
             <a:avLst/>
@@ -8958,9 +11676,160 @@
           </a:p>
         </p:txBody>
       </p:sp>
+      <p:sp>
+        <p:nvSpPr>
+          <p:cNvPr id="4" name="Rectangle 3"/>
+          <p:cNvSpPr/>
+          <p:nvPr/>
+        </p:nvSpPr>
+        <p:spPr>
+          <a:xfrm>
+            <a:off x="640080" y="3291840"/>
+            <a:ext cx="6766560" cy="630936"/>
+          </a:xfrm>
+          <a:prstGeom prst="rect">
+            <a:avLst/>
+          </a:prstGeom>
+          <a:solidFill>
+            <a:srgbClr val="F5F5F5"/>
+          </a:solidFill>
+          <a:ln>
+            <a:solidFill>
+              <a:srgbClr val="DDDDDD"/>
+            </a:solidFill>
+          </a:ln>
+        </p:spPr>
+        <p:style>
+          <a:lnRef idx="1">
+            <a:schemeClr val="accent1"/>
+          </a:lnRef>
+          <a:fillRef idx="3">
+            <a:schemeClr val="accent1"/>
+          </a:fillRef>
+          <a:effectRef idx="2">
+            <a:schemeClr val="accent1"/>
+          </a:effectRef>
+          <a:fontRef idx="minor">
+            <a:schemeClr val="lt1"/>
+          </a:fontRef>
+        </p:style>
+        <p:txBody>
+          <a:bodyPr rtlCol="0" anchor="ctr"/>
+          <a:lstStyle/>
+          <a:p>
+            <a:pPr algn="ctr"/>
+          </a:p>
+        </p:txBody>
+      </p:sp>
+      <p:sp>
+        <p:nvSpPr>
+          <p:cNvPr id="5" name="TextBox 4"/>
+          <p:cNvSpPr txBox="1"/>
+          <p:nvPr/>
+        </p:nvSpPr>
+        <p:spPr>
+          <a:xfrm>
+            <a:off x="713231" y="3328416"/>
+            <a:ext cx="6620256" cy="557784"/>
+          </a:xfrm>
+          <a:prstGeom prst="rect">
+            <a:avLst/>
+          </a:prstGeom>
+          <a:noFill/>
+        </p:spPr>
+        <p:txBody>
+          <a:bodyPr wrap="square">
+            <a:noAutofit/>
+          </a:bodyPr>
+          <a:lstStyle/>
+          <a:p>
+            <a:pPr>
+              <a:spcAft>
+                <a:spcPts val="0"/>
+              </a:spcAft>
+              <a:defRPr sz="1100">
+                <a:solidFill>
+                  <a:srgbClr val="000000"/>
+                </a:solidFill>
+                <a:latin typeface="Consolas"/>
+              </a:defRPr>
+            </a:pPr>
+            <a:r>
+              <a:t>mask = df['age'] &gt; 18</a:t>
+            </a:r>
+          </a:p>
+          <a:p>
+            <a:pPr>
+              <a:spcAft>
+                <a:spcPts val="0"/>
+              </a:spcAft>
+              <a:defRPr sz="1100">
+                <a:solidFill>
+                  <a:srgbClr val="000000"/>
+                </a:solidFill>
+                <a:latin typeface="Consolas"/>
+              </a:defRPr>
+            </a:pPr>
+            <a:r>
+              <a:t>adults = df[mask]           # фильтр булевой маской</a:t>
+            </a:r>
+          </a:p>
+          <a:p>
+            <a:pPr>
+              <a:spcAft>
+                <a:spcPts val="0"/>
+              </a:spcAft>
+              <a:defRPr sz="1100">
+                <a:solidFill>
+                  <a:srgbClr val="000000"/>
+                </a:solidFill>
+                <a:latin typeface="Consolas"/>
+              </a:defRPr>
+            </a:pPr>
+            <a:r>
+              <a:t>df.loc[df['city'] == 'MSK'] # то же через loc</a:t>
+            </a:r>
+          </a:p>
+        </p:txBody>
+      </p:sp>
+      <p:sp>
+        <p:nvSpPr>
+          <p:cNvPr id="6" name="TextBox 5"/>
+          <p:cNvSpPr txBox="1"/>
+          <p:nvPr/>
+        </p:nvSpPr>
+        <p:spPr>
+          <a:xfrm>
+            <a:off x="640080" y="3977639"/>
+            <a:ext cx="6766560" cy="201168"/>
+          </a:xfrm>
+          <a:prstGeom prst="rect">
+            <a:avLst/>
+          </a:prstGeom>
+          <a:noFill/>
+        </p:spPr>
+        <p:txBody>
+          <a:bodyPr wrap="none">
+            <a:spAutoFit/>
+          </a:bodyPr>
+          <a:lstStyle/>
+          <a:p>
+            <a:pPr algn="l">
+              <a:defRPr sz="1000" i="1">
+                <a:solidFill>
+                  <a:srgbClr val="555555"/>
+                </a:solidFill>
+              </a:defRPr>
+            </a:pPr>
+            <a:r>
+              <a:t>Фильтрация строк</a:t>
+            </a:r>
+          </a:p>
+        </p:txBody>
+      </p:sp>
       <p:pic>
         <p:nvPicPr>
-          <p:cNvPr id="4" name="Picture 3" descr="boolean_mask_flow.png"/>
+          <p:cNvPr id="7" name="Picture 6" descr="boolean_mask_flow.png"/>
           <p:cNvPicPr>
             <a:picLocks noChangeAspect="1"/>
           </p:cNvPicPr>
@@ -9042,7 +11911,7 @@
         <p:spPr>
           <a:xfrm>
             <a:off x="640080" y="1371600"/>
-            <a:ext cx="6858000" cy="5029200"/>
+            <a:ext cx="6858000" cy="1810512"/>
           </a:xfrm>
           <a:prstGeom prst="rect">
             <a:avLst/>
@@ -9148,9 +12017,160 @@
           </a:p>
         </p:txBody>
       </p:sp>
+      <p:sp>
+        <p:nvSpPr>
+          <p:cNvPr id="4" name="Rectangle 3"/>
+          <p:cNvSpPr/>
+          <p:nvPr/>
+        </p:nvSpPr>
+        <p:spPr>
+          <a:xfrm>
+            <a:off x="640080" y="3291840"/>
+            <a:ext cx="6766560" cy="630936"/>
+          </a:xfrm>
+          <a:prstGeom prst="rect">
+            <a:avLst/>
+          </a:prstGeom>
+          <a:solidFill>
+            <a:srgbClr val="F5F5F5"/>
+          </a:solidFill>
+          <a:ln>
+            <a:solidFill>
+              <a:srgbClr val="DDDDDD"/>
+            </a:solidFill>
+          </a:ln>
+        </p:spPr>
+        <p:style>
+          <a:lnRef idx="1">
+            <a:schemeClr val="accent1"/>
+          </a:lnRef>
+          <a:fillRef idx="3">
+            <a:schemeClr val="accent1"/>
+          </a:fillRef>
+          <a:effectRef idx="2">
+            <a:schemeClr val="accent1"/>
+          </a:effectRef>
+          <a:fontRef idx="minor">
+            <a:schemeClr val="lt1"/>
+          </a:fontRef>
+        </p:style>
+        <p:txBody>
+          <a:bodyPr rtlCol="0" anchor="ctr"/>
+          <a:lstStyle/>
+          <a:p>
+            <a:pPr algn="ctr"/>
+          </a:p>
+        </p:txBody>
+      </p:sp>
+      <p:sp>
+        <p:nvSpPr>
+          <p:cNvPr id="5" name="TextBox 4"/>
+          <p:cNvSpPr txBox="1"/>
+          <p:nvPr/>
+        </p:nvSpPr>
+        <p:spPr>
+          <a:xfrm>
+            <a:off x="713231" y="3328416"/>
+            <a:ext cx="6620256" cy="557784"/>
+          </a:xfrm>
+          <a:prstGeom prst="rect">
+            <a:avLst/>
+          </a:prstGeom>
+          <a:noFill/>
+        </p:spPr>
+        <p:txBody>
+          <a:bodyPr wrap="square">
+            <a:noAutofit/>
+          </a:bodyPr>
+          <a:lstStyle/>
+          <a:p>
+            <a:pPr>
+              <a:spcAft>
+                <a:spcPts val="0"/>
+              </a:spcAft>
+              <a:defRPr sz="1100">
+                <a:solidFill>
+                  <a:srgbClr val="000000"/>
+                </a:solidFill>
+                <a:latin typeface="Consolas"/>
+              </a:defRPr>
+            </a:pPr>
+            <a:r>
+              <a:t>col = df['price']          # столбец</a:t>
+            </a:r>
+          </a:p>
+          <a:p>
+            <a:pPr>
+              <a:spcAft>
+                <a:spcPts val="0"/>
+              </a:spcAft>
+              <a:defRPr sz="1100">
+                <a:solidFill>
+                  <a:srgbClr val="000000"/>
+                </a:solidFill>
+                <a:latin typeface="Consolas"/>
+              </a:defRPr>
+            </a:pPr>
+            <a:r>
+              <a:t>cell = df.loc[10, 'price'] # по метке индекса</a:t>
+            </a:r>
+          </a:p>
+          <a:p>
+            <a:pPr>
+              <a:spcAft>
+                <a:spcPts val="0"/>
+              </a:spcAft>
+              <a:defRPr sz="1100">
+                <a:solidFill>
+                  <a:srgbClr val="000000"/>
+                </a:solidFill>
+                <a:latin typeface="Consolas"/>
+              </a:defRPr>
+            </a:pPr>
+            <a:r>
+              <a:t>cell = df.iloc[0, 2]       # по позиции (0, 2)</a:t>
+            </a:r>
+          </a:p>
+        </p:txBody>
+      </p:sp>
+      <p:sp>
+        <p:nvSpPr>
+          <p:cNvPr id="6" name="TextBox 5"/>
+          <p:cNvSpPr txBox="1"/>
+          <p:nvPr/>
+        </p:nvSpPr>
+        <p:spPr>
+          <a:xfrm>
+            <a:off x="640080" y="3977639"/>
+            <a:ext cx="6766560" cy="201168"/>
+          </a:xfrm>
+          <a:prstGeom prst="rect">
+            <a:avLst/>
+          </a:prstGeom>
+          <a:noFill/>
+        </p:spPr>
+        <p:txBody>
+          <a:bodyPr wrap="none">
+            <a:spAutoFit/>
+          </a:bodyPr>
+          <a:lstStyle/>
+          <a:p>
+            <a:pPr algn="l">
+              <a:defRPr sz="1000" i="1">
+                <a:solidFill>
+                  <a:srgbClr val="555555"/>
+                </a:solidFill>
+              </a:defRPr>
+            </a:pPr>
+            <a:r>
+              <a:t>[] / loc / iloc</a:t>
+            </a:r>
+          </a:p>
+        </p:txBody>
+      </p:sp>
       <p:pic>
         <p:nvPicPr>
-          <p:cNvPr id="4" name="Picture 3" descr="loc_vs_iloc.png"/>
+          <p:cNvPr id="7" name="Picture 6" descr="loc_vs_iloc.png"/>
           <p:cNvPicPr>
             <a:picLocks noChangeAspect="1"/>
           </p:cNvPicPr>
@@ -9232,7 +12252,7 @@
         <p:spPr>
           <a:xfrm>
             <a:off x="640080" y="1371600"/>
-            <a:ext cx="6858000" cy="5029200"/>
+            <a:ext cx="6858000" cy="1810512"/>
           </a:xfrm>
           <a:prstGeom prst="rect">
             <a:avLst/>
@@ -9314,9 +12334,160 @@
           </a:p>
         </p:txBody>
       </p:sp>
+      <p:sp>
+        <p:nvSpPr>
+          <p:cNvPr id="4" name="Rectangle 3"/>
+          <p:cNvSpPr/>
+          <p:nvPr/>
+        </p:nvSpPr>
+        <p:spPr>
+          <a:xfrm>
+            <a:off x="640080" y="3291840"/>
+            <a:ext cx="6766560" cy="630936"/>
+          </a:xfrm>
+          <a:prstGeom prst="rect">
+            <a:avLst/>
+          </a:prstGeom>
+          <a:solidFill>
+            <a:srgbClr val="F5F5F5"/>
+          </a:solidFill>
+          <a:ln>
+            <a:solidFill>
+              <a:srgbClr val="DDDDDD"/>
+            </a:solidFill>
+          </a:ln>
+        </p:spPr>
+        <p:style>
+          <a:lnRef idx="1">
+            <a:schemeClr val="accent1"/>
+          </a:lnRef>
+          <a:fillRef idx="3">
+            <a:schemeClr val="accent1"/>
+          </a:fillRef>
+          <a:effectRef idx="2">
+            <a:schemeClr val="accent1"/>
+          </a:effectRef>
+          <a:fontRef idx="minor">
+            <a:schemeClr val="lt1"/>
+          </a:fontRef>
+        </p:style>
+        <p:txBody>
+          <a:bodyPr rtlCol="0" anchor="ctr"/>
+          <a:lstStyle/>
+          <a:p>
+            <a:pPr algn="ctr"/>
+          </a:p>
+        </p:txBody>
+      </p:sp>
+      <p:sp>
+        <p:nvSpPr>
+          <p:cNvPr id="5" name="TextBox 4"/>
+          <p:cNvSpPr txBox="1"/>
+          <p:nvPr/>
+        </p:nvSpPr>
+        <p:spPr>
+          <a:xfrm>
+            <a:off x="713231" y="3328416"/>
+            <a:ext cx="6620256" cy="557784"/>
+          </a:xfrm>
+          <a:prstGeom prst="rect">
+            <a:avLst/>
+          </a:prstGeom>
+          <a:noFill/>
+        </p:spPr>
+        <p:txBody>
+          <a:bodyPr wrap="square">
+            <a:noAutofit/>
+          </a:bodyPr>
+          <a:lstStyle/>
+          <a:p>
+            <a:pPr>
+              <a:spcAft>
+                <a:spcPts val="0"/>
+              </a:spcAft>
+              <a:defRPr sz="1100">
+                <a:solidFill>
+                  <a:srgbClr val="000000"/>
+                </a:solidFill>
+                <a:latin typeface="Consolas"/>
+              </a:defRPr>
+            </a:pPr>
+            <a:r>
+              <a:t>df2 = df[df['active']].copy()  # явная копия</a:t>
+            </a:r>
+          </a:p>
+          <a:p>
+            <a:pPr>
+              <a:spcAft>
+                <a:spcPts val="0"/>
+              </a:spcAft>
+              <a:defRPr sz="1100">
+                <a:solidFill>
+                  <a:srgbClr val="000000"/>
+                </a:solidFill>
+                <a:latin typeface="Consolas"/>
+              </a:defRPr>
+            </a:pPr>
+            <a:r>
+              <a:t>df2.loc[:, 'score'] = 0        # без предупреждения</a:t>
+            </a:r>
+          </a:p>
+          <a:p>
+            <a:pPr>
+              <a:spcAft>
+                <a:spcPts val="0"/>
+              </a:spcAft>
+              <a:defRPr sz="1100">
+                <a:solidFill>
+                  <a:srgbClr val="000000"/>
+                </a:solidFill>
+                <a:latin typeface="Consolas"/>
+              </a:defRPr>
+            </a:pPr>
+            <a:r>
+              <a:t># без .copy() — риск записи во view</a:t>
+            </a:r>
+          </a:p>
+        </p:txBody>
+      </p:sp>
+      <p:sp>
+        <p:nvSpPr>
+          <p:cNvPr id="6" name="TextBox 5"/>
+          <p:cNvSpPr txBox="1"/>
+          <p:nvPr/>
+        </p:nvSpPr>
+        <p:spPr>
+          <a:xfrm>
+            <a:off x="640080" y="3977639"/>
+            <a:ext cx="6766560" cy="201168"/>
+          </a:xfrm>
+          <a:prstGeom prst="rect">
+            <a:avLst/>
+          </a:prstGeom>
+          <a:noFill/>
+        </p:spPr>
+        <p:txBody>
+          <a:bodyPr wrap="none">
+            <a:spAutoFit/>
+          </a:bodyPr>
+          <a:lstStyle/>
+          <a:p>
+            <a:pPr algn="l">
+              <a:defRPr sz="1000" i="1">
+                <a:solidFill>
+                  <a:srgbClr val="555555"/>
+                </a:solidFill>
+              </a:defRPr>
+            </a:pPr>
+            <a:r>
+              <a:t>copy() перед присваиванием</a:t>
+            </a:r>
+          </a:p>
+        </p:txBody>
+      </p:sp>
       <p:pic>
         <p:nvPicPr>
-          <p:cNvPr id="4" name="Picture 3" descr="setting_with_copy.png"/>
+          <p:cNvPr id="7" name="Picture 6" descr="setting_with_copy.png"/>
           <p:cNvPicPr>
             <a:picLocks noChangeAspect="1"/>
           </p:cNvPicPr>
@@ -9398,7 +12569,7 @@
         <p:spPr>
           <a:xfrm>
             <a:off x="640080" y="1371600"/>
-            <a:ext cx="6858000" cy="5029200"/>
+            <a:ext cx="6858000" cy="1810512"/>
           </a:xfrm>
           <a:prstGeom prst="rect">
             <a:avLst/>
@@ -9588,7 +12759,7 @@
         <p:spPr>
           <a:xfrm>
             <a:off x="640080" y="1371600"/>
-            <a:ext cx="6858000" cy="5029200"/>
+            <a:ext cx="6858000" cy="1810512"/>
           </a:xfrm>
           <a:prstGeom prst="rect">
             <a:avLst/>
@@ -9694,9 +12865,160 @@
           </a:p>
         </p:txBody>
       </p:sp>
+      <p:sp>
+        <p:nvSpPr>
+          <p:cNvPr id="4" name="Rectangle 3"/>
+          <p:cNvSpPr/>
+          <p:nvPr/>
+        </p:nvSpPr>
+        <p:spPr>
+          <a:xfrm>
+            <a:off x="640080" y="3291840"/>
+            <a:ext cx="6766560" cy="630936"/>
+          </a:xfrm>
+          <a:prstGeom prst="rect">
+            <a:avLst/>
+          </a:prstGeom>
+          <a:solidFill>
+            <a:srgbClr val="F5F5F5"/>
+          </a:solidFill>
+          <a:ln>
+            <a:solidFill>
+              <a:srgbClr val="DDDDDD"/>
+            </a:solidFill>
+          </a:ln>
+        </p:spPr>
+        <p:style>
+          <a:lnRef idx="1">
+            <a:schemeClr val="accent1"/>
+          </a:lnRef>
+          <a:fillRef idx="3">
+            <a:schemeClr val="accent1"/>
+          </a:fillRef>
+          <a:effectRef idx="2">
+            <a:schemeClr val="accent1"/>
+          </a:effectRef>
+          <a:fontRef idx="minor">
+            <a:schemeClr val="lt1"/>
+          </a:fontRef>
+        </p:style>
+        <p:txBody>
+          <a:bodyPr rtlCol="0" anchor="ctr"/>
+          <a:lstStyle/>
+          <a:p>
+            <a:pPr algn="ctr"/>
+          </a:p>
+        </p:txBody>
+      </p:sp>
+      <p:sp>
+        <p:nvSpPr>
+          <p:cNvPr id="5" name="TextBox 4"/>
+          <p:cNvSpPr txBox="1"/>
+          <p:nvPr/>
+        </p:nvSpPr>
+        <p:spPr>
+          <a:xfrm>
+            <a:off x="713231" y="3328416"/>
+            <a:ext cx="6620256" cy="557784"/>
+          </a:xfrm>
+          <a:prstGeom prst="rect">
+            <a:avLst/>
+          </a:prstGeom>
+          <a:noFill/>
+        </p:spPr>
+        <p:txBody>
+          <a:bodyPr wrap="square">
+            <a:noAutofit/>
+          </a:bodyPr>
+          <a:lstStyle/>
+          <a:p>
+            <a:pPr>
+              <a:spcAft>
+                <a:spcPts val="0"/>
+              </a:spcAft>
+              <a:defRPr sz="1100">
+                <a:solidFill>
+                  <a:srgbClr val="000000"/>
+                </a:solidFill>
+                <a:latin typeface="Consolas"/>
+              </a:defRPr>
+            </a:pPr>
+            <a:r>
+              <a:t>df['col'].isna().sum()          # число пропусков</a:t>
+            </a:r>
+          </a:p>
+          <a:p>
+            <a:pPr>
+              <a:spcAft>
+                <a:spcPts val="0"/>
+              </a:spcAft>
+              <a:defRPr sz="1100">
+                <a:solidFill>
+                  <a:srgbClr val="000000"/>
+                </a:solidFill>
+                <a:latin typeface="Consolas"/>
+              </a:defRPr>
+            </a:pPr>
+            <a:r>
+              <a:t>df['col'].fillna(df['col'].median())</a:t>
+            </a:r>
+          </a:p>
+          <a:p>
+            <a:pPr>
+              <a:spcAft>
+                <a:spcPts val="0"/>
+              </a:spcAft>
+              <a:defRPr sz="1100">
+                <a:solidFill>
+                  <a:srgbClr val="000000"/>
+                </a:solidFill>
+                <a:latin typeface="Consolas"/>
+              </a:defRPr>
+            </a:pPr>
+            <a:r>
+              <a:t>df = df.dropna(subset=['target'])</a:t>
+            </a:r>
+          </a:p>
+        </p:txBody>
+      </p:sp>
+      <p:sp>
+        <p:nvSpPr>
+          <p:cNvPr id="6" name="TextBox 5"/>
+          <p:cNvSpPr txBox="1"/>
+          <p:nvPr/>
+        </p:nvSpPr>
+        <p:spPr>
+          <a:xfrm>
+            <a:off x="640080" y="3977639"/>
+            <a:ext cx="6766560" cy="201168"/>
+          </a:xfrm>
+          <a:prstGeom prst="rect">
+            <a:avLst/>
+          </a:prstGeom>
+          <a:noFill/>
+        </p:spPr>
+        <p:txBody>
+          <a:bodyPr wrap="none">
+            <a:spAutoFit/>
+          </a:bodyPr>
+          <a:lstStyle/>
+          <a:p>
+            <a:pPr algn="l">
+              <a:defRPr sz="1000" i="1">
+                <a:solidFill>
+                  <a:srgbClr val="555555"/>
+                </a:solidFill>
+              </a:defRPr>
+            </a:pPr>
+            <a:r>
+              <a:t>isna / fillna / dropna</a:t>
+            </a:r>
+          </a:p>
+        </p:txBody>
+      </p:sp>
       <p:pic>
         <p:nvPicPr>
-          <p:cNvPr id="4" name="Picture 3" descr="missing_counts.png"/>
+          <p:cNvPr id="7" name="Picture 6" descr="missing_counts.png"/>
           <p:cNvPicPr>
             <a:picLocks noChangeAspect="1"/>
           </p:cNvPicPr>
@@ -9720,7 +13042,7 @@
       </p:pic>
       <p:pic>
         <p:nvPicPr>
-          <p:cNvPr id="5" name="Picture 4" descr="nullable_int_types.png"/>
+          <p:cNvPr id="8" name="Picture 7" descr="nullable_int_types.png"/>
           <p:cNvPicPr>
             <a:picLocks noChangeAspect="1"/>
           </p:cNvPicPr>
@@ -9802,7 +13124,7 @@
         <p:spPr>
           <a:xfrm>
             <a:off x="640080" y="1371600"/>
-            <a:ext cx="6858000" cy="5029200"/>
+            <a:ext cx="6858000" cy="1810512"/>
           </a:xfrm>
           <a:prstGeom prst="rect">
             <a:avLst/>
@@ -9891,9 +13213,160 @@
           </a:p>
         </p:txBody>
       </p:sp>
+      <p:sp>
+        <p:nvSpPr>
+          <p:cNvPr id="4" name="Rectangle 3"/>
+          <p:cNvSpPr/>
+          <p:nvPr/>
+        </p:nvSpPr>
+        <p:spPr>
+          <a:xfrm>
+            <a:off x="640080" y="3291840"/>
+            <a:ext cx="6766560" cy="630936"/>
+          </a:xfrm>
+          <a:prstGeom prst="rect">
+            <a:avLst/>
+          </a:prstGeom>
+          <a:solidFill>
+            <a:srgbClr val="F5F5F5"/>
+          </a:solidFill>
+          <a:ln>
+            <a:solidFill>
+              <a:srgbClr val="DDDDDD"/>
+            </a:solidFill>
+          </a:ln>
+        </p:spPr>
+        <p:style>
+          <a:lnRef idx="1">
+            <a:schemeClr val="accent1"/>
+          </a:lnRef>
+          <a:fillRef idx="3">
+            <a:schemeClr val="accent1"/>
+          </a:fillRef>
+          <a:effectRef idx="2">
+            <a:schemeClr val="accent1"/>
+          </a:effectRef>
+          <a:fontRef idx="minor">
+            <a:schemeClr val="lt1"/>
+          </a:fontRef>
+        </p:style>
+        <p:txBody>
+          <a:bodyPr rtlCol="0" anchor="ctr"/>
+          <a:lstStyle/>
+          <a:p>
+            <a:pPr algn="ctr"/>
+          </a:p>
+        </p:txBody>
+      </p:sp>
+      <p:sp>
+        <p:nvSpPr>
+          <p:cNvPr id="5" name="TextBox 4"/>
+          <p:cNvSpPr txBox="1"/>
+          <p:nvPr/>
+        </p:nvSpPr>
+        <p:spPr>
+          <a:xfrm>
+            <a:off x="713231" y="3328416"/>
+            <a:ext cx="6620256" cy="557784"/>
+          </a:xfrm>
+          <a:prstGeom prst="rect">
+            <a:avLst/>
+          </a:prstGeom>
+          <a:noFill/>
+        </p:spPr>
+        <p:txBody>
+          <a:bodyPr wrap="square">
+            <a:noAutofit/>
+          </a:bodyPr>
+          <a:lstStyle/>
+          <a:p>
+            <a:pPr>
+              <a:spcAft>
+                <a:spcPts val="0"/>
+              </a:spcAft>
+              <a:defRPr sz="1100">
+                <a:solidFill>
+                  <a:srgbClr val="000000"/>
+                </a:solidFill>
+                <a:latin typeface="Consolas"/>
+              </a:defRPr>
+            </a:pPr>
+            <a:r>
+              <a:t>df['category'].value_counts()</a:t>
+            </a:r>
+          </a:p>
+          <a:p>
+            <a:pPr>
+              <a:spcAft>
+                <a:spcPts val="0"/>
+              </a:spcAft>
+              <a:defRPr sz="1100">
+                <a:solidFill>
+                  <a:srgbClr val="000000"/>
+                </a:solidFill>
+                <a:latin typeface="Consolas"/>
+              </a:defRPr>
+            </a:pPr>
+            <a:r>
+              <a:t>df['user_id'].nunique()</a:t>
+            </a:r>
+          </a:p>
+          <a:p>
+            <a:pPr>
+              <a:spcAft>
+                <a:spcPts val="0"/>
+              </a:spcAft>
+              <a:defRPr sz="1100">
+                <a:solidFill>
+                  <a:srgbClr val="000000"/>
+                </a:solidFill>
+                <a:latin typeface="Consolas"/>
+              </a:defRPr>
+            </a:pPr>
+            <a:r>
+              <a:t>df[numeric_cols].corr()['target'].sort_values()</a:t>
+            </a:r>
+          </a:p>
+        </p:txBody>
+      </p:sp>
+      <p:sp>
+        <p:nvSpPr>
+          <p:cNvPr id="6" name="TextBox 5"/>
+          <p:cNvSpPr txBox="1"/>
+          <p:nvPr/>
+        </p:nvSpPr>
+        <p:spPr>
+          <a:xfrm>
+            <a:off x="640080" y="3977639"/>
+            <a:ext cx="6766560" cy="201168"/>
+          </a:xfrm>
+          <a:prstGeom prst="rect">
+            <a:avLst/>
+          </a:prstGeom>
+          <a:noFill/>
+        </p:spPr>
+        <p:txBody>
+          <a:bodyPr wrap="none">
+            <a:spAutoFit/>
+          </a:bodyPr>
+          <a:lstStyle/>
+          <a:p>
+            <a:pPr algn="l">
+              <a:defRPr sz="1000" i="1">
+                <a:solidFill>
+                  <a:srgbClr val="555555"/>
+                </a:solidFill>
+              </a:defRPr>
+            </a:pPr>
+            <a:r>
+              <a:t>Частоты и корреляции</a:t>
+            </a:r>
+          </a:p>
+        </p:txBody>
+      </p:sp>
       <p:pic>
         <p:nvPicPr>
-          <p:cNvPr id="4" name="Picture 3" descr="corr_heatmap.png"/>
+          <p:cNvPr id="7" name="Picture 6" descr="corr_heatmap.png"/>
           <p:cNvPicPr>
             <a:picLocks noChangeAspect="1"/>
           </p:cNvPicPr>
@@ -9917,7 +13390,7 @@
       </p:pic>
       <p:pic>
         <p:nvPicPr>
-          <p:cNvPr id="5" name="Picture 4" descr="value_counts_bar.png"/>
+          <p:cNvPr id="8" name="Picture 7" descr="value_counts_bar.png"/>
           <p:cNvPicPr>
             <a:picLocks noChangeAspect="1"/>
           </p:cNvPicPr>

--- a/lessons/pandas/presentation.pptx
+++ b/lessons/pandas/presentation.pptx
@@ -11369,7 +11369,7 @@
                 </a:solidFill>
                 <a:hlinkClick r:id="rId5"/>
               </a:rPr>
-              <a:t>https://colab.research.google.com/github/gurovic/ml-lessons/blob/feature/references-and-slide-code/lessons/pandas/code.ipynb</a:t>
+              <a:t>https://colab.research.google.com/github/gurovic/ml-lessons/blob/main/lessons/pandas/code.ipynb</a:t>
             </a:r>
           </a:p>
         </p:txBody>
@@ -11411,7 +11411,7 @@
                 </a:solidFill>
                 <a:hlinkClick r:id="rId6"/>
               </a:rPr>
-              <a:t>https://colab.research.google.com/github/gurovic/ml-lessons/blob/feature/references-and-slide-code/lessons/pandas/project.ipynb</a:t>
+              <a:t>https://colab.research.google.com/github/gurovic/ml-lessons/blob/main/lessons/pandas/project.ipynb</a:t>
             </a:r>
           </a:p>
         </p:txBody>

--- a/lessons/pandas/presentation.pptx
+++ b/lessons/pandas/presentation.pptx
@@ -4020,7 +4020,7 @@
         <p:spPr>
           <a:xfrm>
             <a:off x="640080" y="1371600"/>
-            <a:ext cx="6858000" cy="1810512"/>
+            <a:ext cx="6858000" cy="3557015"/>
           </a:xfrm>
           <a:prstGeom prst="rect">
             <a:avLst/>
@@ -4029,7 +4029,7 @@
         </p:spPr>
         <p:txBody>
           <a:bodyPr wrap="square">
-            <a:spAutoFit/>
+            <a:normAutofit/>
           </a:bodyPr>
           <a:lstStyle/>
           <a:p>
@@ -4118,7 +4118,7 @@
         </p:nvSpPr>
         <p:spPr>
           <a:xfrm>
-            <a:off x="640080" y="3291840"/>
+            <a:off x="640080" y="5038344"/>
             <a:ext cx="6766560" cy="457200"/>
           </a:xfrm>
           <a:prstGeom prst="rect">
@@ -4163,7 +4163,7 @@
         </p:nvSpPr>
         <p:spPr>
           <a:xfrm>
-            <a:off x="713231" y="3328416"/>
+            <a:off x="713231" y="5074920"/>
             <a:ext cx="6620256" cy="384048"/>
           </a:xfrm>
           <a:prstGeom prst="rect">
@@ -4172,7 +4172,7 @@
           <a:noFill/>
         </p:spPr>
         <p:txBody>
-          <a:bodyPr wrap="square">
+          <a:bodyPr wrap="none">
             <a:noAutofit/>
           </a:bodyPr>
           <a:lstStyle/>
@@ -4181,14 +4181,14 @@
               <a:spcAft>
                 <a:spcPts val="0"/>
               </a:spcAft>
-              <a:defRPr sz="1100">
+            </a:pPr>
+            <a:r>
+              <a:rPr sz="1100">
                 <a:solidFill>
                   <a:srgbClr val="000000"/>
                 </a:solidFill>
                 <a:latin typeface="Consolas"/>
-              </a:defRPr>
-            </a:pPr>
-            <a:r>
+              </a:rPr>
               <a:t>df.groupby('city')['sales'].agg(['mean', 'count'])</a:t>
             </a:r>
           </a:p>
@@ -4197,14 +4197,14 @@
               <a:spcAft>
                 <a:spcPts val="0"/>
               </a:spcAft>
-              <a:defRPr sz="1100">
+            </a:pPr>
+            <a:r>
+              <a:rPr sz="1100">
                 <a:solidFill>
                   <a:srgbClr val="000000"/>
                 </a:solidFill>
                 <a:latin typeface="Consolas"/>
-              </a:defRPr>
-            </a:pPr>
-            <a:r>
+              </a:rPr>
               <a:t>df.groupby('date')['amount'].sum().reset_index()</a:t>
             </a:r>
           </a:p>
@@ -4218,7 +4218,7 @@
         </p:nvSpPr>
         <p:spPr>
           <a:xfrm>
-            <a:off x="640080" y="3803904"/>
+            <a:off x="640080" y="5550408"/>
             <a:ext cx="6766560" cy="201168"/>
           </a:xfrm>
           <a:prstGeom prst="rect">
@@ -4329,7 +4329,7 @@
         <p:spPr>
           <a:xfrm>
             <a:off x="640080" y="1371600"/>
-            <a:ext cx="6858000" cy="1810512"/>
+            <a:ext cx="6858000" cy="3383279"/>
           </a:xfrm>
           <a:prstGeom prst="rect">
             <a:avLst/>
@@ -4338,7 +4338,7 @@
         </p:spPr>
         <p:txBody>
           <a:bodyPr wrap="square">
-            <a:spAutoFit/>
+            <a:normAutofit/>
           </a:bodyPr>
           <a:lstStyle/>
           <a:p>
@@ -4435,7 +4435,7 @@
         </p:nvSpPr>
         <p:spPr>
           <a:xfrm>
-            <a:off x="640080" y="3291840"/>
+            <a:off x="640080" y="4864607"/>
             <a:ext cx="6766560" cy="630936"/>
           </a:xfrm>
           <a:prstGeom prst="rect">
@@ -4480,7 +4480,7 @@
         </p:nvSpPr>
         <p:spPr>
           <a:xfrm>
-            <a:off x="713231" y="3328416"/>
+            <a:off x="713231" y="4901183"/>
             <a:ext cx="6620256" cy="557784"/>
           </a:xfrm>
           <a:prstGeom prst="rect">
@@ -4489,7 +4489,7 @@
           <a:noFill/>
         </p:spPr>
         <p:txBody>
-          <a:bodyPr wrap="square">
+          <a:bodyPr wrap="none">
             <a:noAutofit/>
           </a:bodyPr>
           <a:lstStyle/>
@@ -4498,14 +4498,14 @@
               <a:spcAft>
                 <a:spcPts val="0"/>
               </a:spcAft>
-              <a:defRPr sz="1100">
+            </a:pPr>
+            <a:r>
+              <a:rPr sz="1100">
                 <a:solidFill>
                   <a:srgbClr val="000000"/>
                 </a:solidFill>
                 <a:latin typeface="Consolas"/>
-              </a:defRPr>
-            </a:pPr>
-            <a:r>
+              </a:rPr>
               <a:t>g = df.groupby(['city', 'year'])['sales'].mean()</a:t>
             </a:r>
           </a:p>
@@ -4514,14 +4514,14 @@
               <a:spcAft>
                 <a:spcPts val="0"/>
               </a:spcAft>
-              <a:defRPr sz="1100">
+            </a:pPr>
+            <a:r>
+              <a:rPr sz="1100">
                 <a:solidFill>
                   <a:srgbClr val="000000"/>
                 </a:solidFill>
                 <a:latin typeface="Consolas"/>
-              </a:defRPr>
-            </a:pPr>
-            <a:r>
+              </a:rPr>
               <a:t>g.loc['MSK']          # срез по первому уровню</a:t>
             </a:r>
           </a:p>
@@ -4530,14 +4530,14 @@
               <a:spcAft>
                 <a:spcPts val="0"/>
               </a:spcAft>
-              <a:defRPr sz="1100">
+            </a:pPr>
+            <a:r>
+              <a:rPr sz="1100">
                 <a:solidFill>
                   <a:srgbClr val="000000"/>
                 </a:solidFill>
                 <a:latin typeface="Consolas"/>
-              </a:defRPr>
-            </a:pPr>
-            <a:r>
+              </a:rPr>
               <a:t>g.reset_index()       # обратно в таблицу</a:t>
             </a:r>
           </a:p>
@@ -4551,7 +4551,7 @@
         </p:nvSpPr>
         <p:spPr>
           <a:xfrm>
-            <a:off x="640080" y="3977639"/>
+            <a:off x="640080" y="5550407"/>
             <a:ext cx="6766560" cy="201168"/>
           </a:xfrm>
           <a:prstGeom prst="rect">
@@ -4662,7 +4662,7 @@
         <p:spPr>
           <a:xfrm>
             <a:off x="640080" y="1371600"/>
-            <a:ext cx="6858000" cy="1810512"/>
+            <a:ext cx="6858000" cy="3383279"/>
           </a:xfrm>
           <a:prstGeom prst="rect">
             <a:avLst/>
@@ -4671,7 +4671,7 @@
         </p:spPr>
         <p:txBody>
           <a:bodyPr wrap="square">
-            <a:spAutoFit/>
+            <a:normAutofit/>
           </a:bodyPr>
           <a:lstStyle/>
           <a:p>
@@ -4768,7 +4768,7 @@
         </p:nvSpPr>
         <p:spPr>
           <a:xfrm>
-            <a:off x="640080" y="3291840"/>
+            <a:off x="640080" y="4864607"/>
             <a:ext cx="6766560" cy="630936"/>
           </a:xfrm>
           <a:prstGeom prst="rect">
@@ -4813,7 +4813,7 @@
         </p:nvSpPr>
         <p:spPr>
           <a:xfrm>
-            <a:off x="713231" y="3328416"/>
+            <a:off x="713231" y="4901183"/>
             <a:ext cx="6620256" cy="557784"/>
           </a:xfrm>
           <a:prstGeom prst="rect">
@@ -4822,7 +4822,7 @@
           <a:noFill/>
         </p:spPr>
         <p:txBody>
-          <a:bodyPr wrap="square">
+          <a:bodyPr wrap="none">
             <a:noAutofit/>
           </a:bodyPr>
           <a:lstStyle/>
@@ -4831,14 +4831,14 @@
               <a:spcAft>
                 <a:spcPts val="0"/>
               </a:spcAft>
-              <a:defRPr sz="1100">
+            </a:pPr>
+            <a:r>
+              <a:rPr sz="1100">
                 <a:solidFill>
                   <a:srgbClr val="000000"/>
                 </a:solidFill>
                 <a:latin typeface="Consolas"/>
-              </a:defRPr>
-            </a:pPr>
-            <a:r>
+              </a:rPr>
               <a:t>df['color'] = df['color'].astype('category')</a:t>
             </a:r>
           </a:p>
@@ -4847,14 +4847,14 @@
               <a:spcAft>
                 <a:spcPts val="0"/>
               </a:spcAft>
-              <a:defRPr sz="1100">
+            </a:pPr>
+            <a:r>
+              <a:rPr sz="1100">
                 <a:solidFill>
                   <a:srgbClr val="000000"/>
                 </a:solidFill>
                 <a:latin typeface="Consolas"/>
-              </a:defRPr>
-            </a:pPr>
-            <a:r>
+              </a:rPr>
               <a:t>df['color'].cat.codes   # целые коды</a:t>
             </a:r>
           </a:p>
@@ -4863,14 +4863,14 @@
               <a:spcAft>
                 <a:spcPts val="0"/>
               </a:spcAft>
-              <a:defRPr sz="1100">
+            </a:pPr>
+            <a:r>
+              <a:rPr sz="1100">
                 <a:solidFill>
                   <a:srgbClr val="000000"/>
                 </a:solidFill>
                 <a:latin typeface="Consolas"/>
-              </a:defRPr>
-            </a:pPr>
-            <a:r>
+              </a:rPr>
               <a:t>pd.get_dummies(df, columns=['color'])</a:t>
             </a:r>
           </a:p>
@@ -4884,7 +4884,7 @@
         </p:nvSpPr>
         <p:spPr>
           <a:xfrm>
-            <a:off x="640080" y="3977639"/>
+            <a:off x="640080" y="5550407"/>
             <a:ext cx="6766560" cy="201168"/>
           </a:xfrm>
           <a:prstGeom prst="rect">
@@ -4995,7 +4995,7 @@
         <p:spPr>
           <a:xfrm>
             <a:off x="640080" y="1371600"/>
-            <a:ext cx="6858000" cy="1810512"/>
+            <a:ext cx="6858000" cy="3383279"/>
           </a:xfrm>
           <a:prstGeom prst="rect">
             <a:avLst/>
@@ -5004,7 +5004,7 @@
         </p:spPr>
         <p:txBody>
           <a:bodyPr wrap="square">
-            <a:spAutoFit/>
+            <a:normAutofit/>
           </a:bodyPr>
           <a:lstStyle/>
           <a:p>
@@ -5077,7 +5077,7 @@
         </p:nvSpPr>
         <p:spPr>
           <a:xfrm>
-            <a:off x="640080" y="3291840"/>
+            <a:off x="640080" y="4864607"/>
             <a:ext cx="6766560" cy="630936"/>
           </a:xfrm>
           <a:prstGeom prst="rect">
@@ -5122,7 +5122,7 @@
         </p:nvSpPr>
         <p:spPr>
           <a:xfrm>
-            <a:off x="713231" y="3328416"/>
+            <a:off x="713231" y="4901183"/>
             <a:ext cx="6620256" cy="557784"/>
           </a:xfrm>
           <a:prstGeom prst="rect">
@@ -5131,7 +5131,7 @@
           <a:noFill/>
         </p:spPr>
         <p:txBody>
-          <a:bodyPr wrap="square">
+          <a:bodyPr wrap="none">
             <a:noAutofit/>
           </a:bodyPr>
           <a:lstStyle/>
@@ -5140,14 +5140,14 @@
               <a:spcAft>
                 <a:spcPts val="0"/>
               </a:spcAft>
-              <a:defRPr sz="1100">
+            </a:pPr>
+            <a:r>
+              <a:rPr sz="1100">
                 <a:solidFill>
                   <a:srgbClr val="000000"/>
                 </a:solidFill>
                 <a:latin typeface="Consolas"/>
-              </a:defRPr>
-            </a:pPr>
-            <a:r>
+              </a:rPr>
               <a:t>df['bucket'] = pd.cut(df['age'], bins=[0, 18, 65, 100])</a:t>
             </a:r>
           </a:p>
@@ -5156,14 +5156,14 @@
               <a:spcAft>
                 <a:spcPts val="0"/>
               </a:spcAft>
-              <a:defRPr sz="1100">
+            </a:pPr>
+            <a:r>
+              <a:rPr sz="1100">
                 <a:solidFill>
                   <a:srgbClr val="000000"/>
                 </a:solidFill>
                 <a:latin typeface="Consolas"/>
-              </a:defRPr>
-            </a:pPr>
-            <a:r>
+              </a:rPr>
               <a:t>df['flag'] = (df['score'] &gt; 0.5).astype(int)</a:t>
             </a:r>
           </a:p>
@@ -5172,14 +5172,14 @@
               <a:spcAft>
                 <a:spcPts val="0"/>
               </a:spcAft>
-              <a:defRPr sz="1100">
+            </a:pPr>
+            <a:r>
+              <a:rPr sz="1100">
                 <a:solidFill>
                   <a:srgbClr val="000000"/>
                 </a:solidFill>
                 <a:latin typeface="Consolas"/>
-              </a:defRPr>
-            </a:pPr>
-            <a:r>
+              </a:rPr>
               <a:t>df = df[df['amount'] &gt; 0]</a:t>
             </a:r>
           </a:p>
@@ -5193,7 +5193,7 @@
         </p:nvSpPr>
         <p:spPr>
           <a:xfrm>
-            <a:off x="640080" y="3977639"/>
+            <a:off x="640080" y="5550407"/>
             <a:ext cx="6766560" cy="201168"/>
           </a:xfrm>
           <a:prstGeom prst="rect">
@@ -5328,7 +5328,7 @@
         <p:spPr>
           <a:xfrm>
             <a:off x="640080" y="1371600"/>
-            <a:ext cx="6858000" cy="1810512"/>
+            <a:ext cx="6858000" cy="3383279"/>
           </a:xfrm>
           <a:prstGeom prst="rect">
             <a:avLst/>
@@ -5337,7 +5337,7 @@
         </p:spPr>
         <p:txBody>
           <a:bodyPr wrap="square">
-            <a:spAutoFit/>
+            <a:normAutofit/>
           </a:bodyPr>
           <a:lstStyle/>
           <a:p>
@@ -5410,7 +5410,7 @@
         </p:nvSpPr>
         <p:spPr>
           <a:xfrm>
-            <a:off x="640080" y="3291840"/>
+            <a:off x="640080" y="4864607"/>
             <a:ext cx="6766560" cy="630936"/>
           </a:xfrm>
           <a:prstGeom prst="rect">
@@ -5455,7 +5455,7 @@
         </p:nvSpPr>
         <p:spPr>
           <a:xfrm>
-            <a:off x="713231" y="3328416"/>
+            <a:off x="713231" y="4901183"/>
             <a:ext cx="6620256" cy="557784"/>
           </a:xfrm>
           <a:prstGeom prst="rect">
@@ -5464,7 +5464,7 @@
           <a:noFill/>
         </p:spPr>
         <p:txBody>
-          <a:bodyPr wrap="square">
+          <a:bodyPr wrap="none">
             <a:noAutofit/>
           </a:bodyPr>
           <a:lstStyle/>
@@ -5473,14 +5473,14 @@
               <a:spcAft>
                 <a:spcPts val="0"/>
               </a:spcAft>
-              <a:defRPr sz="1100">
+            </a:pPr>
+            <a:r>
+              <a:rPr sz="1100">
                 <a:solidFill>
                   <a:srgbClr val="000000"/>
                 </a:solidFill>
                 <a:latin typeface="Consolas"/>
-              </a:defRPr>
-            </a:pPr>
-            <a:r>
+              </a:rPr>
               <a:t>df['email'].str.lower()</a:t>
             </a:r>
           </a:p>
@@ -5489,14 +5489,14 @@
               <a:spcAft>
                 <a:spcPts val="0"/>
               </a:spcAft>
-              <a:defRPr sz="1100">
+            </a:pPr>
+            <a:r>
+              <a:rPr sz="1100">
                 <a:solidFill>
                   <a:srgbClr val="000000"/>
                 </a:solidFill>
                 <a:latin typeface="Consolas"/>
-              </a:defRPr>
-            </a:pPr>
-            <a:r>
+              </a:rPr>
               <a:t>df['name'].str.contains('ivan', case=False)</a:t>
             </a:r>
           </a:p>
@@ -5505,14 +5505,14 @@
               <a:spcAft>
                 <a:spcPts val="0"/>
               </a:spcAft>
-              <a:defRPr sz="1100">
+            </a:pPr>
+            <a:r>
+              <a:rPr sz="1100">
                 <a:solidFill>
                   <a:srgbClr val="000000"/>
                 </a:solidFill>
                 <a:latin typeface="Consolas"/>
-              </a:defRPr>
-            </a:pPr>
-            <a:r>
+              </a:rPr>
               <a:t>df['phone'].str.replace('-', '', regex=False)</a:t>
             </a:r>
           </a:p>
@@ -5526,7 +5526,7 @@
         </p:nvSpPr>
         <p:spPr>
           <a:xfrm>
-            <a:off x="640080" y="3977639"/>
+            <a:off x="640080" y="5550407"/>
             <a:ext cx="6766560" cy="201168"/>
           </a:xfrm>
           <a:prstGeom prst="rect">
@@ -5637,7 +5637,7 @@
         <p:spPr>
           <a:xfrm>
             <a:off x="640080" y="1371600"/>
-            <a:ext cx="6858000" cy="1810512"/>
+            <a:ext cx="6858000" cy="3383279"/>
           </a:xfrm>
           <a:prstGeom prst="rect">
             <a:avLst/>
@@ -5646,7 +5646,7 @@
         </p:spPr>
         <p:txBody>
           <a:bodyPr wrap="square">
-            <a:spAutoFit/>
+            <a:normAutofit/>
           </a:bodyPr>
           <a:lstStyle/>
           <a:p>
@@ -5771,7 +5771,7 @@
         </p:nvSpPr>
         <p:spPr>
           <a:xfrm>
-            <a:off x="640080" y="3291840"/>
+            <a:off x="640080" y="4864607"/>
             <a:ext cx="6766560" cy="630936"/>
           </a:xfrm>
           <a:prstGeom prst="rect">
@@ -5816,7 +5816,7 @@
         </p:nvSpPr>
         <p:spPr>
           <a:xfrm>
-            <a:off x="713231" y="3328416"/>
+            <a:off x="713231" y="4901183"/>
             <a:ext cx="6620256" cy="557784"/>
           </a:xfrm>
           <a:prstGeom prst="rect">
@@ -5825,7 +5825,7 @@
           <a:noFill/>
         </p:spPr>
         <p:txBody>
-          <a:bodyPr wrap="square">
+          <a:bodyPr wrap="none">
             <a:noAutofit/>
           </a:bodyPr>
           <a:lstStyle/>
@@ -5834,14 +5834,14 @@
               <a:spcAft>
                 <a:spcPts val="0"/>
               </a:spcAft>
-              <a:defRPr sz="1100">
+            </a:pPr>
+            <a:r>
+              <a:rPr sz="1100">
                 <a:solidFill>
                   <a:srgbClr val="000000"/>
                 </a:solidFill>
                 <a:latin typeface="Consolas"/>
-              </a:defRPr>
-            </a:pPr>
-            <a:r>
+              </a:rPr>
               <a:t>df['ts'] = pd.to_datetime(df['ts'])</a:t>
             </a:r>
           </a:p>
@@ -5850,14 +5850,14 @@
               <a:spcAft>
                 <a:spcPts val="0"/>
               </a:spcAft>
-              <a:defRPr sz="1100">
+            </a:pPr>
+            <a:r>
+              <a:rPr sz="1100">
                 <a:solidFill>
                   <a:srgbClr val="000000"/>
                 </a:solidFill>
                 <a:latin typeface="Consolas"/>
-              </a:defRPr>
-            </a:pPr>
-            <a:r>
+              </a:rPr>
               <a:t>df['hour'] = df['ts'].dt.hour</a:t>
             </a:r>
           </a:p>
@@ -5866,14 +5866,14 @@
               <a:spcAft>
                 <a:spcPts val="0"/>
               </a:spcAft>
-              <a:defRPr sz="1100">
+            </a:pPr>
+            <a:r>
+              <a:rPr sz="1100">
                 <a:solidFill>
                   <a:srgbClr val="000000"/>
                 </a:solidFill>
                 <a:latin typeface="Consolas"/>
-              </a:defRPr>
-            </a:pPr>
-            <a:r>
+              </a:rPr>
               <a:t>df['weekday'] = df['ts'].dt.dayofweek</a:t>
             </a:r>
           </a:p>
@@ -5887,7 +5887,7 @@
         </p:nvSpPr>
         <p:spPr>
           <a:xfrm>
-            <a:off x="640080" y="3977639"/>
+            <a:off x="640080" y="5550407"/>
             <a:ext cx="6766560" cy="201168"/>
           </a:xfrm>
           <a:prstGeom prst="rect">
@@ -5998,7 +5998,7 @@
         <p:spPr>
           <a:xfrm>
             <a:off x="640080" y="1371600"/>
-            <a:ext cx="6858000" cy="1810512"/>
+            <a:ext cx="6858000" cy="3383279"/>
           </a:xfrm>
           <a:prstGeom prst="rect">
             <a:avLst/>
@@ -6007,7 +6007,7 @@
         </p:spPr>
         <p:txBody>
           <a:bodyPr wrap="square">
-            <a:spAutoFit/>
+            <a:normAutofit/>
           </a:bodyPr>
           <a:lstStyle/>
           <a:p>
@@ -6080,7 +6080,7 @@
         </p:nvSpPr>
         <p:spPr>
           <a:xfrm>
-            <a:off x="640080" y="3291840"/>
+            <a:off x="640080" y="4864607"/>
             <a:ext cx="6766560" cy="630936"/>
           </a:xfrm>
           <a:prstGeom prst="rect">
@@ -6125,7 +6125,7 @@
         </p:nvSpPr>
         <p:spPr>
           <a:xfrm>
-            <a:off x="713231" y="3328416"/>
+            <a:off x="713231" y="4901183"/>
             <a:ext cx="6620256" cy="557784"/>
           </a:xfrm>
           <a:prstGeom prst="rect">
@@ -6134,7 +6134,7 @@
           <a:noFill/>
         </p:spPr>
         <p:txBody>
-          <a:bodyPr wrap="square">
+          <a:bodyPr wrap="none">
             <a:noAutofit/>
           </a:bodyPr>
           <a:lstStyle/>
@@ -6143,14 +6143,14 @@
               <a:spcAft>
                 <a:spcPts val="0"/>
               </a:spcAft>
-              <a:defRPr sz="1100">
+            </a:pPr>
+            <a:r>
+              <a:rPr sz="1100">
                 <a:solidFill>
                   <a:srgbClr val="000000"/>
                 </a:solidFill>
                 <a:latin typeface="Consolas"/>
-              </a:defRPr>
-            </a:pPr>
-            <a:r>
+              </a:rPr>
               <a:t>arr = df[['x', 'y']].to_numpy()   # DataFrame → ndarray</a:t>
             </a:r>
           </a:p>
@@ -6159,14 +6159,14 @@
               <a:spcAft>
                 <a:spcPts val="0"/>
               </a:spcAft>
-              <a:defRPr sz="1100">
+            </a:pPr>
+            <a:r>
+              <a:rPr sz="1100">
                 <a:solidFill>
                   <a:srgbClr val="000000"/>
                 </a:solidFill>
                 <a:latin typeface="Consolas"/>
-              </a:defRPr>
-            </a:pPr>
-            <a:r>
+              </a:rPr>
               <a:t>df2 = pd.DataFrame(arr, columns=['x', 'y'])</a:t>
             </a:r>
           </a:p>
@@ -6175,14 +6175,14 @@
               <a:spcAft>
                 <a:spcPts val="0"/>
               </a:spcAft>
-              <a:defRPr sz="1100">
+            </a:pPr>
+            <a:r>
+              <a:rPr sz="1100">
                 <a:solidFill>
                   <a:srgbClr val="000000"/>
                 </a:solidFill>
                 <a:latin typeface="Consolas"/>
-              </a:defRPr>
-            </a:pPr>
-            <a:r>
+              </a:rPr>
               <a:t>df.values  # устаревший alias</a:t>
             </a:r>
           </a:p>
@@ -6196,7 +6196,7 @@
         </p:nvSpPr>
         <p:spPr>
           <a:xfrm>
-            <a:off x="640080" y="3977639"/>
+            <a:off x="640080" y="5550407"/>
             <a:ext cx="6766560" cy="201168"/>
           </a:xfrm>
           <a:prstGeom prst="rect">
@@ -6307,7 +6307,7 @@
         <p:spPr>
           <a:xfrm>
             <a:off x="640080" y="1371600"/>
-            <a:ext cx="6858000" cy="1810512"/>
+            <a:ext cx="6858000" cy="3557015"/>
           </a:xfrm>
           <a:prstGeom prst="rect">
             <a:avLst/>
@@ -6316,7 +6316,7 @@
         </p:spPr>
         <p:txBody>
           <a:bodyPr wrap="square">
-            <a:spAutoFit/>
+            <a:normAutofit/>
           </a:bodyPr>
           <a:lstStyle/>
           <a:p>
@@ -6413,7 +6413,7 @@
         </p:nvSpPr>
         <p:spPr>
           <a:xfrm>
-            <a:off x="640080" y="3291840"/>
+            <a:off x="640080" y="5038344"/>
             <a:ext cx="6766560" cy="457200"/>
           </a:xfrm>
           <a:prstGeom prst="rect">
@@ -6458,7 +6458,7 @@
         </p:nvSpPr>
         <p:spPr>
           <a:xfrm>
-            <a:off x="713231" y="3328416"/>
+            <a:off x="713231" y="5074920"/>
             <a:ext cx="6620256" cy="384048"/>
           </a:xfrm>
           <a:prstGeom prst="rect">
@@ -6467,7 +6467,7 @@
           <a:noFill/>
         </p:spPr>
         <p:txBody>
-          <a:bodyPr wrap="square">
+          <a:bodyPr wrap="none">
             <a:noAutofit/>
           </a:bodyPr>
           <a:lstStyle/>
@@ -6476,14 +6476,14 @@
               <a:spcAft>
                 <a:spcPts val="0"/>
               </a:spcAft>
-              <a:defRPr sz="1100">
+            </a:pPr>
+            <a:r>
+              <a:rPr sz="1100">
                 <a:solidFill>
                   <a:srgbClr val="000000"/>
                 </a:solidFill>
                 <a:latin typeface="Consolas"/>
-              </a:defRPr>
-            </a:pPr>
-            <a:r>
+              </a:rPr>
               <a:t>out = pd.merge(users, orders, on='user_id', how='left')</a:t>
             </a:r>
           </a:p>
@@ -6492,14 +6492,14 @@
               <a:spcAft>
                 <a:spcPts val="0"/>
               </a:spcAft>
-              <a:defRPr sz="1100">
+            </a:pPr>
+            <a:r>
+              <a:rPr sz="1100">
                 <a:solidFill>
                   <a:srgbClr val="000000"/>
                 </a:solidFill>
                 <a:latin typeface="Consolas"/>
-              </a:defRPr>
-            </a:pPr>
-            <a:r>
+              </a:rPr>
               <a:t>wide = pd.concat([df_a, df_b], axis=1)</a:t>
             </a:r>
           </a:p>
@@ -6513,7 +6513,7 @@
         </p:nvSpPr>
         <p:spPr>
           <a:xfrm>
-            <a:off x="640080" y="3803904"/>
+            <a:off x="640080" y="5550408"/>
             <a:ext cx="6766560" cy="201168"/>
           </a:xfrm>
           <a:prstGeom prst="rect">
@@ -6648,7 +6648,7 @@
         <p:spPr>
           <a:xfrm>
             <a:off x="640080" y="1371600"/>
-            <a:ext cx="6858000" cy="1810512"/>
+            <a:ext cx="6858000" cy="3035807"/>
           </a:xfrm>
           <a:prstGeom prst="rect">
             <a:avLst/>
@@ -6657,7 +6657,7 @@
         </p:spPr>
         <p:txBody>
           <a:bodyPr wrap="square">
-            <a:spAutoFit/>
+            <a:normAutofit/>
           </a:bodyPr>
           <a:lstStyle/>
           <a:p>
@@ -6746,7 +6746,7 @@
         </p:nvSpPr>
         <p:spPr>
           <a:xfrm>
-            <a:off x="640080" y="3291840"/>
+            <a:off x="640080" y="4517136"/>
             <a:ext cx="6766560" cy="978407"/>
           </a:xfrm>
           <a:prstGeom prst="rect">
@@ -6791,7 +6791,7 @@
         </p:nvSpPr>
         <p:spPr>
           <a:xfrm>
-            <a:off x="713231" y="3328416"/>
+            <a:off x="713231" y="4553712"/>
             <a:ext cx="6620256" cy="905255"/>
           </a:xfrm>
           <a:prstGeom prst="rect">
@@ -6800,7 +6800,7 @@
           <a:noFill/>
         </p:spPr>
         <p:txBody>
-          <a:bodyPr wrap="square">
+          <a:bodyPr wrap="none">
             <a:noAutofit/>
           </a:bodyPr>
           <a:lstStyle/>
@@ -6809,14 +6809,14 @@
               <a:spcAft>
                 <a:spcPts val="0"/>
               </a:spcAft>
-              <a:defRPr sz="1100">
+            </a:pPr>
+            <a:r>
+              <a:rPr sz="1100">
                 <a:solidFill>
                   <a:srgbClr val="000000"/>
                 </a:solidFill>
                 <a:latin typeface="Consolas"/>
-              </a:defRPr>
-            </a:pPr>
-            <a:r>
+              </a:rPr>
               <a:t>pd.merge_asof(</a:t>
             </a:r>
           </a:p>
@@ -6825,14 +6825,14 @@
               <a:spcAft>
                 <a:spcPts val="0"/>
               </a:spcAft>
-              <a:defRPr sz="1100">
+            </a:pPr>
+            <a:r>
+              <a:rPr sz="1100">
                 <a:solidFill>
                   <a:srgbClr val="000000"/>
                 </a:solidFill>
                 <a:latin typeface="Consolas"/>
-              </a:defRPr>
-            </a:pPr>
-            <a:r>
+              </a:rPr>
               <a:t>    quotes.sort_values('time'),</a:t>
             </a:r>
           </a:p>
@@ -6841,14 +6841,14 @@
               <a:spcAft>
                 <a:spcPts val="0"/>
               </a:spcAft>
-              <a:defRPr sz="1100">
+            </a:pPr>
+            <a:r>
+              <a:rPr sz="1100">
                 <a:solidFill>
                   <a:srgbClr val="000000"/>
                 </a:solidFill>
                 <a:latin typeface="Consolas"/>
-              </a:defRPr>
-            </a:pPr>
-            <a:r>
+              </a:rPr>
               <a:t>    trades.sort_values('time'),</a:t>
             </a:r>
           </a:p>
@@ -6857,14 +6857,14 @@
               <a:spcAft>
                 <a:spcPts val="0"/>
               </a:spcAft>
-              <a:defRPr sz="1100">
+            </a:pPr>
+            <a:r>
+              <a:rPr sz="1100">
                 <a:solidFill>
                   <a:srgbClr val="000000"/>
                 </a:solidFill>
                 <a:latin typeface="Consolas"/>
-              </a:defRPr>
-            </a:pPr>
-            <a:r>
+              </a:rPr>
               <a:t>    on='time', direction='backward',</a:t>
             </a:r>
           </a:p>
@@ -6873,14 +6873,14 @@
               <a:spcAft>
                 <a:spcPts val="0"/>
               </a:spcAft>
-              <a:defRPr sz="1100">
+            </a:pPr>
+            <a:r>
+              <a:rPr sz="1100">
                 <a:solidFill>
                   <a:srgbClr val="000000"/>
                 </a:solidFill>
                 <a:latin typeface="Consolas"/>
-              </a:defRPr>
-            </a:pPr>
-            <a:r>
+              </a:rPr>
               <a:t>)</a:t>
             </a:r>
           </a:p>
@@ -6894,7 +6894,7 @@
         </p:nvSpPr>
         <p:spPr>
           <a:xfrm>
-            <a:off x="640080" y="4325112"/>
+            <a:off x="640080" y="5550407"/>
             <a:ext cx="6766560" cy="201168"/>
           </a:xfrm>
           <a:prstGeom prst="rect">
@@ -7005,7 +7005,7 @@
         <p:spPr>
           <a:xfrm>
             <a:off x="640080" y="1371600"/>
-            <a:ext cx="6858000" cy="1810512"/>
+            <a:ext cx="6858000" cy="3383279"/>
           </a:xfrm>
           <a:prstGeom prst="rect">
             <a:avLst/>
@@ -7014,7 +7014,7 @@
         </p:spPr>
         <p:txBody>
           <a:bodyPr wrap="square">
-            <a:spAutoFit/>
+            <a:normAutofit/>
           </a:bodyPr>
           <a:lstStyle/>
           <a:p>
@@ -7087,7 +7087,7 @@
         </p:nvSpPr>
         <p:spPr>
           <a:xfrm>
-            <a:off x="640080" y="3291840"/>
+            <a:off x="640080" y="4864607"/>
             <a:ext cx="6766560" cy="630936"/>
           </a:xfrm>
           <a:prstGeom prst="rect">
@@ -7132,7 +7132,7 @@
         </p:nvSpPr>
         <p:spPr>
           <a:xfrm>
-            <a:off x="713231" y="3328416"/>
+            <a:off x="713231" y="4901183"/>
             <a:ext cx="6620256" cy="557784"/>
           </a:xfrm>
           <a:prstGeom prst="rect">
@@ -7141,7 +7141,7 @@
           <a:noFill/>
         </p:spPr>
         <p:txBody>
-          <a:bodyPr wrap="square">
+          <a:bodyPr wrap="none">
             <a:noAutofit/>
           </a:bodyPr>
           <a:lstStyle/>
@@ -7150,14 +7150,14 @@
               <a:spcAft>
                 <a:spcPts val="0"/>
               </a:spcAft>
-              <a:defRPr sz="1100">
+            </a:pPr>
+            <a:r>
+              <a:rPr sz="1100">
                 <a:solidFill>
                   <a:srgbClr val="000000"/>
                 </a:solidFill>
                 <a:latin typeface="Consolas"/>
-              </a:defRPr>
-            </a:pPr>
-            <a:r>
+              </a:rPr>
               <a:t>X = df.drop(columns=['target'])</a:t>
             </a:r>
           </a:p>
@@ -7166,14 +7166,14 @@
               <a:spcAft>
                 <a:spcPts val="0"/>
               </a:spcAft>
-              <a:defRPr sz="1100">
+            </a:pPr>
+            <a:r>
+              <a:rPr sz="1100">
                 <a:solidFill>
                   <a:srgbClr val="000000"/>
                 </a:solidFill>
                 <a:latin typeface="Consolas"/>
-              </a:defRPr>
-            </a:pPr>
-            <a:r>
+              </a:rPr>
               <a:t>y = df['target']</a:t>
             </a:r>
           </a:p>
@@ -7182,14 +7182,14 @@
               <a:spcAft>
                 <a:spcPts val="0"/>
               </a:spcAft>
-              <a:defRPr sz="1100">
+            </a:pPr>
+            <a:r>
+              <a:rPr sz="1100">
                 <a:solidFill>
                   <a:srgbClr val="000000"/>
                 </a:solidFill>
                 <a:latin typeface="Consolas"/>
-              </a:defRPr>
-            </a:pPr>
-            <a:r>
+              </a:rPr>
               <a:t>model.fit(X.select_dtypes('number'), y)</a:t>
             </a:r>
           </a:p>
@@ -7203,7 +7203,7 @@
         </p:nvSpPr>
         <p:spPr>
           <a:xfrm>
-            <a:off x="640080" y="3977639"/>
+            <a:off x="640080" y="5550407"/>
             <a:ext cx="6766560" cy="201168"/>
           </a:xfrm>
           <a:prstGeom prst="rect">
@@ -7504,7 +7504,7 @@
         <p:spPr>
           <a:xfrm>
             <a:off x="640080" y="1371600"/>
-            <a:ext cx="6858000" cy="1810512"/>
+            <a:ext cx="6858000" cy="3383279"/>
           </a:xfrm>
           <a:prstGeom prst="rect">
             <a:avLst/>
@@ -7513,7 +7513,7 @@
         </p:spPr>
         <p:txBody>
           <a:bodyPr wrap="square">
-            <a:spAutoFit/>
+            <a:normAutofit/>
           </a:bodyPr>
           <a:lstStyle/>
           <a:p>
@@ -7602,7 +7602,7 @@
         </p:nvSpPr>
         <p:spPr>
           <a:xfrm>
-            <a:off x="640080" y="3291840"/>
+            <a:off x="640080" y="4864607"/>
             <a:ext cx="6766560" cy="630936"/>
           </a:xfrm>
           <a:prstGeom prst="rect">
@@ -7647,7 +7647,7 @@
         </p:nvSpPr>
         <p:spPr>
           <a:xfrm>
-            <a:off x="713231" y="3328416"/>
+            <a:off x="713231" y="4901183"/>
             <a:ext cx="6620256" cy="557784"/>
           </a:xfrm>
           <a:prstGeom prst="rect">
@@ -7656,7 +7656,7 @@
           <a:noFill/>
         </p:spPr>
         <p:txBody>
-          <a:bodyPr wrap="square">
+          <a:bodyPr wrap="none">
             <a:noAutofit/>
           </a:bodyPr>
           <a:lstStyle/>
@@ -7665,14 +7665,14 @@
               <a:spcAft>
                 <a:spcPts val="0"/>
               </a:spcAft>
-              <a:defRPr sz="1100">
+            </a:pPr>
+            <a:r>
+              <a:rPr sz="1100">
                 <a:solidFill>
                   <a:srgbClr val="000000"/>
                 </a:solidFill>
                 <a:latin typeface="Consolas"/>
-              </a:defRPr>
-            </a:pPr>
-            <a:r>
+              </a:rPr>
               <a:t>import torch</a:t>
             </a:r>
           </a:p>
@@ -7681,14 +7681,14 @@
               <a:spcAft>
                 <a:spcPts val="0"/>
               </a:spcAft>
-              <a:defRPr sz="1100">
+            </a:pPr>
+            <a:r>
+              <a:rPr sz="1100">
                 <a:solidFill>
                   <a:srgbClr val="000000"/>
                 </a:solidFill>
                 <a:latin typeface="Consolas"/>
-              </a:defRPr>
-            </a:pPr>
-            <a:r>
+              </a:rPr>
               <a:t>X_t = torch.tensor(df[cols].to_numpy(), dtype=torch.float32)</a:t>
             </a:r>
           </a:p>
@@ -7697,14 +7697,14 @@
               <a:spcAft>
                 <a:spcPts val="0"/>
               </a:spcAft>
-              <a:defRPr sz="1100">
+            </a:pPr>
+            <a:r>
+              <a:rPr sz="1100">
                 <a:solidFill>
                   <a:srgbClr val="000000"/>
                 </a:solidFill>
                 <a:latin typeface="Consolas"/>
-              </a:defRPr>
-            </a:pPr>
-            <a:r>
+              </a:rPr>
               <a:t>y_t = torch.tensor(df['y'].to_numpy())</a:t>
             </a:r>
           </a:p>
@@ -7718,7 +7718,7 @@
         </p:nvSpPr>
         <p:spPr>
           <a:xfrm>
-            <a:off x="640080" y="3977639"/>
+            <a:off x="640080" y="5550407"/>
             <a:ext cx="6766560" cy="201168"/>
           </a:xfrm>
           <a:prstGeom prst="rect">
@@ -7829,7 +7829,7 @@
         <p:spPr>
           <a:xfrm>
             <a:off x="640080" y="1371600"/>
-            <a:ext cx="6858000" cy="2194560"/>
+            <a:ext cx="6858000" cy="3209544"/>
           </a:xfrm>
           <a:prstGeom prst="rect">
             <a:avLst/>
@@ -7838,7 +7838,7 @@
         </p:spPr>
         <p:txBody>
           <a:bodyPr wrap="square">
-            <a:spAutoFit/>
+            <a:normAutofit/>
           </a:bodyPr>
           <a:lstStyle/>
           <a:p>
@@ -7942,7 +7942,7 @@
         </p:nvSpPr>
         <p:spPr>
           <a:xfrm>
-            <a:off x="640080" y="3675887"/>
+            <a:off x="640080" y="4690872"/>
             <a:ext cx="6766560" cy="804672"/>
           </a:xfrm>
           <a:prstGeom prst="rect">
@@ -7987,7 +7987,7 @@
         </p:nvSpPr>
         <p:spPr>
           <a:xfrm>
-            <a:off x="713231" y="3712463"/>
+            <a:off x="713231" y="4727448"/>
             <a:ext cx="6620256" cy="731520"/>
           </a:xfrm>
           <a:prstGeom prst="rect">
@@ -7996,7 +7996,7 @@
           <a:noFill/>
         </p:spPr>
         <p:txBody>
-          <a:bodyPr wrap="square">
+          <a:bodyPr wrap="none">
             <a:noAutofit/>
           </a:bodyPr>
           <a:lstStyle/>
@@ -8005,14 +8005,14 @@
               <a:spcAft>
                 <a:spcPts val="0"/>
               </a:spcAft>
-              <a:defRPr sz="1100">
+            </a:pPr>
+            <a:r>
+              <a:rPr sz="1100">
                 <a:solidFill>
                   <a:srgbClr val="000000"/>
                 </a:solidFill>
                 <a:latin typeface="Consolas"/>
-              </a:defRPr>
-            </a:pPr>
-            <a:r>
+              </a:rPr>
               <a:t>from sklearn.model_selection import train_test_split</a:t>
             </a:r>
           </a:p>
@@ -8021,14 +8021,14 @@
               <a:spcAft>
                 <a:spcPts val="0"/>
               </a:spcAft>
-              <a:defRPr sz="1100">
+            </a:pPr>
+            <a:r>
+              <a:rPr sz="1100">
                 <a:solidFill>
                   <a:srgbClr val="000000"/>
                 </a:solidFill>
                 <a:latin typeface="Consolas"/>
-              </a:defRPr>
-            </a:pPr>
-            <a:r>
+              </a:rPr>
               <a:t>train, test = train_test_split(df, random_state=42)</a:t>
             </a:r>
           </a:p>
@@ -8037,14 +8037,14 @@
               <a:spcAft>
                 <a:spcPts val="0"/>
               </a:spcAft>
-              <a:defRPr sz="1100">
+            </a:pPr>
+            <a:r>
+              <a:rPr sz="1100">
                 <a:solidFill>
                   <a:srgbClr val="000000"/>
                 </a:solidFill>
                 <a:latin typeface="Consolas"/>
-              </a:defRPr>
-            </a:pPr>
-            <a:r>
+              </a:rPr>
               <a:t>mu = train['x'].mean()  # статистика только с train</a:t>
             </a:r>
           </a:p>
@@ -8053,14 +8053,14 @@
               <a:spcAft>
                 <a:spcPts val="0"/>
               </a:spcAft>
-              <a:defRPr sz="1100">
+            </a:pPr>
+            <a:r>
+              <a:rPr sz="1100">
                 <a:solidFill>
                   <a:srgbClr val="000000"/>
                 </a:solidFill>
                 <a:latin typeface="Consolas"/>
-              </a:defRPr>
-            </a:pPr>
-            <a:r>
+              </a:rPr>
               <a:t>test['x'] = test['x'].fillna(mu)</a:t>
             </a:r>
           </a:p>
@@ -8074,7 +8074,7 @@
         </p:nvSpPr>
         <p:spPr>
           <a:xfrm>
-            <a:off x="640080" y="4535423"/>
+            <a:off x="640080" y="5550408"/>
             <a:ext cx="6766560" cy="201168"/>
           </a:xfrm>
           <a:prstGeom prst="rect">
@@ -8185,7 +8185,7 @@
         <p:spPr>
           <a:xfrm>
             <a:off x="640080" y="1371600"/>
-            <a:ext cx="6858000" cy="1810512"/>
+            <a:ext cx="6858000" cy="3383279"/>
           </a:xfrm>
           <a:prstGeom prst="rect">
             <a:avLst/>
@@ -8194,7 +8194,7 @@
         </p:spPr>
         <p:txBody>
           <a:bodyPr wrap="square">
-            <a:spAutoFit/>
+            <a:normAutofit/>
           </a:bodyPr>
           <a:lstStyle/>
           <a:p>
@@ -8267,7 +8267,7 @@
         </p:nvSpPr>
         <p:spPr>
           <a:xfrm>
-            <a:off x="640080" y="3291840"/>
+            <a:off x="640080" y="4864607"/>
             <a:ext cx="6766560" cy="630936"/>
           </a:xfrm>
           <a:prstGeom prst="rect">
@@ -8312,7 +8312,7 @@
         </p:nvSpPr>
         <p:spPr>
           <a:xfrm>
-            <a:off x="713231" y="3328416"/>
+            <a:off x="713231" y="4901183"/>
             <a:ext cx="6620256" cy="557784"/>
           </a:xfrm>
           <a:prstGeom prst="rect">
@@ -8321,7 +8321,7 @@
           <a:noFill/>
         </p:spPr>
         <p:txBody>
-          <a:bodyPr wrap="square">
+          <a:bodyPr wrap="none">
             <a:noAutofit/>
           </a:bodyPr>
           <a:lstStyle/>
@@ -8330,14 +8330,14 @@
               <a:spcAft>
                 <a:spcPts val="0"/>
               </a:spcAft>
-              <a:defRPr sz="1100">
+            </a:pPr>
+            <a:r>
+              <a:rPr sz="1100">
                 <a:solidFill>
                   <a:srgbClr val="000000"/>
                 </a:solidFill>
                 <a:latin typeface="Consolas"/>
-              </a:defRPr>
-            </a:pPr>
-            <a:r>
+              </a:rPr>
               <a:t>chunks = pd.read_csv('big.csv', chunksize=100_000)</a:t>
             </a:r>
           </a:p>
@@ -8346,14 +8346,14 @@
               <a:spcAft>
                 <a:spcPts val="0"/>
               </a:spcAft>
-              <a:defRPr sz="1100">
+            </a:pPr>
+            <a:r>
+              <a:rPr sz="1100">
                 <a:solidFill>
                   <a:srgbClr val="000000"/>
                 </a:solidFill>
                 <a:latin typeface="Consolas"/>
-              </a:defRPr>
-            </a:pPr>
-            <a:r>
+              </a:rPr>
               <a:t>for chunk in chunks:</a:t>
             </a:r>
           </a:p>
@@ -8362,14 +8362,14 @@
               <a:spcAft>
                 <a:spcPts val="0"/>
               </a:spcAft>
-              <a:defRPr sz="1100">
+            </a:pPr>
+            <a:r>
+              <a:rPr sz="1100">
                 <a:solidFill>
                   <a:srgbClr val="000000"/>
                 </a:solidFill>
                 <a:latin typeface="Consolas"/>
-              </a:defRPr>
-            </a:pPr>
-            <a:r>
+              </a:rPr>
               <a:t>    process(chunk)  # обработка по частям</a:t>
             </a:r>
           </a:p>
@@ -8383,7 +8383,7 @@
         </p:nvSpPr>
         <p:spPr>
           <a:xfrm>
-            <a:off x="640080" y="3977639"/>
+            <a:off x="640080" y="5550407"/>
             <a:ext cx="6766560" cy="201168"/>
           </a:xfrm>
           <a:prstGeom prst="rect">
@@ -8718,7 +8718,7 @@
         <p:spPr>
           <a:xfrm>
             <a:off x="640080" y="1371600"/>
-            <a:ext cx="6858000" cy="1810512"/>
+            <a:ext cx="6858000" cy="3557015"/>
           </a:xfrm>
           <a:prstGeom prst="rect">
             <a:avLst/>
@@ -8727,7 +8727,7 @@
         </p:spPr>
         <p:txBody>
           <a:bodyPr wrap="square">
-            <a:spAutoFit/>
+            <a:normAutofit/>
           </a:bodyPr>
           <a:lstStyle/>
           <a:p>
@@ -8800,7 +8800,7 @@
         </p:nvSpPr>
         <p:spPr>
           <a:xfrm>
-            <a:off x="640080" y="3291840"/>
+            <a:off x="640080" y="5038344"/>
             <a:ext cx="6766560" cy="457200"/>
           </a:xfrm>
           <a:prstGeom prst="rect">
@@ -8845,7 +8845,7 @@
         </p:nvSpPr>
         <p:spPr>
           <a:xfrm>
-            <a:off x="713231" y="3328416"/>
+            <a:off x="713231" y="5074920"/>
             <a:ext cx="6620256" cy="384048"/>
           </a:xfrm>
           <a:prstGeom prst="rect">
@@ -8854,7 +8854,7 @@
           <a:noFill/>
         </p:spPr>
         <p:txBody>
-          <a:bodyPr wrap="square">
+          <a:bodyPr wrap="none">
             <a:noAutofit/>
           </a:bodyPr>
           <a:lstStyle/>
@@ -8863,14 +8863,14 @@
               <a:spcAft>
                 <a:spcPts val="0"/>
               </a:spcAft>
-              <a:defRPr sz="1100">
+            </a:pPr>
+            <a:r>
+              <a:rPr sz="1100">
                 <a:solidFill>
                   <a:srgbClr val="000000"/>
                 </a:solidFill>
                 <a:latin typeface="Consolas"/>
-              </a:defRPr>
-            </a:pPr>
-            <a:r>
+              </a:rPr>
               <a:t>df['x'] * 2              # векторизация — быстро</a:t>
             </a:r>
           </a:p>
@@ -8879,14 +8879,14 @@
               <a:spcAft>
                 <a:spcPts val="0"/>
               </a:spcAft>
-              <a:defRPr sz="1100">
+            </a:pPr>
+            <a:r>
+              <a:rPr sz="1100">
                 <a:solidFill>
                   <a:srgbClr val="000000"/>
                 </a:solidFill>
                 <a:latin typeface="Consolas"/>
-              </a:defRPr>
-            </a:pPr>
-            <a:r>
+              </a:rPr>
               <a:t># for i in range(len(df)): ...  # цикл — медленно</a:t>
             </a:r>
           </a:p>
@@ -8900,7 +8900,7 @@
         </p:nvSpPr>
         <p:spPr>
           <a:xfrm>
-            <a:off x="640080" y="3803904"/>
+            <a:off x="640080" y="5550408"/>
             <a:ext cx="6766560" cy="201168"/>
           </a:xfrm>
           <a:prstGeom prst="rect">
@@ -9011,7 +9011,7 @@
         <p:spPr>
           <a:xfrm>
             <a:off x="640080" y="1371600"/>
-            <a:ext cx="6858000" cy="1810512"/>
+            <a:ext cx="6858000" cy="3557015"/>
           </a:xfrm>
           <a:prstGeom prst="rect">
             <a:avLst/>
@@ -9020,7 +9020,7 @@
         </p:spPr>
         <p:txBody>
           <a:bodyPr wrap="square">
-            <a:spAutoFit/>
+            <a:normAutofit/>
           </a:bodyPr>
           <a:lstStyle/>
           <a:p>
@@ -9093,7 +9093,7 @@
         </p:nvSpPr>
         <p:spPr>
           <a:xfrm>
-            <a:off x="640080" y="3291840"/>
+            <a:off x="640080" y="5038344"/>
             <a:ext cx="6766560" cy="457200"/>
           </a:xfrm>
           <a:prstGeom prst="rect">
@@ -9138,7 +9138,7 @@
         </p:nvSpPr>
         <p:spPr>
           <a:xfrm>
-            <a:off x="713231" y="3328416"/>
+            <a:off x="713231" y="5074920"/>
             <a:ext cx="6620256" cy="384048"/>
           </a:xfrm>
           <a:prstGeom prst="rect">
@@ -9147,7 +9147,7 @@
           <a:noFill/>
         </p:spPr>
         <p:txBody>
-          <a:bodyPr wrap="square">
+          <a:bodyPr wrap="none">
             <a:noAutofit/>
           </a:bodyPr>
           <a:lstStyle/>
@@ -9156,14 +9156,14 @@
               <a:spcAft>
                 <a:spcPts val="0"/>
               </a:spcAft>
-              <a:defRPr sz="1100">
+            </a:pPr>
+            <a:r>
+              <a:rPr sz="1100">
                 <a:solidFill>
                   <a:srgbClr val="000000"/>
                 </a:solidFill>
                 <a:latin typeface="Consolas"/>
-              </a:defRPr>
-            </a:pPr>
-            <a:r>
+              </a:rPr>
               <a:t>df['small_int'] = pd.to_numeric(df['small_int'], downcast='integer')</a:t>
             </a:r>
           </a:p>
@@ -9172,14 +9172,14 @@
               <a:spcAft>
                 <a:spcPts val="0"/>
               </a:spcAft>
-              <a:defRPr sz="1100">
+            </a:pPr>
+            <a:r>
+              <a:rPr sz="1100">
                 <a:solidFill>
                   <a:srgbClr val="000000"/>
                 </a:solidFill>
                 <a:latin typeface="Consolas"/>
-              </a:defRPr>
-            </a:pPr>
-            <a:r>
+              </a:rPr>
               <a:t>df['category'] = df['category'].astype('category')</a:t>
             </a:r>
           </a:p>
@@ -9193,7 +9193,7 @@
         </p:nvSpPr>
         <p:spPr>
           <a:xfrm>
-            <a:off x="640080" y="3803904"/>
+            <a:off x="640080" y="5550408"/>
             <a:ext cx="6766560" cy="201168"/>
           </a:xfrm>
           <a:prstGeom prst="rect">
@@ -9304,7 +9304,7 @@
         <p:spPr>
           <a:xfrm>
             <a:off x="640080" y="1371600"/>
-            <a:ext cx="6858000" cy="1810512"/>
+            <a:ext cx="6858000" cy="3383279"/>
           </a:xfrm>
           <a:prstGeom prst="rect">
             <a:avLst/>
@@ -9313,7 +9313,7 @@
         </p:spPr>
         <p:txBody>
           <a:bodyPr wrap="square">
-            <a:spAutoFit/>
+            <a:normAutofit/>
           </a:bodyPr>
           <a:lstStyle/>
           <a:p>
@@ -9394,7 +9394,7 @@
         </p:nvSpPr>
         <p:spPr>
           <a:xfrm>
-            <a:off x="640080" y="3291840"/>
+            <a:off x="640080" y="4864607"/>
             <a:ext cx="6766560" cy="630936"/>
           </a:xfrm>
           <a:prstGeom prst="rect">
@@ -9439,7 +9439,7 @@
         </p:nvSpPr>
         <p:spPr>
           <a:xfrm>
-            <a:off x="713231" y="3328416"/>
+            <a:off x="713231" y="4901183"/>
             <a:ext cx="6620256" cy="557784"/>
           </a:xfrm>
           <a:prstGeom prst="rect">
@@ -9448,7 +9448,7 @@
           <a:noFill/>
         </p:spPr>
         <p:txBody>
-          <a:bodyPr wrap="square">
+          <a:bodyPr wrap="none">
             <a:noAutofit/>
           </a:bodyPr>
           <a:lstStyle/>
@@ -9457,14 +9457,14 @@
               <a:spcAft>
                 <a:spcPts val="0"/>
               </a:spcAft>
-              <a:defRPr sz="1100">
+            </a:pPr>
+            <a:r>
+              <a:rPr sz="1100">
                 <a:solidFill>
                   <a:srgbClr val="000000"/>
                 </a:solidFill>
                 <a:latin typeface="Consolas"/>
-              </a:defRPr>
-            </a:pPr>
-            <a:r>
+              </a:rPr>
               <a:t>df.to_parquet('data.parquet', index=False)</a:t>
             </a:r>
           </a:p>
@@ -9473,14 +9473,14 @@
               <a:spcAft>
                 <a:spcPts val="0"/>
               </a:spcAft>
-              <a:defRPr sz="1100">
+            </a:pPr>
+            <a:r>
+              <a:rPr sz="1100">
                 <a:solidFill>
                   <a:srgbClr val="000000"/>
                 </a:solidFill>
                 <a:latin typeface="Consolas"/>
-              </a:defRPr>
-            </a:pPr>
-            <a:r>
+              </a:rPr>
               <a:t>df = pd.read_parquet('data.parquet')</a:t>
             </a:r>
           </a:p>
@@ -9489,14 +9489,14 @@
               <a:spcAft>
                 <a:spcPts val="0"/>
               </a:spcAft>
-              <a:defRPr sz="1100">
+            </a:pPr>
+            <a:r>
+              <a:rPr sz="1100">
                 <a:solidFill>
                   <a:srgbClr val="000000"/>
                 </a:solidFill>
                 <a:latin typeface="Consolas"/>
-              </a:defRPr>
-            </a:pPr>
-            <a:r>
+              </a:rPr>
               <a:t># типы и сжатие сохраняются</a:t>
             </a:r>
           </a:p>
@@ -9510,7 +9510,7 @@
         </p:nvSpPr>
         <p:spPr>
           <a:xfrm>
-            <a:off x="640080" y="3977639"/>
+            <a:off x="640080" y="5550407"/>
             <a:ext cx="6766560" cy="201168"/>
           </a:xfrm>
           <a:prstGeom prst="rect">
@@ -10135,7 +10135,7 @@
         <p:spPr>
           <a:xfrm>
             <a:off x="640080" y="1371600"/>
-            <a:ext cx="6858000" cy="1810512"/>
+            <a:ext cx="6858000" cy="3209544"/>
           </a:xfrm>
           <a:prstGeom prst="rect">
             <a:avLst/>
@@ -10144,7 +10144,7 @@
         </p:spPr>
         <p:txBody>
           <a:bodyPr wrap="square">
-            <a:spAutoFit/>
+            <a:normAutofit/>
           </a:bodyPr>
           <a:lstStyle/>
           <a:p>
@@ -10248,7 +10248,7 @@
         </p:nvSpPr>
         <p:spPr>
           <a:xfrm>
-            <a:off x="640080" y="3291840"/>
+            <a:off x="640080" y="4690872"/>
             <a:ext cx="6766560" cy="804672"/>
           </a:xfrm>
           <a:prstGeom prst="rect">
@@ -10293,7 +10293,7 @@
         </p:nvSpPr>
         <p:spPr>
           <a:xfrm>
-            <a:off x="713231" y="3328416"/>
+            <a:off x="713231" y="4727448"/>
             <a:ext cx="6620256" cy="731520"/>
           </a:xfrm>
           <a:prstGeom prst="rect">
@@ -10302,7 +10302,7 @@
           <a:noFill/>
         </p:spPr>
         <p:txBody>
-          <a:bodyPr wrap="square">
+          <a:bodyPr wrap="none">
             <a:noAutofit/>
           </a:bodyPr>
           <a:lstStyle/>
@@ -10311,14 +10311,14 @@
               <a:spcAft>
                 <a:spcPts val="0"/>
               </a:spcAft>
-              <a:defRPr sz="1100">
+            </a:pPr>
+            <a:r>
+              <a:rPr sz="1100">
                 <a:solidFill>
                   <a:srgbClr val="000000"/>
                 </a:solidFill>
                 <a:latin typeface="Consolas"/>
-              </a:defRPr>
-            </a:pPr>
-            <a:r>
+              </a:rPr>
               <a:t>import pandas as pd</a:t>
             </a:r>
           </a:p>
@@ -10327,14 +10327,14 @@
               <a:spcAft>
                 <a:spcPts val="0"/>
               </a:spcAft>
-              <a:defRPr sz="1100">
+            </a:pPr>
+            <a:r>
+              <a:rPr sz="1100">
                 <a:solidFill>
                   <a:srgbClr val="000000"/>
                 </a:solidFill>
                 <a:latin typeface="Consolas"/>
-              </a:defRPr>
-            </a:pPr>
-            <a:r>
+              </a:rPr>
               <a:t>df = pd.DataFrame({'a': [1, 2]}, index=['x', 'y'])</a:t>
             </a:r>
           </a:p>
@@ -10343,14 +10343,14 @@
               <a:spcAft>
                 <a:spcPts val="0"/>
               </a:spcAft>
-              <a:defRPr sz="1100">
+            </a:pPr>
+            <a:r>
+              <a:rPr sz="1100">
                 <a:solidFill>
                   <a:srgbClr val="000000"/>
                 </a:solidFill>
                 <a:latin typeface="Consolas"/>
-              </a:defRPr>
-            </a:pPr>
-            <a:r>
+              </a:rPr>
               <a:t>df.loc['x']      # по метке</a:t>
             </a:r>
           </a:p>
@@ -10359,14 +10359,14 @@
               <a:spcAft>
                 <a:spcPts val="0"/>
               </a:spcAft>
-              <a:defRPr sz="1100">
+            </a:pPr>
+            <a:r>
+              <a:rPr sz="1100">
                 <a:solidFill>
                   <a:srgbClr val="000000"/>
                 </a:solidFill>
                 <a:latin typeface="Consolas"/>
-              </a:defRPr>
-            </a:pPr>
-            <a:r>
+              </a:rPr>
               <a:t>df.iloc[0]       # по позиции</a:t>
             </a:r>
           </a:p>
@@ -10380,7 +10380,7 @@
         </p:nvSpPr>
         <p:spPr>
           <a:xfrm>
-            <a:off x="640080" y="4151376"/>
+            <a:off x="640080" y="5550408"/>
             <a:ext cx="6766560" cy="201168"/>
           </a:xfrm>
           <a:prstGeom prst="rect">
@@ -10491,7 +10491,7 @@
         <p:spPr>
           <a:xfrm>
             <a:off x="640080" y="1371600"/>
-            <a:ext cx="6858000" cy="1810512"/>
+            <a:ext cx="6858000" cy="3383279"/>
           </a:xfrm>
           <a:prstGeom prst="rect">
             <a:avLst/>
@@ -10500,7 +10500,7 @@
         </p:spPr>
         <p:txBody>
           <a:bodyPr wrap="square">
-            <a:spAutoFit/>
+            <a:normAutofit/>
           </a:bodyPr>
           <a:lstStyle/>
           <a:p>
@@ -10573,7 +10573,7 @@
         </p:nvSpPr>
         <p:spPr>
           <a:xfrm>
-            <a:off x="640080" y="3291840"/>
+            <a:off x="640080" y="4864607"/>
             <a:ext cx="6766560" cy="630936"/>
           </a:xfrm>
           <a:prstGeom prst="rect">
@@ -10618,7 +10618,7 @@
         </p:nvSpPr>
         <p:spPr>
           <a:xfrm>
-            <a:off x="713231" y="3328416"/>
+            <a:off x="713231" y="4901183"/>
             <a:ext cx="6620256" cy="557784"/>
           </a:xfrm>
           <a:prstGeom prst="rect">
@@ -10627,7 +10627,7 @@
           <a:noFill/>
         </p:spPr>
         <p:txBody>
-          <a:bodyPr wrap="square">
+          <a:bodyPr wrap="none">
             <a:noAutofit/>
           </a:bodyPr>
           <a:lstStyle/>
@@ -10636,14 +10636,14 @@
               <a:spcAft>
                 <a:spcPts val="0"/>
               </a:spcAft>
-              <a:defRPr sz="1100">
+            </a:pPr>
+            <a:r>
+              <a:rPr sz="1100">
                 <a:solidFill>
                   <a:srgbClr val="000000"/>
                 </a:solidFill>
                 <a:latin typeface="Consolas"/>
-              </a:defRPr>
-            </a:pPr>
-            <a:r>
+              </a:rPr>
               <a:t>del big_df</a:t>
             </a:r>
           </a:p>
@@ -10652,14 +10652,14 @@
               <a:spcAft>
                 <a:spcPts val="0"/>
               </a:spcAft>
-              <a:defRPr sz="1100">
+            </a:pPr>
+            <a:r>
+              <a:rPr sz="1100">
                 <a:solidFill>
                   <a:srgbClr val="000000"/>
                 </a:solidFill>
                 <a:latin typeface="Consolas"/>
-              </a:defRPr>
-            </a:pPr>
-            <a:r>
+              </a:rPr>
               <a:t>import gc; gc.collect()</a:t>
             </a:r>
           </a:p>
@@ -10668,14 +10668,14 @@
               <a:spcAft>
                 <a:spcPts val="0"/>
               </a:spcAft>
-              <a:defRPr sz="1100">
+            </a:pPr>
+            <a:r>
+              <a:rPr sz="1100">
                 <a:solidFill>
                   <a:srgbClr val="000000"/>
                 </a:solidFill>
                 <a:latin typeface="Consolas"/>
-              </a:defRPr>
-            </a:pPr>
-            <a:r>
+              </a:rPr>
               <a:t>df = df[['need', 'only', 'cols']].copy()</a:t>
             </a:r>
           </a:p>
@@ -10689,7 +10689,7 @@
         </p:nvSpPr>
         <p:spPr>
           <a:xfrm>
-            <a:off x="640080" y="3977639"/>
+            <a:off x="640080" y="5550407"/>
             <a:ext cx="6766560" cy="201168"/>
           </a:xfrm>
           <a:prstGeom prst="rect">
@@ -11594,7 +11594,7 @@
         <p:spPr>
           <a:xfrm>
             <a:off x="640080" y="1371600"/>
-            <a:ext cx="6858000" cy="1810512"/>
+            <a:ext cx="6858000" cy="3383279"/>
           </a:xfrm>
           <a:prstGeom prst="rect">
             <a:avLst/>
@@ -11603,7 +11603,7 @@
         </p:spPr>
         <p:txBody>
           <a:bodyPr wrap="square">
-            <a:spAutoFit/>
+            <a:normAutofit/>
           </a:bodyPr>
           <a:lstStyle/>
           <a:p>
@@ -11684,7 +11684,7 @@
         </p:nvSpPr>
         <p:spPr>
           <a:xfrm>
-            <a:off x="640080" y="3291840"/>
+            <a:off x="640080" y="4864607"/>
             <a:ext cx="6766560" cy="630936"/>
           </a:xfrm>
           <a:prstGeom prst="rect">
@@ -11729,7 +11729,7 @@
         </p:nvSpPr>
         <p:spPr>
           <a:xfrm>
-            <a:off x="713231" y="3328416"/>
+            <a:off x="713231" y="4901183"/>
             <a:ext cx="6620256" cy="557784"/>
           </a:xfrm>
           <a:prstGeom prst="rect">
@@ -11738,7 +11738,7 @@
           <a:noFill/>
         </p:spPr>
         <p:txBody>
-          <a:bodyPr wrap="square">
+          <a:bodyPr wrap="none">
             <a:noAutofit/>
           </a:bodyPr>
           <a:lstStyle/>
@@ -11747,14 +11747,14 @@
               <a:spcAft>
                 <a:spcPts val="0"/>
               </a:spcAft>
-              <a:defRPr sz="1100">
+            </a:pPr>
+            <a:r>
+              <a:rPr sz="1100">
                 <a:solidFill>
                   <a:srgbClr val="000000"/>
                 </a:solidFill>
                 <a:latin typeface="Consolas"/>
-              </a:defRPr>
-            </a:pPr>
-            <a:r>
+              </a:rPr>
               <a:t>mask = df['age'] &gt; 18</a:t>
             </a:r>
           </a:p>
@@ -11763,14 +11763,14 @@
               <a:spcAft>
                 <a:spcPts val="0"/>
               </a:spcAft>
-              <a:defRPr sz="1100">
+            </a:pPr>
+            <a:r>
+              <a:rPr sz="1100">
                 <a:solidFill>
                   <a:srgbClr val="000000"/>
                 </a:solidFill>
                 <a:latin typeface="Consolas"/>
-              </a:defRPr>
-            </a:pPr>
-            <a:r>
+              </a:rPr>
               <a:t>adults = df[mask]           # фильтр булевой маской</a:t>
             </a:r>
           </a:p>
@@ -11779,14 +11779,14 @@
               <a:spcAft>
                 <a:spcPts val="0"/>
               </a:spcAft>
-              <a:defRPr sz="1100">
+            </a:pPr>
+            <a:r>
+              <a:rPr sz="1100">
                 <a:solidFill>
                   <a:srgbClr val="000000"/>
                 </a:solidFill>
                 <a:latin typeface="Consolas"/>
-              </a:defRPr>
-            </a:pPr>
-            <a:r>
+              </a:rPr>
               <a:t>df.loc[df['city'] == 'MSK'] # то же через loc</a:t>
             </a:r>
           </a:p>
@@ -11800,7 +11800,7 @@
         </p:nvSpPr>
         <p:spPr>
           <a:xfrm>
-            <a:off x="640080" y="3977639"/>
+            <a:off x="640080" y="5550407"/>
             <a:ext cx="6766560" cy="201168"/>
           </a:xfrm>
           <a:prstGeom prst="rect">
@@ -11911,7 +11911,7 @@
         <p:spPr>
           <a:xfrm>
             <a:off x="640080" y="1371600"/>
-            <a:ext cx="6858000" cy="1810512"/>
+            <a:ext cx="6858000" cy="3383279"/>
           </a:xfrm>
           <a:prstGeom prst="rect">
             <a:avLst/>
@@ -11920,7 +11920,7 @@
         </p:spPr>
         <p:txBody>
           <a:bodyPr wrap="square">
-            <a:spAutoFit/>
+            <a:normAutofit/>
           </a:bodyPr>
           <a:lstStyle/>
           <a:p>
@@ -12025,7 +12025,7 @@
         </p:nvSpPr>
         <p:spPr>
           <a:xfrm>
-            <a:off x="640080" y="3291840"/>
+            <a:off x="640080" y="4864607"/>
             <a:ext cx="6766560" cy="630936"/>
           </a:xfrm>
           <a:prstGeom prst="rect">
@@ -12070,7 +12070,7 @@
         </p:nvSpPr>
         <p:spPr>
           <a:xfrm>
-            <a:off x="713231" y="3328416"/>
+            <a:off x="713231" y="4901183"/>
             <a:ext cx="6620256" cy="557784"/>
           </a:xfrm>
           <a:prstGeom prst="rect">
@@ -12079,7 +12079,7 @@
           <a:noFill/>
         </p:spPr>
         <p:txBody>
-          <a:bodyPr wrap="square">
+          <a:bodyPr wrap="none">
             <a:noAutofit/>
           </a:bodyPr>
           <a:lstStyle/>
@@ -12088,14 +12088,14 @@
               <a:spcAft>
                 <a:spcPts val="0"/>
               </a:spcAft>
-              <a:defRPr sz="1100">
+            </a:pPr>
+            <a:r>
+              <a:rPr sz="1100">
                 <a:solidFill>
                   <a:srgbClr val="000000"/>
                 </a:solidFill>
                 <a:latin typeface="Consolas"/>
-              </a:defRPr>
-            </a:pPr>
-            <a:r>
+              </a:rPr>
               <a:t>col = df['price']          # столбец</a:t>
             </a:r>
           </a:p>
@@ -12104,14 +12104,14 @@
               <a:spcAft>
                 <a:spcPts val="0"/>
               </a:spcAft>
-              <a:defRPr sz="1100">
+            </a:pPr>
+            <a:r>
+              <a:rPr sz="1100">
                 <a:solidFill>
                   <a:srgbClr val="000000"/>
                 </a:solidFill>
                 <a:latin typeface="Consolas"/>
-              </a:defRPr>
-            </a:pPr>
-            <a:r>
+              </a:rPr>
               <a:t>cell = df.loc[10, 'price'] # по метке индекса</a:t>
             </a:r>
           </a:p>
@@ -12120,14 +12120,14 @@
               <a:spcAft>
                 <a:spcPts val="0"/>
               </a:spcAft>
-              <a:defRPr sz="1100">
+            </a:pPr>
+            <a:r>
+              <a:rPr sz="1100">
                 <a:solidFill>
                   <a:srgbClr val="000000"/>
                 </a:solidFill>
                 <a:latin typeface="Consolas"/>
-              </a:defRPr>
-            </a:pPr>
-            <a:r>
+              </a:rPr>
               <a:t>cell = df.iloc[0, 2]       # по позиции (0, 2)</a:t>
             </a:r>
           </a:p>
@@ -12141,7 +12141,7 @@
         </p:nvSpPr>
         <p:spPr>
           <a:xfrm>
-            <a:off x="640080" y="3977639"/>
+            <a:off x="640080" y="5550407"/>
             <a:ext cx="6766560" cy="201168"/>
           </a:xfrm>
           <a:prstGeom prst="rect">
@@ -12252,7 +12252,7 @@
         <p:spPr>
           <a:xfrm>
             <a:off x="640080" y="1371600"/>
-            <a:ext cx="6858000" cy="1810512"/>
+            <a:ext cx="6858000" cy="3383279"/>
           </a:xfrm>
           <a:prstGeom prst="rect">
             <a:avLst/>
@@ -12261,7 +12261,7 @@
         </p:spPr>
         <p:txBody>
           <a:bodyPr wrap="square">
-            <a:spAutoFit/>
+            <a:normAutofit/>
           </a:bodyPr>
           <a:lstStyle/>
           <a:p>
@@ -12342,7 +12342,7 @@
         </p:nvSpPr>
         <p:spPr>
           <a:xfrm>
-            <a:off x="640080" y="3291840"/>
+            <a:off x="640080" y="4864607"/>
             <a:ext cx="6766560" cy="630936"/>
           </a:xfrm>
           <a:prstGeom prst="rect">
@@ -12387,7 +12387,7 @@
         </p:nvSpPr>
         <p:spPr>
           <a:xfrm>
-            <a:off x="713231" y="3328416"/>
+            <a:off x="713231" y="4901183"/>
             <a:ext cx="6620256" cy="557784"/>
           </a:xfrm>
           <a:prstGeom prst="rect">
@@ -12396,7 +12396,7 @@
           <a:noFill/>
         </p:spPr>
         <p:txBody>
-          <a:bodyPr wrap="square">
+          <a:bodyPr wrap="none">
             <a:noAutofit/>
           </a:bodyPr>
           <a:lstStyle/>
@@ -12405,14 +12405,14 @@
               <a:spcAft>
                 <a:spcPts val="0"/>
               </a:spcAft>
-              <a:defRPr sz="1100">
+            </a:pPr>
+            <a:r>
+              <a:rPr sz="1100">
                 <a:solidFill>
                   <a:srgbClr val="000000"/>
                 </a:solidFill>
                 <a:latin typeface="Consolas"/>
-              </a:defRPr>
-            </a:pPr>
-            <a:r>
+              </a:rPr>
               <a:t>df2 = df[df['active']].copy()  # явная копия</a:t>
             </a:r>
           </a:p>
@@ -12421,14 +12421,14 @@
               <a:spcAft>
                 <a:spcPts val="0"/>
               </a:spcAft>
-              <a:defRPr sz="1100">
+            </a:pPr>
+            <a:r>
+              <a:rPr sz="1100">
                 <a:solidFill>
                   <a:srgbClr val="000000"/>
                 </a:solidFill>
                 <a:latin typeface="Consolas"/>
-              </a:defRPr>
-            </a:pPr>
-            <a:r>
+              </a:rPr>
               <a:t>df2.loc[:, 'score'] = 0        # без предупреждения</a:t>
             </a:r>
           </a:p>
@@ -12437,14 +12437,14 @@
               <a:spcAft>
                 <a:spcPts val="0"/>
               </a:spcAft>
-              <a:defRPr sz="1100">
+            </a:pPr>
+            <a:r>
+              <a:rPr sz="1100">
                 <a:solidFill>
                   <a:srgbClr val="000000"/>
                 </a:solidFill>
                 <a:latin typeface="Consolas"/>
-              </a:defRPr>
-            </a:pPr>
-            <a:r>
+              </a:rPr>
               <a:t># без .copy() — риск записи во view</a:t>
             </a:r>
           </a:p>
@@ -12458,7 +12458,7 @@
         </p:nvSpPr>
         <p:spPr>
           <a:xfrm>
-            <a:off x="640080" y="3977639"/>
+            <a:off x="640080" y="5550407"/>
             <a:ext cx="6766560" cy="201168"/>
           </a:xfrm>
           <a:prstGeom prst="rect">
@@ -12759,7 +12759,7 @@
         <p:spPr>
           <a:xfrm>
             <a:off x="640080" y="1371600"/>
-            <a:ext cx="6858000" cy="1810512"/>
+            <a:ext cx="6858000" cy="3383279"/>
           </a:xfrm>
           <a:prstGeom prst="rect">
             <a:avLst/>
@@ -12768,7 +12768,7 @@
         </p:spPr>
         <p:txBody>
           <a:bodyPr wrap="square">
-            <a:spAutoFit/>
+            <a:normAutofit/>
           </a:bodyPr>
           <a:lstStyle/>
           <a:p>
@@ -12873,7 +12873,7 @@
         </p:nvSpPr>
         <p:spPr>
           <a:xfrm>
-            <a:off x="640080" y="3291840"/>
+            <a:off x="640080" y="4864607"/>
             <a:ext cx="6766560" cy="630936"/>
           </a:xfrm>
           <a:prstGeom prst="rect">
@@ -12918,7 +12918,7 @@
         </p:nvSpPr>
         <p:spPr>
           <a:xfrm>
-            <a:off x="713231" y="3328416"/>
+            <a:off x="713231" y="4901183"/>
             <a:ext cx="6620256" cy="557784"/>
           </a:xfrm>
           <a:prstGeom prst="rect">
@@ -12927,7 +12927,7 @@
           <a:noFill/>
         </p:spPr>
         <p:txBody>
-          <a:bodyPr wrap="square">
+          <a:bodyPr wrap="none">
             <a:noAutofit/>
           </a:bodyPr>
           <a:lstStyle/>
@@ -12936,14 +12936,14 @@
               <a:spcAft>
                 <a:spcPts val="0"/>
               </a:spcAft>
-              <a:defRPr sz="1100">
+            </a:pPr>
+            <a:r>
+              <a:rPr sz="1100">
                 <a:solidFill>
                   <a:srgbClr val="000000"/>
                 </a:solidFill>
                 <a:latin typeface="Consolas"/>
-              </a:defRPr>
-            </a:pPr>
-            <a:r>
+              </a:rPr>
               <a:t>df['col'].isna().sum()          # число пропусков</a:t>
             </a:r>
           </a:p>
@@ -12952,14 +12952,14 @@
               <a:spcAft>
                 <a:spcPts val="0"/>
               </a:spcAft>
-              <a:defRPr sz="1100">
+            </a:pPr>
+            <a:r>
+              <a:rPr sz="1100">
                 <a:solidFill>
                   <a:srgbClr val="000000"/>
                 </a:solidFill>
                 <a:latin typeface="Consolas"/>
-              </a:defRPr>
-            </a:pPr>
-            <a:r>
+              </a:rPr>
               <a:t>df['col'].fillna(df['col'].median())</a:t>
             </a:r>
           </a:p>
@@ -12968,14 +12968,14 @@
               <a:spcAft>
                 <a:spcPts val="0"/>
               </a:spcAft>
-              <a:defRPr sz="1100">
+            </a:pPr>
+            <a:r>
+              <a:rPr sz="1100">
                 <a:solidFill>
                   <a:srgbClr val="000000"/>
                 </a:solidFill>
                 <a:latin typeface="Consolas"/>
-              </a:defRPr>
-            </a:pPr>
-            <a:r>
+              </a:rPr>
               <a:t>df = df.dropna(subset=['target'])</a:t>
             </a:r>
           </a:p>
@@ -12989,7 +12989,7 @@
         </p:nvSpPr>
         <p:spPr>
           <a:xfrm>
-            <a:off x="640080" y="3977639"/>
+            <a:off x="640080" y="5550407"/>
             <a:ext cx="6766560" cy="201168"/>
           </a:xfrm>
           <a:prstGeom prst="rect">
@@ -13124,7 +13124,7 @@
         <p:spPr>
           <a:xfrm>
             <a:off x="640080" y="1371600"/>
-            <a:ext cx="6858000" cy="1810512"/>
+            <a:ext cx="6858000" cy="3383279"/>
           </a:xfrm>
           <a:prstGeom prst="rect">
             <a:avLst/>
@@ -13133,7 +13133,7 @@
         </p:spPr>
         <p:txBody>
           <a:bodyPr wrap="square">
-            <a:spAutoFit/>
+            <a:normAutofit/>
           </a:bodyPr>
           <a:lstStyle/>
           <a:p>
@@ -13221,7 +13221,7 @@
         </p:nvSpPr>
         <p:spPr>
           <a:xfrm>
-            <a:off x="640080" y="3291840"/>
+            <a:off x="640080" y="4864607"/>
             <a:ext cx="6766560" cy="630936"/>
           </a:xfrm>
           <a:prstGeom prst="rect">
@@ -13266,7 +13266,7 @@
         </p:nvSpPr>
         <p:spPr>
           <a:xfrm>
-            <a:off x="713231" y="3328416"/>
+            <a:off x="713231" y="4901183"/>
             <a:ext cx="6620256" cy="557784"/>
           </a:xfrm>
           <a:prstGeom prst="rect">
@@ -13275,7 +13275,7 @@
           <a:noFill/>
         </p:spPr>
         <p:txBody>
-          <a:bodyPr wrap="square">
+          <a:bodyPr wrap="none">
             <a:noAutofit/>
           </a:bodyPr>
           <a:lstStyle/>
@@ -13284,14 +13284,14 @@
               <a:spcAft>
                 <a:spcPts val="0"/>
               </a:spcAft>
-              <a:defRPr sz="1100">
+            </a:pPr>
+            <a:r>
+              <a:rPr sz="1100">
                 <a:solidFill>
                   <a:srgbClr val="000000"/>
                 </a:solidFill>
                 <a:latin typeface="Consolas"/>
-              </a:defRPr>
-            </a:pPr>
-            <a:r>
+              </a:rPr>
               <a:t>df['category'].value_counts()</a:t>
             </a:r>
           </a:p>
@@ -13300,14 +13300,14 @@
               <a:spcAft>
                 <a:spcPts val="0"/>
               </a:spcAft>
-              <a:defRPr sz="1100">
+            </a:pPr>
+            <a:r>
+              <a:rPr sz="1100">
                 <a:solidFill>
                   <a:srgbClr val="000000"/>
                 </a:solidFill>
                 <a:latin typeface="Consolas"/>
-              </a:defRPr>
-            </a:pPr>
-            <a:r>
+              </a:rPr>
               <a:t>df['user_id'].nunique()</a:t>
             </a:r>
           </a:p>
@@ -13316,14 +13316,14 @@
               <a:spcAft>
                 <a:spcPts val="0"/>
               </a:spcAft>
-              <a:defRPr sz="1100">
+            </a:pPr>
+            <a:r>
+              <a:rPr sz="1100">
                 <a:solidFill>
                   <a:srgbClr val="000000"/>
                 </a:solidFill>
                 <a:latin typeface="Consolas"/>
-              </a:defRPr>
-            </a:pPr>
-            <a:r>
+              </a:rPr>
               <a:t>df[numeric_cols].corr()['target'].sort_values()</a:t>
             </a:r>
           </a:p>
@@ -13337,7 +13337,7 @@
         </p:nvSpPr>
         <p:spPr>
           <a:xfrm>
-            <a:off x="640080" y="3977639"/>
+            <a:off x="640080" y="5550407"/>
             <a:ext cx="6766560" cy="201168"/>
           </a:xfrm>
           <a:prstGeom prst="rect">

--- a/lessons/pandas/presentation.pptx
+++ b/lessons/pandas/presentation.pptx
@@ -3955,7 +3955,7 @@
               </a:defRPr>
             </a:pPr>
             <a:r>
-              <a:t>28.06.2026</a:t>
+              <a:t>29.06.2026</a:t>
             </a:r>
           </a:p>
         </p:txBody>
@@ -4020,7 +4020,7 @@
         <p:spPr>
           <a:xfrm>
             <a:off x="640080" y="1371600"/>
-            <a:ext cx="6858000" cy="3557015"/>
+            <a:ext cx="6263640" cy="2697480"/>
           </a:xfrm>
           <a:prstGeom prst="rect">
             <a:avLst/>
@@ -4029,7 +4029,7 @@
         </p:spPr>
         <p:txBody>
           <a:bodyPr wrap="square">
-            <a:normAutofit/>
+            <a:spAutoFit/>
           </a:bodyPr>
           <a:lstStyle/>
           <a:p>
@@ -4044,7 +4044,7 @@
                   <a:srgbClr val="000000"/>
                 </a:solidFill>
               </a:rPr>
-              <a:t>`agg()` — схлопывает группы в одну строку (среднее по группе)</a:t>
+              <a:t>• `agg()` — схлопывает группы в одну строку (среднее по группе)</a:t>
             </a:r>
           </a:p>
           <a:p>
@@ -4059,7 +4059,7 @@
                   <a:srgbClr val="000000"/>
                 </a:solidFill>
               </a:rPr>
-              <a:t xml:space="preserve">`transform()` — результат </a:t>
+              <a:t xml:space="preserve">• `transform()` — результат </a:t>
             </a:r>
             <a:r>
               <a:rPr lang="ru-RU" dirty="0" sz="2000" b="1">
@@ -4090,7 +4090,7 @@
                   <a:srgbClr val="000000"/>
                 </a:solidFill>
               </a:rPr>
-              <a:t>Пример: `df['dev'] = df['income'] - df.groupby('city')['income'].transform('mean')`</a:t>
+              <a:t>• Пример: `df['dev'] = df['income'] - df.groupby('city')['income'].transform('mean')`</a:t>
             </a:r>
           </a:p>
           <a:p>
@@ -4105,7 +4105,7 @@
                   <a:srgbClr val="000000"/>
                 </a:solidFill>
               </a:rPr>
-              <a:t>Без `transform` нельзя создать контекстный признак без потери гранулярности</a:t>
+              <a:t>• Без `transform` нельзя создать контекстный признак без потери гранулярности</a:t>
             </a:r>
           </a:p>
         </p:txBody>
@@ -4118,8 +4118,8 @@
         </p:nvSpPr>
         <p:spPr>
           <a:xfrm>
-            <a:off x="640080" y="5038344"/>
-            <a:ext cx="6766560" cy="457200"/>
+            <a:off x="640080" y="4892040"/>
+            <a:ext cx="6172200" cy="457200"/>
           </a:xfrm>
           <a:prstGeom prst="rect">
             <a:avLst/>
@@ -4163,8 +4163,8 @@
         </p:nvSpPr>
         <p:spPr>
           <a:xfrm>
-            <a:off x="713231" y="5074920"/>
-            <a:ext cx="6620256" cy="384048"/>
+            <a:off x="713231" y="4928616"/>
+            <a:ext cx="6025896" cy="384048"/>
           </a:xfrm>
           <a:prstGeom prst="rect">
             <a:avLst/>
@@ -4218,8 +4218,8 @@
         </p:nvSpPr>
         <p:spPr>
           <a:xfrm>
-            <a:off x="640080" y="5550408"/>
-            <a:ext cx="6766560" cy="201168"/>
+            <a:off x="640080" y="5404104"/>
+            <a:ext cx="6172200" cy="201168"/>
           </a:xfrm>
           <a:prstGeom prst="rect">
             <a:avLst/>
@@ -4261,8 +4261,8 @@
         </p:blipFill>
         <p:spPr>
           <a:xfrm>
-            <a:off x="7635240" y="2808590"/>
-            <a:ext cx="4343400" cy="1515140"/>
+            <a:off x="7354500" y="1325880"/>
+            <a:ext cx="4294974" cy="4407408"/>
           </a:xfrm>
           <a:prstGeom prst="rect">
             <a:avLst/>
@@ -4329,7 +4329,7 @@
         <p:spPr>
           <a:xfrm>
             <a:off x="640080" y="1371600"/>
-            <a:ext cx="6858000" cy="3383279"/>
+            <a:ext cx="6263640" cy="2423160"/>
           </a:xfrm>
           <a:prstGeom prst="rect">
             <a:avLst/>
@@ -4338,7 +4338,7 @@
         </p:spPr>
         <p:txBody>
           <a:bodyPr wrap="square">
-            <a:normAutofit/>
+            <a:spAutoFit/>
           </a:bodyPr>
           <a:lstStyle/>
           <a:p>
@@ -4353,7 +4353,7 @@
                   <a:srgbClr val="000000"/>
                 </a:solidFill>
               </a:rPr>
-              <a:t xml:space="preserve">`groupby(['city','cat']).agg(['mean','std'])` → </a:t>
+              <a:t xml:space="preserve">• `groupby(['city','cat']).agg(['mean','std'])` → </a:t>
             </a:r>
             <a:r>
               <a:rPr lang="ru-RU" dirty="0" sz="2000" b="1">
@@ -4384,7 +4384,7 @@
                   <a:srgbClr val="000000"/>
                 </a:solidFill>
               </a:rPr>
-              <a:t>Частая боль: как обратиться к ячейке, как склеить с исходной таблицей</a:t>
+              <a:t>• Частая боль: как обратиться к ячейке, как склеить с исходной таблицей</a:t>
             </a:r>
           </a:p>
           <a:p>
@@ -4399,7 +4399,7 @@
                   <a:srgbClr val="000000"/>
                 </a:solidFill>
               </a:rPr>
-              <a:t>`reset_index()` или `as_index=False` в `groupby()`</a:t>
+              <a:t>• `reset_index()` или `as_index=False` в `groupby()`</a:t>
             </a:r>
           </a:p>
           <a:p>
@@ -4414,7 +4414,7 @@
                   <a:srgbClr val="000000"/>
                 </a:solidFill>
               </a:rPr>
-              <a:t xml:space="preserve">Перед моделью или merge — </a:t>
+              <a:t xml:space="preserve">• Перед моделью или merge — </a:t>
             </a:r>
             <a:r>
               <a:rPr lang="ru-RU" dirty="0" sz="2000" b="1">
@@ -4435,8 +4435,8 @@
         </p:nvSpPr>
         <p:spPr>
           <a:xfrm>
-            <a:off x="640080" y="4864607"/>
-            <a:ext cx="6766560" cy="630936"/>
+            <a:off x="640080" y="4690872"/>
+            <a:ext cx="6172200" cy="630936"/>
           </a:xfrm>
           <a:prstGeom prst="rect">
             <a:avLst/>
@@ -4480,8 +4480,8 @@
         </p:nvSpPr>
         <p:spPr>
           <a:xfrm>
-            <a:off x="713231" y="4901183"/>
-            <a:ext cx="6620256" cy="557784"/>
+            <a:off x="713231" y="4727448"/>
+            <a:ext cx="6025896" cy="557784"/>
           </a:xfrm>
           <a:prstGeom prst="rect">
             <a:avLst/>
@@ -4551,8 +4551,8 @@
         </p:nvSpPr>
         <p:spPr>
           <a:xfrm>
-            <a:off x="640080" y="5550407"/>
-            <a:ext cx="6766560" cy="201168"/>
+            <a:off x="640080" y="5376672"/>
+            <a:ext cx="6172200" cy="201168"/>
           </a:xfrm>
           <a:prstGeom prst="rect">
             <a:avLst/>
@@ -4594,8 +4594,8 @@
         </p:blipFill>
         <p:spPr>
           <a:xfrm>
-            <a:off x="7635240" y="2941473"/>
-            <a:ext cx="4343400" cy="1249372"/>
+            <a:off x="7269480" y="1325880"/>
+            <a:ext cx="4465015" cy="1286670"/>
           </a:xfrm>
           <a:prstGeom prst="rect">
             <a:avLst/>
@@ -4662,7 +4662,7 @@
         <p:spPr>
           <a:xfrm>
             <a:off x="640080" y="1371600"/>
-            <a:ext cx="6858000" cy="3383279"/>
+            <a:ext cx="6263640" cy="2697480"/>
           </a:xfrm>
           <a:prstGeom prst="rect">
             <a:avLst/>
@@ -4671,7 +4671,7 @@
         </p:spPr>
         <p:txBody>
           <a:bodyPr wrap="square">
-            <a:normAutofit/>
+            <a:spAutoFit/>
           </a:bodyPr>
           <a:lstStyle/>
           <a:p>
@@ -4681,6 +4681,14 @@
               </a:spcAft>
             </a:pPr>
             <a:r>
+              <a:rPr lang="ru-RU" dirty="0" sz="2000">
+                <a:solidFill>
+                  <a:srgbClr val="000000"/>
+                </a:solidFill>
+              </a:rPr>
+              <a:t xml:space="preserve">• </a:t>
+            </a:r>
+            <a:r>
               <a:rPr lang="ru-RU" dirty="0" sz="2000" b="1">
                 <a:solidFill>
                   <a:srgbClr val="000000"/>
@@ -4704,6 +4712,14 @@
               </a:spcAft>
             </a:pPr>
             <a:r>
+              <a:rPr lang="ru-RU" dirty="0" sz="2000">
+                <a:solidFill>
+                  <a:srgbClr val="000000"/>
+                </a:solidFill>
+              </a:rPr>
+              <a:t xml:space="preserve">• </a:t>
+            </a:r>
+            <a:r>
               <a:rPr lang="ru-RU" dirty="0" sz="2000" b="1">
                 <a:solidFill>
                   <a:srgbClr val="000000"/>
@@ -4727,6 +4743,14 @@
               </a:spcAft>
             </a:pPr>
             <a:r>
+              <a:rPr lang="ru-RU" dirty="0" sz="2000">
+                <a:solidFill>
+                  <a:srgbClr val="000000"/>
+                </a:solidFill>
+              </a:rPr>
+              <a:t xml:space="preserve">• </a:t>
+            </a:r>
+            <a:r>
               <a:rPr lang="ru-RU" dirty="0" sz="2000" b="1">
                 <a:solidFill>
                   <a:srgbClr val="000000"/>
@@ -4755,7 +4779,7 @@
                   <a:srgbClr val="000000"/>
                 </a:solidFill>
               </a:rPr>
-              <a:t>Числа 0,1,2 для деревьев ок, для линейных моделей — ломает геометрию</a:t>
+              <a:t>• Числа 0,1,2 для деревьев ок, для линейных моделей — ломает геометрию</a:t>
             </a:r>
           </a:p>
         </p:txBody>
@@ -4768,8 +4792,8 @@
         </p:nvSpPr>
         <p:spPr>
           <a:xfrm>
-            <a:off x="640080" y="4864607"/>
-            <a:ext cx="6766560" cy="630936"/>
+            <a:off x="640080" y="4690872"/>
+            <a:ext cx="6172200" cy="630936"/>
           </a:xfrm>
           <a:prstGeom prst="rect">
             <a:avLst/>
@@ -4813,8 +4837,8 @@
         </p:nvSpPr>
         <p:spPr>
           <a:xfrm>
-            <a:off x="713231" y="4901183"/>
-            <a:ext cx="6620256" cy="557784"/>
+            <a:off x="713231" y="4727448"/>
+            <a:ext cx="6025896" cy="557784"/>
           </a:xfrm>
           <a:prstGeom prst="rect">
             <a:avLst/>
@@ -4884,8 +4908,8 @@
         </p:nvSpPr>
         <p:spPr>
           <a:xfrm>
-            <a:off x="640080" y="5550407"/>
-            <a:ext cx="6766560" cy="201168"/>
+            <a:off x="640080" y="5376672"/>
+            <a:ext cx="6172200" cy="201168"/>
           </a:xfrm>
           <a:prstGeom prst="rect">
             <a:avLst/>
@@ -4927,8 +4951,8 @@
         </p:blipFill>
         <p:spPr>
           <a:xfrm>
-            <a:off x="7635240" y="2909599"/>
-            <a:ext cx="4343400" cy="1313121"/>
+            <a:off x="7917772" y="1325880"/>
+            <a:ext cx="3168429" cy="4407407"/>
           </a:xfrm>
           <a:prstGeom prst="rect">
             <a:avLst/>
@@ -4995,7 +5019,7 @@
         <p:spPr>
           <a:xfrm>
             <a:off x="640080" y="1371600"/>
-            <a:ext cx="6858000" cy="3383279"/>
+            <a:ext cx="6263640" cy="2971800"/>
           </a:xfrm>
           <a:prstGeom prst="rect">
             <a:avLst/>
@@ -5004,7 +5028,7 @@
         </p:spPr>
         <p:txBody>
           <a:bodyPr wrap="square">
-            <a:normAutofit/>
+            <a:spAutoFit/>
           </a:bodyPr>
           <a:lstStyle/>
           <a:p>
@@ -5019,7 +5043,7 @@
                   <a:srgbClr val="000000"/>
                 </a:solidFill>
               </a:rPr>
-              <a:t>`np.where` — векторизованные условия, в сотни раз быстрее `apply`</a:t>
+              <a:t>• `np.where` — векторизованные условия, в сотни раз быстрее `apply`</a:t>
             </a:r>
           </a:p>
           <a:p>
@@ -5034,7 +5058,7 @@
                   <a:srgbClr val="000000"/>
                 </a:solidFill>
               </a:rPr>
-              <a:t>`pd.cut` — равные интервалы; `pd.qcut` — равное число объектов в корзинах</a:t>
+              <a:t>• `pd.cut` — равные интервалы; `pd.qcut` — равное число объектов в корзинах</a:t>
             </a:r>
           </a:p>
           <a:p>
@@ -5049,7 +5073,7 @@
                   <a:srgbClr val="000000"/>
                 </a:solidFill>
               </a:rPr>
-              <a:t>`clip` / Winsorization: `df['x'].clip(upper=quantile(0.99))` — спасает от выбросов без удаления строк</a:t>
+              <a:t>• `clip` / Winsorization: `df['x'].clip(upper=quantile(0.99))` — спасает от выбросов без удаления строк</a:t>
             </a:r>
           </a:p>
           <a:p>
@@ -5064,7 +5088,7 @@
                   <a:srgbClr val="000000"/>
                 </a:solidFill>
               </a:rPr>
-              <a:t>Линейным моделям помогает биннинг; деревьям — проще разбиения</a:t>
+              <a:t>• Линейным моделям помогает биннинг; деревьям — проще разбиения</a:t>
             </a:r>
           </a:p>
         </p:txBody>
@@ -5077,8 +5101,8 @@
         </p:nvSpPr>
         <p:spPr>
           <a:xfrm>
-            <a:off x="640080" y="4864607"/>
-            <a:ext cx="6766560" cy="630936"/>
+            <a:off x="640080" y="4690872"/>
+            <a:ext cx="6172200" cy="630936"/>
           </a:xfrm>
           <a:prstGeom prst="rect">
             <a:avLst/>
@@ -5122,8 +5146,8 @@
         </p:nvSpPr>
         <p:spPr>
           <a:xfrm>
-            <a:off x="713231" y="4901183"/>
-            <a:ext cx="6620256" cy="557784"/>
+            <a:off x="713231" y="4727448"/>
+            <a:ext cx="6025896" cy="557784"/>
           </a:xfrm>
           <a:prstGeom prst="rect">
             <a:avLst/>
@@ -5193,8 +5217,8 @@
         </p:nvSpPr>
         <p:spPr>
           <a:xfrm>
-            <a:off x="640080" y="5550407"/>
-            <a:ext cx="6766560" cy="201168"/>
+            <a:off x="640080" y="5376672"/>
+            <a:ext cx="6172200" cy="201168"/>
           </a:xfrm>
           <a:prstGeom prst="rect">
             <a:avLst/>
@@ -5236,8 +5260,8 @@
         </p:blipFill>
         <p:spPr>
           <a:xfrm>
-            <a:off x="7635240" y="1670162"/>
-            <a:ext cx="4343400" cy="1515140"/>
+            <a:off x="8606311" y="1325880"/>
+            <a:ext cx="1791353" cy="2176272"/>
           </a:xfrm>
           <a:prstGeom prst="rect">
             <a:avLst/>
@@ -5260,8 +5284,8 @@
         </p:blipFill>
         <p:spPr>
           <a:xfrm>
-            <a:off x="8203431" y="3602735"/>
-            <a:ext cx="3207016" cy="2203704"/>
+            <a:off x="7776765" y="3557016"/>
+            <a:ext cx="3450444" cy="2176272"/>
           </a:xfrm>
           <a:prstGeom prst="rect">
             <a:avLst/>
@@ -5328,7 +5352,7 @@
         <p:spPr>
           <a:xfrm>
             <a:off x="640080" y="1371600"/>
-            <a:ext cx="6858000" cy="3383279"/>
+            <a:ext cx="6263640" cy="2423160"/>
           </a:xfrm>
           <a:prstGeom prst="rect">
             <a:avLst/>
@@ -5337,7 +5361,7 @@
         </p:spPr>
         <p:txBody>
           <a:bodyPr wrap="square">
-            <a:normAutofit/>
+            <a:spAutoFit/>
           </a:bodyPr>
           <a:lstStyle/>
           <a:p>
@@ -5352,7 +5376,7 @@
                   <a:srgbClr val="000000"/>
                 </a:solidFill>
               </a:rPr>
-              <a:t>`.str` — векторизованные операции над строками (база NLP-препроцессинга)</a:t>
+              <a:t>• `.str` — векторизованные операции над строками (база NLP-препроцессинга)</a:t>
             </a:r>
           </a:p>
           <a:p>
@@ -5367,7 +5391,7 @@
                   <a:srgbClr val="000000"/>
                 </a:solidFill>
               </a:rPr>
-              <a:t>`.str.len()`, `.str.lower()`, `.str.contains()`, `.str.replace()`</a:t>
+              <a:t>• `.str.len()`, `.str.lower()`, `.str.contains()`, `.str.replace()`</a:t>
             </a:r>
           </a:p>
           <a:p>
@@ -5382,7 +5406,7 @@
                   <a:srgbClr val="000000"/>
                 </a:solidFill>
               </a:rPr>
-              <a:t>`.str.extract(regex)` — извлечение в DataFrame; `.str.split().str[0]`</a:t>
+              <a:t>• `.str.extract(regex)` — извлечение в DataFrame; `.str.split().str[0]`</a:t>
             </a:r>
           </a:p>
           <a:p>
@@ -5397,7 +5421,7 @@
                   <a:srgbClr val="000000"/>
                 </a:solidFill>
               </a:rPr>
-              <a:t>Работает с `object` и `string[pyarrow]`</a:t>
+              <a:t>• Работает с `object` и `string[pyarrow]`</a:t>
             </a:r>
           </a:p>
         </p:txBody>
@@ -5410,8 +5434,8 @@
         </p:nvSpPr>
         <p:spPr>
           <a:xfrm>
-            <a:off x="640080" y="4864607"/>
-            <a:ext cx="6766560" cy="630936"/>
+            <a:off x="640080" y="4690872"/>
+            <a:ext cx="6172200" cy="630936"/>
           </a:xfrm>
           <a:prstGeom prst="rect">
             <a:avLst/>
@@ -5455,8 +5479,8 @@
         </p:nvSpPr>
         <p:spPr>
           <a:xfrm>
-            <a:off x="713231" y="4901183"/>
-            <a:ext cx="6620256" cy="557784"/>
+            <a:off x="713231" y="4727448"/>
+            <a:ext cx="6025896" cy="557784"/>
           </a:xfrm>
           <a:prstGeom prst="rect">
             <a:avLst/>
@@ -5526,8 +5550,8 @@
         </p:nvSpPr>
         <p:spPr>
           <a:xfrm>
-            <a:off x="640080" y="5550407"/>
-            <a:ext cx="6766560" cy="201168"/>
+            <a:off x="640080" y="5376672"/>
+            <a:ext cx="6172200" cy="201168"/>
           </a:xfrm>
           <a:prstGeom prst="rect">
             <a:avLst/>
@@ -5569,8 +5593,8 @@
         </p:blipFill>
         <p:spPr>
           <a:xfrm>
-            <a:off x="7635240" y="2076907"/>
-            <a:ext cx="4343400" cy="2978505"/>
+            <a:off x="7269480" y="1325880"/>
+            <a:ext cx="4465015" cy="3012306"/>
           </a:xfrm>
           <a:prstGeom prst="rect">
             <a:avLst/>
@@ -5637,7 +5661,7 @@
         <p:spPr>
           <a:xfrm>
             <a:off x="640080" y="1371600"/>
-            <a:ext cx="6858000" cy="3383279"/>
+            <a:ext cx="6263640" cy="2423160"/>
           </a:xfrm>
           <a:prstGeom prst="rect">
             <a:avLst/>
@@ -5646,7 +5670,7 @@
         </p:spPr>
         <p:txBody>
           <a:bodyPr wrap="square">
-            <a:normAutofit/>
+            <a:spAutoFit/>
           </a:bodyPr>
           <a:lstStyle/>
           <a:p>
@@ -5661,7 +5685,7 @@
                   <a:srgbClr val="000000"/>
                 </a:solidFill>
               </a:rPr>
-              <a:t xml:space="preserve">Модель не понимает timestamp — нужны </a:t>
+              <a:t xml:space="preserve">• Модель не понимает timestamp — нужны </a:t>
             </a:r>
             <a:r>
               <a:rPr lang="ru-RU" dirty="0" sz="2000" b="1">
@@ -5692,7 +5716,7 @@
                   <a:srgbClr val="000000"/>
                 </a:solidFill>
               </a:rPr>
-              <a:t>`.dt.dayofweek`, `.dt.hour`, `.dt.is_month_end` — события и циклы</a:t>
+              <a:t>• `.dt.dayofweek`, `.dt.hour`, `.dt.is_month_end` — события и циклы</a:t>
             </a:r>
           </a:p>
           <a:p>
@@ -5707,7 +5731,7 @@
                   <a:srgbClr val="000000"/>
                 </a:solidFill>
               </a:rPr>
-              <a:t xml:space="preserve">Час и месяц кодируют через </a:t>
+              <a:t xml:space="preserve">• Час и месяц кодируют через </a:t>
             </a:r>
             <ns0:m xmlns:ns0="http://schemas.microsoft.com/office/drawing/2010/main">
               <m:oMath xmlns:m="http://schemas.openxmlformats.org/officeDocument/2006/math">
@@ -5758,7 +5782,7 @@
                   <a:srgbClr val="000000"/>
                 </a:solidFill>
               </a:rPr>
-              <a:t>Всегда приводите к `datetime64` перед `.dt`</a:t>
+              <a:t>• Всегда приводите к `datetime64` перед `.dt`</a:t>
             </a:r>
           </a:p>
         </p:txBody>
@@ -5771,8 +5795,8 @@
         </p:nvSpPr>
         <p:spPr>
           <a:xfrm>
-            <a:off x="640080" y="4864607"/>
-            <a:ext cx="6766560" cy="630936"/>
+            <a:off x="640080" y="4690872"/>
+            <a:ext cx="6172200" cy="630936"/>
           </a:xfrm>
           <a:prstGeom prst="rect">
             <a:avLst/>
@@ -5816,8 +5840,8 @@
         </p:nvSpPr>
         <p:spPr>
           <a:xfrm>
-            <a:off x="713231" y="4901183"/>
-            <a:ext cx="6620256" cy="557784"/>
+            <a:off x="713231" y="4727448"/>
+            <a:ext cx="6025896" cy="557784"/>
           </a:xfrm>
           <a:prstGeom prst="rect">
             <a:avLst/>
@@ -5887,8 +5911,8 @@
         </p:nvSpPr>
         <p:spPr>
           <a:xfrm>
-            <a:off x="640080" y="5550407"/>
-            <a:ext cx="6766560" cy="201168"/>
+            <a:off x="640080" y="5376672"/>
+            <a:ext cx="6172200" cy="201168"/>
           </a:xfrm>
           <a:prstGeom prst="rect">
             <a:avLst/>
@@ -5930,8 +5954,8 @@
         </p:blipFill>
         <p:spPr>
           <a:xfrm>
-            <a:off x="7635240" y="2075955"/>
-            <a:ext cx="4343400" cy="2980408"/>
+            <a:off x="7269480" y="1325880"/>
+            <a:ext cx="4465015" cy="2594479"/>
           </a:xfrm>
           <a:prstGeom prst="rect">
             <a:avLst/>
@@ -5998,7 +6022,7 @@
         <p:spPr>
           <a:xfrm>
             <a:off x="640080" y="1371600"/>
-            <a:ext cx="6858000" cy="3383279"/>
+            <a:ext cx="6263640" cy="2423160"/>
           </a:xfrm>
           <a:prstGeom prst="rect">
             <a:avLst/>
@@ -6007,7 +6031,7 @@
         </p:spPr>
         <p:txBody>
           <a:bodyPr wrap="square">
-            <a:normAutofit/>
+            <a:spAutoFit/>
           </a:bodyPr>
           <a:lstStyle/>
           <a:p>
@@ -6022,7 +6046,7 @@
                   <a:srgbClr val="000000"/>
                 </a:solidFill>
               </a:rPr>
-              <a:t>`df.to_numpy()` — современный способ в numpy</a:t>
+              <a:t>• `df.to_numpy()` — современный способ в numpy</a:t>
             </a:r>
           </a:p>
           <a:p>
@@ -6037,7 +6061,7 @@
                   <a:srgbClr val="000000"/>
                 </a:solidFill>
               </a:rPr>
-              <a:t>`df.select_dtypes(include=np.number).to_numpy()` — только числа для модели</a:t>
+              <a:t>• `df.select_dtypes(include=np.number).to_numpy()` — только числа для модели</a:t>
             </a:r>
           </a:p>
           <a:p>
@@ -6052,7 +6076,7 @@
                   <a:srgbClr val="000000"/>
                 </a:solidFill>
               </a:rPr>
-              <a:t>`pd.DataFrame(arr, columns=[...])` — из numpy в pandas</a:t>
+              <a:t>• `pd.DataFrame(arr, columns=[...])` — из numpy в pandas</a:t>
             </a:r>
           </a:p>
           <a:p>
@@ -6067,7 +6091,7 @@
                   <a:srgbClr val="000000"/>
                 </a:solidFill>
               </a:rPr>
-              <a:t>Строки в DataFrame → `.to_numpy()` даст `object`, модель сломается</a:t>
+              <a:t>• Строки в DataFrame → `.to_numpy()` даст `object`, модель сломается</a:t>
             </a:r>
           </a:p>
         </p:txBody>
@@ -6080,8 +6104,8 @@
         </p:nvSpPr>
         <p:spPr>
           <a:xfrm>
-            <a:off x="640080" y="4864607"/>
-            <a:ext cx="6766560" cy="630936"/>
+            <a:off x="640080" y="4690872"/>
+            <a:ext cx="6172200" cy="630936"/>
           </a:xfrm>
           <a:prstGeom prst="rect">
             <a:avLst/>
@@ -6125,8 +6149,8 @@
         </p:nvSpPr>
         <p:spPr>
           <a:xfrm>
-            <a:off x="713231" y="4901183"/>
-            <a:ext cx="6620256" cy="557784"/>
+            <a:off x="713231" y="4727448"/>
+            <a:ext cx="6025896" cy="557784"/>
           </a:xfrm>
           <a:prstGeom prst="rect">
             <a:avLst/>
@@ -6196,8 +6220,8 @@
         </p:nvSpPr>
         <p:spPr>
           <a:xfrm>
-            <a:off x="640080" y="5550407"/>
-            <a:ext cx="6766560" cy="201168"/>
+            <a:off x="640080" y="5376672"/>
+            <a:ext cx="6172200" cy="201168"/>
           </a:xfrm>
           <a:prstGeom prst="rect">
             <a:avLst/>
@@ -6239,8 +6263,8 @@
         </p:blipFill>
         <p:spPr>
           <a:xfrm>
-            <a:off x="7635240" y="2945922"/>
-            <a:ext cx="4343400" cy="1240475"/>
+            <a:off x="7269480" y="1325880"/>
+            <a:ext cx="4465015" cy="1411498"/>
           </a:xfrm>
           <a:prstGeom prst="rect">
             <a:avLst/>
@@ -6307,7 +6331,7 @@
         <p:spPr>
           <a:xfrm>
             <a:off x="640080" y="1371600"/>
-            <a:ext cx="6858000" cy="3557015"/>
+            <a:ext cx="6263640" cy="2423160"/>
           </a:xfrm>
           <a:prstGeom prst="rect">
             <a:avLst/>
@@ -6316,7 +6340,7 @@
         </p:spPr>
         <p:txBody>
           <a:bodyPr wrap="square">
-            <a:normAutofit/>
+            <a:spAutoFit/>
           </a:bodyPr>
           <a:lstStyle/>
           <a:p>
@@ -6326,6 +6350,14 @@
               </a:spcAft>
             </a:pPr>
             <a:r>
+              <a:rPr lang="ru-RU" dirty="0" sz="2000">
+                <a:solidFill>
+                  <a:srgbClr val="000000"/>
+                </a:solidFill>
+              </a:rPr>
+              <a:t xml:space="preserve">• </a:t>
+            </a:r>
+            <a:r>
               <a:rPr lang="ru-RU" dirty="0" sz="2000" b="1">
                 <a:solidFill>
                   <a:srgbClr val="000000"/>
@@ -6354,7 +6386,7 @@
                   <a:srgbClr val="000000"/>
                 </a:solidFill>
               </a:rPr>
-              <a:t>Всегда проверяйте уникальность ключей перед join</a:t>
+              <a:t>• Всегда проверяйте уникальность ключей перед join</a:t>
             </a:r>
           </a:p>
           <a:p>
@@ -6369,7 +6401,7 @@
                   <a:srgbClr val="000000"/>
                 </a:solidFill>
               </a:rPr>
-              <a:t xml:space="preserve">`pd.concat([df1, df2], axis=1)` склеивает </a:t>
+              <a:t xml:space="preserve">• `pd.concat([df1, df2], axis=1)` склеивает </a:t>
             </a:r>
             <a:r>
               <a:rPr lang="ru-RU" dirty="0" sz="2000" b="1">
@@ -6400,7 +6432,7 @@
                   <a:srgbClr val="000000"/>
                 </a:solidFill>
               </a:rPr>
-              <a:t>После `train_test_split` — `reset_index(drop=True)` перед concat по столбцам</a:t>
+              <a:t>• После `train_test_split` — `reset_index(drop=True)` перед concat по столбцам</a:t>
             </a:r>
           </a:p>
         </p:txBody>
@@ -6413,8 +6445,8 @@
         </p:nvSpPr>
         <p:spPr>
           <a:xfrm>
-            <a:off x="640080" y="5038344"/>
-            <a:ext cx="6766560" cy="457200"/>
+            <a:off x="640080" y="4892040"/>
+            <a:ext cx="6172200" cy="457200"/>
           </a:xfrm>
           <a:prstGeom prst="rect">
             <a:avLst/>
@@ -6458,8 +6490,8 @@
         </p:nvSpPr>
         <p:spPr>
           <a:xfrm>
-            <a:off x="713231" y="5074920"/>
-            <a:ext cx="6620256" cy="384048"/>
+            <a:off x="713231" y="4928616"/>
+            <a:ext cx="6025896" cy="384048"/>
           </a:xfrm>
           <a:prstGeom prst="rect">
             <a:avLst/>
@@ -6513,8 +6545,8 @@
         </p:nvSpPr>
         <p:spPr>
           <a:xfrm>
-            <a:off x="640080" y="5550408"/>
-            <a:ext cx="6766560" cy="201168"/>
+            <a:off x="640080" y="5404104"/>
+            <a:ext cx="6172200" cy="201168"/>
           </a:xfrm>
           <a:prstGeom prst="rect">
             <a:avLst/>
@@ -6556,8 +6588,8 @@
         </p:blipFill>
         <p:spPr>
           <a:xfrm>
-            <a:off x="8200166" y="1325880"/>
-            <a:ext cx="3213547" cy="2203703"/>
+            <a:off x="7869783" y="1325880"/>
+            <a:ext cx="3264408" cy="2176272"/>
           </a:xfrm>
           <a:prstGeom prst="rect">
             <a:avLst/>
@@ -6580,8 +6612,8 @@
         </p:blipFill>
         <p:spPr>
           <a:xfrm>
-            <a:off x="7635240" y="3772654"/>
-            <a:ext cx="4343400" cy="1863867"/>
+            <a:off x="8659659" y="3557016"/>
+            <a:ext cx="1684656" cy="2176271"/>
           </a:xfrm>
           <a:prstGeom prst="rect">
             <a:avLst/>
@@ -6648,7 +6680,7 @@
         <p:spPr>
           <a:xfrm>
             <a:off x="640080" y="1371600"/>
-            <a:ext cx="6858000" cy="3035807"/>
+            <a:ext cx="6263640" cy="2569463"/>
           </a:xfrm>
           <a:prstGeom prst="rect">
             <a:avLst/>
@@ -6657,7 +6689,7 @@
         </p:spPr>
         <p:txBody>
           <a:bodyPr wrap="square">
-            <a:normAutofit/>
+            <a:spAutoFit/>
           </a:bodyPr>
           <a:lstStyle/>
           <a:p>
@@ -6672,7 +6704,7 @@
                   <a:srgbClr val="000000"/>
                 </a:solidFill>
               </a:rPr>
-              <a:t>Классический `merge` требует точного совпадения времени</a:t>
+              <a:t>• Классический `merge` требует точного совпадения времени</a:t>
             </a:r>
           </a:p>
           <a:p>
@@ -6687,7 +6719,7 @@
                   <a:srgbClr val="000000"/>
                 </a:solidFill>
               </a:rPr>
-              <a:t xml:space="preserve">`pd.merge_asof()` — join по </a:t>
+              <a:t xml:space="preserve">• `pd.merge_asof()` — join по </a:t>
             </a:r>
             <a:r>
               <a:rPr lang="ru-RU" dirty="0" sz="2000" b="1">
@@ -6718,7 +6750,7 @@
                   <a:srgbClr val="000000"/>
                 </a:solidFill>
               </a:rPr>
-              <a:t>Пример: транзакции + курс валют `direction='backward'`</a:t>
+              <a:t>• Пример: транзакции + курс валют `direction='backward'`</a:t>
             </a:r>
           </a:p>
           <a:p>
@@ -6733,7 +6765,7 @@
                   <a:srgbClr val="000000"/>
                 </a:solidFill>
               </a:rPr>
-              <a:t>Нужен для признаков «курс/погода на момент события»</a:t>
+              <a:t>• Нужен для признаков «курс/погода на момент события»</a:t>
             </a:r>
           </a:p>
         </p:txBody>
@@ -6746,8 +6778,8 @@
         </p:nvSpPr>
         <p:spPr>
           <a:xfrm>
-            <a:off x="640080" y="4517136"/>
-            <a:ext cx="6766560" cy="978407"/>
+            <a:off x="640080" y="4288536"/>
+            <a:ext cx="6172200" cy="978407"/>
           </a:xfrm>
           <a:prstGeom prst="rect">
             <a:avLst/>
@@ -6791,8 +6823,8 @@
         </p:nvSpPr>
         <p:spPr>
           <a:xfrm>
-            <a:off x="713231" y="4553712"/>
-            <a:ext cx="6620256" cy="905255"/>
+            <a:off x="713231" y="4325112"/>
+            <a:ext cx="6025896" cy="905255"/>
           </a:xfrm>
           <a:prstGeom prst="rect">
             <a:avLst/>
@@ -6894,8 +6926,8 @@
         </p:nvSpPr>
         <p:spPr>
           <a:xfrm>
-            <a:off x="640080" y="5550407"/>
-            <a:ext cx="6766560" cy="201168"/>
+            <a:off x="640080" y="5321807"/>
+            <a:ext cx="6172200" cy="201168"/>
           </a:xfrm>
           <a:prstGeom prst="rect">
             <a:avLst/>
@@ -6937,8 +6969,8 @@
         </p:blipFill>
         <p:spPr>
           <a:xfrm>
-            <a:off x="7635240" y="2185699"/>
-            <a:ext cx="4343400" cy="2760921"/>
+            <a:off x="7269480" y="1325880"/>
+            <a:ext cx="4465015" cy="2716692"/>
           </a:xfrm>
           <a:prstGeom prst="rect">
             <a:avLst/>
@@ -7005,7 +7037,7 @@
         <p:spPr>
           <a:xfrm>
             <a:off x="640080" y="1371600"/>
-            <a:ext cx="6858000" cy="3383279"/>
+            <a:ext cx="6263640" cy="2423160"/>
           </a:xfrm>
           <a:prstGeom prst="rect">
             <a:avLst/>
@@ -7014,7 +7046,7 @@
         </p:spPr>
         <p:txBody>
           <a:bodyPr wrap="square">
-            <a:normAutofit/>
+            <a:spAutoFit/>
           </a:bodyPr>
           <a:lstStyle/>
           <a:p>
@@ -7029,7 +7061,7 @@
                   <a:srgbClr val="000000"/>
                 </a:solidFill>
               </a:rPr>
-              <a:t>sklearn игнорирует имена столбцов и индексы — только позиции</a:t>
+              <a:t>• sklearn игнорирует имена столбцов и индексы — только позиции</a:t>
             </a:r>
           </a:p>
           <a:p>
@@ -7044,7 +7076,7 @@
                   <a:srgbClr val="000000"/>
                 </a:solidFill>
               </a:rPr>
-              <a:t>Разные категории Train/Test → разное число OHE-столбцов → `handle_unknown='ignore'` в Pipeline</a:t>
+              <a:t>• Разные категории Train/Test → разное число OHE-столбцов → `handle_unknown='ignore'` в Pipeline</a:t>
             </a:r>
           </a:p>
           <a:p>
@@ -7059,7 +7091,7 @@
                   <a:srgbClr val="000000"/>
                 </a:solidFill>
               </a:rPr>
-              <a:t>Старые индексы после split → NaN при склейке → `reset_index(drop=True)`</a:t>
+              <a:t>• Старые индексы после split → NaN при склейке → `reset_index(drop=True)`</a:t>
             </a:r>
           </a:p>
           <a:p>
@@ -7074,7 +7106,7 @@
                   <a:srgbClr val="000000"/>
                 </a:solidFill>
               </a:rPr>
-              <a:t>Все fit-зависимые шаги — внутри Pipeline</a:t>
+              <a:t>• Все fit-зависимые шаги — внутри Pipeline</a:t>
             </a:r>
           </a:p>
         </p:txBody>
@@ -7087,8 +7119,8 @@
         </p:nvSpPr>
         <p:spPr>
           <a:xfrm>
-            <a:off x="640080" y="4864607"/>
-            <a:ext cx="6766560" cy="630936"/>
+            <a:off x="640080" y="4690872"/>
+            <a:ext cx="6172200" cy="630936"/>
           </a:xfrm>
           <a:prstGeom prst="rect">
             <a:avLst/>
@@ -7132,8 +7164,8 @@
         </p:nvSpPr>
         <p:spPr>
           <a:xfrm>
-            <a:off x="713231" y="4901183"/>
-            <a:ext cx="6620256" cy="557784"/>
+            <a:off x="713231" y="4727448"/>
+            <a:ext cx="6025896" cy="557784"/>
           </a:xfrm>
           <a:prstGeom prst="rect">
             <a:avLst/>
@@ -7203,8 +7235,8 @@
         </p:nvSpPr>
         <p:spPr>
           <a:xfrm>
-            <a:off x="640080" y="5550407"/>
-            <a:ext cx="6766560" cy="201168"/>
+            <a:off x="640080" y="5376672"/>
+            <a:ext cx="6172200" cy="201168"/>
           </a:xfrm>
           <a:prstGeom prst="rect">
             <a:avLst/>
@@ -7246,8 +7278,8 @@
         </p:blipFill>
         <p:spPr>
           <a:xfrm>
-            <a:off x="7635240" y="2338916"/>
-            <a:ext cx="4343400" cy="2454488"/>
+            <a:off x="7269480" y="1325880"/>
+            <a:ext cx="4465015" cy="2473680"/>
           </a:xfrm>
           <a:prstGeom prst="rect">
             <a:avLst/>
@@ -7314,7 +7346,7 @@
         <p:spPr>
           <a:xfrm>
             <a:off x="640080" y="1371600"/>
-            <a:ext cx="6858000" cy="1810512"/>
+            <a:ext cx="6263640" cy="2971800"/>
           </a:xfrm>
           <a:prstGeom prst="rect">
             <a:avLst/>
@@ -7338,7 +7370,7 @@
                   <a:srgbClr val="000000"/>
                 </a:solidFill>
               </a:rPr>
-              <a:t xml:space="preserve">pandas — </a:t>
+              <a:t xml:space="preserve">• pandas — </a:t>
             </a:r>
             <a:r>
               <a:rPr lang="ru-RU" dirty="0" sz="2000" b="1">
@@ -7369,7 +7401,7 @@
                   <a:srgbClr val="000000"/>
                 </a:solidFill>
               </a:rPr>
-              <a:t>Числовой столбец внутри — непрерывный numpy-массив (быстро и эффективно)</a:t>
+              <a:t>• Числовой столбец внутри — непрерывный numpy-массив (быстро и эффективно)</a:t>
             </a:r>
           </a:p>
           <a:p>
@@ -7384,7 +7416,7 @@
                   <a:srgbClr val="000000"/>
                 </a:solidFill>
               </a:rPr>
-              <a:t>Столбец `object` — указатели на Python-объекты (медленно); современный стандарт — `string[pyarrow]`</a:t>
+              <a:t>• Столбец `object` — указатели на Python-объекты (медленно); современный стандарт — `string[pyarrow]`</a:t>
             </a:r>
           </a:p>
           <a:p>
@@ -7399,7 +7431,7 @@
                   <a:srgbClr val="000000"/>
                 </a:solidFill>
               </a:rPr>
-              <a:t xml:space="preserve">Главное отличие от numpy — </a:t>
+              <a:t xml:space="preserve">• Главное отличие от numpy — </a:t>
             </a:r>
             <a:r>
               <a:rPr lang="ru-RU" dirty="0" sz="2000" b="1">
@@ -7436,8 +7468,8 @@
         </p:blipFill>
         <p:spPr>
           <a:xfrm>
-            <a:off x="7635240" y="2103809"/>
-            <a:ext cx="4343400" cy="2924702"/>
+            <a:off x="7269480" y="1325880"/>
+            <a:ext cx="4465015" cy="1975413"/>
           </a:xfrm>
           <a:prstGeom prst="rect">
             <a:avLst/>
@@ -7504,7 +7536,7 @@
         <p:spPr>
           <a:xfrm>
             <a:off x="640080" y="1371600"/>
-            <a:ext cx="6858000" cy="3383279"/>
+            <a:ext cx="6263640" cy="2697480"/>
           </a:xfrm>
           <a:prstGeom prst="rect">
             <a:avLst/>
@@ -7513,7 +7545,7 @@
         </p:spPr>
         <p:txBody>
           <a:bodyPr wrap="square">
-            <a:normAutofit/>
+            <a:spAutoFit/>
           </a:bodyPr>
           <a:lstStyle/>
           <a:p>
@@ -7528,7 +7560,7 @@
                   <a:srgbClr val="000000"/>
                 </a:solidFill>
               </a:rPr>
-              <a:t>Путь: pandas → numpy → `torch.from_numpy()` → `TensorDataset`</a:t>
+              <a:t>• Путь: pandas → numpy → `torch.from_numpy()` → `TensorDataset`</a:t>
             </a:r>
           </a:p>
           <a:p>
@@ -7543,7 +7575,7 @@
                   <a:srgbClr val="000000"/>
                 </a:solidFill>
               </a:rPr>
-              <a:t xml:space="preserve">`torch.from_numpy(X)` </a:t>
+              <a:t xml:space="preserve">• `torch.from_numpy(X)` </a:t>
             </a:r>
             <a:r>
               <a:rPr lang="ru-RU" dirty="0" sz="2000" b="1">
@@ -7574,7 +7606,7 @@
                   <a:srgbClr val="000000"/>
                 </a:solidFill>
               </a:rPr>
-              <a:t>Независимость: `torch.tensor(X)` или `.copy()` перед конвертацией</a:t>
+              <a:t>• Независимость: `torch.tensor(X)` или `.copy()` перед конвертацией</a:t>
             </a:r>
           </a:p>
           <a:p>
@@ -7589,7 +7621,7 @@
                   <a:srgbClr val="000000"/>
                 </a:solidFill>
               </a:rPr>
-              <a:t>Явно задавайте `dtype` — `object`/`int64` для float-тензоров не подходят</a:t>
+              <a:t>• Явно задавайте `dtype` — `object`/`int64` для float-тензоров не подходят</a:t>
             </a:r>
           </a:p>
         </p:txBody>
@@ -7602,8 +7634,8 @@
         </p:nvSpPr>
         <p:spPr>
           <a:xfrm>
-            <a:off x="640080" y="4864607"/>
-            <a:ext cx="6766560" cy="630936"/>
+            <a:off x="640080" y="4892040"/>
+            <a:ext cx="6172200" cy="457200"/>
           </a:xfrm>
           <a:prstGeom prst="rect">
             <a:avLst/>
@@ -7647,8 +7679,8 @@
         </p:nvSpPr>
         <p:spPr>
           <a:xfrm>
-            <a:off x="713231" y="4901183"/>
-            <a:ext cx="6620256" cy="557784"/>
+            <a:off x="713231" y="4928616"/>
+            <a:ext cx="6025896" cy="384048"/>
           </a:xfrm>
           <a:prstGeom prst="rect">
             <a:avLst/>
@@ -7673,22 +7705,6 @@
                 </a:solidFill>
                 <a:latin typeface="Consolas"/>
               </a:rPr>
-              <a:t>import torch</a:t>
-            </a:r>
-          </a:p>
-          <a:p>
-            <a:pPr>
-              <a:spcAft>
-                <a:spcPts val="0"/>
-              </a:spcAft>
-            </a:pPr>
-            <a:r>
-              <a:rPr sz="1100">
-                <a:solidFill>
-                  <a:srgbClr val="000000"/>
-                </a:solidFill>
-                <a:latin typeface="Consolas"/>
-              </a:rPr>
               <a:t>X_t = torch.tensor(df[cols].to_numpy(), dtype=torch.float32)</a:t>
             </a:r>
           </a:p>
@@ -7718,8 +7734,8 @@
         </p:nvSpPr>
         <p:spPr>
           <a:xfrm>
-            <a:off x="640080" y="5550407"/>
-            <a:ext cx="6766560" cy="201168"/>
+            <a:off x="640080" y="5404104"/>
+            <a:ext cx="6172200" cy="201168"/>
           </a:xfrm>
           <a:prstGeom prst="rect">
             <a:avLst/>
@@ -7761,8 +7777,8 @@
         </p:blipFill>
         <p:spPr>
           <a:xfrm>
-            <a:off x="7635240" y="2893637"/>
-            <a:ext cx="4343400" cy="1345045"/>
+            <a:off x="7269480" y="1325880"/>
+            <a:ext cx="4465015" cy="1013000"/>
           </a:xfrm>
           <a:prstGeom prst="rect">
             <a:avLst/>
@@ -7829,7 +7845,7 @@
         <p:spPr>
           <a:xfrm>
             <a:off x="640080" y="1371600"/>
-            <a:ext cx="6858000" cy="3209544"/>
+            <a:ext cx="6263640" cy="2697480"/>
           </a:xfrm>
           <a:prstGeom prst="rect">
             <a:avLst/>
@@ -7838,7 +7854,7 @@
         </p:spPr>
         <p:txBody>
           <a:bodyPr wrap="square">
-            <a:normAutofit/>
+            <a:spAutoFit/>
           </a:bodyPr>
           <a:lstStyle/>
           <a:p>
@@ -7853,7 +7869,7 @@
                   <a:srgbClr val="000000"/>
                 </a:solidFill>
               </a:rPr>
-              <a:t xml:space="preserve">Импутация `fillna(mean())` </a:t>
+              <a:t xml:space="preserve">• Импутация `fillna(mean())` </a:t>
             </a:r>
             <a:r>
               <a:rPr lang="ru-RU" dirty="0" sz="2000" b="1">
@@ -7884,7 +7900,7 @@
                   <a:srgbClr val="000000"/>
                 </a:solidFill>
               </a:rPr>
-              <a:t>Target Encoding вне Pipeline — утечка таргета</a:t>
+              <a:t>• Target Encoding вне Pipeline — утечка таргета</a:t>
             </a:r>
           </a:p>
           <a:p>
@@ -7899,7 +7915,7 @@
                   <a:srgbClr val="000000"/>
                 </a:solidFill>
               </a:rPr>
-              <a:t>Индекс как сигнал (`timestamp`, `user_id`) если забыли `reset_index()`</a:t>
+              <a:t>• Индекс как сигнал (`timestamp`, `user_id`) если забыли `reset_index()`</a:t>
             </a:r>
           </a:p>
           <a:p>
@@ -7914,7 +7930,7 @@
                   <a:srgbClr val="000000"/>
                 </a:solidFill>
               </a:rPr>
-              <a:t>Случайный join по старым индексам после split</a:t>
+              <a:t>• Случайный join по старым индексам после split</a:t>
             </a:r>
           </a:p>
           <a:p>
@@ -7929,7 +7945,7 @@
                   <a:srgbClr val="000000"/>
                 </a:solidFill>
               </a:rPr>
-              <a:t>Решение: fit-зависимые шаги в `sklearn.Pipeline`; pandas — загрузка и EDA</a:t>
+              <a:t>• Решение: fit-зависимые шаги в `sklearn.Pipeline`; pandas — загрузка и EDA</a:t>
             </a:r>
           </a:p>
         </p:txBody>
@@ -7943,7 +7959,7 @@
         <p:spPr>
           <a:xfrm>
             <a:off x="640080" y="4690872"/>
-            <a:ext cx="6766560" cy="804672"/>
+            <a:ext cx="6172200" cy="630936"/>
           </a:xfrm>
           <a:prstGeom prst="rect">
             <a:avLst/>
@@ -7988,7 +8004,7 @@
         <p:spPr>
           <a:xfrm>
             <a:off x="713231" y="4727448"/>
-            <a:ext cx="6620256" cy="731520"/>
+            <a:ext cx="6025896" cy="557784"/>
           </a:xfrm>
           <a:prstGeom prst="rect">
             <a:avLst/>
@@ -8013,22 +8029,6 @@
                 </a:solidFill>
                 <a:latin typeface="Consolas"/>
               </a:rPr>
-              <a:t>from sklearn.model_selection import train_test_split</a:t>
-            </a:r>
-          </a:p>
-          <a:p>
-            <a:pPr>
-              <a:spcAft>
-                <a:spcPts val="0"/>
-              </a:spcAft>
-            </a:pPr>
-            <a:r>
-              <a:rPr sz="1100">
-                <a:solidFill>
-                  <a:srgbClr val="000000"/>
-                </a:solidFill>
-                <a:latin typeface="Consolas"/>
-              </a:rPr>
               <a:t>train, test = train_test_split(df, random_state=42)</a:t>
             </a:r>
           </a:p>
@@ -8074,8 +8074,8 @@
         </p:nvSpPr>
         <p:spPr>
           <a:xfrm>
-            <a:off x="640080" y="5550408"/>
-            <a:ext cx="6766560" cy="201168"/>
+            <a:off x="640080" y="5376672"/>
+            <a:ext cx="6172200" cy="201168"/>
           </a:xfrm>
           <a:prstGeom prst="rect">
             <a:avLst/>
@@ -8117,8 +8117,8 @@
         </p:blipFill>
         <p:spPr>
           <a:xfrm>
-            <a:off x="7635240" y="2909599"/>
-            <a:ext cx="4343400" cy="1313121"/>
+            <a:off x="7526405" y="1325880"/>
+            <a:ext cx="3951163" cy="4407407"/>
           </a:xfrm>
           <a:prstGeom prst="rect">
             <a:avLst/>
@@ -8185,7 +8185,7 @@
         <p:spPr>
           <a:xfrm>
             <a:off x="640080" y="1371600"/>
-            <a:ext cx="6858000" cy="3383279"/>
+            <a:ext cx="6263640" cy="2148839"/>
           </a:xfrm>
           <a:prstGeom prst="rect">
             <a:avLst/>
@@ -8194,7 +8194,7 @@
         </p:spPr>
         <p:txBody>
           <a:bodyPr wrap="square">
-            <a:normAutofit/>
+            <a:spAutoFit/>
           </a:bodyPr>
           <a:lstStyle/>
           <a:p>
@@ -8209,7 +8209,7 @@
                   <a:srgbClr val="000000"/>
                 </a:solidFill>
               </a:rPr>
-              <a:t>50 ГБ CSV при 16 ГБ RAM — `read_csv()` упадёт с OOM</a:t>
+              <a:t>• 50 ГБ CSV при 16 ГБ RAM — `read_csv()` упадёт с OOM</a:t>
             </a:r>
           </a:p>
           <a:p>
@@ -8224,7 +8224,7 @@
                   <a:srgbClr val="000000"/>
                 </a:solidFill>
               </a:rPr>
-              <a:t>`chunksize` в `read_csv()` — итератор порций</a:t>
+              <a:t>• `chunksize` в `read_csv()` — итератор порций</a:t>
             </a:r>
           </a:p>
           <a:p>
@@ -8239,7 +8239,7 @@
                   <a:srgbClr val="000000"/>
                 </a:solidFill>
               </a:rPr>
-              <a:t>Обрабатывайте chunk, накапливайте статистики</a:t>
+              <a:t>• Обрабатывайте chunk, накапливайте статистики</a:t>
             </a:r>
           </a:p>
           <a:p>
@@ -8254,7 +8254,7 @@
                   <a:srgbClr val="000000"/>
                 </a:solidFill>
               </a:rPr>
-              <a:t>Альтернатива: Parquet + фильтрация через `pyarrow`</a:t>
+              <a:t>• Альтернатива: Parquet + фильтрация через `pyarrow`</a:t>
             </a:r>
           </a:p>
         </p:txBody>
@@ -8267,8 +8267,8 @@
         </p:nvSpPr>
         <p:spPr>
           <a:xfrm>
-            <a:off x="640080" y="4864607"/>
-            <a:ext cx="6766560" cy="630936"/>
+            <a:off x="640080" y="4690872"/>
+            <a:ext cx="6172200" cy="630936"/>
           </a:xfrm>
           <a:prstGeom prst="rect">
             <a:avLst/>
@@ -8312,8 +8312,8 @@
         </p:nvSpPr>
         <p:spPr>
           <a:xfrm>
-            <a:off x="713231" y="4901183"/>
-            <a:ext cx="6620256" cy="557784"/>
+            <a:off x="713231" y="4727448"/>
+            <a:ext cx="6025896" cy="557784"/>
           </a:xfrm>
           <a:prstGeom prst="rect">
             <a:avLst/>
@@ -8383,8 +8383,8 @@
         </p:nvSpPr>
         <p:spPr>
           <a:xfrm>
-            <a:off x="640080" y="5550407"/>
-            <a:ext cx="6766560" cy="201168"/>
+            <a:off x="640080" y="5376672"/>
+            <a:ext cx="6172200" cy="201168"/>
           </a:xfrm>
           <a:prstGeom prst="rect">
             <a:avLst/>
@@ -8426,8 +8426,8 @@
         </p:blipFill>
         <p:spPr>
           <a:xfrm>
-            <a:off x="7635240" y="2338916"/>
-            <a:ext cx="4343400" cy="2454488"/>
+            <a:off x="7269480" y="1325880"/>
+            <a:ext cx="4465015" cy="2449405"/>
           </a:xfrm>
           <a:prstGeom prst="rect">
             <a:avLst/>
@@ -8494,7 +8494,7 @@
         <p:spPr>
           <a:xfrm>
             <a:off x="640080" y="1371600"/>
-            <a:ext cx="6858000" cy="1810512"/>
+            <a:ext cx="6263640" cy="2697480"/>
           </a:xfrm>
           <a:prstGeom prst="rect">
             <a:avLst/>
@@ -8518,7 +8518,7 @@
                   <a:srgbClr val="000000"/>
                 </a:solidFill>
               </a:rPr>
-              <a:t>Ручной EDA (`info`, `describe`, `value_counts`) — часы на новом датасете</a:t>
+              <a:t>• Ручной EDA (`info`, `describe`, `value_counts`) — часы на новом датасете</a:t>
             </a:r>
           </a:p>
           <a:p>
@@ -8533,7 +8533,7 @@
                   <a:srgbClr val="000000"/>
                 </a:solidFill>
               </a:rPr>
-              <a:t>`ydata-profiling` (бывш. `pandas-profiling`) — HTML-отчёт одной командой</a:t>
+              <a:t>• `ydata-profiling` (бывш. `pandas-profiling`) — HTML-отчёт одной командой</a:t>
             </a:r>
           </a:p>
           <a:p>
@@ -8548,7 +8548,7 @@
                   <a:srgbClr val="000000"/>
                 </a:solidFill>
               </a:rPr>
-              <a:t>Отчёт: распределения, корреляции, пропуски, дубликаты, предупреждения</a:t>
+              <a:t>• Отчёт: распределения, корреляции, пропуски, дубликаты, предупреждения</a:t>
             </a:r>
           </a:p>
           <a:p>
@@ -8563,7 +8563,7 @@
                   <a:srgbClr val="000000"/>
                 </a:solidFill>
               </a:rPr>
-              <a:t>Стандарт индустрии для быстрого знакомства с данными</a:t>
+              <a:t>• Стандарт индустрии для быстрого знакомства с данными</a:t>
             </a:r>
           </a:p>
         </p:txBody>
@@ -8584,8 +8584,8 @@
         </p:blipFill>
         <p:spPr>
           <a:xfrm>
-            <a:off x="7635240" y="1774507"/>
-            <a:ext cx="4343400" cy="3583305"/>
+            <a:off x="7269480" y="1325880"/>
+            <a:ext cx="4465015" cy="3548886"/>
           </a:xfrm>
           <a:prstGeom prst="rect">
             <a:avLst/>
@@ -8718,7 +8718,7 @@
         <p:spPr>
           <a:xfrm>
             <a:off x="640080" y="1371600"/>
-            <a:ext cx="6858000" cy="3557015"/>
+            <a:ext cx="6263640" cy="2423160"/>
           </a:xfrm>
           <a:prstGeom prst="rect">
             <a:avLst/>
@@ -8727,7 +8727,7 @@
         </p:spPr>
         <p:txBody>
           <a:bodyPr wrap="square">
-            <a:normAutofit/>
+            <a:spAutoFit/>
           </a:bodyPr>
           <a:lstStyle/>
           <a:p>
@@ -8742,7 +8742,7 @@
                   <a:srgbClr val="000000"/>
                 </a:solidFill>
               </a:rPr>
-              <a:t>pandas однопоточный — не для огромных данных</a:t>
+              <a:t>• pandas однопоточный — не для огромных данных</a:t>
             </a:r>
           </a:p>
           <a:p>
@@ -8757,7 +8757,7 @@
                   <a:srgbClr val="000000"/>
                 </a:solidFill>
               </a:rPr>
-              <a:t>`iterrows` / `itertuples` — заменять векторизацией</a:t>
+              <a:t>• `iterrows` / `itertuples` — заменять векторизацией</a:t>
             </a:r>
           </a:p>
           <a:p>
@@ -8772,7 +8772,7 @@
                   <a:srgbClr val="000000"/>
                 </a:solidFill>
               </a:rPr>
-              <a:t>`apply` с Python-функцией — ~100× медленнее векторизации</a:t>
+              <a:t>• `apply` с Python-функцией — ~100× медленнее векторизации</a:t>
             </a:r>
           </a:p>
           <a:p>
@@ -8787,7 +8787,7 @@
                   <a:srgbClr val="000000"/>
                 </a:solidFill>
               </a:rPr>
-              <a:t>Первая линия: `.str`, numpy, `np.where` вместо `apply`</a:t>
+              <a:t>• Первая линия: `.str`, numpy, `np.where` вместо `apply`</a:t>
             </a:r>
           </a:p>
         </p:txBody>
@@ -8800,8 +8800,8 @@
         </p:nvSpPr>
         <p:spPr>
           <a:xfrm>
-            <a:off x="640080" y="5038344"/>
-            <a:ext cx="6766560" cy="457200"/>
+            <a:off x="640080" y="4892040"/>
+            <a:ext cx="6172200" cy="457200"/>
           </a:xfrm>
           <a:prstGeom prst="rect">
             <a:avLst/>
@@ -8845,8 +8845,8 @@
         </p:nvSpPr>
         <p:spPr>
           <a:xfrm>
-            <a:off x="713231" y="5074920"/>
-            <a:ext cx="6620256" cy="384048"/>
+            <a:off x="713231" y="4928616"/>
+            <a:ext cx="6025896" cy="384048"/>
           </a:xfrm>
           <a:prstGeom prst="rect">
             <a:avLst/>
@@ -8900,8 +8900,8 @@
         </p:nvSpPr>
         <p:spPr>
           <a:xfrm>
-            <a:off x="640080" y="5550408"/>
-            <a:ext cx="6766560" cy="201168"/>
+            <a:off x="640080" y="5404104"/>
+            <a:ext cx="6172200" cy="201168"/>
           </a:xfrm>
           <a:prstGeom prst="rect">
             <a:avLst/>
@@ -8943,8 +8943,8 @@
         </p:blipFill>
         <p:spPr>
           <a:xfrm>
-            <a:off x="7635240" y="2073874"/>
-            <a:ext cx="4343400" cy="2984571"/>
+            <a:off x="7269480" y="1325880"/>
+            <a:ext cx="4465015" cy="2954439"/>
           </a:xfrm>
           <a:prstGeom prst="rect">
             <a:avLst/>
@@ -9011,7 +9011,7 @@
         <p:spPr>
           <a:xfrm>
             <a:off x="640080" y="1371600"/>
-            <a:ext cx="6858000" cy="3557015"/>
+            <a:ext cx="6263640" cy="2423160"/>
           </a:xfrm>
           <a:prstGeom prst="rect">
             <a:avLst/>
@@ -9020,7 +9020,7 @@
         </p:spPr>
         <p:txBody>
           <a:bodyPr wrap="square">
-            <a:normAutofit/>
+            <a:spAutoFit/>
           </a:bodyPr>
           <a:lstStyle/>
           <a:p>
@@ -9035,7 +9035,7 @@
                   <a:srgbClr val="000000"/>
                 </a:solidFill>
               </a:rPr>
-              <a:t>По умолчанию `float64`, `int64` — расточительно для ML</a:t>
+              <a:t>• По умолчанию `float64`, `int64` — расточительно для ML</a:t>
             </a:r>
           </a:p>
           <a:p>
@@ -9050,7 +9050,7 @@
                   <a:srgbClr val="000000"/>
                 </a:solidFill>
               </a:rPr>
-              <a:t>`astype('category')` для строк — экономия в 10–100×</a:t>
+              <a:t>• `astype('category')` для строк — экономия в 10–100×</a:t>
             </a:r>
           </a:p>
           <a:p>
@@ -9065,7 +9065,7 @@
                   <a:srgbClr val="000000"/>
                 </a:solidFill>
               </a:rPr>
-              <a:t>`float32` вместо `float64` — обычно достаточно</a:t>
+              <a:t>• `float32` вместо `float64` — обычно достаточно</a:t>
             </a:r>
           </a:p>
           <a:p>
@@ -9080,7 +9080,7 @@
                   <a:srgbClr val="000000"/>
                 </a:solidFill>
               </a:rPr>
-              <a:t>`pd.to_numeric(..., downcast='integer')` — автоматический downcast</a:t>
+              <a:t>• `pd.to_numeric(..., downcast='integer')` — автоматический downcast</a:t>
             </a:r>
           </a:p>
         </p:txBody>
@@ -9093,8 +9093,8 @@
         </p:nvSpPr>
         <p:spPr>
           <a:xfrm>
-            <a:off x="640080" y="5038344"/>
-            <a:ext cx="6766560" cy="457200"/>
+            <a:off x="640080" y="4892040"/>
+            <a:ext cx="6172200" cy="457200"/>
           </a:xfrm>
           <a:prstGeom prst="rect">
             <a:avLst/>
@@ -9138,8 +9138,8 @@
         </p:nvSpPr>
         <p:spPr>
           <a:xfrm>
-            <a:off x="713231" y="5074920"/>
-            <a:ext cx="6620256" cy="384048"/>
+            <a:off x="713231" y="4928616"/>
+            <a:ext cx="6025896" cy="384048"/>
           </a:xfrm>
           <a:prstGeom prst="rect">
             <a:avLst/>
@@ -9193,8 +9193,8 @@
         </p:nvSpPr>
         <p:spPr>
           <a:xfrm>
-            <a:off x="640080" y="5550408"/>
-            <a:ext cx="6766560" cy="201168"/>
+            <a:off x="640080" y="5404104"/>
+            <a:ext cx="6172200" cy="201168"/>
           </a:xfrm>
           <a:prstGeom prst="rect">
             <a:avLst/>
@@ -9236,8 +9236,8 @@
         </p:blipFill>
         <p:spPr>
           <a:xfrm>
-            <a:off x="7635240" y="2073874"/>
-            <a:ext cx="4343400" cy="2984571"/>
+            <a:off x="7269480" y="1325880"/>
+            <a:ext cx="4465015" cy="2703427"/>
           </a:xfrm>
           <a:prstGeom prst="rect">
             <a:avLst/>
@@ -9304,7 +9304,7 @@
         <p:spPr>
           <a:xfrm>
             <a:off x="640080" y="1371600"/>
-            <a:ext cx="6858000" cy="3383279"/>
+            <a:ext cx="6263640" cy="2423160"/>
           </a:xfrm>
           <a:prstGeom prst="rect">
             <a:avLst/>
@@ -9313,7 +9313,7 @@
         </p:spPr>
         <p:txBody>
           <a:bodyPr wrap="square">
-            <a:normAutofit/>
+            <a:spAutoFit/>
           </a:bodyPr>
           <a:lstStyle/>
           <a:p>
@@ -9328,7 +9328,7 @@
                   <a:srgbClr val="000000"/>
                 </a:solidFill>
               </a:rPr>
-              <a:t>CSV не сохраняет типы: ID `007`→`7`, даты→строки, категории→object</a:t>
+              <a:t>• CSV не сохраняет типы: ID `007`→`7`, даты→строки, категории→object</a:t>
             </a:r>
           </a:p>
           <a:p>
@@ -9343,7 +9343,7 @@
                   <a:srgbClr val="000000"/>
                 </a:solidFill>
               </a:rPr>
-              <a:t>CSV медленен на больших датасетах</a:t>
+              <a:t>• CSV медленен на больших датасетах</a:t>
             </a:r>
           </a:p>
           <a:p>
@@ -9353,6 +9353,14 @@
               </a:spcAft>
             </a:pPr>
             <a:r>
+              <a:rPr lang="ru-RU" dirty="0" sz="2000">
+                <a:solidFill>
+                  <a:srgbClr val="000000"/>
+                </a:solidFill>
+              </a:rPr>
+              <a:t xml:space="preserve">• </a:t>
+            </a:r>
+            <a:r>
               <a:rPr lang="ru-RU" dirty="0" sz="2000" b="1">
                 <a:solidFill>
                   <a:srgbClr val="000000"/>
@@ -9381,7 +9389,7 @@
                   <a:srgbClr val="000000"/>
                 </a:solidFill>
               </a:rPr>
-              <a:t>CSV — отчёт бизнесу; внутри ML-пайплайна — `.to_parquet()`</a:t>
+              <a:t>• CSV — отчёт бизнесу; внутри ML-пайплайна — `.to_parquet()`</a:t>
             </a:r>
           </a:p>
         </p:txBody>
@@ -9394,8 +9402,8 @@
         </p:nvSpPr>
         <p:spPr>
           <a:xfrm>
-            <a:off x="640080" y="4864607"/>
-            <a:ext cx="6766560" cy="630936"/>
+            <a:off x="640080" y="4690872"/>
+            <a:ext cx="6172200" cy="630936"/>
           </a:xfrm>
           <a:prstGeom prst="rect">
             <a:avLst/>
@@ -9439,8 +9447,8 @@
         </p:nvSpPr>
         <p:spPr>
           <a:xfrm>
-            <a:off x="713231" y="4901183"/>
-            <a:ext cx="6620256" cy="557784"/>
+            <a:off x="713231" y="4727448"/>
+            <a:ext cx="6025896" cy="557784"/>
           </a:xfrm>
           <a:prstGeom prst="rect">
             <a:avLst/>
@@ -9510,8 +9518,8 @@
         </p:nvSpPr>
         <p:spPr>
           <a:xfrm>
-            <a:off x="640080" y="5550407"/>
-            <a:ext cx="6766560" cy="201168"/>
+            <a:off x="640080" y="5376672"/>
+            <a:ext cx="6172200" cy="201168"/>
           </a:xfrm>
           <a:prstGeom prst="rect">
             <a:avLst/>
@@ -9553,8 +9561,8 @@
         </p:blipFill>
         <p:spPr>
           <a:xfrm>
-            <a:off x="7635240" y="2808590"/>
-            <a:ext cx="4343400" cy="1515140"/>
+            <a:off x="7397460" y="1325880"/>
+            <a:ext cx="4209054" cy="4407407"/>
           </a:xfrm>
           <a:prstGeom prst="rect">
             <a:avLst/>
@@ -9621,7 +9629,7 @@
         <p:spPr>
           <a:xfrm>
             <a:off x="640080" y="1371600"/>
-            <a:ext cx="6858000" cy="1810512"/>
+            <a:ext cx="6263640" cy="2423160"/>
           </a:xfrm>
           <a:prstGeom prst="rect">
             <a:avLst/>
@@ -9645,7 +9653,7 @@
                   <a:srgbClr val="000000"/>
                 </a:solidFill>
               </a:rPr>
-              <a:t>`to_sql(..., index=False)` — интеграция с БД через SQLAlchemy</a:t>
+              <a:t>• `to_sql(..., index=False)` — интеграция с БД через SQLAlchemy</a:t>
             </a:r>
           </a:p>
           <a:p>
@@ -9660,7 +9668,7 @@
                   <a:srgbClr val="000000"/>
                 </a:solidFill>
               </a:rPr>
-              <a:t>`to_json()` — REST API и веб</a:t>
+              <a:t>• `to_json()` — REST API и веб</a:t>
             </a:r>
           </a:p>
           <a:p>
@@ -9675,7 +9683,7 @@
                   <a:srgbClr val="000000"/>
                 </a:solidFill>
               </a:rPr>
-              <a:t>`to_feather()` — быстрый бинарный промежуточный формат</a:t>
+              <a:t>• `to_feather()` — быстрый бинарный промежуточный формат</a:t>
             </a:r>
           </a:p>
           <a:p>
@@ -9690,7 +9698,7 @@
                   <a:srgbClr val="000000"/>
                 </a:solidFill>
               </a:rPr>
-              <a:t>Всегда `index=False` при экспорте — иначе лишний столбец</a:t>
+              <a:t>• Всегда `index=False` при экспорте — иначе лишний столбец</a:t>
             </a:r>
           </a:p>
         </p:txBody>
@@ -9711,8 +9719,8 @@
         </p:blipFill>
         <p:spPr>
           <a:xfrm>
-            <a:off x="7635240" y="2076907"/>
-            <a:ext cx="4343400" cy="2978505"/>
+            <a:off x="7269480" y="1325880"/>
+            <a:ext cx="4465015" cy="3012306"/>
           </a:xfrm>
           <a:prstGeom prst="rect">
             <a:avLst/>
@@ -9779,7 +9787,7 @@
         <p:spPr>
           <a:xfrm>
             <a:off x="640080" y="1371600"/>
-            <a:ext cx="6858000" cy="1810512"/>
+            <a:ext cx="6263640" cy="2148839"/>
           </a:xfrm>
           <a:prstGeom prst="rect">
             <a:avLst/>
@@ -9798,6 +9806,14 @@
               </a:spcAft>
             </a:pPr>
             <a:r>
+              <a:rPr lang="ru-RU" dirty="0" sz="2000">
+                <a:solidFill>
+                  <a:srgbClr val="000000"/>
+                </a:solidFill>
+              </a:rPr>
+              <a:t xml:space="preserve">• </a:t>
+            </a:r>
+            <a:r>
               <a:rPr lang="ru-RU" dirty="0" sz="2000" b="1">
                 <a:solidFill>
                   <a:srgbClr val="000000"/>
@@ -9821,6 +9837,14 @@
               </a:spcAft>
             </a:pPr>
             <a:r>
+              <a:rPr lang="ru-RU" dirty="0" sz="2000">
+                <a:solidFill>
+                  <a:srgbClr val="000000"/>
+                </a:solidFill>
+              </a:rPr>
+              <a:t xml:space="preserve">• </a:t>
+            </a:r>
+            <a:r>
               <a:rPr lang="ru-RU" dirty="0" sz="2000" b="1">
                 <a:solidFill>
                   <a:srgbClr val="000000"/>
@@ -9844,6 +9868,14 @@
               </a:spcAft>
             </a:pPr>
             <a:r>
+              <a:rPr lang="ru-RU" dirty="0" sz="2000">
+                <a:solidFill>
+                  <a:srgbClr val="000000"/>
+                </a:solidFill>
+              </a:rPr>
+              <a:t xml:space="preserve">• </a:t>
+            </a:r>
+            <a:r>
               <a:rPr lang="ru-RU" dirty="0" sz="2000" b="1">
                 <a:solidFill>
                   <a:srgbClr val="000000"/>
@@ -9872,7 +9904,7 @@
                   <a:srgbClr val="000000"/>
                 </a:solidFill>
               </a:rPr>
-              <a:t>pandas — EDA и &lt; 1–2 ГБ; продакшен чаще Polars/DuckDB</a:t>
+              <a:t>• pandas — EDA и &lt; 1–2 ГБ; продакшен чаще Polars/DuckDB</a:t>
             </a:r>
           </a:p>
         </p:txBody>
@@ -9893,8 +9925,8 @@
         </p:blipFill>
         <p:spPr>
           <a:xfrm>
-            <a:off x="7635240" y="2069694"/>
-            <a:ext cx="4343400" cy="2992931"/>
+            <a:off x="7269480" y="1325880"/>
+            <a:ext cx="4465015" cy="2970289"/>
           </a:xfrm>
           <a:prstGeom prst="rect">
             <a:avLst/>
@@ -9961,7 +9993,7 @@
         <p:spPr>
           <a:xfrm>
             <a:off x="640080" y="1371600"/>
-            <a:ext cx="6858000" cy="1810512"/>
+            <a:ext cx="6263640" cy="2697480"/>
           </a:xfrm>
           <a:prstGeom prst="rect">
             <a:avLst/>
@@ -9985,7 +10017,7 @@
                   <a:srgbClr val="000000"/>
                 </a:solidFill>
               </a:rPr>
-              <a:t xml:space="preserve">Миф: «pandas на GPU из коробки» — </a:t>
+              <a:t xml:space="preserve">• Миф: «pandas на GPU из коробки» — </a:t>
             </a:r>
             <a:r>
               <a:rPr lang="ru-RU" dirty="0" sz="2000" b="1">
@@ -10003,6 +10035,14 @@
               </a:spcAft>
             </a:pPr>
             <a:r>
+              <a:rPr lang="ru-RU" dirty="0" sz="2000">
+                <a:solidFill>
+                  <a:srgbClr val="000000"/>
+                </a:solidFill>
+              </a:rPr>
+              <a:t xml:space="preserve">• </a:t>
+            </a:r>
+            <a:r>
               <a:rPr lang="ru-RU" dirty="0" sz="2000" b="1">
                 <a:solidFill>
                   <a:srgbClr val="000000"/>
@@ -10031,7 +10071,7 @@
                   <a:srgbClr val="000000"/>
                 </a:solidFill>
               </a:rPr>
-              <a:t>`cudf.pandas` — перехват вызовов GPU/CPU автоматически</a:t>
+              <a:t>• `cudf.pandas` — перехват вызовов GPU/CPU автоматически</a:t>
             </a:r>
           </a:p>
           <a:p>
@@ -10046,7 +10086,7 @@
                   <a:srgbClr val="000000"/>
                 </a:solidFill>
               </a:rPr>
-              <a:t>В VRAM данные передаёт PyTorch (`tensor.to('cuda')`), не pandas</a:t>
+              <a:t>• В VRAM данные передаёт PyTorch (`tensor.to('cuda')`), не pandas</a:t>
             </a:r>
           </a:p>
         </p:txBody>
@@ -10067,8 +10107,8 @@
         </p:blipFill>
         <p:spPr>
           <a:xfrm>
-            <a:off x="7635240" y="2218113"/>
-            <a:ext cx="4343400" cy="2696093"/>
+            <a:off x="7269480" y="1325880"/>
+            <a:ext cx="4465015" cy="2344038"/>
           </a:xfrm>
           <a:prstGeom prst="rect">
             <a:avLst/>
@@ -10135,7 +10175,7 @@
         <p:spPr>
           <a:xfrm>
             <a:off x="640080" y="1371600"/>
-            <a:ext cx="6858000" cy="3209544"/>
+            <a:ext cx="6263640" cy="2697480"/>
           </a:xfrm>
           <a:prstGeom prst="rect">
             <a:avLst/>
@@ -10144,7 +10184,7 @@
         </p:spPr>
         <p:txBody>
           <a:bodyPr wrap="square">
-            <a:normAutofit/>
+            <a:spAutoFit/>
           </a:bodyPr>
           <a:lstStyle/>
           <a:p>
@@ -10159,7 +10199,7 @@
                   <a:srgbClr val="000000"/>
                 </a:solidFill>
               </a:rPr>
-              <a:t>Позиция (</a:t>
+              <a:t>• Позиция (</a:t>
             </a:r>
             <ns0:m xmlns:ns0="http://schemas.microsoft.com/office/drawing/2010/main">
               <m:oMath xmlns:m="http://schemas.openxmlformats.org/officeDocument/2006/math">
@@ -10205,7 +10245,7 @@
                   <a:srgbClr val="000000"/>
                 </a:solidFill>
               </a:rPr>
-              <a:t>После фильтрации, merge или сортировки индексы становятся «рваными»</a:t>
+              <a:t>• После фильтрации, merge или сортировки индексы становятся «рваными»</a:t>
             </a:r>
           </a:p>
           <a:p>
@@ -10220,7 +10260,7 @@
                   <a:srgbClr val="000000"/>
                 </a:solidFill>
               </a:rPr>
-              <a:t>`reset_index(drop=True)` — базовая операция после трансформации</a:t>
+              <a:t>• `reset_index(drop=True)` — базовая операция после трансформации</a:t>
             </a:r>
           </a:p>
           <a:p>
@@ -10235,7 +10275,7 @@
                   <a:srgbClr val="000000"/>
                 </a:solidFill>
               </a:rPr>
-              <a:t>sklearn игнорирует индексы, но при склейке в pandas несовпадение даст неожиданные NaN</a:t>
+              <a:t>• sklearn игнорирует индексы, но при склейке в pandas несовпадение даст неожиданные NaN</a:t>
             </a:r>
           </a:p>
         </p:txBody>
@@ -10248,8 +10288,8 @@
         </p:nvSpPr>
         <p:spPr>
           <a:xfrm>
-            <a:off x="640080" y="4690872"/>
-            <a:ext cx="6766560" cy="804672"/>
+            <a:off x="640080" y="4489703"/>
+            <a:ext cx="6172200" cy="804672"/>
           </a:xfrm>
           <a:prstGeom prst="rect">
             <a:avLst/>
@@ -10293,8 +10333,8 @@
         </p:nvSpPr>
         <p:spPr>
           <a:xfrm>
-            <a:off x="713231" y="4727448"/>
-            <a:ext cx="6620256" cy="731520"/>
+            <a:off x="713231" y="4526279"/>
+            <a:ext cx="6025896" cy="731520"/>
           </a:xfrm>
           <a:prstGeom prst="rect">
             <a:avLst/>
@@ -10380,8 +10420,8 @@
         </p:nvSpPr>
         <p:spPr>
           <a:xfrm>
-            <a:off x="640080" y="5550408"/>
-            <a:ext cx="6766560" cy="201168"/>
+            <a:off x="640080" y="5349240"/>
+            <a:ext cx="6172200" cy="201168"/>
           </a:xfrm>
           <a:prstGeom prst="rect">
             <a:avLst/>
@@ -10423,8 +10463,8 @@
         </p:blipFill>
         <p:spPr>
           <a:xfrm>
-            <a:off x="7635240" y="2873949"/>
-            <a:ext cx="4343400" cy="1384422"/>
+            <a:off x="7727745" y="1325880"/>
+            <a:ext cx="3548483" cy="4407407"/>
           </a:xfrm>
           <a:prstGeom prst="rect">
             <a:avLst/>
@@ -10491,7 +10531,7 @@
         <p:spPr>
           <a:xfrm>
             <a:off x="640080" y="1371600"/>
-            <a:ext cx="6858000" cy="3383279"/>
+            <a:ext cx="6263640" cy="2423160"/>
           </a:xfrm>
           <a:prstGeom prst="rect">
             <a:avLst/>
@@ -10500,7 +10540,7 @@
         </p:spPr>
         <p:txBody>
           <a:bodyPr wrap="square">
-            <a:normAutofit/>
+            <a:spAutoFit/>
           </a:bodyPr>
           <a:lstStyle/>
           <a:p>
@@ -10515,7 +10555,7 @@
                   <a:srgbClr val="000000"/>
                 </a:solidFill>
               </a:rPr>
-              <a:t>Jupyter хранит ссылки на старые датафреймы (`_`, история выводов)</a:t>
+              <a:t>• Jupyter хранит ссылки на старые датафреймы (`_`, история выводов)</a:t>
             </a:r>
           </a:p>
           <a:p>
@@ -10530,7 +10570,7 @@
                   <a:srgbClr val="000000"/>
                 </a:solidFill>
               </a:rPr>
-              <a:t>Переопределение `df1` не освобождает память сразу</a:t>
+              <a:t>• Переопределение `df1` не освобождает память сразу</a:t>
             </a:r>
           </a:p>
           <a:p>
@@ -10545,7 +10585,7 @@
                   <a:srgbClr val="000000"/>
                 </a:solidFill>
               </a:rPr>
-              <a:t>`del df_old` + `gc.collect()` перед тяжёлой моделью</a:t>
+              <a:t>• `del df_old` + `gc.collect()` перед тяжёлой моделью</a:t>
             </a:r>
           </a:p>
           <a:p>
@@ -10560,7 +10600,7 @@
                   <a:srgbClr val="000000"/>
                 </a:solidFill>
               </a:rPr>
-              <a:t>Явное управление памятью — навык для больших ноутбуков</a:t>
+              <a:t>• Явное управление памятью — навык для больших ноутбуков</a:t>
             </a:r>
           </a:p>
         </p:txBody>
@@ -10573,8 +10613,8 @@
         </p:nvSpPr>
         <p:spPr>
           <a:xfrm>
-            <a:off x="640080" y="4864607"/>
-            <a:ext cx="6766560" cy="630936"/>
+            <a:off x="640080" y="4892040"/>
+            <a:ext cx="6172200" cy="457200"/>
           </a:xfrm>
           <a:prstGeom prst="rect">
             <a:avLst/>
@@ -10618,8 +10658,8 @@
         </p:nvSpPr>
         <p:spPr>
           <a:xfrm>
-            <a:off x="713231" y="4901183"/>
-            <a:ext cx="6620256" cy="557784"/>
+            <a:off x="713231" y="4928616"/>
+            <a:ext cx="6025896" cy="384048"/>
           </a:xfrm>
           <a:prstGeom prst="rect">
             <a:avLst/>
@@ -10660,22 +10700,6 @@
                 </a:solidFill>
                 <a:latin typeface="Consolas"/>
               </a:rPr>
-              <a:t>import gc; gc.collect()</a:t>
-            </a:r>
-          </a:p>
-          <a:p>
-            <a:pPr>
-              <a:spcAft>
-                <a:spcPts val="0"/>
-              </a:spcAft>
-            </a:pPr>
-            <a:r>
-              <a:rPr sz="1100">
-                <a:solidFill>
-                  <a:srgbClr val="000000"/>
-                </a:solidFill>
-                <a:latin typeface="Consolas"/>
-              </a:rPr>
               <a:t>df = df[['need', 'only', 'cols']].copy()</a:t>
             </a:r>
           </a:p>
@@ -10689,8 +10713,8 @@
         </p:nvSpPr>
         <p:spPr>
           <a:xfrm>
-            <a:off x="640080" y="5550407"/>
-            <a:ext cx="6766560" cy="201168"/>
+            <a:off x="640080" y="5404104"/>
+            <a:ext cx="6172200" cy="201168"/>
           </a:xfrm>
           <a:prstGeom prst="rect">
             <a:avLst/>
@@ -10732,8 +10756,8 @@
         </p:blipFill>
         <p:spPr>
           <a:xfrm>
-            <a:off x="7635240" y="2904435"/>
-            <a:ext cx="4343400" cy="1323449"/>
+            <a:off x="7526405" y="1325880"/>
+            <a:ext cx="3951163" cy="4407407"/>
           </a:xfrm>
           <a:prstGeom prst="rect">
             <a:avLst/>
@@ -10800,7 +10824,7 @@
         <p:spPr>
           <a:xfrm>
             <a:off x="640080" y="1371600"/>
-            <a:ext cx="6858000" cy="2194560"/>
+            <a:ext cx="6263640" cy="2971800"/>
           </a:xfrm>
           <a:prstGeom prst="rect">
             <a:avLst/>
@@ -10824,7 +10848,7 @@
                   <a:srgbClr val="000000"/>
                 </a:solidFill>
               </a:rPr>
-              <a:t>pandas = EDA и первичная очистка, не тяжёлые продакшен-трансформации</a:t>
+              <a:t>• pandas = EDA и первичная очистка, не тяжёлые продакшен-трансформации</a:t>
             </a:r>
           </a:p>
           <a:p>
@@ -10839,7 +10863,7 @@
                   <a:srgbClr val="000000"/>
                 </a:solidFill>
               </a:rPr>
-              <a:t>Индекс — ключ; помните при join/merge/concat</a:t>
+              <a:t>• Индекс — ключ; помните при join/merge/concat</a:t>
             </a:r>
           </a:p>
           <a:p>
@@ -10854,7 +10878,7 @@
                   <a:srgbClr val="000000"/>
                 </a:solidFill>
               </a:rPr>
-              <a:t>`.copy()` / `.loc`; векторизация &gt; apply &gt; iterrows</a:t>
+              <a:t>• `.copy()` / `.loc`; векторизация &gt; apply &gt; iterrows</a:t>
             </a:r>
           </a:p>
           <a:p>
@@ -10869,7 +10893,7 @@
                   <a:srgbClr val="000000"/>
                 </a:solidFill>
               </a:rPr>
-              <a:t>Fit-зависимое — в Pipeline; перед моделью — `.to_numpy()` + `reset_index()`</a:t>
+              <a:t>• Fit-зависимое — в Pipeline; перед моделью — `.to_numpy()` + `reset_index()`</a:t>
             </a:r>
           </a:p>
           <a:p>
@@ -10884,7 +10908,7 @@
                   <a:srgbClr val="000000"/>
                 </a:solidFill>
               </a:rPr>
-              <a:t>Промежуточные данные — Parquet; GPU — cuDF/PyTorch, не pandas</a:t>
+              <a:t>• Промежуточные данные — Parquet; GPU — cuDF/PyTorch, не pandas</a:t>
             </a:r>
           </a:p>
         </p:txBody>
@@ -10905,8 +10929,8 @@
         </p:blipFill>
         <p:spPr>
           <a:xfrm>
-            <a:off x="7635240" y="2329535"/>
-            <a:ext cx="4343400" cy="2473248"/>
+            <a:off x="7269480" y="1325880"/>
+            <a:ext cx="4465015" cy="2138769"/>
           </a:xfrm>
           <a:prstGeom prst="rect">
             <a:avLst/>
@@ -10973,7 +10997,7 @@
         <p:spPr>
           <a:xfrm>
             <a:off x="640080" y="1371600"/>
-            <a:ext cx="11247120" cy="2194560"/>
+            <a:ext cx="5532120" cy="2148839"/>
           </a:xfrm>
           <a:prstGeom prst="rect">
             <a:avLst/>
@@ -10997,7 +11021,7 @@
                   <a:srgbClr val="000000"/>
                 </a:solidFill>
               </a:rPr>
-              <a:t>`df.info()` — типы и пропуски; `describe()` — аномалии</a:t>
+              <a:t>• `df.info()` — типы и пропуски; `describe()` — аномалии</a:t>
             </a:r>
           </a:p>
           <a:p>
@@ -11012,7 +11036,7 @@
                   <a:srgbClr val="000000"/>
                 </a:solidFill>
               </a:rPr>
-              <a:t>`value_counts()` / `corr()` — кардинальность и мультиколлинеарность</a:t>
+              <a:t>• `value_counts()` / `corr()` — кардинальность и мультиколлинеарность</a:t>
             </a:r>
           </a:p>
           <a:p>
@@ -11027,7 +11051,7 @@
                   <a:srgbClr val="000000"/>
                 </a:solidFill>
               </a:rPr>
-              <a:t xml:space="preserve">`drop_duplicates`; кодирование категорий; импутация </a:t>
+              <a:t xml:space="preserve">• `drop_duplicates`; кодирование категорий; импутация </a:t>
             </a:r>
             <a:r>
               <a:rPr lang="ru-RU" dirty="0" sz="2000" b="1">
@@ -11038,6 +11062,29 @@
               <a:t>не по всему датасету</a:t>
             </a:r>
           </a:p>
+        </p:txBody>
+      </p:sp>
+      <p:sp>
+        <p:nvSpPr>
+          <p:cNvPr id="4" name="TextBox 3"/>
+          <p:cNvSpPr txBox="1"/>
+          <p:nvPr/>
+        </p:nvSpPr>
+        <p:spPr>
+          <a:xfrm>
+            <a:off x="6355080" y="1371600"/>
+            <a:ext cx="5532120" cy="2148839"/>
+          </a:xfrm>
+          <a:prstGeom prst="rect">
+            <a:avLst/>
+          </a:prstGeom>
+          <a:noFill/>
+        </p:spPr>
+        <p:txBody>
+          <a:bodyPr wrap="square">
+            <a:spAutoFit/>
+          </a:bodyPr>
+          <a:lstStyle/>
           <a:p>
             <a:pPr>
               <a:spcAft>
@@ -11050,7 +11097,7 @@
                   <a:srgbClr val="000000"/>
                 </a:solidFill>
               </a:rPr>
-              <a:t>`train_test_split` до глобальных трансформаций; X,y → numpy с правильным dtype</a:t>
+              <a:t>• `train_test_split` до глобальных трансформаций; X,y → numpy с правильным dtype</a:t>
             </a:r>
           </a:p>
           <a:p>
@@ -11065,7 +11112,7 @@
                   <a:srgbClr val="000000"/>
                 </a:solidFill>
               </a:rPr>
-              <a:t>Проверка NaN/inf; Pipeline; `del` + `gc.collect()`</a:t>
+              <a:t>• Проверка NaN/inf; Pipeline; `del` + `gc.collect()`</a:t>
             </a:r>
           </a:p>
         </p:txBody>
@@ -11594,7 +11641,7 @@
         <p:spPr>
           <a:xfrm>
             <a:off x="640080" y="1371600"/>
-            <a:ext cx="6858000" cy="3383279"/>
+            <a:ext cx="6263640" cy="2423160"/>
           </a:xfrm>
           <a:prstGeom prst="rect">
             <a:avLst/>
@@ -11603,7 +11650,7 @@
         </p:spPr>
         <p:txBody>
           <a:bodyPr wrap="square">
-            <a:normAutofit/>
+            <a:spAutoFit/>
           </a:bodyPr>
           <a:lstStyle/>
           <a:p>
@@ -11618,7 +11665,7 @@
                   <a:srgbClr val="000000"/>
                 </a:solidFill>
               </a:rPr>
-              <a:t>`df[df['age'] &gt; 30]` — маска numpy внутри pandas</a:t>
+              <a:t>• `df[df['age'] &gt; 30]` — маска numpy внутри pandas</a:t>
             </a:r>
           </a:p>
           <a:p>
@@ -11633,7 +11680,7 @@
                   <a:srgbClr val="000000"/>
                 </a:solidFill>
               </a:rPr>
-              <a:t>Шаг 1: `df['age'] &gt; 30` → булев массив `[True, False, True, \ldots]`</a:t>
+              <a:t>• Шаг 1: `df['age'] &gt; 30` → булев массив `[True, False, True, \ldots]`</a:t>
             </a:r>
           </a:p>
           <a:p>
@@ -11648,7 +11695,7 @@
                   <a:srgbClr val="000000"/>
                 </a:solidFill>
               </a:rPr>
-              <a:t>Шаг 2: `df[mask]` возвращает строки, где `True` — прямое наследие numpy</a:t>
+              <a:t>• Шаг 2: `df[mask]` возвращает строки, где `True` — прямое наследие numpy</a:t>
             </a:r>
           </a:p>
           <a:p>
@@ -11663,7 +11710,7 @@
                   <a:srgbClr val="000000"/>
                 </a:solidFill>
               </a:rPr>
-              <a:t xml:space="preserve">Составные условия: `&amp;`, `|`, `~` (не `and`/`or`); </a:t>
+              <a:t xml:space="preserve">• Составные условия: `&amp;`, `|`, `~` (не `and`/`or`); </a:t>
             </a:r>
             <a:r>
               <a:rPr lang="ru-RU" dirty="0" sz="2000" b="1">
@@ -11684,8 +11731,8 @@
         </p:nvSpPr>
         <p:spPr>
           <a:xfrm>
-            <a:off x="640080" y="4864607"/>
-            <a:ext cx="6766560" cy="630936"/>
+            <a:off x="640080" y="4690872"/>
+            <a:ext cx="6172200" cy="630936"/>
           </a:xfrm>
           <a:prstGeom prst="rect">
             <a:avLst/>
@@ -11729,8 +11776,8 @@
         </p:nvSpPr>
         <p:spPr>
           <a:xfrm>
-            <a:off x="713231" y="4901183"/>
-            <a:ext cx="6620256" cy="557784"/>
+            <a:off x="713231" y="4727448"/>
+            <a:ext cx="6025896" cy="557784"/>
           </a:xfrm>
           <a:prstGeom prst="rect">
             <a:avLst/>
@@ -11800,8 +11847,8 @@
         </p:nvSpPr>
         <p:spPr>
           <a:xfrm>
-            <a:off x="640080" y="5550407"/>
-            <a:ext cx="6766560" cy="201168"/>
+            <a:off x="640080" y="5376672"/>
+            <a:ext cx="6172200" cy="201168"/>
           </a:xfrm>
           <a:prstGeom prst="rect">
             <a:avLst/>
@@ -11843,8 +11890,8 @@
         </p:blipFill>
         <p:spPr>
           <a:xfrm>
-            <a:off x="7635240" y="2917026"/>
-            <a:ext cx="4343400" cy="1298267"/>
+            <a:off x="7399481" y="1325880"/>
+            <a:ext cx="4205011" cy="4407407"/>
           </a:xfrm>
           <a:prstGeom prst="rect">
             <a:avLst/>
@@ -11911,7 +11958,7 @@
         <p:spPr>
           <a:xfrm>
             <a:off x="640080" y="1371600"/>
-            <a:ext cx="6858000" cy="3383279"/>
+            <a:ext cx="6263640" cy="2148839"/>
           </a:xfrm>
           <a:prstGeom prst="rect">
             <a:avLst/>
@@ -11920,7 +11967,7 @@
         </p:spPr>
         <p:txBody>
           <a:bodyPr wrap="square">
-            <a:normAutofit/>
+            <a:spAutoFit/>
           </a:bodyPr>
           <a:lstStyle/>
           <a:p>
@@ -11935,7 +11982,7 @@
                   <a:srgbClr val="000000"/>
                 </a:solidFill>
               </a:rPr>
-              <a:t>`df['col']` — столбец по имени</a:t>
+              <a:t>• `df['col']` — столбец по имени</a:t>
             </a:r>
           </a:p>
           <a:p>
@@ -11950,7 +11997,7 @@
                   <a:srgbClr val="000000"/>
                 </a:solidFill>
               </a:rPr>
-              <a:t xml:space="preserve">`.iloc[i, j]` — доступ </a:t>
+              <a:t xml:space="preserve">• `.iloc[i, j]` — доступ </a:t>
             </a:r>
             <a:r>
               <a:rPr lang="ru-RU" dirty="0" sz="2000" b="1">
@@ -11981,7 +12028,7 @@
                   <a:srgbClr val="000000"/>
                 </a:solidFill>
               </a:rPr>
-              <a:t xml:space="preserve">`.loc[label, col]` — доступ </a:t>
+              <a:t xml:space="preserve">• `.loc[label, col]` — доступ </a:t>
             </a:r>
             <a:r>
               <a:rPr lang="ru-RU" dirty="0" sz="2000" b="1">
@@ -12012,7 +12059,7 @@
                   <a:srgbClr val="000000"/>
                 </a:solidFill>
               </a:rPr>
-              <a:t>Присваивание — через `.loc`; перед sklearn удобнее `.iloc` (позиционная индексация)</a:t>
+              <a:t>• Присваивание — через `.loc`; перед sklearn удобнее `.iloc` (позиционная индексация)</a:t>
             </a:r>
           </a:p>
         </p:txBody>
@@ -12025,8 +12072,8 @@
         </p:nvSpPr>
         <p:spPr>
           <a:xfrm>
-            <a:off x="640080" y="4864607"/>
-            <a:ext cx="6766560" cy="630936"/>
+            <a:off x="640080" y="4690872"/>
+            <a:ext cx="6172200" cy="630936"/>
           </a:xfrm>
           <a:prstGeom prst="rect">
             <a:avLst/>
@@ -12070,8 +12117,8 @@
         </p:nvSpPr>
         <p:spPr>
           <a:xfrm>
-            <a:off x="713231" y="4901183"/>
-            <a:ext cx="6620256" cy="557784"/>
+            <a:off x="713231" y="4727448"/>
+            <a:ext cx="6025896" cy="557784"/>
           </a:xfrm>
           <a:prstGeom prst="rect">
             <a:avLst/>
@@ -12141,8 +12188,8 @@
         </p:nvSpPr>
         <p:spPr>
           <a:xfrm>
-            <a:off x="640080" y="5550407"/>
-            <a:ext cx="6766560" cy="201168"/>
+            <a:off x="640080" y="5376672"/>
+            <a:ext cx="6172200" cy="201168"/>
           </a:xfrm>
           <a:prstGeom prst="rect">
             <a:avLst/>
@@ -12184,8 +12231,8 @@
         </p:blipFill>
         <p:spPr>
           <a:xfrm>
-            <a:off x="7635240" y="2055813"/>
-            <a:ext cx="4343400" cy="3020693"/>
+            <a:off x="7269480" y="1325880"/>
+            <a:ext cx="4465015" cy="2301171"/>
           </a:xfrm>
           <a:prstGeom prst="rect">
             <a:avLst/>
@@ -12252,7 +12299,7 @@
         <p:spPr>
           <a:xfrm>
             <a:off x="640080" y="1371600"/>
-            <a:ext cx="6858000" cy="3383279"/>
+            <a:ext cx="6263640" cy="2697480"/>
           </a:xfrm>
           <a:prstGeom prst="rect">
             <a:avLst/>
@@ -12261,7 +12308,7 @@
         </p:spPr>
         <p:txBody>
           <a:bodyPr wrap="square">
-            <a:normAutofit/>
+            <a:spAutoFit/>
           </a:bodyPr>
           <a:lstStyle/>
           <a:p>
@@ -12276,7 +12323,7 @@
                   <a:srgbClr val="000000"/>
                 </a:solidFill>
               </a:rPr>
-              <a:t>pandas не всегда понимает: вы меняете оригинал или копию</a:t>
+              <a:t>• pandas не всегда понимает: вы меняете оригинал или копию</a:t>
             </a:r>
           </a:p>
           <a:p>
@@ -12291,7 +12338,7 @@
                   <a:srgbClr val="000000"/>
                 </a:solidFill>
               </a:rPr>
-              <a:t xml:space="preserve">`subset = df[df['age'] &gt; 30]; subset['new_col'] = 1` — </a:t>
+              <a:t xml:space="preserve">• `subset = df[df['age'] &gt; 30]; subset['new_col'] = 1` — </a:t>
             </a:r>
             <a:r>
               <a:rPr lang="ru-RU" dirty="0" sz="2000" b="1">
@@ -12314,7 +12361,7 @@
                   <a:srgbClr val="000000"/>
                 </a:solidFill>
               </a:rPr>
-              <a:t>Изменения могут не попасть в `df` или перезаписать данные случайно</a:t>
+              <a:t>• Изменения могут не попасть в `df` или перезаписать данные случайно</a:t>
             </a:r>
           </a:p>
           <a:p>
@@ -12329,7 +12376,7 @@
                   <a:srgbClr val="000000"/>
                 </a:solidFill>
               </a:rPr>
-              <a:t>Решение: `.copy()` или `df.loc[mask, 'col'] = value`</a:t>
+              <a:t>• Решение: `.copy()` или `df.loc[mask, 'col'] = value`</a:t>
             </a:r>
           </a:p>
         </p:txBody>
@@ -12342,8 +12389,8 @@
         </p:nvSpPr>
         <p:spPr>
           <a:xfrm>
-            <a:off x="640080" y="4864607"/>
-            <a:ext cx="6766560" cy="630936"/>
+            <a:off x="640080" y="4690872"/>
+            <a:ext cx="6172200" cy="630936"/>
           </a:xfrm>
           <a:prstGeom prst="rect">
             <a:avLst/>
@@ -12387,8 +12434,8 @@
         </p:nvSpPr>
         <p:spPr>
           <a:xfrm>
-            <a:off x="713231" y="4901183"/>
-            <a:ext cx="6620256" cy="557784"/>
+            <a:off x="713231" y="4727448"/>
+            <a:ext cx="6025896" cy="557784"/>
           </a:xfrm>
           <a:prstGeom prst="rect">
             <a:avLst/>
@@ -12458,8 +12505,8 @@
         </p:nvSpPr>
         <p:spPr>
           <a:xfrm>
-            <a:off x="640080" y="5550407"/>
-            <a:ext cx="6766560" cy="201168"/>
+            <a:off x="640080" y="5376672"/>
+            <a:ext cx="6172200" cy="201168"/>
           </a:xfrm>
           <a:prstGeom prst="rect">
             <a:avLst/>
@@ -12501,8 +12548,8 @@
         </p:blipFill>
         <p:spPr>
           <a:xfrm>
-            <a:off x="7635240" y="2076907"/>
-            <a:ext cx="4343400" cy="2978505"/>
+            <a:off x="7269480" y="1325880"/>
+            <a:ext cx="4465015" cy="3012306"/>
           </a:xfrm>
           <a:prstGeom prst="rect">
             <a:avLst/>
@@ -12569,7 +12616,7 @@
         <p:spPr>
           <a:xfrm>
             <a:off x="640080" y="1371600"/>
-            <a:ext cx="6858000" cy="1810512"/>
+            <a:ext cx="6263640" cy="2697480"/>
           </a:xfrm>
           <a:prstGeom prst="rect">
             <a:avLst/>
@@ -12588,6 +12635,14 @@
               </a:spcAft>
             </a:pPr>
             <a:r>
+              <a:rPr lang="ru-RU" dirty="0" sz="2000">
+                <a:solidFill>
+                  <a:srgbClr val="000000"/>
+                </a:solidFill>
+              </a:rPr>
+              <a:t xml:space="preserve">• </a:t>
+            </a:r>
+            <a:r>
               <a:rPr lang="ru-RU" dirty="0" sz="2000" b="1">
                 <a:solidFill>
                   <a:srgbClr val="000000"/>
@@ -12632,7 +12687,7 @@
                   <a:srgbClr val="000000"/>
                 </a:solidFill>
               </a:rPr>
-              <a:t>Исторически pandas решает «по ситуации» → неопределённость</a:t>
+              <a:t>• Исторически pandas решает «по ситуации» → неопределённость</a:t>
             </a:r>
           </a:p>
           <a:p>
@@ -12642,6 +12697,14 @@
               </a:spcAft>
             </a:pPr>
             <a:r>
+              <a:rPr lang="ru-RU" dirty="0" sz="2000">
+                <a:solidFill>
+                  <a:srgbClr val="000000"/>
+                </a:solidFill>
+              </a:rPr>
+              <a:t xml:space="preserve">• </a:t>
+            </a:r>
+            <a:r>
               <a:rPr lang="ru-RU" dirty="0" sz="2000" b="1">
                 <a:solidFill>
                   <a:srgbClr val="000000"/>
@@ -12670,7 +12733,7 @@
                   <a:srgbClr val="000000"/>
                 </a:solidFill>
               </a:rPr>
-              <a:t>Для ML: `.copy()` при создании новых признаков, если не уверены</a:t>
+              <a:t>• Для ML: `.copy()` при создании новых признаков, если не уверены</a:t>
             </a:r>
           </a:p>
         </p:txBody>
@@ -12691,8 +12754,8 @@
         </p:blipFill>
         <p:spPr>
           <a:xfrm>
-            <a:off x="7635240" y="2873949"/>
-            <a:ext cx="4343400" cy="1384422"/>
+            <a:off x="7269480" y="1325880"/>
+            <a:ext cx="4465015" cy="3611257"/>
           </a:xfrm>
           <a:prstGeom prst="rect">
             <a:avLst/>
@@ -12759,7 +12822,7 @@
         <p:spPr>
           <a:xfrm>
             <a:off x="640080" y="1371600"/>
-            <a:ext cx="6858000" cy="3383279"/>
+            <a:ext cx="6263640" cy="2423160"/>
           </a:xfrm>
           <a:prstGeom prst="rect">
             <a:avLst/>
@@ -12768,7 +12831,7 @@
         </p:spPr>
         <p:txBody>
           <a:bodyPr wrap="square">
-            <a:normAutofit/>
+            <a:spAutoFit/>
           </a:bodyPr>
           <a:lstStyle/>
           <a:p>
@@ -12783,7 +12846,7 @@
                   <a:srgbClr val="000000"/>
                 </a:solidFill>
               </a:rPr>
-              <a:t>Разные «пустые»: `np.nan` (числа), `None` (object), `pd.NaT` (время)</a:t>
+              <a:t>• Разные «пустые»: `np.nan` (числа), `None` (object), `pd.NaT` (время)</a:t>
             </a:r>
           </a:p>
           <a:p>
@@ -12798,7 +12861,7 @@
                   <a:srgbClr val="000000"/>
                 </a:solidFill>
               </a:rPr>
-              <a:t>`df.isnull().sum()` — первый шаг диагностики</a:t>
+              <a:t>• `df.isnull().sum()` — первый шаг диагностики</a:t>
             </a:r>
           </a:p>
           <a:p>
@@ -12813,7 +12876,7 @@
                   <a:srgbClr val="000000"/>
                 </a:solidFill>
               </a:rPr>
-              <a:t xml:space="preserve">Раньше пропуск в `int64` → весь столбец во `float64`; сейчас </a:t>
+              <a:t xml:space="preserve">• Раньше пропуск в `int64` → весь столбец во `float64`; сейчас </a:t>
             </a:r>
             <a:r>
               <a:rPr lang="ru-RU" dirty="0" sz="2000" b="1">
@@ -12844,7 +12907,7 @@
                   <a:srgbClr val="000000"/>
                 </a:solidFill>
               </a:rPr>
-              <a:t xml:space="preserve">В ML: импутация только по </a:t>
+              <a:t xml:space="preserve">• В ML: импутация только по </a:t>
             </a:r>
             <a:r>
               <a:rPr lang="ru-RU" dirty="0" sz="2000" b="1">
@@ -12873,8 +12936,8 @@
         </p:nvSpPr>
         <p:spPr>
           <a:xfrm>
-            <a:off x="640080" y="4864607"/>
-            <a:ext cx="6766560" cy="630936"/>
+            <a:off x="640080" y="4690872"/>
+            <a:ext cx="6172200" cy="630936"/>
           </a:xfrm>
           <a:prstGeom prst="rect">
             <a:avLst/>
@@ -12918,8 +12981,8 @@
         </p:nvSpPr>
         <p:spPr>
           <a:xfrm>
-            <a:off x="713231" y="4901183"/>
-            <a:ext cx="6620256" cy="557784"/>
+            <a:off x="713231" y="4727448"/>
+            <a:ext cx="6025896" cy="557784"/>
           </a:xfrm>
           <a:prstGeom prst="rect">
             <a:avLst/>
@@ -12989,8 +13052,8 @@
         </p:nvSpPr>
         <p:spPr>
           <a:xfrm>
-            <a:off x="640080" y="5550407"/>
-            <a:ext cx="6766560" cy="201168"/>
+            <a:off x="640080" y="5376672"/>
+            <a:ext cx="6172200" cy="201168"/>
           </a:xfrm>
           <a:prstGeom prst="rect">
             <a:avLst/>
@@ -13032,8 +13095,8 @@
         </p:blipFill>
         <p:spPr>
           <a:xfrm>
-            <a:off x="8203431" y="1325880"/>
-            <a:ext cx="3207016" cy="2203704"/>
+            <a:off x="7641626" y="1325880"/>
+            <a:ext cx="3720723" cy="2176272"/>
           </a:xfrm>
           <a:prstGeom prst="rect">
             <a:avLst/>
@@ -13056,8 +13119,8 @@
         </p:blipFill>
         <p:spPr>
           <a:xfrm>
-            <a:off x="7635240" y="3795127"/>
-            <a:ext cx="4343400" cy="1818920"/>
+            <a:off x="7269480" y="3557016"/>
+            <a:ext cx="4465015" cy="1941534"/>
           </a:xfrm>
           <a:prstGeom prst="rect">
             <a:avLst/>
@@ -13124,7 +13187,7 @@
         <p:spPr>
           <a:xfrm>
             <a:off x="640080" y="1371600"/>
-            <a:ext cx="6858000" cy="3383279"/>
+            <a:ext cx="6263640" cy="2697480"/>
           </a:xfrm>
           <a:prstGeom prst="rect">
             <a:avLst/>
@@ -13133,7 +13196,7 @@
         </p:spPr>
         <p:txBody>
           <a:bodyPr wrap="square">
-            <a:normAutofit/>
+            <a:spAutoFit/>
           </a:bodyPr>
           <a:lstStyle/>
           <a:p>
@@ -13148,7 +13211,7 @@
                   <a:srgbClr val="000000"/>
                 </a:solidFill>
               </a:rPr>
-              <a:t>`value_counts()` — частоты категорий, дисбаланс классов, мусорные категории</a:t>
+              <a:t>• `value_counts()` — частоты категорий, дисбаланс классов, мусорные категории</a:t>
             </a:r>
           </a:p>
           <a:p>
@@ -13163,7 +13226,7 @@
                   <a:srgbClr val="000000"/>
                 </a:solidFill>
               </a:rPr>
-              <a:t>`nunique()` — кардинальность: 100k уникальных из 100k строк → признак-ID, удалить</a:t>
+              <a:t>• `nunique()` — кардинальность: 100k уникальных из 100k строк → признак-ID, удалить</a:t>
             </a:r>
           </a:p>
           <a:p>
@@ -13178,7 +13241,7 @@
                   <a:srgbClr val="000000"/>
                 </a:solidFill>
               </a:rPr>
-              <a:t xml:space="preserve">`corr()` — мультиколлинеарность (корреляция </a:t>
+              <a:t xml:space="preserve">• `corr()` — мультиколлинеарность (корреляция </a:t>
             </a:r>
             <ns0:m xmlns:ns0="http://schemas.microsoft.com/office/drawing/2010/main">
               <m:oMath xmlns:m="http://schemas.openxmlformats.org/officeDocument/2006/math">
@@ -13208,7 +13271,7 @@
                   <a:srgbClr val="000000"/>
                 </a:solidFill>
               </a:rPr>
-              <a:t>`describe(include='all')` — числа и категории в одном отчёте</a:t>
+              <a:t>• `describe(include='all')` — числа и категории в одном отчёте</a:t>
             </a:r>
           </a:p>
         </p:txBody>
@@ -13221,8 +13284,8 @@
         </p:nvSpPr>
         <p:spPr>
           <a:xfrm>
-            <a:off x="640080" y="4864607"/>
-            <a:ext cx="6766560" cy="630936"/>
+            <a:off x="640080" y="4690872"/>
+            <a:ext cx="6172200" cy="630936"/>
           </a:xfrm>
           <a:prstGeom prst="rect">
             <a:avLst/>
@@ -13266,8 +13329,8 @@
         </p:nvSpPr>
         <p:spPr>
           <a:xfrm>
-            <a:off x="713231" y="4901183"/>
-            <a:ext cx="6620256" cy="557784"/>
+            <a:off x="713231" y="4727448"/>
+            <a:ext cx="6025896" cy="557784"/>
           </a:xfrm>
           <a:prstGeom prst="rect">
             <a:avLst/>
@@ -13337,8 +13400,8 @@
         </p:nvSpPr>
         <p:spPr>
           <a:xfrm>
-            <a:off x="640080" y="5550407"/>
-            <a:ext cx="6766560" cy="201168"/>
+            <a:off x="640080" y="5376672"/>
+            <a:ext cx="6172200" cy="201168"/>
           </a:xfrm>
           <a:prstGeom prst="rect">
             <a:avLst/>
@@ -13380,8 +13443,8 @@
         </p:blipFill>
         <p:spPr>
           <a:xfrm>
-            <a:off x="8528247" y="1325880"/>
-            <a:ext cx="2557384" cy="2203703"/>
+            <a:off x="7587170" y="1325880"/>
+            <a:ext cx="3829634" cy="2176272"/>
           </a:xfrm>
           <a:prstGeom prst="rect">
             <a:avLst/>
@@ -13404,8 +13467,8 @@
         </p:blipFill>
         <p:spPr>
           <a:xfrm>
-            <a:off x="8203431" y="3602735"/>
-            <a:ext cx="3207016" cy="2203704"/>
+            <a:off x="7527547" y="3557016"/>
+            <a:ext cx="3948880" cy="2176272"/>
           </a:xfrm>
           <a:prstGeom prst="rect">
             <a:avLst/>
